--- a/docs/welfare_ai_10min.pptx
+++ b/docs/welfare_ai_10min.pptx
@@ -7235,7 +7235,7 @@
                 <a:ea typeface="Malgun Gothic" pitchFamily="34" charset="-122"/>
                 <a:cs typeface="Malgun Gothic" pitchFamily="34" charset="-120"/>
               </a:rPr>
-              <a:t>92%</a:t>
+              <a:t>93%</a:t>
             </a:r>
             <a:endParaRPr lang="en-US" sz="3600" dirty="0"/>
           </a:p>
@@ -7313,7 +7313,7 @@
                 <a:ea typeface="Malgun Gothic" pitchFamily="34" charset="-122"/>
                 <a:cs typeface="Malgun Gothic" pitchFamily="34" charset="-120"/>
               </a:rPr>
-              <a:t>자체 평가셋 (정보질문 95%)</a:t>
+              <a:t>범위 밖 거절 100% · 한국어 98%</a:t>
             </a:r>
             <a:endParaRPr lang="en-US" sz="1100" dirty="0"/>
           </a:p>

--- a/docs/welfare_ai_10min.pptx
+++ b/docs/welfare_ai_10min.pptx
@@ -7235,7 +7235,7 @@
                 <a:ea typeface="Malgun Gothic" pitchFamily="34" charset="-122"/>
                 <a:cs typeface="Malgun Gothic" pitchFamily="34" charset="-120"/>
               </a:rPr>
-              <a:t>93%</a:t>
+              <a:t>92%</a:t>
             </a:r>
             <a:endParaRPr lang="en-US" sz="3600" dirty="0"/>
           </a:p>
@@ -7313,7 +7313,7 @@
                 <a:ea typeface="Malgun Gothic" pitchFamily="34" charset="-122"/>
                 <a:cs typeface="Malgun Gothic" pitchFamily="34" charset="-120"/>
               </a:rPr>
-              <a:t>범위 밖 거절 100% · 한국어 98%</a:t>
+              <a:t>범위 밖 거절 100% · 사실정확도 98%</a:t>
             </a:r>
             <a:endParaRPr lang="en-US" sz="1100" dirty="0"/>
           </a:p>

--- a/docs/welfare_ai_10min.pptx
+++ b/docs/welfare_ai_10min.pptx
@@ -15,9 +15,10 @@
     <p:sldId id="263" r:id="rId9"/>
     <p:sldId id="264" r:id="rId10"/>
     <p:sldId id="265" r:id="rId11"/>
+    <p:sldId id="266" r:id="rId12"/>
   </p:sldIdLst>
   <p:notesMasterIdLst>
-    <p:notesMasterId r:id="rId12"/>
+    <p:notesMasterId r:id="rId13"/>
   </p:notesMasterIdLst>
   <p:sldSz cx="12192000" cy="6858000"/>
   <p:notesSz cx="6858000" cy="12192000"/>
@@ -599,7 +600,7 @@
           <a:p>
             <a:r>
               <a:rPr lang="en-US" dirty="0"/>
-              <a:t>정직한 한계 공개가 신뢰를 준다.</a:t>
+              <a:t>1단계 완료 강조, 나머지는 계획대로 진행 중.</a:t>
             </a:r>
             <a:endParaRPr lang="en-US" dirty="0"/>
           </a:p>
@@ -623,6 +624,94 @@
             <a:fld id="{F7021451-1387-4CA6-816F-3879F97B5CBC}" type="slidenum">
               <a:rPr lang="en-US"/>
               <a:t>10</a:t>
+            </a:fld>
+            <a:endParaRPr lang="en-US"/>
+          </a:p>
+        </p:txBody>
+      </p:sp>
+    </p:spTree>
+    <p:extLst>
+      <p:ext uri="{BB962C8B-B14F-4D97-AF65-F5344CB8AC3E}">
+        <p14:creationId xmlns:p14="http://schemas.microsoft.com/office/powerpoint/2010/main" val="1024086991"/>
+      </p:ext>
+    </p:extLst>
+  </p:cSld>
+  <p:clrMapOvr>
+    <a:masterClrMapping/>
+  </p:clrMapOvr>
+</p:notes>
+</file>
+
+<file path=ppt/notesSlides/notesSlide11.xml><?xml version="1.0" encoding="utf-8"?>
+<p:notes xmlns:a="http://schemas.openxmlformats.org/drawingml/2006/main" xmlns:r="http://schemas.openxmlformats.org/officeDocument/2006/relationships" xmlns:p="http://schemas.openxmlformats.org/presentationml/2006/main">
+  <p:cSld>
+    <p:spTree>
+      <p:nvGrpSpPr>
+        <p:cNvPr id="1" name=""/>
+        <p:cNvGrpSpPr/>
+        <p:nvPr/>
+      </p:nvGrpSpPr>
+      <p:grpSpPr>
+        <a:xfrm>
+          <a:off x="0" y="0"/>
+          <a:ext cx="0" cy="0"/>
+          <a:chOff x="0" y="0"/>
+          <a:chExt cx="0" cy="0"/>
+        </a:xfrm>
+      </p:grpSpPr>
+      <p:sp>
+        <p:nvSpPr>
+          <p:cNvPr id="2" name="Slide Image Placeholder 1"/>
+          <p:cNvSpPr>
+            <a:spLocks noGrp="1" noRot="1" noChangeAspect="1"/>
+          </p:cNvSpPr>
+          <p:nvPr>
+            <p:ph type="sldImg"/>
+          </p:nvPr>
+        </p:nvSpPr>
+        <p:spPr/>
+      </p:sp>
+      <p:sp>
+        <p:nvSpPr>
+          <p:cNvPr id="3" name="Notes Placeholder 2"/>
+          <p:cNvSpPr>
+            <a:spLocks noGrp="1"/>
+          </p:cNvSpPr>
+          <p:nvPr>
+            <p:ph type="body" idx="1"/>
+          </p:nvPr>
+        </p:nvSpPr>
+        <p:spPr/>
+        <p:txBody>
+          <a:bodyPr/>
+          <a:lstStyle/>
+          <a:p>
+            <a:r>
+              <a:rPr lang="en-US" dirty="0"/>
+              <a:t>정직한 한계 공개가 신뢰를 준다.</a:t>
+            </a:r>
+            <a:endParaRPr lang="en-US" dirty="0"/>
+          </a:p>
+        </p:txBody>
+      </p:sp>
+      <p:sp>
+        <p:nvSpPr>
+          <p:cNvPr id="4" name="Slide Number Placeholder 3"/>
+          <p:cNvSpPr>
+            <a:spLocks noGrp="1"/>
+          </p:cNvSpPr>
+          <p:nvPr>
+            <p:ph type="sldNum" sz="quarter" idx="10"/>
+          </p:nvPr>
+        </p:nvSpPr>
+        <p:spPr/>
+        <p:txBody>
+          <a:bodyPr/>
+          <a:lstStyle/>
+          <a:p>
+            <a:fld id="{F7021451-1387-4CA6-816F-3879F97B5CBC}" type="slidenum">
+              <a:rPr lang="en-US"/>
+              <a:t>11</a:t>
             </a:fld>
             <a:endParaRPr lang="en-US"/>
           </a:p>
@@ -951,7 +1040,7 @@
           <a:p>
             <a:r>
               <a:rPr lang="en-US" dirty="0"/>
-              <a:t>input→STT→라우팅→(Layer1 RAG / Layer2 이상신호)→LLM 답변+복지사 알림. 모든 처리는 로컬.</a:t>
+              <a:t>데이터: ①출처(보건복지부 사업안내+대전 공개데이터 24파일) ②형식(PDF/CSV/XLS/XLSX/MD, HWP 향후) ③처리(정제→표구조화→섹션청킹→저품질제거→bge-m3→ChromaDB=3,455청크). 전 과정 로컬.</a:t>
             </a:r>
             <a:endParaRPr lang="en-US" dirty="0"/>
           </a:p>
@@ -1039,7 +1128,7 @@
           <a:p>
             <a:r>
               <a:rPr lang="en-US" dirty="0"/>
-              <a:t>실제 작동 데모 2개 + 데이터 규모/성능 수치. data well-managed를 여기서 증명.</a:t>
+              <a:t>input→STT→라우팅→(Layer1 RAG / Layer2 이상신호)→LLM 답변+복지사 알림. 모든 처리는 로컬.</a:t>
             </a:r>
             <a:endParaRPr lang="en-US" dirty="0"/>
           </a:p>
@@ -1127,7 +1216,7 @@
           <a:p>
             <a:r>
               <a:rPr lang="en-US" dirty="0"/>
-              <a:t>현장 연계로 '진짜 사회적 임팩트 프로젝트'임을 보여준다.</a:t>
+              <a:t>실제 작동 데모 2개 + 데이터 규모/성능 수치. data well-managed를 여기서 증명.</a:t>
             </a:r>
             <a:endParaRPr lang="en-US" dirty="0"/>
           </a:p>
@@ -1215,7 +1304,7 @@
           <a:p>
             <a:r>
               <a:rPr lang="en-US" dirty="0"/>
-              <a:t>세 주체별 변화 + 정량 KPI. 마지막 한 줄로 미션 재강조.</a:t>
+              <a:t>현장 연계로 '진짜 사회적 임팩트 프로젝트'임을 보여준다.</a:t>
             </a:r>
             <a:endParaRPr lang="en-US" dirty="0"/>
           </a:p>
@@ -1303,7 +1392,7 @@
           <a:p>
             <a:r>
               <a:rPr lang="en-US" dirty="0"/>
-              <a:t>1단계 완료 강조, 나머지는 계획대로 진행 중.</a:t>
+              <a:t>세 주체별 변화 + 정량 KPI. 마지막 한 줄로 미션 재강조.</a:t>
             </a:r>
             <a:endParaRPr lang="en-US" dirty="0"/>
           </a:p>
@@ -1932,6 +2021,1583 @@
     <p:bg>
       <p:bgPr>
         <a:solidFill>
+          <a:srgbClr val="FFFFFF"/>
+        </a:solidFill>
+      </p:bgPr>
+    </p:bg>
+    <p:spTree>
+      <p:nvGrpSpPr>
+        <p:cNvPr id="1" name=""/>
+        <p:cNvGrpSpPr/>
+        <p:nvPr/>
+      </p:nvGrpSpPr>
+      <p:grpSpPr>
+        <a:xfrm>
+          <a:off x="0" y="0"/>
+          <a:ext cx="0" cy="0"/>
+          <a:chOff x="0" y="0"/>
+          <a:chExt cx="0" cy="0"/>
+        </a:xfrm>
+      </p:grpSpPr>
+      <p:sp>
+        <p:nvSpPr>
+          <p:cNvPr id="2" name="Text 0"/>
+          <p:cNvSpPr txBox="1"/>
+          <p:nvPr/>
+        </p:nvSpPr>
+        <p:spPr>
+          <a:xfrm>
+            <a:off x="548640" y="457200"/>
+            <a:ext cx="11094415" cy="274320"/>
+          </a:xfrm>
+          <a:prstGeom prst="rect">
+            <a:avLst/>
+          </a:prstGeom>
+          <a:noFill/>
+          <a:ln/>
+        </p:spPr>
+        <p:txBody>
+          <a:bodyPr wrap="square" lIns="0" tIns="0" rIns="0" bIns="0" rtlCol="0" anchor="ctr"/>
+          <a:lstStyle/>
+          <a:p>
+            <a:pPr indent="0" marL="0">
+              <a:buNone/>
+            </a:pPr>
+            <a:r>
+              <a:rPr lang="en-US" sz="1300" b="1" spc="200" kern="0" dirty="0">
+                <a:solidFill>
+                  <a:srgbClr val="E0A83C"/>
+                </a:solidFill>
+                <a:latin typeface="Malgun Gothic" pitchFamily="34" charset="0"/>
+                <a:ea typeface="Malgun Gothic" pitchFamily="34" charset="-122"/>
+                <a:cs typeface="Malgun Gothic" pitchFamily="34" charset="-120"/>
+              </a:rPr>
+              <a:t>ROADMAP</a:t>
+            </a:r>
+            <a:endParaRPr lang="en-US" sz="1300" dirty="0"/>
+          </a:p>
+        </p:txBody>
+      </p:sp>
+      <p:sp>
+        <p:nvSpPr>
+          <p:cNvPr id="3" name="Text 1"/>
+          <p:cNvSpPr txBox="1"/>
+          <p:nvPr/>
+        </p:nvSpPr>
+        <p:spPr>
+          <a:xfrm>
+            <a:off x="548640" y="713232"/>
+            <a:ext cx="11094415" cy="640080"/>
+          </a:xfrm>
+          <a:prstGeom prst="rect">
+            <a:avLst/>
+          </a:prstGeom>
+          <a:noFill/>
+          <a:ln/>
+        </p:spPr>
+        <p:txBody>
+          <a:bodyPr wrap="square" lIns="0" tIns="0" rIns="0" bIns="0" rtlCol="0" anchor="ctr"/>
+          <a:lstStyle/>
+          <a:p>
+            <a:pPr indent="0" marL="0">
+              <a:buNone/>
+            </a:pPr>
+            <a:r>
+              <a:rPr lang="en-US" sz="3200" b="1" dirty="0">
+                <a:solidFill>
+                  <a:srgbClr val="0F2F6F"/>
+                </a:solidFill>
+                <a:latin typeface="Malgun Gothic" pitchFamily="34" charset="0"/>
+                <a:ea typeface="Malgun Gothic" pitchFamily="34" charset="-122"/>
+                <a:cs typeface="Malgun Gothic" pitchFamily="34" charset="-120"/>
+              </a:rPr>
+              <a:t>진행 현황과 계획</a:t>
+            </a:r>
+            <a:endParaRPr lang="en-US" sz="3200" dirty="0"/>
+          </a:p>
+        </p:txBody>
+      </p:sp>
+      <p:sp>
+        <p:nvSpPr>
+          <p:cNvPr id="4" name="Shape 2"/>
+          <p:cNvSpPr/>
+          <p:nvPr/>
+        </p:nvSpPr>
+        <p:spPr>
+          <a:xfrm>
+            <a:off x="548640" y="1691640"/>
+            <a:ext cx="3484778" cy="1325880"/>
+          </a:xfrm>
+          <a:prstGeom prst="roundRect">
+            <a:avLst>
+              <a:gd name="adj" fmla="val 6207"/>
+            </a:avLst>
+          </a:prstGeom>
+          <a:solidFill>
+            <a:srgbClr val="F4F7FC"/>
+          </a:solidFill>
+          <a:ln w="12700">
+            <a:solidFill>
+              <a:srgbClr val="D8E0EC"/>
+            </a:solidFill>
+            <a:prstDash val="solid"/>
+          </a:ln>
+          <a:effectLst>
+            <a:outerShdw sx="100000" sy="100000" kx="0" ky="0" algn="bl" rotWithShape="0" blurRad="76200" dist="25400" dir="5400000">
+              <a:srgbClr val="9AA5B5">
+                <a:alpha val="35000"/>
+              </a:srgbClr>
+            </a:outerShdw>
+          </a:effectLst>
+        </p:spPr>
+      </p:sp>
+      <p:sp>
+        <p:nvSpPr>
+          <p:cNvPr id="5" name="Shape 3"/>
+          <p:cNvSpPr/>
+          <p:nvPr/>
+        </p:nvSpPr>
+        <p:spPr>
+          <a:xfrm>
+            <a:off x="804672" y="1920240"/>
+            <a:ext cx="548640" cy="548640"/>
+          </a:xfrm>
+          <a:prstGeom prst="ellipse">
+            <a:avLst/>
+          </a:prstGeom>
+          <a:solidFill>
+            <a:srgbClr val="0F2F6F"/>
+          </a:solidFill>
+          <a:ln/>
+        </p:spPr>
+      </p:sp>
+      <p:sp>
+        <p:nvSpPr>
+          <p:cNvPr id="6" name="Text 4"/>
+          <p:cNvSpPr txBox="1"/>
+          <p:nvPr/>
+        </p:nvSpPr>
+        <p:spPr>
+          <a:xfrm>
+            <a:off x="804672" y="1920240"/>
+            <a:ext cx="548640" cy="548640"/>
+          </a:xfrm>
+          <a:prstGeom prst="rect">
+            <a:avLst/>
+          </a:prstGeom>
+          <a:noFill/>
+          <a:ln/>
+        </p:spPr>
+        <p:txBody>
+          <a:bodyPr wrap="square" lIns="0" tIns="0" rIns="0" bIns="0" rtlCol="0" anchor="ctr"/>
+          <a:lstStyle/>
+          <a:p>
+            <a:pPr algn="ctr" indent="0" marL="0">
+              <a:buNone/>
+            </a:pPr>
+            <a:r>
+              <a:rPr lang="en-US" sz="1500" b="1" dirty="0">
+                <a:solidFill>
+                  <a:srgbClr val="FFFFFF"/>
+                </a:solidFill>
+                <a:latin typeface="Malgun Gothic" pitchFamily="34" charset="0"/>
+                <a:ea typeface="Malgun Gothic" pitchFamily="34" charset="-122"/>
+                <a:cs typeface="Malgun Gothic" pitchFamily="34" charset="-120"/>
+              </a:rPr>
+              <a:t>1</a:t>
+            </a:r>
+            <a:endParaRPr lang="en-US" sz="1500" dirty="0"/>
+          </a:p>
+        </p:txBody>
+      </p:sp>
+      <p:sp>
+        <p:nvSpPr>
+          <p:cNvPr id="7" name="Text 5"/>
+          <p:cNvSpPr txBox="1"/>
+          <p:nvPr/>
+        </p:nvSpPr>
+        <p:spPr>
+          <a:xfrm>
+            <a:off x="1508760" y="1874520"/>
+            <a:ext cx="2341778" cy="548640"/>
+          </a:xfrm>
+          <a:prstGeom prst="rect">
+            <a:avLst/>
+          </a:prstGeom>
+          <a:noFill/>
+          <a:ln/>
+        </p:spPr>
+        <p:txBody>
+          <a:bodyPr wrap="square" lIns="0" tIns="0" rIns="0" bIns="0" rtlCol="0" anchor="ctr"/>
+          <a:lstStyle/>
+          <a:p>
+            <a:pPr indent="0" marL="0">
+              <a:buNone/>
+            </a:pPr>
+            <a:r>
+              <a:rPr lang="en-US" sz="1450" b="1" dirty="0">
+                <a:solidFill>
+                  <a:srgbClr val="0F2F6F"/>
+                </a:solidFill>
+                <a:latin typeface="Malgun Gothic" pitchFamily="34" charset="0"/>
+                <a:ea typeface="Malgun Gothic" pitchFamily="34" charset="-122"/>
+                <a:cs typeface="Malgun Gothic" pitchFamily="34" charset="-120"/>
+              </a:rPr>
+              <a:t>텍스트 대화 (RAG Q&amp;A)</a:t>
+            </a:r>
+            <a:endParaRPr lang="en-US" sz="1450" dirty="0"/>
+          </a:p>
+        </p:txBody>
+      </p:sp>
+      <p:sp>
+        <p:nvSpPr>
+          <p:cNvPr id="8" name="Shape 6"/>
+          <p:cNvSpPr/>
+          <p:nvPr/>
+        </p:nvSpPr>
+        <p:spPr>
+          <a:xfrm>
+            <a:off x="822960" y="2532888"/>
+            <a:ext cx="1051560" cy="292608"/>
+          </a:xfrm>
+          <a:prstGeom prst="roundRect">
+            <a:avLst>
+              <a:gd name="adj" fmla="val 15625"/>
+            </a:avLst>
+          </a:prstGeom>
+          <a:solidFill>
+            <a:srgbClr val="2E7D46"/>
+          </a:solidFill>
+          <a:ln/>
+        </p:spPr>
+      </p:sp>
+      <p:sp>
+        <p:nvSpPr>
+          <p:cNvPr id="9" name="Text 7"/>
+          <p:cNvSpPr txBox="1"/>
+          <p:nvPr/>
+        </p:nvSpPr>
+        <p:spPr>
+          <a:xfrm>
+            <a:off x="822960" y="2532888"/>
+            <a:ext cx="1051560" cy="292608"/>
+          </a:xfrm>
+          <a:prstGeom prst="rect">
+            <a:avLst/>
+          </a:prstGeom>
+          <a:noFill/>
+          <a:ln/>
+        </p:spPr>
+        <p:txBody>
+          <a:bodyPr wrap="square" lIns="0" tIns="0" rIns="0" bIns="0" rtlCol="0" anchor="ctr"/>
+          <a:lstStyle/>
+          <a:p>
+            <a:pPr algn="ctr" indent="0" marL="0">
+              <a:buNone/>
+            </a:pPr>
+            <a:r>
+              <a:rPr lang="en-US" sz="1100" b="1" dirty="0">
+                <a:solidFill>
+                  <a:srgbClr val="FFFFFF"/>
+                </a:solidFill>
+                <a:latin typeface="Malgun Gothic" pitchFamily="34" charset="0"/>
+                <a:ea typeface="Malgun Gothic" pitchFamily="34" charset="-122"/>
+                <a:cs typeface="Malgun Gothic" pitchFamily="34" charset="-120"/>
+              </a:rPr>
+              <a:t>완료</a:t>
+            </a:r>
+            <a:endParaRPr lang="en-US" sz="1100" dirty="0"/>
+          </a:p>
+        </p:txBody>
+      </p:sp>
+      <p:sp>
+        <p:nvSpPr>
+          <p:cNvPr id="10" name="Text 8"/>
+          <p:cNvSpPr txBox="1"/>
+          <p:nvPr/>
+        </p:nvSpPr>
+        <p:spPr>
+          <a:xfrm>
+            <a:off x="1965960" y="2514600"/>
+            <a:ext cx="1884578" cy="365760"/>
+          </a:xfrm>
+          <a:prstGeom prst="rect">
+            <a:avLst/>
+          </a:prstGeom>
+          <a:noFill/>
+          <a:ln/>
+        </p:spPr>
+        <p:txBody>
+          <a:bodyPr wrap="square" lIns="0" tIns="0" rIns="0" bIns="0" rtlCol="0" anchor="ctr"/>
+          <a:lstStyle/>
+          <a:p>
+            <a:pPr indent="0" marL="0">
+              <a:buNone/>
+            </a:pPr>
+            <a:r>
+              <a:rPr lang="en-US" sz="1150" dirty="0">
+                <a:solidFill>
+                  <a:srgbClr val="5B6673"/>
+                </a:solidFill>
+                <a:latin typeface="Malgun Gothic" pitchFamily="34" charset="0"/>
+                <a:ea typeface="Malgun Gothic" pitchFamily="34" charset="-122"/>
+                <a:cs typeface="Malgun Gothic" pitchFamily="34" charset="-120"/>
+              </a:rPr>
+              <a:t>완료 · 오늘 발표 핵심</a:t>
+            </a:r>
+            <a:endParaRPr lang="en-US" sz="1150" dirty="0"/>
+          </a:p>
+        </p:txBody>
+      </p:sp>
+      <p:sp>
+        <p:nvSpPr>
+          <p:cNvPr id="11" name="Shape 9"/>
+          <p:cNvSpPr/>
+          <p:nvPr/>
+        </p:nvSpPr>
+        <p:spPr>
+          <a:xfrm>
+            <a:off x="4353458" y="1691640"/>
+            <a:ext cx="3484778" cy="1325880"/>
+          </a:xfrm>
+          <a:prstGeom prst="roundRect">
+            <a:avLst>
+              <a:gd name="adj" fmla="val 6207"/>
+            </a:avLst>
+          </a:prstGeom>
+          <a:solidFill>
+            <a:srgbClr val="F4F7FC"/>
+          </a:solidFill>
+          <a:ln w="12700">
+            <a:solidFill>
+              <a:srgbClr val="D8E0EC"/>
+            </a:solidFill>
+            <a:prstDash val="solid"/>
+          </a:ln>
+          <a:effectLst>
+            <a:outerShdw sx="100000" sy="100000" kx="0" ky="0" algn="bl" rotWithShape="0" blurRad="76200" dist="25400" dir="5400000">
+              <a:srgbClr val="9AA5B5">
+                <a:alpha val="35000"/>
+              </a:srgbClr>
+            </a:outerShdw>
+          </a:effectLst>
+        </p:spPr>
+      </p:sp>
+      <p:sp>
+        <p:nvSpPr>
+          <p:cNvPr id="12" name="Shape 10"/>
+          <p:cNvSpPr/>
+          <p:nvPr/>
+        </p:nvSpPr>
+        <p:spPr>
+          <a:xfrm>
+            <a:off x="4609490" y="1920240"/>
+            <a:ext cx="548640" cy="548640"/>
+          </a:xfrm>
+          <a:prstGeom prst="ellipse">
+            <a:avLst/>
+          </a:prstGeom>
+          <a:solidFill>
+            <a:srgbClr val="0F2F6F"/>
+          </a:solidFill>
+          <a:ln/>
+        </p:spPr>
+      </p:sp>
+      <p:sp>
+        <p:nvSpPr>
+          <p:cNvPr id="13" name="Text 11"/>
+          <p:cNvSpPr txBox="1"/>
+          <p:nvPr/>
+        </p:nvSpPr>
+        <p:spPr>
+          <a:xfrm>
+            <a:off x="4609490" y="1920240"/>
+            <a:ext cx="548640" cy="548640"/>
+          </a:xfrm>
+          <a:prstGeom prst="rect">
+            <a:avLst/>
+          </a:prstGeom>
+          <a:noFill/>
+          <a:ln/>
+        </p:spPr>
+        <p:txBody>
+          <a:bodyPr wrap="square" lIns="0" tIns="0" rIns="0" bIns="0" rtlCol="0" anchor="ctr"/>
+          <a:lstStyle/>
+          <a:p>
+            <a:pPr algn="ctr" indent="0" marL="0">
+              <a:buNone/>
+            </a:pPr>
+            <a:r>
+              <a:rPr lang="en-US" sz="1500" b="1" dirty="0">
+                <a:solidFill>
+                  <a:srgbClr val="FFFFFF"/>
+                </a:solidFill>
+                <a:latin typeface="Malgun Gothic" pitchFamily="34" charset="0"/>
+                <a:ea typeface="Malgun Gothic" pitchFamily="34" charset="-122"/>
+                <a:cs typeface="Malgun Gothic" pitchFamily="34" charset="-120"/>
+              </a:rPr>
+              <a:t>2</a:t>
+            </a:r>
+            <a:endParaRPr lang="en-US" sz="1500" dirty="0"/>
+          </a:p>
+        </p:txBody>
+      </p:sp>
+      <p:sp>
+        <p:nvSpPr>
+          <p:cNvPr id="14" name="Text 12"/>
+          <p:cNvSpPr txBox="1"/>
+          <p:nvPr/>
+        </p:nvSpPr>
+        <p:spPr>
+          <a:xfrm>
+            <a:off x="5313578" y="1874520"/>
+            <a:ext cx="2341778" cy="548640"/>
+          </a:xfrm>
+          <a:prstGeom prst="rect">
+            <a:avLst/>
+          </a:prstGeom>
+          <a:noFill/>
+          <a:ln/>
+        </p:spPr>
+        <p:txBody>
+          <a:bodyPr wrap="square" lIns="0" tIns="0" rIns="0" bIns="0" rtlCol="0" anchor="ctr"/>
+          <a:lstStyle/>
+          <a:p>
+            <a:pPr indent="0" marL="0">
+              <a:buNone/>
+            </a:pPr>
+            <a:r>
+              <a:rPr lang="en-US" sz="1450" b="1" dirty="0">
+                <a:solidFill>
+                  <a:srgbClr val="0F2F6F"/>
+                </a:solidFill>
+                <a:latin typeface="Malgun Gothic" pitchFamily="34" charset="0"/>
+                <a:ea typeface="Malgun Gothic" pitchFamily="34" charset="-122"/>
+                <a:cs typeface="Malgun Gothic" pitchFamily="34" charset="-120"/>
+              </a:rPr>
+              <a:t>이상신호 감지</a:t>
+            </a:r>
+            <a:endParaRPr lang="en-US" sz="1450" dirty="0"/>
+          </a:p>
+        </p:txBody>
+      </p:sp>
+      <p:sp>
+        <p:nvSpPr>
+          <p:cNvPr id="15" name="Shape 13"/>
+          <p:cNvSpPr/>
+          <p:nvPr/>
+        </p:nvSpPr>
+        <p:spPr>
+          <a:xfrm>
+            <a:off x="4627778" y="2532888"/>
+            <a:ext cx="1051560" cy="292608"/>
+          </a:xfrm>
+          <a:prstGeom prst="roundRect">
+            <a:avLst>
+              <a:gd name="adj" fmla="val 15625"/>
+            </a:avLst>
+          </a:prstGeom>
+          <a:solidFill>
+            <a:srgbClr val="2E7D46"/>
+          </a:solidFill>
+          <a:ln/>
+        </p:spPr>
+      </p:sp>
+      <p:sp>
+        <p:nvSpPr>
+          <p:cNvPr id="16" name="Text 14"/>
+          <p:cNvSpPr txBox="1"/>
+          <p:nvPr/>
+        </p:nvSpPr>
+        <p:spPr>
+          <a:xfrm>
+            <a:off x="4627778" y="2532888"/>
+            <a:ext cx="1051560" cy="292608"/>
+          </a:xfrm>
+          <a:prstGeom prst="rect">
+            <a:avLst/>
+          </a:prstGeom>
+          <a:noFill/>
+          <a:ln/>
+        </p:spPr>
+        <p:txBody>
+          <a:bodyPr wrap="square" lIns="0" tIns="0" rIns="0" bIns="0" rtlCol="0" anchor="ctr"/>
+          <a:lstStyle/>
+          <a:p>
+            <a:pPr algn="ctr" indent="0" marL="0">
+              <a:buNone/>
+            </a:pPr>
+            <a:r>
+              <a:rPr lang="en-US" sz="1100" b="1" dirty="0">
+                <a:solidFill>
+                  <a:srgbClr val="FFFFFF"/>
+                </a:solidFill>
+                <a:latin typeface="Malgun Gothic" pitchFamily="34" charset="0"/>
+                <a:ea typeface="Malgun Gothic" pitchFamily="34" charset="-122"/>
+                <a:cs typeface="Malgun Gothic" pitchFamily="34" charset="-120"/>
+              </a:rPr>
+              <a:t>완료</a:t>
+            </a:r>
+            <a:endParaRPr lang="en-US" sz="1100" dirty="0"/>
+          </a:p>
+        </p:txBody>
+      </p:sp>
+      <p:sp>
+        <p:nvSpPr>
+          <p:cNvPr id="17" name="Text 15"/>
+          <p:cNvSpPr txBox="1"/>
+          <p:nvPr/>
+        </p:nvSpPr>
+        <p:spPr>
+          <a:xfrm>
+            <a:off x="5770778" y="2514600"/>
+            <a:ext cx="1884578" cy="365760"/>
+          </a:xfrm>
+          <a:prstGeom prst="rect">
+            <a:avLst/>
+          </a:prstGeom>
+          <a:noFill/>
+          <a:ln/>
+        </p:spPr>
+        <p:txBody>
+          <a:bodyPr wrap="square" lIns="0" tIns="0" rIns="0" bIns="0" rtlCol="0" anchor="ctr"/>
+          <a:lstStyle/>
+          <a:p>
+            <a:pPr indent="0" marL="0">
+              <a:buNone/>
+            </a:pPr>
+            <a:r>
+              <a:rPr lang="en-US" sz="1150" dirty="0">
+                <a:solidFill>
+                  <a:srgbClr val="5B6673"/>
+                </a:solidFill>
+                <a:latin typeface="Malgun Gothic" pitchFamily="34" charset="0"/>
+                <a:ea typeface="Malgun Gothic" pitchFamily="34" charset="-122"/>
+                <a:cs typeface="Malgun Gothic" pitchFamily="34" charset="-120"/>
+              </a:rPr>
+              <a:t>구현 (고도화 예정)</a:t>
+            </a:r>
+            <a:endParaRPr lang="en-US" sz="1150" dirty="0"/>
+          </a:p>
+        </p:txBody>
+      </p:sp>
+      <p:sp>
+        <p:nvSpPr>
+          <p:cNvPr id="18" name="Shape 16"/>
+          <p:cNvSpPr/>
+          <p:nvPr/>
+        </p:nvSpPr>
+        <p:spPr>
+          <a:xfrm>
+            <a:off x="8158277" y="1691640"/>
+            <a:ext cx="3484778" cy="1325880"/>
+          </a:xfrm>
+          <a:prstGeom prst="roundRect">
+            <a:avLst>
+              <a:gd name="adj" fmla="val 6207"/>
+            </a:avLst>
+          </a:prstGeom>
+          <a:solidFill>
+            <a:srgbClr val="F4F7FC"/>
+          </a:solidFill>
+          <a:ln w="12700">
+            <a:solidFill>
+              <a:srgbClr val="D8E0EC"/>
+            </a:solidFill>
+            <a:prstDash val="solid"/>
+          </a:ln>
+          <a:effectLst>
+            <a:outerShdw sx="100000" sy="100000" kx="0" ky="0" algn="bl" rotWithShape="0" blurRad="76200" dist="25400" dir="5400000">
+              <a:srgbClr val="9AA5B5">
+                <a:alpha val="35000"/>
+              </a:srgbClr>
+            </a:outerShdw>
+          </a:effectLst>
+        </p:spPr>
+      </p:sp>
+      <p:sp>
+        <p:nvSpPr>
+          <p:cNvPr id="19" name="Shape 17"/>
+          <p:cNvSpPr/>
+          <p:nvPr/>
+        </p:nvSpPr>
+        <p:spPr>
+          <a:xfrm>
+            <a:off x="8414309" y="1920240"/>
+            <a:ext cx="548640" cy="548640"/>
+          </a:xfrm>
+          <a:prstGeom prst="ellipse">
+            <a:avLst/>
+          </a:prstGeom>
+          <a:solidFill>
+            <a:srgbClr val="0F2F6F"/>
+          </a:solidFill>
+          <a:ln/>
+        </p:spPr>
+      </p:sp>
+      <p:sp>
+        <p:nvSpPr>
+          <p:cNvPr id="20" name="Text 18"/>
+          <p:cNvSpPr txBox="1"/>
+          <p:nvPr/>
+        </p:nvSpPr>
+        <p:spPr>
+          <a:xfrm>
+            <a:off x="8414309" y="1920240"/>
+            <a:ext cx="548640" cy="548640"/>
+          </a:xfrm>
+          <a:prstGeom prst="rect">
+            <a:avLst/>
+          </a:prstGeom>
+          <a:noFill/>
+          <a:ln/>
+        </p:spPr>
+        <p:txBody>
+          <a:bodyPr wrap="square" lIns="0" tIns="0" rIns="0" bIns="0" rtlCol="0" anchor="ctr"/>
+          <a:lstStyle/>
+          <a:p>
+            <a:pPr algn="ctr" indent="0" marL="0">
+              <a:buNone/>
+            </a:pPr>
+            <a:r>
+              <a:rPr lang="en-US" sz="1500" b="1" dirty="0">
+                <a:solidFill>
+                  <a:srgbClr val="FFFFFF"/>
+                </a:solidFill>
+                <a:latin typeface="Malgun Gothic" pitchFamily="34" charset="0"/>
+                <a:ea typeface="Malgun Gothic" pitchFamily="34" charset="-122"/>
+                <a:cs typeface="Malgun Gothic" pitchFamily="34" charset="-120"/>
+              </a:rPr>
+              <a:t>3</a:t>
+            </a:r>
+            <a:endParaRPr lang="en-US" sz="1500" dirty="0"/>
+          </a:p>
+        </p:txBody>
+      </p:sp>
+      <p:sp>
+        <p:nvSpPr>
+          <p:cNvPr id="21" name="Text 19"/>
+          <p:cNvSpPr txBox="1"/>
+          <p:nvPr/>
+        </p:nvSpPr>
+        <p:spPr>
+          <a:xfrm>
+            <a:off x="9118397" y="1874520"/>
+            <a:ext cx="2341778" cy="548640"/>
+          </a:xfrm>
+          <a:prstGeom prst="rect">
+            <a:avLst/>
+          </a:prstGeom>
+          <a:noFill/>
+          <a:ln/>
+        </p:spPr>
+        <p:txBody>
+          <a:bodyPr wrap="square" lIns="0" tIns="0" rIns="0" bIns="0" rtlCol="0" anchor="ctr"/>
+          <a:lstStyle/>
+          <a:p>
+            <a:pPr indent="0" marL="0">
+              <a:buNone/>
+            </a:pPr>
+            <a:r>
+              <a:rPr lang="en-US" sz="1450" b="1" dirty="0">
+                <a:solidFill>
+                  <a:srgbClr val="0F2F6F"/>
+                </a:solidFill>
+                <a:latin typeface="Malgun Gothic" pitchFamily="34" charset="0"/>
+                <a:ea typeface="Malgun Gothic" pitchFamily="34" charset="-122"/>
+                <a:cs typeface="Malgun Gothic" pitchFamily="34" charset="-120"/>
+              </a:rPr>
+              <a:t>두 기능 융합</a:t>
+            </a:r>
+            <a:endParaRPr lang="en-US" sz="1450" dirty="0"/>
+          </a:p>
+        </p:txBody>
+      </p:sp>
+      <p:sp>
+        <p:nvSpPr>
+          <p:cNvPr id="22" name="Shape 20"/>
+          <p:cNvSpPr/>
+          <p:nvPr/>
+        </p:nvSpPr>
+        <p:spPr>
+          <a:xfrm>
+            <a:off x="8432597" y="2532888"/>
+            <a:ext cx="1051560" cy="292608"/>
+          </a:xfrm>
+          <a:prstGeom prst="roundRect">
+            <a:avLst>
+              <a:gd name="adj" fmla="val 15625"/>
+            </a:avLst>
+          </a:prstGeom>
+          <a:solidFill>
+            <a:srgbClr val="2E7D46"/>
+          </a:solidFill>
+          <a:ln/>
+        </p:spPr>
+      </p:sp>
+      <p:sp>
+        <p:nvSpPr>
+          <p:cNvPr id="23" name="Text 21"/>
+          <p:cNvSpPr txBox="1"/>
+          <p:nvPr/>
+        </p:nvSpPr>
+        <p:spPr>
+          <a:xfrm>
+            <a:off x="8432597" y="2532888"/>
+            <a:ext cx="1051560" cy="292608"/>
+          </a:xfrm>
+          <a:prstGeom prst="rect">
+            <a:avLst/>
+          </a:prstGeom>
+          <a:noFill/>
+          <a:ln/>
+        </p:spPr>
+        <p:txBody>
+          <a:bodyPr wrap="square" lIns="0" tIns="0" rIns="0" bIns="0" rtlCol="0" anchor="ctr"/>
+          <a:lstStyle/>
+          <a:p>
+            <a:pPr algn="ctr" indent="0" marL="0">
+              <a:buNone/>
+            </a:pPr>
+            <a:r>
+              <a:rPr lang="en-US" sz="1100" b="1" dirty="0">
+                <a:solidFill>
+                  <a:srgbClr val="FFFFFF"/>
+                </a:solidFill>
+                <a:latin typeface="Malgun Gothic" pitchFamily="34" charset="0"/>
+                <a:ea typeface="Malgun Gothic" pitchFamily="34" charset="-122"/>
+                <a:cs typeface="Malgun Gothic" pitchFamily="34" charset="-120"/>
+              </a:rPr>
+              <a:t>완료</a:t>
+            </a:r>
+            <a:endParaRPr lang="en-US" sz="1100" dirty="0"/>
+          </a:p>
+        </p:txBody>
+      </p:sp>
+      <p:sp>
+        <p:nvSpPr>
+          <p:cNvPr id="24" name="Text 22"/>
+          <p:cNvSpPr txBox="1"/>
+          <p:nvPr/>
+        </p:nvSpPr>
+        <p:spPr>
+          <a:xfrm>
+            <a:off x="9575597" y="2514600"/>
+            <a:ext cx="1884578" cy="365760"/>
+          </a:xfrm>
+          <a:prstGeom prst="rect">
+            <a:avLst/>
+          </a:prstGeom>
+          <a:noFill/>
+          <a:ln/>
+        </p:spPr>
+        <p:txBody>
+          <a:bodyPr wrap="square" lIns="0" tIns="0" rIns="0" bIns="0" rtlCol="0" anchor="ctr"/>
+          <a:lstStyle/>
+          <a:p>
+            <a:pPr indent="0" marL="0">
+              <a:buNone/>
+            </a:pPr>
+            <a:r>
+              <a:rPr lang="en-US" sz="1150" dirty="0">
+                <a:solidFill>
+                  <a:srgbClr val="5B6673"/>
+                </a:solidFill>
+                <a:latin typeface="Malgun Gothic" pitchFamily="34" charset="0"/>
+                <a:ea typeface="Malgun Gothic" pitchFamily="34" charset="-122"/>
+                <a:cs typeface="Malgun Gothic" pitchFamily="34" charset="-120"/>
+              </a:rPr>
+              <a:t>통합 완료</a:t>
+            </a:r>
+            <a:endParaRPr lang="en-US" sz="1150" dirty="0"/>
+          </a:p>
+        </p:txBody>
+      </p:sp>
+      <p:sp>
+        <p:nvSpPr>
+          <p:cNvPr id="25" name="Shape 23"/>
+          <p:cNvSpPr/>
+          <p:nvPr/>
+        </p:nvSpPr>
+        <p:spPr>
+          <a:xfrm>
+            <a:off x="548640" y="3246120"/>
+            <a:ext cx="3484778" cy="1325880"/>
+          </a:xfrm>
+          <a:prstGeom prst="roundRect">
+            <a:avLst>
+              <a:gd name="adj" fmla="val 6207"/>
+            </a:avLst>
+          </a:prstGeom>
+          <a:solidFill>
+            <a:srgbClr val="F4F7FC"/>
+          </a:solidFill>
+          <a:ln w="12700">
+            <a:solidFill>
+              <a:srgbClr val="D8E0EC"/>
+            </a:solidFill>
+            <a:prstDash val="solid"/>
+          </a:ln>
+          <a:effectLst>
+            <a:outerShdw sx="100000" sy="100000" kx="0" ky="0" algn="bl" rotWithShape="0" blurRad="76200" dist="25400" dir="5400000">
+              <a:srgbClr val="9AA5B5">
+                <a:alpha val="35000"/>
+              </a:srgbClr>
+            </a:outerShdw>
+          </a:effectLst>
+        </p:spPr>
+      </p:sp>
+      <p:sp>
+        <p:nvSpPr>
+          <p:cNvPr id="26" name="Shape 24"/>
+          <p:cNvSpPr/>
+          <p:nvPr/>
+        </p:nvSpPr>
+        <p:spPr>
+          <a:xfrm>
+            <a:off x="804672" y="3474720"/>
+            <a:ext cx="548640" cy="548640"/>
+          </a:xfrm>
+          <a:prstGeom prst="ellipse">
+            <a:avLst/>
+          </a:prstGeom>
+          <a:solidFill>
+            <a:srgbClr val="0F2F6F"/>
+          </a:solidFill>
+          <a:ln/>
+        </p:spPr>
+      </p:sp>
+      <p:sp>
+        <p:nvSpPr>
+          <p:cNvPr id="27" name="Text 25"/>
+          <p:cNvSpPr txBox="1"/>
+          <p:nvPr/>
+        </p:nvSpPr>
+        <p:spPr>
+          <a:xfrm>
+            <a:off x="804672" y="3474720"/>
+            <a:ext cx="548640" cy="548640"/>
+          </a:xfrm>
+          <a:prstGeom prst="rect">
+            <a:avLst/>
+          </a:prstGeom>
+          <a:noFill/>
+          <a:ln/>
+        </p:spPr>
+        <p:txBody>
+          <a:bodyPr wrap="square" lIns="0" tIns="0" rIns="0" bIns="0" rtlCol="0" anchor="ctr"/>
+          <a:lstStyle/>
+          <a:p>
+            <a:pPr algn="ctr" indent="0" marL="0">
+              <a:buNone/>
+            </a:pPr>
+            <a:r>
+              <a:rPr lang="en-US" sz="1500" b="1" dirty="0">
+                <a:solidFill>
+                  <a:srgbClr val="FFFFFF"/>
+                </a:solidFill>
+                <a:latin typeface="Malgun Gothic" pitchFamily="34" charset="0"/>
+                <a:ea typeface="Malgun Gothic" pitchFamily="34" charset="-122"/>
+                <a:cs typeface="Malgun Gothic" pitchFamily="34" charset="-120"/>
+              </a:rPr>
+              <a:t>4</a:t>
+            </a:r>
+            <a:endParaRPr lang="en-US" sz="1500" dirty="0"/>
+          </a:p>
+        </p:txBody>
+      </p:sp>
+      <p:sp>
+        <p:nvSpPr>
+          <p:cNvPr id="28" name="Text 26"/>
+          <p:cNvSpPr txBox="1"/>
+          <p:nvPr/>
+        </p:nvSpPr>
+        <p:spPr>
+          <a:xfrm>
+            <a:off x="1508760" y="3429000"/>
+            <a:ext cx="2341778" cy="548640"/>
+          </a:xfrm>
+          <a:prstGeom prst="rect">
+            <a:avLst/>
+          </a:prstGeom>
+          <a:noFill/>
+          <a:ln/>
+        </p:spPr>
+        <p:txBody>
+          <a:bodyPr wrap="square" lIns="0" tIns="0" rIns="0" bIns="0" rtlCol="0" anchor="ctr"/>
+          <a:lstStyle/>
+          <a:p>
+            <a:pPr indent="0" marL="0">
+              <a:buNone/>
+            </a:pPr>
+            <a:r>
+              <a:rPr lang="en-US" sz="1450" b="1" dirty="0">
+                <a:solidFill>
+                  <a:srgbClr val="0F2F6F"/>
+                </a:solidFill>
+                <a:latin typeface="Malgun Gothic" pitchFamily="34" charset="0"/>
+                <a:ea typeface="Malgun Gothic" pitchFamily="34" charset="-122"/>
+                <a:cs typeface="Malgun Gothic" pitchFamily="34" charset="-120"/>
+              </a:rPr>
+              <a:t>음성 대화 (STT·TTS)</a:t>
+            </a:r>
+            <a:endParaRPr lang="en-US" sz="1450" dirty="0"/>
+          </a:p>
+        </p:txBody>
+      </p:sp>
+      <p:sp>
+        <p:nvSpPr>
+          <p:cNvPr id="29" name="Shape 27"/>
+          <p:cNvSpPr/>
+          <p:nvPr/>
+        </p:nvSpPr>
+        <p:spPr>
+          <a:xfrm>
+            <a:off x="822960" y="4087368"/>
+            <a:ext cx="1051560" cy="292608"/>
+          </a:xfrm>
+          <a:prstGeom prst="roundRect">
+            <a:avLst>
+              <a:gd name="adj" fmla="val 15625"/>
+            </a:avLst>
+          </a:prstGeom>
+          <a:solidFill>
+            <a:srgbClr val="E0A83C"/>
+          </a:solidFill>
+          <a:ln/>
+        </p:spPr>
+      </p:sp>
+      <p:sp>
+        <p:nvSpPr>
+          <p:cNvPr id="30" name="Text 28"/>
+          <p:cNvSpPr txBox="1"/>
+          <p:nvPr/>
+        </p:nvSpPr>
+        <p:spPr>
+          <a:xfrm>
+            <a:off x="822960" y="4087368"/>
+            <a:ext cx="1051560" cy="292608"/>
+          </a:xfrm>
+          <a:prstGeom prst="rect">
+            <a:avLst/>
+          </a:prstGeom>
+          <a:noFill/>
+          <a:ln/>
+        </p:spPr>
+        <p:txBody>
+          <a:bodyPr wrap="square" lIns="0" tIns="0" rIns="0" bIns="0" rtlCol="0" anchor="ctr"/>
+          <a:lstStyle/>
+          <a:p>
+            <a:pPr algn="ctr" indent="0" marL="0">
+              <a:buNone/>
+            </a:pPr>
+            <a:r>
+              <a:rPr lang="en-US" sz="1100" b="1" dirty="0">
+                <a:solidFill>
+                  <a:srgbClr val="FFFFFF"/>
+                </a:solidFill>
+                <a:latin typeface="Malgun Gothic" pitchFamily="34" charset="0"/>
+                <a:ea typeface="Malgun Gothic" pitchFamily="34" charset="-122"/>
+                <a:cs typeface="Malgun Gothic" pitchFamily="34" charset="-120"/>
+              </a:rPr>
+              <a:t>진행중</a:t>
+            </a:r>
+            <a:endParaRPr lang="en-US" sz="1100" dirty="0"/>
+          </a:p>
+        </p:txBody>
+      </p:sp>
+      <p:sp>
+        <p:nvSpPr>
+          <p:cNvPr id="31" name="Text 29"/>
+          <p:cNvSpPr txBox="1"/>
+          <p:nvPr/>
+        </p:nvSpPr>
+        <p:spPr>
+          <a:xfrm>
+            <a:off x="1965960" y="4069080"/>
+            <a:ext cx="1884578" cy="365760"/>
+          </a:xfrm>
+          <a:prstGeom prst="rect">
+            <a:avLst/>
+          </a:prstGeom>
+          <a:noFill/>
+          <a:ln/>
+        </p:spPr>
+        <p:txBody>
+          <a:bodyPr wrap="square" lIns="0" tIns="0" rIns="0" bIns="0" rtlCol="0" anchor="ctr"/>
+          <a:lstStyle/>
+          <a:p>
+            <a:pPr indent="0" marL="0">
+              <a:buNone/>
+            </a:pPr>
+            <a:r>
+              <a:rPr lang="en-US" sz="1150" dirty="0">
+                <a:solidFill>
+                  <a:srgbClr val="5B6673"/>
+                </a:solidFill>
+                <a:latin typeface="Malgun Gothic" pitchFamily="34" charset="0"/>
+                <a:ea typeface="Malgun Gothic" pitchFamily="34" charset="-122"/>
+                <a:cs typeface="Malgun Gothic" pitchFamily="34" charset="-120"/>
+              </a:rPr>
+              <a:t>실험 구현</a:t>
+            </a:r>
+            <a:endParaRPr lang="en-US" sz="1150" dirty="0"/>
+          </a:p>
+        </p:txBody>
+      </p:sp>
+      <p:sp>
+        <p:nvSpPr>
+          <p:cNvPr id="32" name="Shape 30"/>
+          <p:cNvSpPr/>
+          <p:nvPr/>
+        </p:nvSpPr>
+        <p:spPr>
+          <a:xfrm>
+            <a:off x="4353458" y="3246120"/>
+            <a:ext cx="3484778" cy="1325880"/>
+          </a:xfrm>
+          <a:prstGeom prst="roundRect">
+            <a:avLst>
+              <a:gd name="adj" fmla="val 6207"/>
+            </a:avLst>
+          </a:prstGeom>
+          <a:solidFill>
+            <a:srgbClr val="F4F7FC"/>
+          </a:solidFill>
+          <a:ln w="12700">
+            <a:solidFill>
+              <a:srgbClr val="D8E0EC"/>
+            </a:solidFill>
+            <a:prstDash val="solid"/>
+          </a:ln>
+          <a:effectLst>
+            <a:outerShdw sx="100000" sy="100000" kx="0" ky="0" algn="bl" rotWithShape="0" blurRad="76200" dist="25400" dir="5400000">
+              <a:srgbClr val="9AA5B5">
+                <a:alpha val="35000"/>
+              </a:srgbClr>
+            </a:outerShdw>
+          </a:effectLst>
+        </p:spPr>
+      </p:sp>
+      <p:sp>
+        <p:nvSpPr>
+          <p:cNvPr id="33" name="Shape 31"/>
+          <p:cNvSpPr/>
+          <p:nvPr/>
+        </p:nvSpPr>
+        <p:spPr>
+          <a:xfrm>
+            <a:off x="4609490" y="3474720"/>
+            <a:ext cx="548640" cy="548640"/>
+          </a:xfrm>
+          <a:prstGeom prst="ellipse">
+            <a:avLst/>
+          </a:prstGeom>
+          <a:solidFill>
+            <a:srgbClr val="0F2F6F"/>
+          </a:solidFill>
+          <a:ln/>
+        </p:spPr>
+      </p:sp>
+      <p:sp>
+        <p:nvSpPr>
+          <p:cNvPr id="34" name="Text 32"/>
+          <p:cNvSpPr txBox="1"/>
+          <p:nvPr/>
+        </p:nvSpPr>
+        <p:spPr>
+          <a:xfrm>
+            <a:off x="4609490" y="3474720"/>
+            <a:ext cx="548640" cy="548640"/>
+          </a:xfrm>
+          <a:prstGeom prst="rect">
+            <a:avLst/>
+          </a:prstGeom>
+          <a:noFill/>
+          <a:ln/>
+        </p:spPr>
+        <p:txBody>
+          <a:bodyPr wrap="square" lIns="0" tIns="0" rIns="0" bIns="0" rtlCol="0" anchor="ctr"/>
+          <a:lstStyle/>
+          <a:p>
+            <a:pPr algn="ctr" indent="0" marL="0">
+              <a:buNone/>
+            </a:pPr>
+            <a:r>
+              <a:rPr lang="en-US" sz="1500" b="1" dirty="0">
+                <a:solidFill>
+                  <a:srgbClr val="FFFFFF"/>
+                </a:solidFill>
+                <a:latin typeface="Malgun Gothic" pitchFamily="34" charset="0"/>
+                <a:ea typeface="Malgun Gothic" pitchFamily="34" charset="-122"/>
+                <a:cs typeface="Malgun Gothic" pitchFamily="34" charset="-120"/>
+              </a:rPr>
+              <a:t>5</a:t>
+            </a:r>
+            <a:endParaRPr lang="en-US" sz="1500" dirty="0"/>
+          </a:p>
+        </p:txBody>
+      </p:sp>
+      <p:sp>
+        <p:nvSpPr>
+          <p:cNvPr id="35" name="Text 33"/>
+          <p:cNvSpPr txBox="1"/>
+          <p:nvPr/>
+        </p:nvSpPr>
+        <p:spPr>
+          <a:xfrm>
+            <a:off x="5313578" y="3429000"/>
+            <a:ext cx="2341778" cy="548640"/>
+          </a:xfrm>
+          <a:prstGeom prst="rect">
+            <a:avLst/>
+          </a:prstGeom>
+          <a:noFill/>
+          <a:ln/>
+        </p:spPr>
+        <p:txBody>
+          <a:bodyPr wrap="square" lIns="0" tIns="0" rIns="0" bIns="0" rtlCol="0" anchor="ctr"/>
+          <a:lstStyle/>
+          <a:p>
+            <a:pPr indent="0" marL="0">
+              <a:buNone/>
+            </a:pPr>
+            <a:r>
+              <a:rPr lang="en-US" sz="1450" b="1" dirty="0">
+                <a:solidFill>
+                  <a:srgbClr val="0F2F6F"/>
+                </a:solidFill>
+                <a:latin typeface="Malgun Gothic" pitchFamily="34" charset="0"/>
+                <a:ea typeface="Malgun Gothic" pitchFamily="34" charset="-122"/>
+                <a:cs typeface="Malgun Gothic" pitchFamily="34" charset="-120"/>
+              </a:rPr>
+              <a:t>UI/UX (모바일·PWA)</a:t>
+            </a:r>
+            <a:endParaRPr lang="en-US" sz="1450" dirty="0"/>
+          </a:p>
+        </p:txBody>
+      </p:sp>
+      <p:sp>
+        <p:nvSpPr>
+          <p:cNvPr id="36" name="Shape 34"/>
+          <p:cNvSpPr/>
+          <p:nvPr/>
+        </p:nvSpPr>
+        <p:spPr>
+          <a:xfrm>
+            <a:off x="4627778" y="4087368"/>
+            <a:ext cx="1051560" cy="292608"/>
+          </a:xfrm>
+          <a:prstGeom prst="roundRect">
+            <a:avLst>
+              <a:gd name="adj" fmla="val 15625"/>
+            </a:avLst>
+          </a:prstGeom>
+          <a:solidFill>
+            <a:srgbClr val="2E7D46"/>
+          </a:solidFill>
+          <a:ln/>
+        </p:spPr>
+      </p:sp>
+      <p:sp>
+        <p:nvSpPr>
+          <p:cNvPr id="37" name="Text 35"/>
+          <p:cNvSpPr txBox="1"/>
+          <p:nvPr/>
+        </p:nvSpPr>
+        <p:spPr>
+          <a:xfrm>
+            <a:off x="4627778" y="4087368"/>
+            <a:ext cx="1051560" cy="292608"/>
+          </a:xfrm>
+          <a:prstGeom prst="rect">
+            <a:avLst/>
+          </a:prstGeom>
+          <a:noFill/>
+          <a:ln/>
+        </p:spPr>
+        <p:txBody>
+          <a:bodyPr wrap="square" lIns="0" tIns="0" rIns="0" bIns="0" rtlCol="0" anchor="ctr"/>
+          <a:lstStyle/>
+          <a:p>
+            <a:pPr algn="ctr" indent="0" marL="0">
+              <a:buNone/>
+            </a:pPr>
+            <a:r>
+              <a:rPr lang="en-US" sz="1100" b="1" dirty="0">
+                <a:solidFill>
+                  <a:srgbClr val="FFFFFF"/>
+                </a:solidFill>
+                <a:latin typeface="Malgun Gothic" pitchFamily="34" charset="0"/>
+                <a:ea typeface="Malgun Gothic" pitchFamily="34" charset="-122"/>
+                <a:cs typeface="Malgun Gothic" pitchFamily="34" charset="-120"/>
+              </a:rPr>
+              <a:t>완료</a:t>
+            </a:r>
+            <a:endParaRPr lang="en-US" sz="1100" dirty="0"/>
+          </a:p>
+        </p:txBody>
+      </p:sp>
+      <p:sp>
+        <p:nvSpPr>
+          <p:cNvPr id="38" name="Text 36"/>
+          <p:cNvSpPr txBox="1"/>
+          <p:nvPr/>
+        </p:nvSpPr>
+        <p:spPr>
+          <a:xfrm>
+            <a:off x="5770778" y="4069080"/>
+            <a:ext cx="1884578" cy="365760"/>
+          </a:xfrm>
+          <a:prstGeom prst="rect">
+            <a:avLst/>
+          </a:prstGeom>
+          <a:noFill/>
+          <a:ln/>
+        </p:spPr>
+        <p:txBody>
+          <a:bodyPr wrap="square" lIns="0" tIns="0" rIns="0" bIns="0" rtlCol="0" anchor="ctr"/>
+          <a:lstStyle/>
+          <a:p>
+            <a:pPr indent="0" marL="0">
+              <a:buNone/>
+            </a:pPr>
+            <a:r>
+              <a:rPr lang="en-US" sz="1150" dirty="0">
+                <a:solidFill>
+                  <a:srgbClr val="5B6673"/>
+                </a:solidFill>
+                <a:latin typeface="Malgun Gothic" pitchFamily="34" charset="0"/>
+                <a:ea typeface="Malgun Gothic" pitchFamily="34" charset="-122"/>
+                <a:cs typeface="Malgun Gothic" pitchFamily="34" charset="-120"/>
+              </a:rPr>
+              <a:t>구현</a:t>
+            </a:r>
+            <a:endParaRPr lang="en-US" sz="1150" dirty="0"/>
+          </a:p>
+        </p:txBody>
+      </p:sp>
+      <p:sp>
+        <p:nvSpPr>
+          <p:cNvPr id="39" name="Shape 37"/>
+          <p:cNvSpPr/>
+          <p:nvPr/>
+        </p:nvSpPr>
+        <p:spPr>
+          <a:xfrm>
+            <a:off x="8158277" y="3246120"/>
+            <a:ext cx="3484778" cy="1325880"/>
+          </a:xfrm>
+          <a:prstGeom prst="roundRect">
+            <a:avLst>
+              <a:gd name="adj" fmla="val 6207"/>
+            </a:avLst>
+          </a:prstGeom>
+          <a:solidFill>
+            <a:srgbClr val="F4F7FC"/>
+          </a:solidFill>
+          <a:ln w="12700">
+            <a:solidFill>
+              <a:srgbClr val="D8E0EC"/>
+            </a:solidFill>
+            <a:prstDash val="solid"/>
+          </a:ln>
+          <a:effectLst>
+            <a:outerShdw sx="100000" sy="100000" kx="0" ky="0" algn="bl" rotWithShape="0" blurRad="76200" dist="25400" dir="5400000">
+              <a:srgbClr val="9AA5B5">
+                <a:alpha val="35000"/>
+              </a:srgbClr>
+            </a:outerShdw>
+          </a:effectLst>
+        </p:spPr>
+      </p:sp>
+      <p:sp>
+        <p:nvSpPr>
+          <p:cNvPr id="40" name="Shape 38"/>
+          <p:cNvSpPr/>
+          <p:nvPr/>
+        </p:nvSpPr>
+        <p:spPr>
+          <a:xfrm>
+            <a:off x="8414309" y="3474720"/>
+            <a:ext cx="548640" cy="548640"/>
+          </a:xfrm>
+          <a:prstGeom prst="ellipse">
+            <a:avLst/>
+          </a:prstGeom>
+          <a:solidFill>
+            <a:srgbClr val="0F2F6F"/>
+          </a:solidFill>
+          <a:ln/>
+        </p:spPr>
+      </p:sp>
+      <p:sp>
+        <p:nvSpPr>
+          <p:cNvPr id="41" name="Text 39"/>
+          <p:cNvSpPr txBox="1"/>
+          <p:nvPr/>
+        </p:nvSpPr>
+        <p:spPr>
+          <a:xfrm>
+            <a:off x="8414309" y="3474720"/>
+            <a:ext cx="548640" cy="548640"/>
+          </a:xfrm>
+          <a:prstGeom prst="rect">
+            <a:avLst/>
+          </a:prstGeom>
+          <a:noFill/>
+          <a:ln/>
+        </p:spPr>
+        <p:txBody>
+          <a:bodyPr wrap="square" lIns="0" tIns="0" rIns="0" bIns="0" rtlCol="0" anchor="ctr"/>
+          <a:lstStyle/>
+          <a:p>
+            <a:pPr algn="ctr" indent="0" marL="0">
+              <a:buNone/>
+            </a:pPr>
+            <a:r>
+              <a:rPr lang="en-US" sz="1500" b="1" dirty="0">
+                <a:solidFill>
+                  <a:srgbClr val="FFFFFF"/>
+                </a:solidFill>
+                <a:latin typeface="Malgun Gothic" pitchFamily="34" charset="0"/>
+                <a:ea typeface="Malgun Gothic" pitchFamily="34" charset="-122"/>
+                <a:cs typeface="Malgun Gothic" pitchFamily="34" charset="-120"/>
+              </a:rPr>
+              <a:t>6</a:t>
+            </a:r>
+            <a:endParaRPr lang="en-US" sz="1500" dirty="0"/>
+          </a:p>
+        </p:txBody>
+      </p:sp>
+      <p:sp>
+        <p:nvSpPr>
+          <p:cNvPr id="42" name="Text 40"/>
+          <p:cNvSpPr txBox="1"/>
+          <p:nvPr/>
+        </p:nvSpPr>
+        <p:spPr>
+          <a:xfrm>
+            <a:off x="9118397" y="3429000"/>
+            <a:ext cx="2341778" cy="548640"/>
+          </a:xfrm>
+          <a:prstGeom prst="rect">
+            <a:avLst/>
+          </a:prstGeom>
+          <a:noFill/>
+          <a:ln/>
+        </p:spPr>
+        <p:txBody>
+          <a:bodyPr wrap="square" lIns="0" tIns="0" rIns="0" bIns="0" rtlCol="0" anchor="ctr"/>
+          <a:lstStyle/>
+          <a:p>
+            <a:pPr indent="0" marL="0">
+              <a:buNone/>
+            </a:pPr>
+            <a:r>
+              <a:rPr lang="en-US" sz="1450" b="1" dirty="0">
+                <a:solidFill>
+                  <a:srgbClr val="0F2F6F"/>
+                </a:solidFill>
+                <a:latin typeface="Malgun Gothic" pitchFamily="34" charset="0"/>
+                <a:ea typeface="Malgun Gothic" pitchFamily="34" charset="-122"/>
+                <a:cs typeface="Malgun Gothic" pitchFamily="34" charset="-120"/>
+              </a:rPr>
+              <a:t>평가 · 실증</a:t>
+            </a:r>
+            <a:endParaRPr lang="en-US" sz="1450" dirty="0"/>
+          </a:p>
+        </p:txBody>
+      </p:sp>
+      <p:sp>
+        <p:nvSpPr>
+          <p:cNvPr id="43" name="Shape 41"/>
+          <p:cNvSpPr/>
+          <p:nvPr/>
+        </p:nvSpPr>
+        <p:spPr>
+          <a:xfrm>
+            <a:off x="8432597" y="4087368"/>
+            <a:ext cx="1051560" cy="292608"/>
+          </a:xfrm>
+          <a:prstGeom prst="roundRect">
+            <a:avLst>
+              <a:gd name="adj" fmla="val 15625"/>
+            </a:avLst>
+          </a:prstGeom>
+          <a:solidFill>
+            <a:srgbClr val="E0A83C"/>
+          </a:solidFill>
+          <a:ln/>
+        </p:spPr>
+      </p:sp>
+      <p:sp>
+        <p:nvSpPr>
+          <p:cNvPr id="44" name="Text 42"/>
+          <p:cNvSpPr txBox="1"/>
+          <p:nvPr/>
+        </p:nvSpPr>
+        <p:spPr>
+          <a:xfrm>
+            <a:off x="8432597" y="4087368"/>
+            <a:ext cx="1051560" cy="292608"/>
+          </a:xfrm>
+          <a:prstGeom prst="rect">
+            <a:avLst/>
+          </a:prstGeom>
+          <a:noFill/>
+          <a:ln/>
+        </p:spPr>
+        <p:txBody>
+          <a:bodyPr wrap="square" lIns="0" tIns="0" rIns="0" bIns="0" rtlCol="0" anchor="ctr"/>
+          <a:lstStyle/>
+          <a:p>
+            <a:pPr algn="ctr" indent="0" marL="0">
+              <a:buNone/>
+            </a:pPr>
+            <a:r>
+              <a:rPr lang="en-US" sz="1100" b="1" dirty="0">
+                <a:solidFill>
+                  <a:srgbClr val="FFFFFF"/>
+                </a:solidFill>
+                <a:latin typeface="Malgun Gothic" pitchFamily="34" charset="0"/>
+                <a:ea typeface="Malgun Gothic" pitchFamily="34" charset="-122"/>
+                <a:cs typeface="Malgun Gothic" pitchFamily="34" charset="-120"/>
+              </a:rPr>
+              <a:t>진행중</a:t>
+            </a:r>
+            <a:endParaRPr lang="en-US" sz="1100" dirty="0"/>
+          </a:p>
+        </p:txBody>
+      </p:sp>
+      <p:sp>
+        <p:nvSpPr>
+          <p:cNvPr id="45" name="Text 43"/>
+          <p:cNvSpPr txBox="1"/>
+          <p:nvPr/>
+        </p:nvSpPr>
+        <p:spPr>
+          <a:xfrm>
+            <a:off x="9575597" y="4069080"/>
+            <a:ext cx="1884578" cy="365760"/>
+          </a:xfrm>
+          <a:prstGeom prst="rect">
+            <a:avLst/>
+          </a:prstGeom>
+          <a:noFill/>
+          <a:ln/>
+        </p:spPr>
+        <p:txBody>
+          <a:bodyPr wrap="square" lIns="0" tIns="0" rIns="0" bIns="0" rtlCol="0" anchor="ctr"/>
+          <a:lstStyle/>
+          <a:p>
+            <a:pPr indent="0" marL="0">
+              <a:buNone/>
+            </a:pPr>
+            <a:r>
+              <a:rPr lang="en-US" sz="1150" dirty="0">
+                <a:solidFill>
+                  <a:srgbClr val="5B6673"/>
+                </a:solidFill>
+                <a:latin typeface="Malgun Gothic" pitchFamily="34" charset="0"/>
+                <a:ea typeface="Malgun Gothic" pitchFamily="34" charset="-122"/>
+                <a:cs typeface="Malgun Gothic" pitchFamily="34" charset="-120"/>
+              </a:rPr>
+              <a:t>하네스 구축 · 현장 실증 예정</a:t>
+            </a:r>
+            <a:endParaRPr lang="en-US" sz="1150" dirty="0"/>
+          </a:p>
+        </p:txBody>
+      </p:sp>
+      <p:sp>
+        <p:nvSpPr>
+          <p:cNvPr id="46" name="Shape 44"/>
+          <p:cNvSpPr/>
+          <p:nvPr/>
+        </p:nvSpPr>
+        <p:spPr>
+          <a:xfrm>
+            <a:off x="548640" y="4892040"/>
+            <a:ext cx="11094415" cy="868680"/>
+          </a:xfrm>
+          <a:prstGeom prst="roundRect">
+            <a:avLst>
+              <a:gd name="adj" fmla="val 8421"/>
+            </a:avLst>
+          </a:prstGeom>
+          <a:solidFill>
+            <a:srgbClr val="EAF0FA"/>
+          </a:solidFill>
+          <a:ln/>
+        </p:spPr>
+      </p:sp>
+      <p:sp>
+        <p:nvSpPr>
+          <p:cNvPr id="47" name="Text 45"/>
+          <p:cNvSpPr txBox="1"/>
+          <p:nvPr/>
+        </p:nvSpPr>
+        <p:spPr>
+          <a:xfrm>
+            <a:off x="914400" y="4892040"/>
+            <a:ext cx="10362895" cy="868680"/>
+          </a:xfrm>
+          <a:prstGeom prst="rect">
+            <a:avLst/>
+          </a:prstGeom>
+          <a:noFill/>
+          <a:ln/>
+        </p:spPr>
+        <p:txBody>
+          <a:bodyPr wrap="square" lIns="0" tIns="0" rIns="0" bIns="0" rtlCol="0" anchor="ctr"/>
+          <a:lstStyle/>
+          <a:p>
+            <a:pPr indent="0" marL="0">
+              <a:buNone/>
+            </a:pPr>
+            <a:r>
+              <a:rPr lang="en-US" sz="1400" b="1" dirty="0">
+                <a:solidFill>
+                  <a:srgbClr val="0F2F6F"/>
+                </a:solidFill>
+                <a:latin typeface="Malgun Gothic" pitchFamily="34" charset="0"/>
+                <a:ea typeface="Malgun Gothic" pitchFamily="34" charset="-122"/>
+                <a:cs typeface="Malgun Gothic" pitchFamily="34" charset="-120"/>
+              </a:rPr>
+              <a:t>다음 단계   </a:t>
+            </a:r>
+            <a:pPr indent="0" marL="0">
+              <a:buNone/>
+            </a:pPr>
+            <a:r>
+              <a:rPr lang="en-US" sz="1400" b="1" dirty="0">
+                <a:solidFill>
+                  <a:srgbClr val="1F2933"/>
+                </a:solidFill>
+                <a:latin typeface="Malgun Gothic" pitchFamily="34" charset="0"/>
+                <a:ea typeface="Malgun Gothic" pitchFamily="34" charset="-122"/>
+                <a:cs typeface="Malgun Gothic" pitchFamily="34" charset="-120"/>
+              </a:rPr>
+              <a:t>경로당 시범 운영 · HWP 문서 지원 · 사람·LLM 평가 보강</a:t>
+            </a:r>
+            <a:endParaRPr lang="en-US" sz="1400" dirty="0"/>
+          </a:p>
+        </p:txBody>
+      </p:sp>
+    </p:spTree>
+  </p:cSld>
+  <p:clrMapOvr>
+    <a:masterClrMapping/>
+  </p:clrMapOvr>
+</p:sld>
+</file>
+
+<file path=ppt/slides/slide11.xml><?xml version="1.0" encoding="utf-8"?>
+<p:sld xmlns:a="http://schemas.openxmlformats.org/drawingml/2006/main" xmlns:r="http://schemas.openxmlformats.org/officeDocument/2006/relationships" xmlns:p="http://schemas.openxmlformats.org/presentationml/2006/main">
+  <p:cSld name="Slide 11">
+    <p:bg>
+      <p:bgPr>
+        <a:solidFill>
           <a:srgbClr val="0F2F6F"/>
         </a:solidFill>
       </p:bgPr>
@@ -5539,7 +7205,7 @@
                 <a:ea typeface="Malgun Gothic" pitchFamily="34" charset="-122"/>
                 <a:cs typeface="Malgun Gothic" pitchFamily="34" charset="-120"/>
               </a:rPr>
-              <a:t>ARCHITECTURE</a:t>
+              <a:t>DATA</a:t>
             </a:r>
             <a:endParaRPr lang="en-US" sz="1300" dirty="0"/>
           </a:p>
@@ -5578,7 +7244,7 @@
                 <a:ea typeface="Malgun Gothic" pitchFamily="34" charset="-122"/>
                 <a:cs typeface="Malgun Gothic" pitchFamily="34" charset="-120"/>
               </a:rPr>
-              <a:t>시스템 아키텍처 — 모두 기기 안에서</a:t>
+              <a:t>데이터 — 무엇을 · 어떤 형식으로 · 어떻게 처리했나</a:t>
             </a:r>
             <a:endParaRPr lang="en-US" sz="3200" dirty="0"/>
           </a:p>
@@ -5592,12 +7258,12 @@
         </p:nvSpPr>
         <p:spPr>
           <a:xfrm>
-            <a:off x="548640" y="1600200"/>
-            <a:ext cx="2377440" cy="658368"/>
+            <a:off x="548640" y="1572768"/>
+            <a:ext cx="5532120" cy="2148840"/>
           </a:xfrm>
           <a:prstGeom prst="roundRect">
             <a:avLst>
-              <a:gd name="adj" fmla="val 9722"/>
+              <a:gd name="adj" fmla="val 3830"/>
             </a:avLst>
           </a:prstGeom>
           <a:solidFill>
@@ -5609,18 +7275,45 @@
             </a:solidFill>
             <a:prstDash val="solid"/>
           </a:ln>
-        </p:spPr>
-      </p:sp>
-      <p:sp>
-        <p:nvSpPr>
-          <p:cNvPr id="5" name="Text 3"/>
-          <p:cNvSpPr txBox="1"/>
-          <p:nvPr/>
-        </p:nvSpPr>
-        <p:spPr>
-          <a:xfrm>
-            <a:off x="640080" y="1600200"/>
-            <a:ext cx="2194560" cy="658368"/>
+          <a:effectLst>
+            <a:outerShdw sx="100000" sy="100000" kx="0" ky="0" algn="bl" rotWithShape="0" blurRad="76200" dist="25400" dir="5400000">
+              <a:srgbClr val="9AA5B5">
+                <a:alpha val="35000"/>
+              </a:srgbClr>
+            </a:outerShdw>
+          </a:effectLst>
+        </p:spPr>
+      </p:sp>
+      <p:sp>
+        <p:nvSpPr>
+          <p:cNvPr id="5" name="Shape 3"/>
+          <p:cNvSpPr/>
+          <p:nvPr/>
+        </p:nvSpPr>
+        <p:spPr>
+          <a:xfrm>
+            <a:off x="768096" y="1773936"/>
+            <a:ext cx="457200" cy="457200"/>
+          </a:xfrm>
+          <a:prstGeom prst="ellipse">
+            <a:avLst/>
+          </a:prstGeom>
+          <a:solidFill>
+            <a:srgbClr val="0F2F6F"/>
+          </a:solidFill>
+          <a:ln/>
+        </p:spPr>
+      </p:sp>
+      <p:sp>
+        <p:nvSpPr>
+          <p:cNvPr id="6" name="Text 4"/>
+          <p:cNvSpPr txBox="1"/>
+          <p:nvPr/>
+        </p:nvSpPr>
+        <p:spPr>
+          <a:xfrm>
+            <a:off x="768096" y="1773936"/>
+            <a:ext cx="457200" cy="457200"/>
           </a:xfrm>
           <a:prstGeom prst="rect">
             <a:avLst/>
@@ -5636,7 +7329,89 @@
               <a:buNone/>
             </a:pPr>
             <a:r>
-              <a:rPr lang="en-US" sz="1350" b="1" dirty="0">
+              <a:rPr lang="en-US" sz="1500" b="1" dirty="0">
+                <a:solidFill>
+                  <a:srgbClr val="FFFFFF"/>
+                </a:solidFill>
+                <a:latin typeface="Malgun Gothic" pitchFamily="34" charset="0"/>
+                <a:ea typeface="Malgun Gothic" pitchFamily="34" charset="-122"/>
+                <a:cs typeface="Malgun Gothic" pitchFamily="34" charset="-120"/>
+              </a:rPr>
+              <a:t>1</a:t>
+            </a:r>
+            <a:endParaRPr lang="en-US" sz="1500" dirty="0"/>
+          </a:p>
+        </p:txBody>
+      </p:sp>
+      <p:sp>
+        <p:nvSpPr>
+          <p:cNvPr id="7" name="Text 5"/>
+          <p:cNvSpPr txBox="1"/>
+          <p:nvPr/>
+        </p:nvSpPr>
+        <p:spPr>
+          <a:xfrm>
+            <a:off x="1371600" y="1773936"/>
+            <a:ext cx="4526280" cy="457200"/>
+          </a:xfrm>
+          <a:prstGeom prst="rect">
+            <a:avLst/>
+          </a:prstGeom>
+          <a:noFill/>
+          <a:ln/>
+        </p:spPr>
+        <p:txBody>
+          <a:bodyPr wrap="square" lIns="0" tIns="0" rIns="0" bIns="0" rtlCol="0" anchor="ctr"/>
+          <a:lstStyle/>
+          <a:p>
+            <a:pPr indent="0" marL="0">
+              <a:buNone/>
+            </a:pPr>
+            <a:r>
+              <a:rPr lang="en-US" sz="1800" b="1" dirty="0">
+                <a:solidFill>
+                  <a:srgbClr val="0F2F6F"/>
+                </a:solidFill>
+                <a:latin typeface="Malgun Gothic" pitchFamily="34" charset="0"/>
+                <a:ea typeface="Malgun Gothic" pitchFamily="34" charset="-122"/>
+                <a:cs typeface="Malgun Gothic" pitchFamily="34" charset="-120"/>
+              </a:rPr>
+              <a:t>데이터 출처</a:t>
+            </a:r>
+            <a:endParaRPr lang="en-US" sz="1800" dirty="0"/>
+          </a:p>
+        </p:txBody>
+      </p:sp>
+      <p:sp>
+        <p:nvSpPr>
+          <p:cNvPr id="8" name="Text 6"/>
+          <p:cNvSpPr txBox="1"/>
+          <p:nvPr/>
+        </p:nvSpPr>
+        <p:spPr>
+          <a:xfrm>
+            <a:off x="841248" y="2322576"/>
+            <a:ext cx="4946904" cy="1097280"/>
+          </a:xfrm>
+          <a:prstGeom prst="rect">
+            <a:avLst/>
+          </a:prstGeom>
+          <a:noFill/>
+          <a:ln/>
+        </p:spPr>
+        <p:txBody>
+          <a:bodyPr wrap="square" rtlCol="0" anchor="t"/>
+          <a:lstStyle/>
+          <a:p>
+            <a:pPr marL="342900" indent="-342900">
+              <a:spcAft>
+                <a:spcPts val="600"/>
+              </a:spcAft>
+              <a:buSzPct val="100000"/>
+              <a:buChar char="•"/>
+            </a:pPr>
+            <a:r>
+              <a:rPr lang="en-US" sz="1350" dirty="0">
                 <a:solidFill>
                   <a:srgbClr val="1F2933"/>
                 </a:solidFill>
@@ -5644,50 +7419,107 @@
                 <a:ea typeface="Malgun Gothic" pitchFamily="34" charset="-122"/>
                 <a:cs typeface="Malgun Gothic" pitchFamily="34" charset="-120"/>
               </a:rPr>
-              <a:t>입력 (음성·문자)</a:t>
+              <a:t>보건복지부 「2025 노인보건복지 사업안내」 1·2권 (정책 원문)</a:t>
             </a:r>
             <a:endParaRPr lang="en-US" sz="1350" dirty="0"/>
           </a:p>
-        </p:txBody>
-      </p:sp>
-      <p:sp>
-        <p:nvSpPr>
-          <p:cNvPr id="6" name="Shape 4"/>
+          <a:p>
+            <a:pPr marL="342900" indent="-342900">
+              <a:spcAft>
+                <a:spcPts val="600"/>
+              </a:spcAft>
+              <a:buSzPct val="100000"/>
+              <a:buChar char="•"/>
+            </a:pPr>
+            <a:r>
+              <a:rPr lang="en-US" sz="1350" dirty="0">
+                <a:solidFill>
+                  <a:srgbClr val="1F2933"/>
+                </a:solidFill>
+                <a:latin typeface="Malgun Gothic" pitchFamily="34" charset="0"/>
+                <a:ea typeface="Malgun Gothic" pitchFamily="34" charset="-122"/>
+                <a:cs typeface="Malgun Gothic" pitchFamily="34" charset="-120"/>
+              </a:rPr>
+              <a:t>대전시 구별 노인복지시설 현황 — 요양·주야간보호·복지관·경로당</a:t>
+            </a:r>
+            <a:endParaRPr lang="en-US" sz="1350" dirty="0"/>
+          </a:p>
+          <a:p>
+            <a:pPr marL="342900" indent="-342900">
+              <a:spcAft>
+                <a:spcPts val="600"/>
+              </a:spcAft>
+              <a:buSzPct val="100000"/>
+              <a:buChar char="•"/>
+            </a:pPr>
+            <a:r>
+              <a:rPr lang="en-US" sz="1350" dirty="0">
+                <a:solidFill>
+                  <a:srgbClr val="1F2933"/>
+                </a:solidFill>
+                <a:latin typeface="Malgun Gothic" pitchFamily="34" charset="0"/>
+                <a:ea typeface="Malgun Gothic" pitchFamily="34" charset="-122"/>
+                <a:cs typeface="Malgun Gothic" pitchFamily="34" charset="-120"/>
+              </a:rPr>
+              <a:t>대전 노인맞춤돌봄 · 재가노인 식사배달 현황</a:t>
+            </a:r>
+            <a:endParaRPr lang="en-US" sz="1350" dirty="0"/>
+          </a:p>
+        </p:txBody>
+      </p:sp>
+      <p:sp>
+        <p:nvSpPr>
+          <p:cNvPr id="9" name="Text 7"/>
+          <p:cNvSpPr txBox="1"/>
+          <p:nvPr/>
+        </p:nvSpPr>
+        <p:spPr>
+          <a:xfrm>
+            <a:off x="841248" y="3328416"/>
+            <a:ext cx="4946904" cy="320040"/>
+          </a:xfrm>
+          <a:prstGeom prst="rect">
+            <a:avLst/>
+          </a:prstGeom>
+          <a:noFill/>
+          <a:ln/>
+        </p:spPr>
+        <p:txBody>
+          <a:bodyPr wrap="square" lIns="0" tIns="0" rIns="0" bIns="0" rtlCol="0" anchor="ctr"/>
+          <a:lstStyle/>
+          <a:p>
+            <a:pPr indent="0" marL="0">
+              <a:buNone/>
+            </a:pPr>
+            <a:r>
+              <a:rPr lang="en-US" sz="1200" b="1" dirty="0">
+                <a:solidFill>
+                  <a:srgbClr val="B8862B"/>
+                </a:solidFill>
+                <a:latin typeface="Malgun Gothic" pitchFamily="34" charset="0"/>
+                <a:ea typeface="Malgun Gothic" pitchFamily="34" charset="-122"/>
+                <a:cs typeface="Malgun Gothic" pitchFamily="34" charset="-120"/>
+              </a:rPr>
+              <a:t>→ 모두 공공기관 공개데이터 · 총 24개 파일 (개인정보 없음)</a:t>
+            </a:r>
+            <a:endParaRPr lang="en-US" sz="1200" dirty="0"/>
+          </a:p>
+        </p:txBody>
+      </p:sp>
+      <p:sp>
+        <p:nvSpPr>
+          <p:cNvPr id="10" name="Shape 8"/>
           <p:cNvSpPr/>
           <p:nvPr/>
         </p:nvSpPr>
         <p:spPr>
           <a:xfrm>
-            <a:off x="2926080" y="1929384"/>
-            <a:ext cx="457200" cy="0"/>
-          </a:xfrm>
-          <a:prstGeom prst="line">
-            <a:avLst/>
-          </a:prstGeom>
-          <a:noFill/>
-          <a:ln w="31750">
-            <a:solidFill>
-              <a:srgbClr val="E0A83C"/>
-            </a:solidFill>
-            <a:prstDash val="solid"/>
-            <a:tailEnd type="triangle"/>
-          </a:ln>
-        </p:spPr>
-      </p:sp>
-      <p:sp>
-        <p:nvSpPr>
-          <p:cNvPr id="7" name="Shape 5"/>
-          <p:cNvSpPr/>
-          <p:nvPr/>
-        </p:nvSpPr>
-        <p:spPr>
-          <a:xfrm>
-            <a:off x="3383280" y="1600200"/>
-            <a:ext cx="2194560" cy="658368"/>
+            <a:off x="6446520" y="1572768"/>
+            <a:ext cx="5196535" cy="2148840"/>
           </a:xfrm>
           <a:prstGeom prst="roundRect">
             <a:avLst>
-              <a:gd name="adj" fmla="val 9722"/>
+              <a:gd name="adj" fmla="val 3830"/>
             </a:avLst>
           </a:prstGeom>
           <a:solidFill>
@@ -5699,18 +7531,45 @@
             </a:solidFill>
             <a:prstDash val="solid"/>
           </a:ln>
-        </p:spPr>
-      </p:sp>
-      <p:sp>
-        <p:nvSpPr>
-          <p:cNvPr id="8" name="Text 6"/>
-          <p:cNvSpPr txBox="1"/>
-          <p:nvPr/>
-        </p:nvSpPr>
-        <p:spPr>
-          <a:xfrm>
-            <a:off x="3474720" y="1600200"/>
-            <a:ext cx="2011680" cy="658368"/>
+          <a:effectLst>
+            <a:outerShdw sx="100000" sy="100000" kx="0" ky="0" algn="bl" rotWithShape="0" blurRad="76200" dist="25400" dir="5400000">
+              <a:srgbClr val="9AA5B5">
+                <a:alpha val="35000"/>
+              </a:srgbClr>
+            </a:outerShdw>
+          </a:effectLst>
+        </p:spPr>
+      </p:sp>
+      <p:sp>
+        <p:nvSpPr>
+          <p:cNvPr id="11" name="Shape 9"/>
+          <p:cNvSpPr/>
+          <p:nvPr/>
+        </p:nvSpPr>
+        <p:spPr>
+          <a:xfrm>
+            <a:off x="6665976" y="1773936"/>
+            <a:ext cx="457200" cy="457200"/>
+          </a:xfrm>
+          <a:prstGeom prst="ellipse">
+            <a:avLst/>
+          </a:prstGeom>
+          <a:solidFill>
+            <a:srgbClr val="0F2F6F"/>
+          </a:solidFill>
+          <a:ln/>
+        </p:spPr>
+      </p:sp>
+      <p:sp>
+        <p:nvSpPr>
+          <p:cNvPr id="12" name="Text 10"/>
+          <p:cNvSpPr txBox="1"/>
+          <p:nvPr/>
+        </p:nvSpPr>
+        <p:spPr>
+          <a:xfrm>
+            <a:off x="6665976" y="1773936"/>
+            <a:ext cx="457200" cy="457200"/>
           </a:xfrm>
           <a:prstGeom prst="rect">
             <a:avLst/>
@@ -5726,75 +7585,630 @@
               <a:buNone/>
             </a:pPr>
             <a:r>
-              <a:rPr lang="en-US" sz="1350" b="1" dirty="0">
-                <a:solidFill>
-                  <a:srgbClr val="1F2933"/>
-                </a:solidFill>
-                <a:latin typeface="Malgun Gothic" pitchFamily="34" charset="0"/>
-                <a:ea typeface="Malgun Gothic" pitchFamily="34" charset="-122"/>
-                <a:cs typeface="Malgun Gothic" pitchFamily="34" charset="-120"/>
-              </a:rPr>
-              <a:t>STT (Whisper)</a:t>
-            </a:r>
-            <a:endParaRPr lang="en-US" sz="1350" dirty="0"/>
-          </a:p>
-          <a:p>
-            <a:pPr algn="ctr" indent="0" marL="0">
-              <a:buNone/>
-            </a:pPr>
-            <a:r>
-              <a:rPr lang="en-US" sz="1050" dirty="0">
-                <a:solidFill>
-                  <a:srgbClr val="5B6673"/>
-                </a:solidFill>
-                <a:latin typeface="Malgun Gothic" pitchFamily="34" charset="0"/>
-                <a:ea typeface="Malgun Gothic" pitchFamily="34" charset="-122"/>
-                <a:cs typeface="Malgun Gothic" pitchFamily="34" charset="-120"/>
-              </a:rPr>
-              <a:t>로컬 음성인식</a:t>
-            </a:r>
-            <a:endParaRPr lang="en-US" sz="1350" dirty="0"/>
-          </a:p>
-        </p:txBody>
-      </p:sp>
-      <p:sp>
-        <p:nvSpPr>
-          <p:cNvPr id="9" name="Shape 7"/>
+              <a:rPr lang="en-US" sz="1500" b="1" dirty="0">
+                <a:solidFill>
+                  <a:srgbClr val="FFFFFF"/>
+                </a:solidFill>
+                <a:latin typeface="Malgun Gothic" pitchFamily="34" charset="0"/>
+                <a:ea typeface="Malgun Gothic" pitchFamily="34" charset="-122"/>
+                <a:cs typeface="Malgun Gothic" pitchFamily="34" charset="-120"/>
+              </a:rPr>
+              <a:t>2</a:t>
+            </a:r>
+            <a:endParaRPr lang="en-US" sz="1500" dirty="0"/>
+          </a:p>
+        </p:txBody>
+      </p:sp>
+      <p:sp>
+        <p:nvSpPr>
+          <p:cNvPr id="13" name="Text 11"/>
+          <p:cNvSpPr txBox="1"/>
+          <p:nvPr/>
+        </p:nvSpPr>
+        <p:spPr>
+          <a:xfrm>
+            <a:off x="7269480" y="1773936"/>
+            <a:ext cx="4190695" cy="457200"/>
+          </a:xfrm>
+          <a:prstGeom prst="rect">
+            <a:avLst/>
+          </a:prstGeom>
+          <a:noFill/>
+          <a:ln/>
+        </p:spPr>
+        <p:txBody>
+          <a:bodyPr wrap="square" lIns="0" tIns="0" rIns="0" bIns="0" rtlCol="0" anchor="ctr"/>
+          <a:lstStyle/>
+          <a:p>
+            <a:pPr indent="0" marL="0">
+              <a:buNone/>
+            </a:pPr>
+            <a:r>
+              <a:rPr lang="en-US" sz="1800" b="1" dirty="0">
+                <a:solidFill>
+                  <a:srgbClr val="0F2F6F"/>
+                </a:solidFill>
+                <a:latin typeface="Malgun Gothic" pitchFamily="34" charset="0"/>
+                <a:ea typeface="Malgun Gothic" pitchFamily="34" charset="-122"/>
+                <a:cs typeface="Malgun Gothic" pitchFamily="34" charset="-120"/>
+              </a:rPr>
+              <a:t>데이터 형식</a:t>
+            </a:r>
+            <a:endParaRPr lang="en-US" sz="1800" dirty="0"/>
+          </a:p>
+        </p:txBody>
+      </p:sp>
+      <p:sp>
+        <p:nvSpPr>
+          <p:cNvPr id="14" name="Shape 12"/>
           <p:cNvSpPr/>
           <p:nvPr/>
         </p:nvSpPr>
         <p:spPr>
           <a:xfrm>
-            <a:off x="5577840" y="1929384"/>
-            <a:ext cx="457200" cy="0"/>
-          </a:xfrm>
-          <a:prstGeom prst="line">
-            <a:avLst/>
-          </a:prstGeom>
-          <a:noFill/>
-          <a:ln w="31750">
+            <a:off x="6739128" y="2359152"/>
+            <a:ext cx="2214220" cy="566928"/>
+          </a:xfrm>
+          <a:prstGeom prst="roundRect">
+            <a:avLst>
+              <a:gd name="adj" fmla="val 8065"/>
+            </a:avLst>
+          </a:prstGeom>
+          <a:solidFill>
+            <a:srgbClr val="FFFFFF"/>
+          </a:solidFill>
+          <a:ln w="12700">
             <a:solidFill>
               <a:srgbClr val="E0A83C"/>
             </a:solidFill>
             <a:prstDash val="solid"/>
-            <a:tailEnd type="triangle"/>
           </a:ln>
         </p:spPr>
       </p:sp>
       <p:sp>
         <p:nvSpPr>
-          <p:cNvPr id="10" name="Shape 8"/>
+          <p:cNvPr id="15" name="Text 13"/>
+          <p:cNvSpPr txBox="1"/>
+          <p:nvPr/>
+        </p:nvSpPr>
+        <p:spPr>
+          <a:xfrm>
+            <a:off x="6885432" y="2414016"/>
+            <a:ext cx="1921612" cy="256032"/>
+          </a:xfrm>
+          <a:prstGeom prst="rect">
+            <a:avLst/>
+          </a:prstGeom>
+          <a:noFill/>
+          <a:ln/>
+        </p:spPr>
+        <p:txBody>
+          <a:bodyPr wrap="square" lIns="0" tIns="0" rIns="0" bIns="0" rtlCol="0" anchor="ctr"/>
+          <a:lstStyle/>
+          <a:p>
+            <a:pPr indent="0" marL="0">
+              <a:buNone/>
+            </a:pPr>
+            <a:r>
+              <a:rPr lang="en-US" sz="1400" b="1" dirty="0">
+                <a:solidFill>
+                  <a:srgbClr val="0F2F6F"/>
+                </a:solidFill>
+                <a:latin typeface="Malgun Gothic" pitchFamily="34" charset="0"/>
+                <a:ea typeface="Malgun Gothic" pitchFamily="34" charset="-122"/>
+                <a:cs typeface="Malgun Gothic" pitchFamily="34" charset="-120"/>
+              </a:rPr>
+              <a:t>PDF</a:t>
+            </a:r>
+            <a:endParaRPr lang="en-US" sz="1400" dirty="0"/>
+          </a:p>
+        </p:txBody>
+      </p:sp>
+      <p:sp>
+        <p:nvSpPr>
+          <p:cNvPr id="16" name="Text 14"/>
+          <p:cNvSpPr txBox="1"/>
+          <p:nvPr/>
+        </p:nvSpPr>
+        <p:spPr>
+          <a:xfrm>
+            <a:off x="6885432" y="2660904"/>
+            <a:ext cx="1921612" cy="219456"/>
+          </a:xfrm>
+          <a:prstGeom prst="rect">
+            <a:avLst/>
+          </a:prstGeom>
+          <a:noFill/>
+          <a:ln/>
+        </p:spPr>
+        <p:txBody>
+          <a:bodyPr wrap="square" lIns="0" tIns="0" rIns="0" bIns="0" rtlCol="0" anchor="ctr"/>
+          <a:lstStyle/>
+          <a:p>
+            <a:pPr indent="0" marL="0">
+              <a:buNone/>
+            </a:pPr>
+            <a:r>
+              <a:rPr lang="en-US" sz="1050" dirty="0">
+                <a:solidFill>
+                  <a:srgbClr val="5B6673"/>
+                </a:solidFill>
+                <a:latin typeface="Malgun Gothic" pitchFamily="34" charset="0"/>
+                <a:ea typeface="Malgun Gothic" pitchFamily="34" charset="-122"/>
+                <a:cs typeface="Malgun Gothic" pitchFamily="34" charset="-120"/>
+              </a:rPr>
+              <a:t>정책 원문 · 스캔 OCR</a:t>
+            </a:r>
+            <a:endParaRPr lang="en-US" sz="1050" dirty="0"/>
+          </a:p>
+        </p:txBody>
+      </p:sp>
+      <p:sp>
+        <p:nvSpPr>
+          <p:cNvPr id="17" name="Shape 15"/>
           <p:cNvSpPr/>
           <p:nvPr/>
         </p:nvSpPr>
         <p:spPr>
           <a:xfrm>
-            <a:off x="6035040" y="1600200"/>
-            <a:ext cx="2743200" cy="658368"/>
+            <a:off x="9136228" y="2359152"/>
+            <a:ext cx="2214220" cy="566928"/>
           </a:xfrm>
           <a:prstGeom prst="roundRect">
             <a:avLst>
-              <a:gd name="adj" fmla="val 9722"/>
+              <a:gd name="adj" fmla="val 8065"/>
+            </a:avLst>
+          </a:prstGeom>
+          <a:solidFill>
+            <a:srgbClr val="FFFFFF"/>
+          </a:solidFill>
+          <a:ln w="12700">
+            <a:solidFill>
+              <a:srgbClr val="E0A83C"/>
+            </a:solidFill>
+            <a:prstDash val="solid"/>
+          </a:ln>
+        </p:spPr>
+      </p:sp>
+      <p:sp>
+        <p:nvSpPr>
+          <p:cNvPr id="18" name="Text 16"/>
+          <p:cNvSpPr txBox="1"/>
+          <p:nvPr/>
+        </p:nvSpPr>
+        <p:spPr>
+          <a:xfrm>
+            <a:off x="9282532" y="2414016"/>
+            <a:ext cx="1921612" cy="256032"/>
+          </a:xfrm>
+          <a:prstGeom prst="rect">
+            <a:avLst/>
+          </a:prstGeom>
+          <a:noFill/>
+          <a:ln/>
+        </p:spPr>
+        <p:txBody>
+          <a:bodyPr wrap="square" lIns="0" tIns="0" rIns="0" bIns="0" rtlCol="0" anchor="ctr"/>
+          <a:lstStyle/>
+          <a:p>
+            <a:pPr indent="0" marL="0">
+              <a:buNone/>
+            </a:pPr>
+            <a:r>
+              <a:rPr lang="en-US" sz="1400" b="1" dirty="0">
+                <a:solidFill>
+                  <a:srgbClr val="0F2F6F"/>
+                </a:solidFill>
+                <a:latin typeface="Malgun Gothic" pitchFamily="34" charset="0"/>
+                <a:ea typeface="Malgun Gothic" pitchFamily="34" charset="-122"/>
+                <a:cs typeface="Malgun Gothic" pitchFamily="34" charset="-120"/>
+              </a:rPr>
+              <a:t>CSV</a:t>
+            </a:r>
+            <a:endParaRPr lang="en-US" sz="1400" dirty="0"/>
+          </a:p>
+        </p:txBody>
+      </p:sp>
+      <p:sp>
+        <p:nvSpPr>
+          <p:cNvPr id="19" name="Text 17"/>
+          <p:cNvSpPr txBox="1"/>
+          <p:nvPr/>
+        </p:nvSpPr>
+        <p:spPr>
+          <a:xfrm>
+            <a:off x="9282532" y="2660904"/>
+            <a:ext cx="1921612" cy="219456"/>
+          </a:xfrm>
+          <a:prstGeom prst="rect">
+            <a:avLst/>
+          </a:prstGeom>
+          <a:noFill/>
+          <a:ln/>
+        </p:spPr>
+        <p:txBody>
+          <a:bodyPr wrap="square" lIns="0" tIns="0" rIns="0" bIns="0" rtlCol="0" anchor="ctr"/>
+          <a:lstStyle/>
+          <a:p>
+            <a:pPr indent="0" marL="0">
+              <a:buNone/>
+            </a:pPr>
+            <a:r>
+              <a:rPr lang="en-US" sz="1050" dirty="0">
+                <a:solidFill>
+                  <a:srgbClr val="5B6673"/>
+                </a:solidFill>
+                <a:latin typeface="Malgun Gothic" pitchFamily="34" charset="0"/>
+                <a:ea typeface="Malgun Gothic" pitchFamily="34" charset="-122"/>
+                <a:cs typeface="Malgun Gothic" pitchFamily="34" charset="-120"/>
+              </a:rPr>
+              <a:t>돌봄 · 식사배달 현황</a:t>
+            </a:r>
+            <a:endParaRPr lang="en-US" sz="1050" dirty="0"/>
+          </a:p>
+        </p:txBody>
+      </p:sp>
+      <p:sp>
+        <p:nvSpPr>
+          <p:cNvPr id="20" name="Shape 18"/>
+          <p:cNvSpPr/>
+          <p:nvPr/>
+        </p:nvSpPr>
+        <p:spPr>
+          <a:xfrm>
+            <a:off x="6739128" y="3054096"/>
+            <a:ext cx="2214220" cy="566928"/>
+          </a:xfrm>
+          <a:prstGeom prst="roundRect">
+            <a:avLst>
+              <a:gd name="adj" fmla="val 8065"/>
+            </a:avLst>
+          </a:prstGeom>
+          <a:solidFill>
+            <a:srgbClr val="FFFFFF"/>
+          </a:solidFill>
+          <a:ln w="12700">
+            <a:solidFill>
+              <a:srgbClr val="E0A83C"/>
+            </a:solidFill>
+            <a:prstDash val="solid"/>
+          </a:ln>
+        </p:spPr>
+      </p:sp>
+      <p:sp>
+        <p:nvSpPr>
+          <p:cNvPr id="21" name="Text 19"/>
+          <p:cNvSpPr txBox="1"/>
+          <p:nvPr/>
+        </p:nvSpPr>
+        <p:spPr>
+          <a:xfrm>
+            <a:off x="6885432" y="3108960"/>
+            <a:ext cx="1921612" cy="256032"/>
+          </a:xfrm>
+          <a:prstGeom prst="rect">
+            <a:avLst/>
+          </a:prstGeom>
+          <a:noFill/>
+          <a:ln/>
+        </p:spPr>
+        <p:txBody>
+          <a:bodyPr wrap="square" lIns="0" tIns="0" rIns="0" bIns="0" rtlCol="0" anchor="ctr"/>
+          <a:lstStyle/>
+          <a:p>
+            <a:pPr indent="0" marL="0">
+              <a:buNone/>
+            </a:pPr>
+            <a:r>
+              <a:rPr lang="en-US" sz="1400" b="1" dirty="0">
+                <a:solidFill>
+                  <a:srgbClr val="0F2F6F"/>
+                </a:solidFill>
+                <a:latin typeface="Malgun Gothic" pitchFamily="34" charset="0"/>
+                <a:ea typeface="Malgun Gothic" pitchFamily="34" charset="-122"/>
+                <a:cs typeface="Malgun Gothic" pitchFamily="34" charset="-120"/>
+              </a:rPr>
+              <a:t>XLS / XLSX</a:t>
+            </a:r>
+            <a:endParaRPr lang="en-US" sz="1400" dirty="0"/>
+          </a:p>
+        </p:txBody>
+      </p:sp>
+      <p:sp>
+        <p:nvSpPr>
+          <p:cNvPr id="22" name="Text 20"/>
+          <p:cNvSpPr txBox="1"/>
+          <p:nvPr/>
+        </p:nvSpPr>
+        <p:spPr>
+          <a:xfrm>
+            <a:off x="6885432" y="3355848"/>
+            <a:ext cx="1921612" cy="219456"/>
+          </a:xfrm>
+          <a:prstGeom prst="rect">
+            <a:avLst/>
+          </a:prstGeom>
+          <a:noFill/>
+          <a:ln/>
+        </p:spPr>
+        <p:txBody>
+          <a:bodyPr wrap="square" lIns="0" tIns="0" rIns="0" bIns="0" rtlCol="0" anchor="ctr"/>
+          <a:lstStyle/>
+          <a:p>
+            <a:pPr indent="0" marL="0">
+              <a:buNone/>
+            </a:pPr>
+            <a:r>
+              <a:rPr lang="en-US" sz="1050" dirty="0">
+                <a:solidFill>
+                  <a:srgbClr val="5B6673"/>
+                </a:solidFill>
+                <a:latin typeface="Malgun Gothic" pitchFamily="34" charset="0"/>
+                <a:ea typeface="Malgun Gothic" pitchFamily="34" charset="-122"/>
+                <a:cs typeface="Malgun Gothic" pitchFamily="34" charset="-120"/>
+              </a:rPr>
+              <a:t>구별 시설 현황</a:t>
+            </a:r>
+            <a:endParaRPr lang="en-US" sz="1050" dirty="0"/>
+          </a:p>
+        </p:txBody>
+      </p:sp>
+      <p:sp>
+        <p:nvSpPr>
+          <p:cNvPr id="23" name="Shape 21"/>
+          <p:cNvSpPr/>
+          <p:nvPr/>
+        </p:nvSpPr>
+        <p:spPr>
+          <a:xfrm>
+            <a:off x="9136228" y="3054096"/>
+            <a:ext cx="2214220" cy="566928"/>
+          </a:xfrm>
+          <a:prstGeom prst="roundRect">
+            <a:avLst>
+              <a:gd name="adj" fmla="val 8065"/>
+            </a:avLst>
+          </a:prstGeom>
+          <a:solidFill>
+            <a:srgbClr val="FFFFFF"/>
+          </a:solidFill>
+          <a:ln w="12700">
+            <a:solidFill>
+              <a:srgbClr val="E0A83C"/>
+            </a:solidFill>
+            <a:prstDash val="solid"/>
+          </a:ln>
+        </p:spPr>
+      </p:sp>
+      <p:sp>
+        <p:nvSpPr>
+          <p:cNvPr id="24" name="Text 22"/>
+          <p:cNvSpPr txBox="1"/>
+          <p:nvPr/>
+        </p:nvSpPr>
+        <p:spPr>
+          <a:xfrm>
+            <a:off x="9282532" y="3108960"/>
+            <a:ext cx="1921612" cy="256032"/>
+          </a:xfrm>
+          <a:prstGeom prst="rect">
+            <a:avLst/>
+          </a:prstGeom>
+          <a:noFill/>
+          <a:ln/>
+        </p:spPr>
+        <p:txBody>
+          <a:bodyPr wrap="square" lIns="0" tIns="0" rIns="0" bIns="0" rtlCol="0" anchor="ctr"/>
+          <a:lstStyle/>
+          <a:p>
+            <a:pPr indent="0" marL="0">
+              <a:buNone/>
+            </a:pPr>
+            <a:r>
+              <a:rPr lang="en-US" sz="1400" b="1" dirty="0">
+                <a:solidFill>
+                  <a:srgbClr val="0F2F6F"/>
+                </a:solidFill>
+                <a:latin typeface="Malgun Gothic" pitchFamily="34" charset="0"/>
+                <a:ea typeface="Malgun Gothic" pitchFamily="34" charset="-122"/>
+                <a:cs typeface="Malgun Gothic" pitchFamily="34" charset="-120"/>
+              </a:rPr>
+              <a:t>MD / TXT</a:t>
+            </a:r>
+            <a:endParaRPr lang="en-US" sz="1400" dirty="0"/>
+          </a:p>
+        </p:txBody>
+      </p:sp>
+      <p:sp>
+        <p:nvSpPr>
+          <p:cNvPr id="25" name="Text 23"/>
+          <p:cNvSpPr txBox="1"/>
+          <p:nvPr/>
+        </p:nvSpPr>
+        <p:spPr>
+          <a:xfrm>
+            <a:off x="9282532" y="3355848"/>
+            <a:ext cx="1921612" cy="219456"/>
+          </a:xfrm>
+          <a:prstGeom prst="rect">
+            <a:avLst/>
+          </a:prstGeom>
+          <a:noFill/>
+          <a:ln/>
+        </p:spPr>
+        <p:txBody>
+          <a:bodyPr wrap="square" lIns="0" tIns="0" rIns="0" bIns="0" rtlCol="0" anchor="ctr"/>
+          <a:lstStyle/>
+          <a:p>
+            <a:pPr indent="0" marL="0">
+              <a:buNone/>
+            </a:pPr>
+            <a:r>
+              <a:rPr lang="en-US" sz="1050" dirty="0">
+                <a:solidFill>
+                  <a:srgbClr val="5B6673"/>
+                </a:solidFill>
+                <a:latin typeface="Malgun Gothic" pitchFamily="34" charset="0"/>
+                <a:ea typeface="Malgun Gothic" pitchFamily="34" charset="-122"/>
+                <a:cs typeface="Malgun Gothic" pitchFamily="34" charset="-120"/>
+              </a:rPr>
+              <a:t>요약 문서</a:t>
+            </a:r>
+            <a:endParaRPr lang="en-US" sz="1050" dirty="0"/>
+          </a:p>
+        </p:txBody>
+      </p:sp>
+      <p:sp>
+        <p:nvSpPr>
+          <p:cNvPr id="26" name="Text 24"/>
+          <p:cNvSpPr txBox="1"/>
+          <p:nvPr/>
+        </p:nvSpPr>
+        <p:spPr>
+          <a:xfrm>
+            <a:off x="6739128" y="3383280"/>
+            <a:ext cx="4611319" cy="274320"/>
+          </a:xfrm>
+          <a:prstGeom prst="rect">
+            <a:avLst/>
+          </a:prstGeom>
+          <a:noFill/>
+          <a:ln/>
+        </p:spPr>
+        <p:txBody>
+          <a:bodyPr wrap="square" lIns="0" tIns="0" rIns="0" bIns="0" rtlCol="0" anchor="ctr"/>
+          <a:lstStyle/>
+          <a:p>
+            <a:pPr indent="0" marL="0">
+              <a:buNone/>
+            </a:pPr>
+            <a:r>
+              <a:rPr lang="en-US" sz="1050" i="1" dirty="0">
+                <a:solidFill>
+                  <a:srgbClr val="8A94A6"/>
+                </a:solidFill>
+                <a:latin typeface="Malgun Gothic" pitchFamily="34" charset="0"/>
+                <a:ea typeface="Malgun Gothic" pitchFamily="34" charset="-122"/>
+                <a:cs typeface="Malgun Gothic" pitchFamily="34" charset="-120"/>
+              </a:rPr>
+              <a:t>※ HWP(한글 문서)는 현재 PDF로 대체 · 향후 지원 예정</a:t>
+            </a:r>
+            <a:endParaRPr lang="en-US" sz="1050" dirty="0"/>
+          </a:p>
+        </p:txBody>
+      </p:sp>
+      <p:sp>
+        <p:nvSpPr>
+          <p:cNvPr id="27" name="Shape 25"/>
+          <p:cNvSpPr/>
+          <p:nvPr/>
+        </p:nvSpPr>
+        <p:spPr>
+          <a:xfrm>
+            <a:off x="566928" y="4069080"/>
+            <a:ext cx="457200" cy="457200"/>
+          </a:xfrm>
+          <a:prstGeom prst="ellipse">
+            <a:avLst/>
+          </a:prstGeom>
+          <a:solidFill>
+            <a:srgbClr val="0F2F6F"/>
+          </a:solidFill>
+          <a:ln/>
+        </p:spPr>
+      </p:sp>
+      <p:sp>
+        <p:nvSpPr>
+          <p:cNvPr id="28" name="Text 26"/>
+          <p:cNvSpPr txBox="1"/>
+          <p:nvPr/>
+        </p:nvSpPr>
+        <p:spPr>
+          <a:xfrm>
+            <a:off x="566928" y="4069080"/>
+            <a:ext cx="457200" cy="457200"/>
+          </a:xfrm>
+          <a:prstGeom prst="rect">
+            <a:avLst/>
+          </a:prstGeom>
+          <a:noFill/>
+          <a:ln/>
+        </p:spPr>
+        <p:txBody>
+          <a:bodyPr wrap="square" lIns="0" tIns="0" rIns="0" bIns="0" rtlCol="0" anchor="ctr"/>
+          <a:lstStyle/>
+          <a:p>
+            <a:pPr algn="ctr" indent="0" marL="0">
+              <a:buNone/>
+            </a:pPr>
+            <a:r>
+              <a:rPr lang="en-US" sz="1500" b="1" dirty="0">
+                <a:solidFill>
+                  <a:srgbClr val="FFFFFF"/>
+                </a:solidFill>
+                <a:latin typeface="Malgun Gothic" pitchFamily="34" charset="0"/>
+                <a:ea typeface="Malgun Gothic" pitchFamily="34" charset="-122"/>
+                <a:cs typeface="Malgun Gothic" pitchFamily="34" charset="-120"/>
+              </a:rPr>
+              <a:t>3</a:t>
+            </a:r>
+            <a:endParaRPr lang="en-US" sz="1500" dirty="0"/>
+          </a:p>
+        </p:txBody>
+      </p:sp>
+      <p:sp>
+        <p:nvSpPr>
+          <p:cNvPr id="29" name="Text 27"/>
+          <p:cNvSpPr txBox="1"/>
+          <p:nvPr/>
+        </p:nvSpPr>
+        <p:spPr>
+          <a:xfrm>
+            <a:off x="1143000" y="4069080"/>
+            <a:ext cx="6400800" cy="457200"/>
+          </a:xfrm>
+          <a:prstGeom prst="rect">
+            <a:avLst/>
+          </a:prstGeom>
+          <a:noFill/>
+          <a:ln/>
+        </p:spPr>
+        <p:txBody>
+          <a:bodyPr wrap="square" lIns="0" tIns="0" rIns="0" bIns="0" rtlCol="0" anchor="ctr"/>
+          <a:lstStyle/>
+          <a:p>
+            <a:pPr indent="0" marL="0">
+              <a:buNone/>
+            </a:pPr>
+            <a:r>
+              <a:rPr lang="en-US" sz="1800" b="1" dirty="0">
+                <a:solidFill>
+                  <a:srgbClr val="0F2F6F"/>
+                </a:solidFill>
+                <a:latin typeface="Malgun Gothic" pitchFamily="34" charset="0"/>
+                <a:ea typeface="Malgun Gothic" pitchFamily="34" charset="-122"/>
+                <a:cs typeface="Malgun Gothic" pitchFamily="34" charset="-120"/>
+              </a:rPr>
+              <a:t>데이터 처리 파이프라인</a:t>
+            </a:r>
+            <a:endParaRPr lang="en-US" sz="1800" dirty="0"/>
+          </a:p>
+        </p:txBody>
+      </p:sp>
+      <p:sp>
+        <p:nvSpPr>
+          <p:cNvPr id="30" name="Shape 28"/>
+          <p:cNvSpPr/>
+          <p:nvPr/>
+        </p:nvSpPr>
+        <p:spPr>
+          <a:xfrm>
+            <a:off x="548640" y="4736592"/>
+            <a:ext cx="1487363" cy="914400"/>
+          </a:xfrm>
+          <a:prstGeom prst="roundRect">
+            <a:avLst>
+              <a:gd name="adj" fmla="val 7000"/>
             </a:avLst>
           </a:prstGeom>
           <a:solidFill>
@@ -5810,14 +8224,14 @@
       </p:sp>
       <p:sp>
         <p:nvSpPr>
-          <p:cNvPr id="11" name="Text 9"/>
-          <p:cNvSpPr txBox="1"/>
-          <p:nvPr/>
-        </p:nvSpPr>
-        <p:spPr>
-          <a:xfrm>
-            <a:off x="6126480" y="1600200"/>
-            <a:ext cx="2560320" cy="658368"/>
+          <p:cNvPr id="31" name="Text 29"/>
+          <p:cNvSpPr txBox="1"/>
+          <p:nvPr/>
+        </p:nvSpPr>
+        <p:spPr>
+          <a:xfrm>
+            <a:off x="603504" y="4882896"/>
+            <a:ext cx="1377635" cy="320040"/>
           </a:xfrm>
           <a:prstGeom prst="rect">
             <a:avLst/>
@@ -5833,24 +8247,46 @@
               <a:buNone/>
             </a:pPr>
             <a:r>
-              <a:rPr lang="en-US" sz="1350" b="1" dirty="0">
-                <a:solidFill>
-                  <a:srgbClr val="1F2933"/>
-                </a:solidFill>
-                <a:latin typeface="Malgun Gothic" pitchFamily="34" charset="0"/>
-                <a:ea typeface="Malgun Gothic" pitchFamily="34" charset="-122"/>
-                <a:cs typeface="Malgun Gothic" pitchFamily="34" charset="-120"/>
-              </a:rPr>
-              <a:t>의도 라우팅</a:t>
-            </a:r>
-            <a:endParaRPr lang="en-US" sz="1350" dirty="0"/>
-          </a:p>
+              <a:rPr lang="en-US" sz="1300" b="1" dirty="0">
+                <a:solidFill>
+                  <a:srgbClr val="0F2F6F"/>
+                </a:solidFill>
+                <a:latin typeface="Malgun Gothic" pitchFamily="34" charset="0"/>
+                <a:ea typeface="Malgun Gothic" pitchFamily="34" charset="-122"/>
+                <a:cs typeface="Malgun Gothic" pitchFamily="34" charset="-120"/>
+              </a:rPr>
+              <a:t>정제</a:t>
+            </a:r>
+            <a:endParaRPr lang="en-US" sz="1300" dirty="0"/>
+          </a:p>
+        </p:txBody>
+      </p:sp>
+      <p:sp>
+        <p:nvSpPr>
+          <p:cNvPr id="32" name="Text 30"/>
+          <p:cNvSpPr txBox="1"/>
+          <p:nvPr/>
+        </p:nvSpPr>
+        <p:spPr>
+          <a:xfrm>
+            <a:off x="603504" y="5212080"/>
+            <a:ext cx="1377635" cy="365760"/>
+          </a:xfrm>
+          <a:prstGeom prst="rect">
+            <a:avLst/>
+          </a:prstGeom>
+          <a:noFill/>
+          <a:ln/>
+        </p:spPr>
+        <p:txBody>
+          <a:bodyPr wrap="square" lIns="0" tIns="0" rIns="0" bIns="0" rtlCol="0" anchor="ctr"/>
+          <a:lstStyle/>
           <a:p>
             <a:pPr algn="ctr" indent="0" marL="0">
               <a:buNone/>
             </a:pPr>
             <a:r>
-              <a:rPr lang="en-US" sz="1050" dirty="0">
+              <a:rPr lang="en-US" sz="900" dirty="0">
                 <a:solidFill>
                   <a:srgbClr val="5B6673"/>
                 </a:solidFill>
@@ -5858,22 +8294,22 @@
                 <a:ea typeface="Malgun Gothic" pitchFamily="34" charset="-122"/>
                 <a:cs typeface="Malgun Gothic" pitchFamily="34" charset="-120"/>
               </a:rPr>
-              <a:t>인사·잡담 vs 복지 질문</a:t>
-            </a:r>
-            <a:endParaRPr lang="en-US" sz="1350" dirty="0"/>
-          </a:p>
-        </p:txBody>
-      </p:sp>
-      <p:sp>
-        <p:nvSpPr>
-          <p:cNvPr id="12" name="Shape 10"/>
+              <a:t>머리말·쪽번호 제거</a:t>
+            </a:r>
+            <a:endParaRPr lang="en-US" sz="900" dirty="0"/>
+          </a:p>
+        </p:txBody>
+      </p:sp>
+      <p:sp>
+        <p:nvSpPr>
+          <p:cNvPr id="33" name="Shape 31"/>
           <p:cNvSpPr/>
           <p:nvPr/>
         </p:nvSpPr>
         <p:spPr>
           <a:xfrm>
-            <a:off x="2377440" y="2258568"/>
-            <a:ext cx="0" cy="530352"/>
+            <a:off x="2036003" y="5193792"/>
+            <a:ext cx="310896" cy="0"/>
           </a:xfrm>
           <a:prstGeom prst="line">
             <a:avLst/>
@@ -5890,14 +8326,119 @@
       </p:sp>
       <p:sp>
         <p:nvSpPr>
-          <p:cNvPr id="13" name="Shape 11"/>
+          <p:cNvPr id="34" name="Shape 32"/>
           <p:cNvSpPr/>
           <p:nvPr/>
         </p:nvSpPr>
         <p:spPr>
           <a:xfrm>
-            <a:off x="9707728" y="2258568"/>
-            <a:ext cx="0" cy="530352"/>
+            <a:off x="2346899" y="4736592"/>
+            <a:ext cx="1487363" cy="914400"/>
+          </a:xfrm>
+          <a:prstGeom prst="roundRect">
+            <a:avLst>
+              <a:gd name="adj" fmla="val 7000"/>
+            </a:avLst>
+          </a:prstGeom>
+          <a:solidFill>
+            <a:srgbClr val="EAF0FA"/>
+          </a:solidFill>
+          <a:ln w="12700">
+            <a:solidFill>
+              <a:srgbClr val="D8E0EC"/>
+            </a:solidFill>
+            <a:prstDash val="solid"/>
+          </a:ln>
+        </p:spPr>
+      </p:sp>
+      <p:sp>
+        <p:nvSpPr>
+          <p:cNvPr id="35" name="Text 33"/>
+          <p:cNvSpPr txBox="1"/>
+          <p:nvPr/>
+        </p:nvSpPr>
+        <p:spPr>
+          <a:xfrm>
+            <a:off x="2401763" y="4882896"/>
+            <a:ext cx="1377635" cy="320040"/>
+          </a:xfrm>
+          <a:prstGeom prst="rect">
+            <a:avLst/>
+          </a:prstGeom>
+          <a:noFill/>
+          <a:ln/>
+        </p:spPr>
+        <p:txBody>
+          <a:bodyPr wrap="square" lIns="0" tIns="0" rIns="0" bIns="0" rtlCol="0" anchor="ctr"/>
+          <a:lstStyle/>
+          <a:p>
+            <a:pPr algn="ctr" indent="0" marL="0">
+              <a:buNone/>
+            </a:pPr>
+            <a:r>
+              <a:rPr lang="en-US" sz="1300" b="1" dirty="0">
+                <a:solidFill>
+                  <a:srgbClr val="0F2F6F"/>
+                </a:solidFill>
+                <a:latin typeface="Malgun Gothic" pitchFamily="34" charset="0"/>
+                <a:ea typeface="Malgun Gothic" pitchFamily="34" charset="-122"/>
+                <a:cs typeface="Malgun Gothic" pitchFamily="34" charset="-120"/>
+              </a:rPr>
+              <a:t>표 구조화</a:t>
+            </a:r>
+            <a:endParaRPr lang="en-US" sz="1300" dirty="0"/>
+          </a:p>
+        </p:txBody>
+      </p:sp>
+      <p:sp>
+        <p:nvSpPr>
+          <p:cNvPr id="36" name="Text 34"/>
+          <p:cNvSpPr txBox="1"/>
+          <p:nvPr/>
+        </p:nvSpPr>
+        <p:spPr>
+          <a:xfrm>
+            <a:off x="2401763" y="5212080"/>
+            <a:ext cx="1377635" cy="365760"/>
+          </a:xfrm>
+          <a:prstGeom prst="rect">
+            <a:avLst/>
+          </a:prstGeom>
+          <a:noFill/>
+          <a:ln/>
+        </p:spPr>
+        <p:txBody>
+          <a:bodyPr wrap="square" lIns="0" tIns="0" rIns="0" bIns="0" rtlCol="0" anchor="ctr"/>
+          <a:lstStyle/>
+          <a:p>
+            <a:pPr algn="ctr" indent="0" marL="0">
+              <a:buNone/>
+            </a:pPr>
+            <a:r>
+              <a:rPr lang="en-US" sz="900" dirty="0">
+                <a:solidFill>
+                  <a:srgbClr val="5B6673"/>
+                </a:solidFill>
+                <a:latin typeface="Malgun Gothic" pitchFamily="34" charset="0"/>
+                <a:ea typeface="Malgun Gothic" pitchFamily="34" charset="-122"/>
+                <a:cs typeface="Malgun Gothic" pitchFamily="34" charset="-120"/>
+              </a:rPr>
+              <a:t>헤더 인식 → 컬럼:값</a:t>
+            </a:r>
+            <a:endParaRPr lang="en-US" sz="900" dirty="0"/>
+          </a:p>
+        </p:txBody>
+      </p:sp>
+      <p:sp>
+        <p:nvSpPr>
+          <p:cNvPr id="37" name="Shape 35"/>
+          <p:cNvSpPr/>
+          <p:nvPr/>
+        </p:nvSpPr>
+        <p:spPr>
+          <a:xfrm>
+            <a:off x="3834262" y="5193792"/>
+            <a:ext cx="310896" cy="0"/>
           </a:xfrm>
           <a:prstGeom prst="line">
             <a:avLst/>
@@ -5914,26 +8455,26 @@
       </p:sp>
       <p:sp>
         <p:nvSpPr>
-          <p:cNvPr id="14" name="Shape 12"/>
+          <p:cNvPr id="38" name="Shape 36"/>
           <p:cNvSpPr/>
           <p:nvPr/>
         </p:nvSpPr>
         <p:spPr>
           <a:xfrm>
-            <a:off x="548640" y="2788920"/>
-            <a:ext cx="6766560" cy="1874520"/>
+            <a:off x="4145158" y="4736592"/>
+            <a:ext cx="1487363" cy="914400"/>
           </a:xfrm>
           <a:prstGeom prst="roundRect">
             <a:avLst>
-              <a:gd name="adj" fmla="val 3902"/>
+              <a:gd name="adj" fmla="val 7000"/>
             </a:avLst>
           </a:prstGeom>
           <a:solidFill>
-            <a:srgbClr val="EAF0FA"/>
+            <a:srgbClr val="F4F7FC"/>
           </a:solidFill>
-          <a:ln w="15240">
+          <a:ln w="12700">
             <a:solidFill>
-              <a:srgbClr val="0F2F6F"/>
+              <a:srgbClr val="D8E0EC"/>
             </a:solidFill>
             <a:prstDash val="solid"/>
           </a:ln>
@@ -5941,30 +8482,30 @@
       </p:sp>
       <p:sp>
         <p:nvSpPr>
-          <p:cNvPr id="15" name="Text 13"/>
-          <p:cNvSpPr txBox="1"/>
-          <p:nvPr/>
-        </p:nvSpPr>
-        <p:spPr>
-          <a:xfrm>
-            <a:off x="777240" y="2898648"/>
-            <a:ext cx="6309360" cy="320040"/>
-          </a:xfrm>
-          <a:prstGeom prst="rect">
-            <a:avLst/>
-          </a:prstGeom>
-          <a:noFill/>
-          <a:ln/>
-        </p:spPr>
-        <p:txBody>
-          <a:bodyPr wrap="square" lIns="0" tIns="0" rIns="0" bIns="0" rtlCol="0" anchor="ctr"/>
-          <a:lstStyle/>
-          <a:p>
-            <a:pPr indent="0" marL="0">
-              <a:buNone/>
-            </a:pPr>
-            <a:r>
-              <a:rPr lang="en-US" sz="1500" b="1" dirty="0">
+          <p:cNvPr id="39" name="Text 37"/>
+          <p:cNvSpPr txBox="1"/>
+          <p:nvPr/>
+        </p:nvSpPr>
+        <p:spPr>
+          <a:xfrm>
+            <a:off x="4200022" y="4882896"/>
+            <a:ext cx="1377635" cy="320040"/>
+          </a:xfrm>
+          <a:prstGeom prst="rect">
+            <a:avLst/>
+          </a:prstGeom>
+          <a:noFill/>
+          <a:ln/>
+        </p:spPr>
+        <p:txBody>
+          <a:bodyPr wrap="square" lIns="0" tIns="0" rIns="0" bIns="0" rtlCol="0" anchor="ctr"/>
+          <a:lstStyle/>
+          <a:p>
+            <a:pPr algn="ctr" indent="0" marL="0">
+              <a:buNone/>
+            </a:pPr>
+            <a:r>
+              <a:rPr lang="en-US" sz="1300" b="1" dirty="0">
                 <a:solidFill>
                   <a:srgbClr val="0F2F6F"/>
                 </a:solidFill>
@@ -5972,258 +8513,61 @@
                 <a:ea typeface="Malgun Gothic" pitchFamily="34" charset="-122"/>
                 <a:cs typeface="Malgun Gothic" pitchFamily="34" charset="-120"/>
               </a:rPr>
-              <a:t>Layer 1 · 복지 안내 (RAG)</a:t>
-            </a:r>
-            <a:endParaRPr lang="en-US" sz="1500" dirty="0"/>
-          </a:p>
-        </p:txBody>
-      </p:sp>
-      <p:sp>
-        <p:nvSpPr>
-          <p:cNvPr id="16" name="Text 14"/>
-          <p:cNvSpPr txBox="1"/>
-          <p:nvPr/>
-        </p:nvSpPr>
-        <p:spPr>
-          <a:xfrm>
-            <a:off x="822960" y="3246120"/>
-            <a:ext cx="6217920" cy="1371600"/>
-          </a:xfrm>
-          <a:prstGeom prst="rect">
-            <a:avLst/>
-          </a:prstGeom>
-          <a:noFill/>
-          <a:ln/>
-        </p:spPr>
-        <p:txBody>
-          <a:bodyPr wrap="square" rtlCol="0" anchor="t"/>
-          <a:lstStyle/>
-          <a:p>
-            <a:pPr marL="342900" indent="-342900">
-              <a:spcAft>
-                <a:spcPts val="600"/>
-              </a:spcAft>
-              <a:buSzPct val="100000"/>
-              <a:buChar char="•"/>
-            </a:pPr>
-            <a:r>
-              <a:rPr lang="en-US" sz="1250" dirty="0">
-                <a:solidFill>
-                  <a:srgbClr val="1F2933"/>
-                </a:solidFill>
-                <a:latin typeface="Malgun Gothic" pitchFamily="34" charset="0"/>
-                <a:ea typeface="Malgun Gothic" pitchFamily="34" charset="-122"/>
-                <a:cs typeface="Malgun Gothic" pitchFamily="34" charset="-120"/>
-              </a:rPr>
-              <a:t>정제 → 섹션 청킹 → bge-m3 임베딩</a:t>
-            </a:r>
-            <a:endParaRPr lang="en-US" sz="1250" dirty="0"/>
-          </a:p>
-          <a:p>
-            <a:pPr marL="342900" indent="-342900">
-              <a:spcAft>
-                <a:spcPts val="600"/>
-              </a:spcAft>
-              <a:buSzPct val="100000"/>
-              <a:buChar char="•"/>
-            </a:pPr>
-            <a:r>
-              <a:rPr lang="en-US" sz="1250" dirty="0">
-                <a:solidFill>
-                  <a:srgbClr val="1F2933"/>
-                </a:solidFill>
-                <a:latin typeface="Malgun Gothic" pitchFamily="34" charset="0"/>
-                <a:ea typeface="Malgun Gothic" pitchFamily="34" charset="-122"/>
-                <a:cs typeface="Malgun Gothic" pitchFamily="34" charset="-120"/>
-              </a:rPr>
-              <a:t>ChromaDB 후보 10 → cross-encoder 재랭킹</a:t>
-            </a:r>
-            <a:endParaRPr lang="en-US" sz="1250" dirty="0"/>
-          </a:p>
-          <a:p>
-            <a:pPr marL="342900" indent="-342900">
-              <a:spcAft>
-                <a:spcPts val="600"/>
-              </a:spcAft>
-              <a:buSzPct val="100000"/>
-              <a:buChar char="•"/>
-            </a:pPr>
-            <a:r>
-              <a:rPr lang="en-US" sz="1250" dirty="0">
-                <a:solidFill>
-                  <a:srgbClr val="1F2933"/>
-                </a:solidFill>
-                <a:latin typeface="Malgun Gothic" pitchFamily="34" charset="0"/>
-                <a:ea typeface="Malgun Gothic" pitchFamily="34" charset="-122"/>
-                <a:cs typeface="Malgun Gothic" pitchFamily="34" charset="-120"/>
-              </a:rPr>
-              <a:t>관련성 게이트 → 상위 3개 근거 선택</a:t>
-            </a:r>
-            <a:endParaRPr lang="en-US" sz="1250" dirty="0"/>
-          </a:p>
-        </p:txBody>
-      </p:sp>
-      <p:sp>
-        <p:nvSpPr>
-          <p:cNvPr id="17" name="Shape 15"/>
+              <a:t>섹션 청킹</a:t>
+            </a:r>
+            <a:endParaRPr lang="en-US" sz="1300" dirty="0"/>
+          </a:p>
+        </p:txBody>
+      </p:sp>
+      <p:sp>
+        <p:nvSpPr>
+          <p:cNvPr id="40" name="Text 38"/>
+          <p:cNvSpPr txBox="1"/>
+          <p:nvPr/>
+        </p:nvSpPr>
+        <p:spPr>
+          <a:xfrm>
+            <a:off x="4200022" y="5212080"/>
+            <a:ext cx="1377635" cy="365760"/>
+          </a:xfrm>
+          <a:prstGeom prst="rect">
+            <a:avLst/>
+          </a:prstGeom>
+          <a:noFill/>
+          <a:ln/>
+        </p:spPr>
+        <p:txBody>
+          <a:bodyPr wrap="square" lIns="0" tIns="0" rIns="0" bIns="0" rtlCol="0" anchor="ctr"/>
+          <a:lstStyle/>
+          <a:p>
+            <a:pPr algn="ctr" indent="0" marL="0">
+              <a:buNone/>
+            </a:pPr>
+            <a:r>
+              <a:rPr lang="en-US" sz="900" dirty="0">
+                <a:solidFill>
+                  <a:srgbClr val="5B6673"/>
+                </a:solidFill>
+                <a:latin typeface="Malgun Gothic" pitchFamily="34" charset="0"/>
+                <a:ea typeface="Malgun Gothic" pitchFamily="34" charset="-122"/>
+                <a:cs typeface="Malgun Gothic" pitchFamily="34" charset="-120"/>
+              </a:rPr>
+              <a:t>복지 항목 단위</a:t>
+            </a:r>
+            <a:endParaRPr lang="en-US" sz="900" dirty="0"/>
+          </a:p>
+        </p:txBody>
+      </p:sp>
+      <p:sp>
+        <p:nvSpPr>
+          <p:cNvPr id="41" name="Shape 39"/>
           <p:cNvSpPr/>
           <p:nvPr/>
         </p:nvSpPr>
         <p:spPr>
           <a:xfrm>
-            <a:off x="7772400" y="2788920"/>
-            <a:ext cx="3870655" cy="1874520"/>
-          </a:xfrm>
-          <a:prstGeom prst="roundRect">
-            <a:avLst>
-              <a:gd name="adj" fmla="val 3902"/>
-            </a:avLst>
-          </a:prstGeom>
-          <a:solidFill>
-            <a:srgbClr val="FBF3E3"/>
-          </a:solidFill>
-          <a:ln w="15240">
-            <a:solidFill>
-              <a:srgbClr val="E0A83C"/>
-            </a:solidFill>
-            <a:prstDash val="solid"/>
-          </a:ln>
-        </p:spPr>
-      </p:sp>
-      <p:sp>
-        <p:nvSpPr>
-          <p:cNvPr id="18" name="Text 16"/>
-          <p:cNvSpPr txBox="1"/>
-          <p:nvPr/>
-        </p:nvSpPr>
-        <p:spPr>
-          <a:xfrm>
-            <a:off x="8001000" y="2898648"/>
-            <a:ext cx="3413455" cy="320040"/>
-          </a:xfrm>
-          <a:prstGeom prst="rect">
-            <a:avLst/>
-          </a:prstGeom>
-          <a:noFill/>
-          <a:ln/>
-        </p:spPr>
-        <p:txBody>
-          <a:bodyPr wrap="square" lIns="0" tIns="0" rIns="0" bIns="0" rtlCol="0" anchor="ctr"/>
-          <a:lstStyle/>
-          <a:p>
-            <a:pPr indent="0" marL="0">
-              <a:buNone/>
-            </a:pPr>
-            <a:r>
-              <a:rPr lang="en-US" sz="1500" b="1" dirty="0">
-                <a:solidFill>
-                  <a:srgbClr val="B8862B"/>
-                </a:solidFill>
-                <a:latin typeface="Malgun Gothic" pitchFamily="34" charset="0"/>
-                <a:ea typeface="Malgun Gothic" pitchFamily="34" charset="-122"/>
-                <a:cs typeface="Malgun Gothic" pitchFamily="34" charset="-120"/>
-              </a:rPr>
-              <a:t>Layer 2 · 이상신호 감지</a:t>
-            </a:r>
-            <a:endParaRPr lang="en-US" sz="1500" dirty="0"/>
-          </a:p>
-        </p:txBody>
-      </p:sp>
-      <p:sp>
-        <p:nvSpPr>
-          <p:cNvPr id="19" name="Text 17"/>
-          <p:cNvSpPr txBox="1"/>
-          <p:nvPr/>
-        </p:nvSpPr>
-        <p:spPr>
-          <a:xfrm>
-            <a:off x="8046720" y="3246120"/>
-            <a:ext cx="3322015" cy="1371600"/>
-          </a:xfrm>
-          <a:prstGeom prst="rect">
-            <a:avLst/>
-          </a:prstGeom>
-          <a:noFill/>
-          <a:ln/>
-        </p:spPr>
-        <p:txBody>
-          <a:bodyPr wrap="square" rtlCol="0" anchor="t"/>
-          <a:lstStyle/>
-          <a:p>
-            <a:pPr marL="342900" indent="-342900">
-              <a:spcAft>
-                <a:spcPts val="600"/>
-              </a:spcAft>
-              <a:buSzPct val="100000"/>
-              <a:buChar char="•"/>
-            </a:pPr>
-            <a:r>
-              <a:rPr lang="en-US" sz="1250" dirty="0">
-                <a:solidFill>
-                  <a:srgbClr val="1F2933"/>
-                </a:solidFill>
-                <a:latin typeface="Malgun Gothic" pitchFamily="34" charset="0"/>
-                <a:ea typeface="Malgun Gothic" pitchFamily="34" charset="-122"/>
-                <a:cs typeface="Malgun Gothic" pitchFamily="34" charset="-120"/>
-              </a:rPr>
-              <a:t>증상 반복 카운트</a:t>
-            </a:r>
-            <a:endParaRPr lang="en-US" sz="1250" dirty="0"/>
-          </a:p>
-          <a:p>
-            <a:pPr marL="342900" indent="-342900">
-              <a:spcAft>
-                <a:spcPts val="600"/>
-              </a:spcAft>
-              <a:buSzPct val="100000"/>
-              <a:buChar char="•"/>
-            </a:pPr>
-            <a:r>
-              <a:rPr lang="en-US" sz="1250" dirty="0">
-                <a:solidFill>
-                  <a:srgbClr val="1F2933"/>
-                </a:solidFill>
-                <a:latin typeface="Malgun Gothic" pitchFamily="34" charset="0"/>
-                <a:ea typeface="Malgun Gothic" pitchFamily="34" charset="-122"/>
-                <a:cs typeface="Malgun Gothic" pitchFamily="34" charset="-120"/>
-              </a:rPr>
-              <a:t>부정 감정 점수</a:t>
-            </a:r>
-            <a:endParaRPr lang="en-US" sz="1250" dirty="0"/>
-          </a:p>
-          <a:p>
-            <a:pPr marL="342900" indent="-342900">
-              <a:spcAft>
-                <a:spcPts val="600"/>
-              </a:spcAft>
-              <a:buSzPct val="100000"/>
-              <a:buChar char="•"/>
-            </a:pPr>
-            <a:r>
-              <a:rPr lang="en-US" sz="1250" dirty="0">
-                <a:solidFill>
-                  <a:srgbClr val="1F2933"/>
-                </a:solidFill>
-                <a:latin typeface="Malgun Gothic" pitchFamily="34" charset="0"/>
-                <a:ea typeface="Malgun Gothic" pitchFamily="34" charset="-122"/>
-                <a:cs typeface="Malgun Gothic" pitchFamily="34" charset="-120"/>
-              </a:rPr>
-              <a:t>개인 baseline 대비 변화</a:t>
-            </a:r>
-            <a:endParaRPr lang="en-US" sz="1250" dirty="0"/>
-          </a:p>
-        </p:txBody>
-      </p:sp>
-      <p:sp>
-        <p:nvSpPr>
-          <p:cNvPr id="20" name="Shape 18"/>
-          <p:cNvSpPr/>
-          <p:nvPr/>
-        </p:nvSpPr>
-        <p:spPr>
-          <a:xfrm>
-            <a:off x="2377440" y="4663440"/>
-            <a:ext cx="0" cy="365760"/>
+            <a:off x="5632521" y="5193792"/>
+            <a:ext cx="310896" cy="0"/>
           </a:xfrm>
           <a:prstGeom prst="line">
             <a:avLst/>
@@ -6240,14 +8584,119 @@
       </p:sp>
       <p:sp>
         <p:nvSpPr>
-          <p:cNvPr id="21" name="Shape 19"/>
+          <p:cNvPr id="42" name="Shape 40"/>
           <p:cNvSpPr/>
           <p:nvPr/>
         </p:nvSpPr>
         <p:spPr>
           <a:xfrm>
-            <a:off x="9707728" y="4663440"/>
-            <a:ext cx="0" cy="365760"/>
+            <a:off x="5943417" y="4736592"/>
+            <a:ext cx="1487363" cy="914400"/>
+          </a:xfrm>
+          <a:prstGeom prst="roundRect">
+            <a:avLst>
+              <a:gd name="adj" fmla="val 7000"/>
+            </a:avLst>
+          </a:prstGeom>
+          <a:solidFill>
+            <a:srgbClr val="EAF0FA"/>
+          </a:solidFill>
+          <a:ln w="12700">
+            <a:solidFill>
+              <a:srgbClr val="D8E0EC"/>
+            </a:solidFill>
+            <a:prstDash val="solid"/>
+          </a:ln>
+        </p:spPr>
+      </p:sp>
+      <p:sp>
+        <p:nvSpPr>
+          <p:cNvPr id="43" name="Text 41"/>
+          <p:cNvSpPr txBox="1"/>
+          <p:nvPr/>
+        </p:nvSpPr>
+        <p:spPr>
+          <a:xfrm>
+            <a:off x="5998281" y="4882896"/>
+            <a:ext cx="1377635" cy="320040"/>
+          </a:xfrm>
+          <a:prstGeom prst="rect">
+            <a:avLst/>
+          </a:prstGeom>
+          <a:noFill/>
+          <a:ln/>
+        </p:spPr>
+        <p:txBody>
+          <a:bodyPr wrap="square" lIns="0" tIns="0" rIns="0" bIns="0" rtlCol="0" anchor="ctr"/>
+          <a:lstStyle/>
+          <a:p>
+            <a:pPr algn="ctr" indent="0" marL="0">
+              <a:buNone/>
+            </a:pPr>
+            <a:r>
+              <a:rPr lang="en-US" sz="1300" b="1" dirty="0">
+                <a:solidFill>
+                  <a:srgbClr val="0F2F6F"/>
+                </a:solidFill>
+                <a:latin typeface="Malgun Gothic" pitchFamily="34" charset="0"/>
+                <a:ea typeface="Malgun Gothic" pitchFamily="34" charset="-122"/>
+                <a:cs typeface="Malgun Gothic" pitchFamily="34" charset="-120"/>
+              </a:rPr>
+              <a:t>저품질 제거</a:t>
+            </a:r>
+            <a:endParaRPr lang="en-US" sz="1300" dirty="0"/>
+          </a:p>
+        </p:txBody>
+      </p:sp>
+      <p:sp>
+        <p:nvSpPr>
+          <p:cNvPr id="44" name="Text 42"/>
+          <p:cNvSpPr txBox="1"/>
+          <p:nvPr/>
+        </p:nvSpPr>
+        <p:spPr>
+          <a:xfrm>
+            <a:off x="5998281" y="5212080"/>
+            <a:ext cx="1377635" cy="365760"/>
+          </a:xfrm>
+          <a:prstGeom prst="rect">
+            <a:avLst/>
+          </a:prstGeom>
+          <a:noFill/>
+          <a:ln/>
+        </p:spPr>
+        <p:txBody>
+          <a:bodyPr wrap="square" lIns="0" tIns="0" rIns="0" bIns="0" rtlCol="0" anchor="ctr"/>
+          <a:lstStyle/>
+          <a:p>
+            <a:pPr algn="ctr" indent="0" marL="0">
+              <a:buNone/>
+            </a:pPr>
+            <a:r>
+              <a:rPr lang="en-US" sz="900" dirty="0">
+                <a:solidFill>
+                  <a:srgbClr val="5B6673"/>
+                </a:solidFill>
+                <a:latin typeface="Malgun Gothic" pitchFamily="34" charset="0"/>
+                <a:ea typeface="Malgun Gothic" pitchFamily="34" charset="-122"/>
+                <a:cs typeface="Malgun Gothic" pitchFamily="34" charset="-120"/>
+              </a:rPr>
+              <a:t>노이즈 청크 삭제</a:t>
+            </a:r>
+            <a:endParaRPr lang="en-US" sz="900" dirty="0"/>
+          </a:p>
+        </p:txBody>
+      </p:sp>
+      <p:sp>
+        <p:nvSpPr>
+          <p:cNvPr id="45" name="Shape 43"/>
+          <p:cNvSpPr/>
+          <p:nvPr/>
+        </p:nvSpPr>
+        <p:spPr>
+          <a:xfrm>
+            <a:off x="7430780" y="5193792"/>
+            <a:ext cx="310896" cy="0"/>
           </a:xfrm>
           <a:prstGeom prst="line">
             <a:avLst/>
@@ -6264,22 +8713,22 @@
       </p:sp>
       <p:sp>
         <p:nvSpPr>
-          <p:cNvPr id="22" name="Shape 20"/>
+          <p:cNvPr id="46" name="Shape 44"/>
           <p:cNvSpPr/>
           <p:nvPr/>
         </p:nvSpPr>
         <p:spPr>
           <a:xfrm>
-            <a:off x="548640" y="5029200"/>
-            <a:ext cx="6766560" cy="685800"/>
+            <a:off x="7741676" y="4736592"/>
+            <a:ext cx="1487363" cy="914400"/>
           </a:xfrm>
           <a:prstGeom prst="roundRect">
             <a:avLst>
-              <a:gd name="adj" fmla="val 9333"/>
+              <a:gd name="adj" fmla="val 7000"/>
             </a:avLst>
           </a:prstGeom>
           <a:solidFill>
-            <a:srgbClr val="0F2F6F"/>
+            <a:srgbClr val="F4F7FC"/>
           </a:solidFill>
           <a:ln w="12700">
             <a:solidFill>
@@ -6291,14 +8740,14 @@
       </p:sp>
       <p:sp>
         <p:nvSpPr>
-          <p:cNvPr id="23" name="Text 21"/>
-          <p:cNvSpPr txBox="1"/>
-          <p:nvPr/>
-        </p:nvSpPr>
-        <p:spPr>
-          <a:xfrm>
-            <a:off x="640080" y="5029200"/>
-            <a:ext cx="6583680" cy="685800"/>
+          <p:cNvPr id="47" name="Text 45"/>
+          <p:cNvSpPr txBox="1"/>
+          <p:nvPr/>
+        </p:nvSpPr>
+        <p:spPr>
+          <a:xfrm>
+            <a:off x="7796540" y="4882896"/>
+            <a:ext cx="1377635" cy="320040"/>
           </a:xfrm>
           <a:prstGeom prst="rect">
             <a:avLst/>
@@ -6314,74 +8763,115 @@
               <a:buNone/>
             </a:pPr>
             <a:r>
-              <a:rPr lang="en-US" sz="1350" b="1" dirty="0">
-                <a:solidFill>
-                  <a:srgbClr val="FFFFFF"/>
-                </a:solidFill>
-                <a:latin typeface="Malgun Gothic" pitchFamily="34" charset="0"/>
-                <a:ea typeface="Malgun Gothic" pitchFamily="34" charset="-122"/>
-                <a:cs typeface="Malgun Gothic" pitchFamily="34" charset="-120"/>
-              </a:rPr>
-              <a:t>로컬 LLM (EXAONE 3.5)</a:t>
-            </a:r>
-            <a:endParaRPr lang="en-US" sz="1350" dirty="0"/>
-          </a:p>
+              <a:rPr lang="en-US" sz="1300" b="1" dirty="0">
+                <a:solidFill>
+                  <a:srgbClr val="0F2F6F"/>
+                </a:solidFill>
+                <a:latin typeface="Malgun Gothic" pitchFamily="34" charset="0"/>
+                <a:ea typeface="Malgun Gothic" pitchFamily="34" charset="-122"/>
+                <a:cs typeface="Malgun Gothic" pitchFamily="34" charset="-120"/>
+              </a:rPr>
+              <a:t>임베딩·색인</a:t>
+            </a:r>
+            <a:endParaRPr lang="en-US" sz="1300" dirty="0"/>
+          </a:p>
+        </p:txBody>
+      </p:sp>
+      <p:sp>
+        <p:nvSpPr>
+          <p:cNvPr id="48" name="Text 46"/>
+          <p:cNvSpPr txBox="1"/>
+          <p:nvPr/>
+        </p:nvSpPr>
+        <p:spPr>
+          <a:xfrm>
+            <a:off x="7796540" y="5212080"/>
+            <a:ext cx="1377635" cy="365760"/>
+          </a:xfrm>
+          <a:prstGeom prst="rect">
+            <a:avLst/>
+          </a:prstGeom>
+          <a:noFill/>
+          <a:ln/>
+        </p:spPr>
+        <p:txBody>
+          <a:bodyPr wrap="square" lIns="0" tIns="0" rIns="0" bIns="0" rtlCol="0" anchor="ctr"/>
+          <a:lstStyle/>
           <a:p>
             <a:pPr algn="ctr" indent="0" marL="0">
               <a:buNone/>
             </a:pPr>
             <a:r>
-              <a:rPr lang="en-US" sz="1050" dirty="0">
-                <a:solidFill>
-                  <a:srgbClr val="CADCFC"/>
-                </a:solidFill>
-                <a:latin typeface="Malgun Gothic" pitchFamily="34" charset="0"/>
-                <a:ea typeface="Malgun Gothic" pitchFamily="34" charset="-122"/>
-                <a:cs typeface="Malgun Gothic" pitchFamily="34" charset="-120"/>
-              </a:rPr>
-              <a:t>검색 근거로만 한국어 답변</a:t>
-            </a:r>
-            <a:endParaRPr lang="en-US" sz="1350" dirty="0"/>
-          </a:p>
-        </p:txBody>
-      </p:sp>
-      <p:sp>
-        <p:nvSpPr>
-          <p:cNvPr id="24" name="Shape 22"/>
+              <a:rPr lang="en-US" sz="900" dirty="0">
+                <a:solidFill>
+                  <a:srgbClr val="5B6673"/>
+                </a:solidFill>
+                <a:latin typeface="Malgun Gothic" pitchFamily="34" charset="0"/>
+                <a:ea typeface="Malgun Gothic" pitchFamily="34" charset="-122"/>
+                <a:cs typeface="Malgun Gothic" pitchFamily="34" charset="-120"/>
+              </a:rPr>
+              <a:t>bge-m3 → ChromaDB</a:t>
+            </a:r>
+            <a:endParaRPr lang="en-US" sz="900" dirty="0"/>
+          </a:p>
+        </p:txBody>
+      </p:sp>
+      <p:sp>
+        <p:nvSpPr>
+          <p:cNvPr id="49" name="Shape 47"/>
           <p:cNvSpPr/>
           <p:nvPr/>
         </p:nvSpPr>
         <p:spPr>
           <a:xfrm>
-            <a:off x="7772400" y="5029200"/>
-            <a:ext cx="3870655" cy="685800"/>
+            <a:off x="9229039" y="5193792"/>
+            <a:ext cx="310896" cy="0"/>
+          </a:xfrm>
+          <a:prstGeom prst="line">
+            <a:avLst/>
+          </a:prstGeom>
+          <a:noFill/>
+          <a:ln w="31750">
+            <a:solidFill>
+              <a:srgbClr val="E0A83C"/>
+            </a:solidFill>
+            <a:prstDash val="solid"/>
+            <a:tailEnd type="triangle"/>
+          </a:ln>
+        </p:spPr>
+      </p:sp>
+      <p:sp>
+        <p:nvSpPr>
+          <p:cNvPr id="50" name="Shape 48"/>
+          <p:cNvSpPr/>
+          <p:nvPr/>
+        </p:nvSpPr>
+        <p:spPr>
+          <a:xfrm>
+            <a:off x="9539935" y="4736592"/>
+            <a:ext cx="2103120" cy="914400"/>
           </a:xfrm>
           <a:prstGeom prst="roundRect">
             <a:avLst>
-              <a:gd name="adj" fmla="val 9333"/>
+              <a:gd name="adj" fmla="val 8000"/>
             </a:avLst>
           </a:prstGeom>
           <a:solidFill>
-            <a:srgbClr val="E0A83C"/>
+            <a:srgbClr val="0F2F6F"/>
           </a:solidFill>
-          <a:ln w="12700">
-            <a:solidFill>
-              <a:srgbClr val="D8E0EC"/>
-            </a:solidFill>
-            <a:prstDash val="solid"/>
-          </a:ln>
-        </p:spPr>
-      </p:sp>
-      <p:sp>
-        <p:nvSpPr>
-          <p:cNvPr id="25" name="Text 23"/>
-          <p:cNvSpPr txBox="1"/>
-          <p:nvPr/>
-        </p:nvSpPr>
-        <p:spPr>
-          <a:xfrm>
-            <a:off x="7863840" y="5029200"/>
-            <a:ext cx="3687775" cy="685800"/>
+          <a:ln/>
+        </p:spPr>
+      </p:sp>
+      <p:sp>
+        <p:nvSpPr>
+          <p:cNvPr id="51" name="Text 49"/>
+          <p:cNvSpPr txBox="1"/>
+          <p:nvPr/>
+        </p:nvSpPr>
+        <p:spPr>
+          <a:xfrm>
+            <a:off x="9539935" y="4736592"/>
+            <a:ext cx="2103120" cy="914400"/>
           </a:xfrm>
           <a:prstGeom prst="rect">
             <a:avLst/>
@@ -6397,7 +8887,25 @@
               <a:buNone/>
             </a:pPr>
             <a:r>
-              <a:rPr lang="en-US" sz="1350" b="1" dirty="0">
+              <a:rPr lang="en-US" sz="2400" b="1" dirty="0">
+                <a:solidFill>
+                  <a:srgbClr val="E0A83C"/>
+                </a:solidFill>
+                <a:latin typeface="Malgun Gothic" pitchFamily="34" charset="0"/>
+                <a:ea typeface="Malgun Gothic" pitchFamily="34" charset="-122"/>
+                <a:cs typeface="Malgun Gothic" pitchFamily="34" charset="-120"/>
+              </a:rPr>
+              <a:t>3,455개
+</a:t>
+            </a:r>
+            <a:endParaRPr lang="en-US" sz="2400" dirty="0"/>
+          </a:p>
+          <a:p>
+            <a:pPr algn="ctr" indent="0" marL="0">
+              <a:buNone/>
+            </a:pPr>
+            <a:r>
+              <a:rPr lang="en-US" sz="1200" b="1" dirty="0">
                 <a:solidFill>
                   <a:srgbClr val="FFFFFF"/>
                 </a:solidFill>
@@ -6405,57 +8913,40 @@
                 <a:ea typeface="Malgun Gothic" pitchFamily="34" charset="-122"/>
                 <a:cs typeface="Malgun Gothic" pitchFamily="34" charset="-120"/>
               </a:rPr>
-              <a:t>사회복지사 알림 요약</a:t>
-            </a:r>
-            <a:endParaRPr lang="en-US" sz="1350" dirty="0"/>
-          </a:p>
+              <a:t>색인 청크</a:t>
+            </a:r>
+            <a:endParaRPr lang="en-US" sz="2400" dirty="0"/>
+          </a:p>
+        </p:txBody>
+      </p:sp>
+      <p:sp>
+        <p:nvSpPr>
+          <p:cNvPr id="52" name="Text 50"/>
+          <p:cNvSpPr txBox="1"/>
+          <p:nvPr/>
+        </p:nvSpPr>
+        <p:spPr>
+          <a:xfrm>
+            <a:off x="548640" y="5989320"/>
+            <a:ext cx="11094415" cy="411480"/>
+          </a:xfrm>
+          <a:prstGeom prst="rect">
+            <a:avLst/>
+          </a:prstGeom>
+          <a:solidFill>
+            <a:srgbClr val="F4F7FC"/>
+          </a:solidFill>
+          <a:ln/>
+        </p:spPr>
+        <p:txBody>
+          <a:bodyPr wrap="square" lIns="50800" tIns="50800" rIns="50800" bIns="50800" rtlCol="0" anchor="ctr"/>
+          <a:lstStyle/>
           <a:p>
             <a:pPr algn="ctr" indent="0" marL="0">
               <a:buNone/>
             </a:pPr>
             <a:r>
-              <a:rPr lang="en-US" sz="1050" dirty="0">
-                <a:solidFill>
-                  <a:srgbClr val="CADCFC"/>
-                </a:solidFill>
-                <a:latin typeface="Malgun Gothic" pitchFamily="34" charset="0"/>
-                <a:ea typeface="Malgun Gothic" pitchFamily="34" charset="-122"/>
-                <a:cs typeface="Malgun Gothic" pitchFamily="34" charset="-120"/>
-              </a:rPr>
-              <a:t>이상신호 감지 시</a:t>
-            </a:r>
-            <a:endParaRPr lang="en-US" sz="1350" dirty="0"/>
-          </a:p>
-        </p:txBody>
-      </p:sp>
-      <p:sp>
-        <p:nvSpPr>
-          <p:cNvPr id="26" name="Text 24"/>
-          <p:cNvSpPr txBox="1"/>
-          <p:nvPr/>
-        </p:nvSpPr>
-        <p:spPr>
-          <a:xfrm>
-            <a:off x="548640" y="5943600"/>
-            <a:ext cx="11094415" cy="457200"/>
-          </a:xfrm>
-          <a:prstGeom prst="rect">
-            <a:avLst/>
-          </a:prstGeom>
-          <a:solidFill>
-            <a:srgbClr val="EAF0FA"/>
-          </a:solidFill>
-          <a:ln/>
-        </p:spPr>
-        <p:txBody>
-          <a:bodyPr wrap="square" lIns="50800" tIns="50800" rIns="50800" bIns="50800" rtlCol="0" anchor="ctr"/>
-          <a:lstStyle/>
-          <a:p>
-            <a:pPr algn="ctr" indent="0" marL="0">
-              <a:buNone/>
-            </a:pPr>
-            <a:r>
-              <a:rPr lang="en-US" sz="1400" b="1" dirty="0">
+              <a:rPr lang="en-US" sz="1300" b="1" dirty="0">
                 <a:solidFill>
                   <a:srgbClr val="0F2F6F"/>
                 </a:solidFill>
@@ -6463,9 +8954,9 @@
                 <a:ea typeface="Malgun Gothic" pitchFamily="34" charset="-122"/>
                 <a:cs typeface="Malgun Gothic" pitchFamily="34" charset="-120"/>
               </a:rPr>
-              <a:t>🔒  전 과정 로컬 · 대화는 기기·가정 네트워크를 벗어나지 않습니다</a:t>
-            </a:r>
-            <a:endParaRPr lang="en-US" sz="1400" dirty="0"/>
+              <a:t>🔒  문서 색인·검색 전 과정 로컬 실행 — 대화 데이터는 외부로 전송되지 않습니다</a:t>
+            </a:r>
+            <a:endParaRPr lang="en-US" sz="1300" dirty="0"/>
           </a:p>
         </p:txBody>
       </p:sp>
@@ -6534,7 +9025,7 @@
                 <a:ea typeface="Malgun Gothic" pitchFamily="34" charset="-122"/>
                 <a:cs typeface="Malgun Gothic" pitchFamily="34" charset="-120"/>
               </a:rPr>
-              <a:t>DEMO</a:t>
+              <a:t>ARCHITECTURE</a:t>
             </a:r>
             <a:endParaRPr lang="en-US" sz="1300" dirty="0"/>
           </a:p>
@@ -6573,7 +9064,7 @@
                 <a:ea typeface="Malgun Gothic" pitchFamily="34" charset="-122"/>
                 <a:cs typeface="Malgun Gothic" pitchFamily="34" charset="-120"/>
               </a:rPr>
-              <a:t>핵심 기능 데모 · 데이터 · 성능</a:t>
+              <a:t>시스템 아키텍처 — 모두 기기 안에서</a:t>
             </a:r>
             <a:endParaRPr lang="en-US" sz="3200" dirty="0"/>
           </a:p>
@@ -6588,11 +9079,11 @@
         <p:spPr>
           <a:xfrm>
             <a:off x="548640" y="1600200"/>
-            <a:ext cx="5364328" cy="2148840"/>
+            <a:ext cx="2377440" cy="658368"/>
           </a:xfrm>
           <a:prstGeom prst="roundRect">
             <a:avLst>
-              <a:gd name="adj" fmla="val 3830"/>
+              <a:gd name="adj" fmla="val 9722"/>
             </a:avLst>
           </a:prstGeom>
           <a:solidFill>
@@ -6604,218 +9095,89 @@
             </a:solidFill>
             <a:prstDash val="solid"/>
           </a:ln>
-          <a:effectLst>
-            <a:outerShdw sx="100000" sy="100000" kx="0" ky="0" algn="bl" rotWithShape="0" blurRad="76200" dist="25400" dir="5400000">
-              <a:srgbClr val="9AA5B5">
-                <a:alpha val="35000"/>
-              </a:srgbClr>
-            </a:outerShdw>
-          </a:effectLst>
-        </p:spPr>
-      </p:sp>
-      <p:sp>
-        <p:nvSpPr>
-          <p:cNvPr id="5" name="Shape 3"/>
+        </p:spPr>
+      </p:sp>
+      <p:sp>
+        <p:nvSpPr>
+          <p:cNvPr id="5" name="Text 3"/>
+          <p:cNvSpPr txBox="1"/>
+          <p:nvPr/>
+        </p:nvSpPr>
+        <p:spPr>
+          <a:xfrm>
+            <a:off x="640080" y="1600200"/>
+            <a:ext cx="2194560" cy="658368"/>
+          </a:xfrm>
+          <a:prstGeom prst="rect">
+            <a:avLst/>
+          </a:prstGeom>
+          <a:noFill/>
+          <a:ln/>
+        </p:spPr>
+        <p:txBody>
+          <a:bodyPr wrap="square" lIns="0" tIns="0" rIns="0" bIns="0" rtlCol="0" anchor="ctr"/>
+          <a:lstStyle/>
+          <a:p>
+            <a:pPr algn="ctr" indent="0" marL="0">
+              <a:buNone/>
+            </a:pPr>
+            <a:r>
+              <a:rPr lang="en-US" sz="1350" b="1" dirty="0">
+                <a:solidFill>
+                  <a:srgbClr val="1F2933"/>
+                </a:solidFill>
+                <a:latin typeface="Malgun Gothic" pitchFamily="34" charset="0"/>
+                <a:ea typeface="Malgun Gothic" pitchFamily="34" charset="-122"/>
+                <a:cs typeface="Malgun Gothic" pitchFamily="34" charset="-120"/>
+              </a:rPr>
+              <a:t>입력 (음성·문자)</a:t>
+            </a:r>
+            <a:endParaRPr lang="en-US" sz="1350" dirty="0"/>
+          </a:p>
+        </p:txBody>
+      </p:sp>
+      <p:sp>
+        <p:nvSpPr>
+          <p:cNvPr id="6" name="Shape 4"/>
           <p:cNvSpPr/>
           <p:nvPr/>
         </p:nvSpPr>
         <p:spPr>
           <a:xfrm>
-            <a:off x="822960" y="1810512"/>
-            <a:ext cx="1371600" cy="365760"/>
+            <a:off x="2926080" y="1929384"/>
+            <a:ext cx="457200" cy="0"/>
+          </a:xfrm>
+          <a:prstGeom prst="line">
+            <a:avLst/>
+          </a:prstGeom>
+          <a:noFill/>
+          <a:ln w="31750">
+            <a:solidFill>
+              <a:srgbClr val="E0A83C"/>
+            </a:solidFill>
+            <a:prstDash val="solid"/>
+            <a:tailEnd type="triangle"/>
+          </a:ln>
+        </p:spPr>
+      </p:sp>
+      <p:sp>
+        <p:nvSpPr>
+          <p:cNvPr id="7" name="Shape 5"/>
+          <p:cNvSpPr/>
+          <p:nvPr/>
+        </p:nvSpPr>
+        <p:spPr>
+          <a:xfrm>
+            <a:off x="3383280" y="1600200"/>
+            <a:ext cx="2194560" cy="658368"/>
           </a:xfrm>
           <a:prstGeom prst="roundRect">
             <a:avLst>
-              <a:gd name="adj" fmla="val 15000"/>
+              <a:gd name="adj" fmla="val 9722"/>
             </a:avLst>
           </a:prstGeom>
           <a:solidFill>
-            <a:srgbClr val="0F2F6F"/>
-          </a:solidFill>
-          <a:ln/>
-        </p:spPr>
-      </p:sp>
-      <p:sp>
-        <p:nvSpPr>
-          <p:cNvPr id="6" name="Text 4"/>
-          <p:cNvSpPr txBox="1"/>
-          <p:nvPr/>
-        </p:nvSpPr>
-        <p:spPr>
-          <a:xfrm>
-            <a:off x="822960" y="1810512"/>
-            <a:ext cx="1371600" cy="365760"/>
-          </a:xfrm>
-          <a:prstGeom prst="rect">
-            <a:avLst/>
-          </a:prstGeom>
-          <a:noFill/>
-          <a:ln/>
-        </p:spPr>
-        <p:txBody>
-          <a:bodyPr wrap="square" lIns="0" tIns="0" rIns="0" bIns="0" rtlCol="0" anchor="ctr"/>
-          <a:lstStyle/>
-          <a:p>
-            <a:pPr algn="ctr" indent="0" marL="0">
-              <a:buNone/>
-            </a:pPr>
-            <a:r>
-              <a:rPr lang="en-US" sz="1200" b="1" dirty="0">
-                <a:solidFill>
-                  <a:srgbClr val="FFFFFF"/>
-                </a:solidFill>
-                <a:latin typeface="Malgun Gothic" pitchFamily="34" charset="0"/>
-                <a:ea typeface="Malgun Gothic" pitchFamily="34" charset="-122"/>
-                <a:cs typeface="Malgun Gothic" pitchFamily="34" charset="-120"/>
-              </a:rPr>
-              <a:t>데모 A</a:t>
-            </a:r>
-            <a:endParaRPr lang="en-US" sz="1200" dirty="0"/>
-          </a:p>
-        </p:txBody>
-      </p:sp>
-      <p:sp>
-        <p:nvSpPr>
-          <p:cNvPr id="7" name="Text 5"/>
-          <p:cNvSpPr txBox="1"/>
-          <p:nvPr/>
-        </p:nvSpPr>
-        <p:spPr>
-          <a:xfrm>
-            <a:off x="2331720" y="1810512"/>
-            <a:ext cx="3352648" cy="365760"/>
-          </a:xfrm>
-          <a:prstGeom prst="rect">
-            <a:avLst/>
-          </a:prstGeom>
-          <a:noFill/>
-          <a:ln/>
-        </p:spPr>
-        <p:txBody>
-          <a:bodyPr wrap="square" lIns="0" tIns="0" rIns="0" bIns="0" rtlCol="0" anchor="ctr"/>
-          <a:lstStyle/>
-          <a:p>
-            <a:pPr indent="0" marL="0">
-              <a:buNone/>
-            </a:pPr>
-            <a:r>
-              <a:rPr lang="en-US" sz="1600" b="1" dirty="0">
-                <a:solidFill>
-                  <a:srgbClr val="0F2F6F"/>
-                </a:solidFill>
-                <a:latin typeface="Malgun Gothic" pitchFamily="34" charset="0"/>
-                <a:ea typeface="Malgun Gothic" pitchFamily="34" charset="-122"/>
-                <a:cs typeface="Malgun Gothic" pitchFamily="34" charset="-120"/>
-              </a:rPr>
-              <a:t>복지 Q&amp;A</a:t>
-            </a:r>
-            <a:endParaRPr lang="en-US" sz="1600" dirty="0"/>
-          </a:p>
-        </p:txBody>
-      </p:sp>
-      <p:sp>
-        <p:nvSpPr>
-          <p:cNvPr id="8" name="Text 6"/>
-          <p:cNvSpPr txBox="1"/>
-          <p:nvPr/>
-        </p:nvSpPr>
-        <p:spPr>
-          <a:xfrm>
-            <a:off x="822960" y="2286000"/>
-            <a:ext cx="4815688" cy="1371600"/>
-          </a:xfrm>
-          <a:prstGeom prst="rect">
-            <a:avLst/>
-          </a:prstGeom>
-          <a:noFill/>
-          <a:ln/>
-        </p:spPr>
-        <p:txBody>
-          <a:bodyPr wrap="square" rtlCol="0" anchor="t"/>
-          <a:lstStyle/>
-          <a:p>
-            <a:pPr marL="342900" indent="-342900">
-              <a:spcAft>
-                <a:spcPts val="600"/>
-              </a:spcAft>
-              <a:buSzPct val="100000"/>
-              <a:buChar char="•"/>
-            </a:pPr>
-            <a:r>
-              <a:rPr lang="en-US" sz="1300" dirty="0">
-                <a:solidFill>
-                  <a:srgbClr val="1F2933"/>
-                </a:solidFill>
-                <a:latin typeface="Malgun Gothic" pitchFamily="34" charset="0"/>
-                <a:ea typeface="Malgun Gothic" pitchFamily="34" charset="-122"/>
-                <a:cs typeface="Malgun Gothic" pitchFamily="34" charset="-120"/>
-              </a:rPr>
-              <a:t>"기초연금은 어떻게 신청하나요?" → 문서 근거 기반 정확 안내</a:t>
-            </a:r>
-            <a:endParaRPr lang="en-US" sz="1300" dirty="0"/>
-          </a:p>
-          <a:p>
-            <a:pPr marL="342900" indent="-342900">
-              <a:spcAft>
-                <a:spcPts val="600"/>
-              </a:spcAft>
-              <a:buSzPct val="100000"/>
-              <a:buChar char="•"/>
-            </a:pPr>
-            <a:r>
-              <a:rPr lang="en-US" sz="1300" dirty="0">
-                <a:solidFill>
-                  <a:srgbClr val="1F2933"/>
-                </a:solidFill>
-                <a:latin typeface="Malgun Gothic" pitchFamily="34" charset="0"/>
-                <a:ea typeface="Malgun Gothic" pitchFamily="34" charset="-122"/>
-                <a:cs typeface="Malgun Gothic" pitchFamily="34" charset="-120"/>
-              </a:rPr>
-              <a:t>범위 밖 질문은 지어내지 않고 안전하게 거절</a:t>
-            </a:r>
-            <a:endParaRPr lang="en-US" sz="1300" dirty="0"/>
-          </a:p>
-          <a:p>
-            <a:pPr marL="342900" indent="-342900">
-              <a:spcAft>
-                <a:spcPts val="600"/>
-              </a:spcAft>
-              <a:buSzPct val="100000"/>
-              <a:buChar char="•"/>
-            </a:pPr>
-            <a:r>
-              <a:rPr lang="en-US" sz="1300" dirty="0">
-                <a:solidFill>
-                  <a:srgbClr val="1F2933"/>
-                </a:solidFill>
-                <a:latin typeface="Malgun Gothic" pitchFamily="34" charset="0"/>
-                <a:ea typeface="Malgun Gothic" pitchFamily="34" charset="-122"/>
-                <a:cs typeface="Malgun Gothic" pitchFamily="34" charset="-120"/>
-              </a:rPr>
-              <a:t>인사·잡담은 따뜻한 대화형 응답</a:t>
-            </a:r>
-            <a:endParaRPr lang="en-US" sz="1300" dirty="0"/>
-          </a:p>
-        </p:txBody>
-      </p:sp>
-      <p:sp>
-        <p:nvSpPr>
-          <p:cNvPr id="9" name="Shape 7"/>
-          <p:cNvSpPr/>
-          <p:nvPr/>
-        </p:nvSpPr>
-        <p:spPr>
-          <a:xfrm>
-            <a:off x="6278728" y="1600200"/>
-            <a:ext cx="5364328" cy="2148840"/>
-          </a:xfrm>
-          <a:prstGeom prst="roundRect">
-            <a:avLst>
-              <a:gd name="adj" fmla="val 3830"/>
-            </a:avLst>
-          </a:prstGeom>
-          <a:solidFill>
-            <a:srgbClr val="FBF3E3"/>
+            <a:srgbClr val="F4F7FC"/>
           </a:solidFill>
           <a:ln w="12700">
             <a:solidFill>
@@ -6823,13 +9185,86 @@
             </a:solidFill>
             <a:prstDash val="solid"/>
           </a:ln>
-          <a:effectLst>
-            <a:outerShdw sx="100000" sy="100000" kx="0" ky="0" algn="bl" rotWithShape="0" blurRad="76200" dist="25400" dir="5400000">
-              <a:srgbClr val="9AA5B5">
-                <a:alpha val="35000"/>
-              </a:srgbClr>
-            </a:outerShdw>
-          </a:effectLst>
+        </p:spPr>
+      </p:sp>
+      <p:sp>
+        <p:nvSpPr>
+          <p:cNvPr id="8" name="Text 6"/>
+          <p:cNvSpPr txBox="1"/>
+          <p:nvPr/>
+        </p:nvSpPr>
+        <p:spPr>
+          <a:xfrm>
+            <a:off x="3474720" y="1600200"/>
+            <a:ext cx="2011680" cy="658368"/>
+          </a:xfrm>
+          <a:prstGeom prst="rect">
+            <a:avLst/>
+          </a:prstGeom>
+          <a:noFill/>
+          <a:ln/>
+        </p:spPr>
+        <p:txBody>
+          <a:bodyPr wrap="square" lIns="0" tIns="0" rIns="0" bIns="0" rtlCol="0" anchor="ctr"/>
+          <a:lstStyle/>
+          <a:p>
+            <a:pPr algn="ctr" indent="0" marL="0">
+              <a:buNone/>
+            </a:pPr>
+            <a:r>
+              <a:rPr lang="en-US" sz="1350" b="1" dirty="0">
+                <a:solidFill>
+                  <a:srgbClr val="1F2933"/>
+                </a:solidFill>
+                <a:latin typeface="Malgun Gothic" pitchFamily="34" charset="0"/>
+                <a:ea typeface="Malgun Gothic" pitchFamily="34" charset="-122"/>
+                <a:cs typeface="Malgun Gothic" pitchFamily="34" charset="-120"/>
+              </a:rPr>
+              <a:t>STT (Whisper)</a:t>
+            </a:r>
+            <a:endParaRPr lang="en-US" sz="1350" dirty="0"/>
+          </a:p>
+          <a:p>
+            <a:pPr algn="ctr" indent="0" marL="0">
+              <a:buNone/>
+            </a:pPr>
+            <a:r>
+              <a:rPr lang="en-US" sz="1050" dirty="0">
+                <a:solidFill>
+                  <a:srgbClr val="5B6673"/>
+                </a:solidFill>
+                <a:latin typeface="Malgun Gothic" pitchFamily="34" charset="0"/>
+                <a:ea typeface="Malgun Gothic" pitchFamily="34" charset="-122"/>
+                <a:cs typeface="Malgun Gothic" pitchFamily="34" charset="-120"/>
+              </a:rPr>
+              <a:t>로컬 음성인식</a:t>
+            </a:r>
+            <a:endParaRPr lang="en-US" sz="1350" dirty="0"/>
+          </a:p>
+        </p:txBody>
+      </p:sp>
+      <p:sp>
+        <p:nvSpPr>
+          <p:cNvPr id="9" name="Shape 7"/>
+          <p:cNvSpPr/>
+          <p:nvPr/>
+        </p:nvSpPr>
+        <p:spPr>
+          <a:xfrm>
+            <a:off x="5577840" y="1929384"/>
+            <a:ext cx="457200" cy="0"/>
+          </a:xfrm>
+          <a:prstGeom prst="line">
+            <a:avLst/>
+          </a:prstGeom>
+          <a:noFill/>
+          <a:ln w="31750">
+            <a:solidFill>
+              <a:srgbClr val="E0A83C"/>
+            </a:solidFill>
+            <a:prstDash val="solid"/>
+            <a:tailEnd type="triangle"/>
+          </a:ln>
         </p:spPr>
       </p:sp>
       <p:sp>
@@ -6840,201 +9275,16 @@
         </p:nvSpPr>
         <p:spPr>
           <a:xfrm>
-            <a:off x="6553048" y="1810512"/>
-            <a:ext cx="1371600" cy="365760"/>
+            <a:off x="6035040" y="1600200"/>
+            <a:ext cx="2743200" cy="658368"/>
           </a:xfrm>
           <a:prstGeom prst="roundRect">
             <a:avLst>
-              <a:gd name="adj" fmla="val 15000"/>
+              <a:gd name="adj" fmla="val 9722"/>
             </a:avLst>
           </a:prstGeom>
           <a:solidFill>
-            <a:srgbClr val="E0A83C"/>
-          </a:solidFill>
-          <a:ln/>
-        </p:spPr>
-      </p:sp>
-      <p:sp>
-        <p:nvSpPr>
-          <p:cNvPr id="11" name="Text 9"/>
-          <p:cNvSpPr txBox="1"/>
-          <p:nvPr/>
-        </p:nvSpPr>
-        <p:spPr>
-          <a:xfrm>
-            <a:off x="6553048" y="1810512"/>
-            <a:ext cx="1371600" cy="365760"/>
-          </a:xfrm>
-          <a:prstGeom prst="rect">
-            <a:avLst/>
-          </a:prstGeom>
-          <a:noFill/>
-          <a:ln/>
-        </p:spPr>
-        <p:txBody>
-          <a:bodyPr wrap="square" lIns="0" tIns="0" rIns="0" bIns="0" rtlCol="0" anchor="ctr"/>
-          <a:lstStyle/>
-          <a:p>
-            <a:pPr algn="ctr" indent="0" marL="0">
-              <a:buNone/>
-            </a:pPr>
-            <a:r>
-              <a:rPr lang="en-US" sz="1200" b="1" dirty="0">
-                <a:solidFill>
-                  <a:srgbClr val="FFFFFF"/>
-                </a:solidFill>
-                <a:latin typeface="Malgun Gothic" pitchFamily="34" charset="0"/>
-                <a:ea typeface="Malgun Gothic" pitchFamily="34" charset="-122"/>
-                <a:cs typeface="Malgun Gothic" pitchFamily="34" charset="-120"/>
-              </a:rPr>
-              <a:t>데모 B</a:t>
-            </a:r>
-            <a:endParaRPr lang="en-US" sz="1200" dirty="0"/>
-          </a:p>
-        </p:txBody>
-      </p:sp>
-      <p:sp>
-        <p:nvSpPr>
-          <p:cNvPr id="12" name="Text 10"/>
-          <p:cNvSpPr txBox="1"/>
-          <p:nvPr/>
-        </p:nvSpPr>
-        <p:spPr>
-          <a:xfrm>
-            <a:off x="8061808" y="1810512"/>
-            <a:ext cx="3352648" cy="365760"/>
-          </a:xfrm>
-          <a:prstGeom prst="rect">
-            <a:avLst/>
-          </a:prstGeom>
-          <a:noFill/>
-          <a:ln/>
-        </p:spPr>
-        <p:txBody>
-          <a:bodyPr wrap="square" lIns="0" tIns="0" rIns="0" bIns="0" rtlCol="0" anchor="ctr"/>
-          <a:lstStyle/>
-          <a:p>
-            <a:pPr indent="0" marL="0">
-              <a:buNone/>
-            </a:pPr>
-            <a:r>
-              <a:rPr lang="en-US" sz="1600" b="1" dirty="0">
-                <a:solidFill>
-                  <a:srgbClr val="B8862B"/>
-                </a:solidFill>
-                <a:latin typeface="Malgun Gothic" pitchFamily="34" charset="0"/>
-                <a:ea typeface="Malgun Gothic" pitchFamily="34" charset="-122"/>
-                <a:cs typeface="Malgun Gothic" pitchFamily="34" charset="-120"/>
-              </a:rPr>
-              <a:t>이상신호 감지</a:t>
-            </a:r>
-            <a:endParaRPr lang="en-US" sz="1600" dirty="0"/>
-          </a:p>
-        </p:txBody>
-      </p:sp>
-      <p:sp>
-        <p:nvSpPr>
-          <p:cNvPr id="13" name="Text 11"/>
-          <p:cNvSpPr txBox="1"/>
-          <p:nvPr/>
-        </p:nvSpPr>
-        <p:spPr>
-          <a:xfrm>
-            <a:off x="6553048" y="2286000"/>
-            <a:ext cx="4815688" cy="1371600"/>
-          </a:xfrm>
-          <a:prstGeom prst="rect">
-            <a:avLst/>
-          </a:prstGeom>
-          <a:noFill/>
-          <a:ln/>
-        </p:spPr>
-        <p:txBody>
-          <a:bodyPr wrap="square" rtlCol="0" anchor="t"/>
-          <a:lstStyle/>
-          <a:p>
-            <a:pPr marL="342900" indent="-342900">
-              <a:spcAft>
-                <a:spcPts val="600"/>
-              </a:spcAft>
-              <a:buSzPct val="100000"/>
-              <a:buChar char="•"/>
-            </a:pPr>
-            <a:r>
-              <a:rPr lang="en-US" sz="1300" dirty="0">
-                <a:solidFill>
-                  <a:srgbClr val="1F2933"/>
-                </a:solidFill>
-                <a:latin typeface="Malgun Gothic" pitchFamily="34" charset="0"/>
-                <a:ea typeface="Malgun Gothic" pitchFamily="34" charset="-122"/>
-                <a:cs typeface="Malgun Gothic" pitchFamily="34" charset="-120"/>
-              </a:rPr>
-              <a:t>증상 반복 + 부정 감정 대화 감지</a:t>
-            </a:r>
-            <a:endParaRPr lang="en-US" sz="1300" dirty="0"/>
-          </a:p>
-          <a:p>
-            <a:pPr marL="342900" indent="-342900">
-              <a:spcAft>
-                <a:spcPts val="600"/>
-              </a:spcAft>
-              <a:buSzPct val="100000"/>
-              <a:buChar char="•"/>
-            </a:pPr>
-            <a:r>
-              <a:rPr lang="en-US" sz="1300" dirty="0">
-                <a:solidFill>
-                  <a:srgbClr val="1F2933"/>
-                </a:solidFill>
-                <a:latin typeface="Malgun Gothic" pitchFamily="34" charset="0"/>
-                <a:ea typeface="Malgun Gothic" pitchFamily="34" charset="-122"/>
-                <a:cs typeface="Malgun Gothic" pitchFamily="34" charset="-120"/>
-              </a:rPr>
-              <a:t>위기 키워드 시 즉시 긴급 알림</a:t>
-            </a:r>
-            <a:endParaRPr lang="en-US" sz="1300" dirty="0"/>
-          </a:p>
-          <a:p>
-            <a:pPr marL="342900" indent="-342900">
-              <a:spcAft>
-                <a:spcPts val="600"/>
-              </a:spcAft>
-              <a:buSzPct val="100000"/>
-              <a:buChar char="•"/>
-            </a:pPr>
-            <a:r>
-              <a:rPr lang="en-US" sz="1300" dirty="0">
-                <a:solidFill>
-                  <a:srgbClr val="1F2933"/>
-                </a:solidFill>
-                <a:latin typeface="Malgun Gothic" pitchFamily="34" charset="0"/>
-                <a:ea typeface="Malgun Gothic" pitchFamily="34" charset="-122"/>
-                <a:cs typeface="Malgun Gothic" pitchFamily="34" charset="-120"/>
-              </a:rPr>
-              <a:t>→ 사회복지사 알림 요약 생성</a:t>
-            </a:r>
-            <a:endParaRPr lang="en-US" sz="1300" dirty="0"/>
-          </a:p>
-        </p:txBody>
-      </p:sp>
-      <p:sp>
-        <p:nvSpPr>
-          <p:cNvPr id="14" name="Shape 12"/>
-          <p:cNvSpPr/>
-          <p:nvPr/>
-        </p:nvSpPr>
-        <p:spPr>
-          <a:xfrm>
-            <a:off x="548640" y="3977640"/>
-            <a:ext cx="3454298" cy="1783080"/>
-          </a:xfrm>
-          <a:prstGeom prst="roundRect">
-            <a:avLst>
-              <a:gd name="adj" fmla="val 4615"/>
-            </a:avLst>
-          </a:prstGeom>
-          <a:solidFill>
-            <a:srgbClr val="FFFFFF"/>
+            <a:srgbClr val="F4F7FC"/>
           </a:solidFill>
           <a:ln w="12700">
             <a:solidFill>
@@ -7042,80 +9292,34 @@
             </a:solidFill>
             <a:prstDash val="solid"/>
           </a:ln>
-          <a:effectLst>
-            <a:outerShdw sx="100000" sy="100000" kx="0" ky="0" algn="bl" rotWithShape="0" blurRad="76200" dist="25400" dir="5400000">
-              <a:srgbClr val="9AA5B5">
-                <a:alpha val="35000"/>
-              </a:srgbClr>
-            </a:outerShdw>
-          </a:effectLst>
-        </p:spPr>
-      </p:sp>
-      <p:sp>
-        <p:nvSpPr>
-          <p:cNvPr id="15" name="Text 13"/>
-          <p:cNvSpPr txBox="1"/>
-          <p:nvPr/>
-        </p:nvSpPr>
-        <p:spPr>
-          <a:xfrm>
-            <a:off x="731520" y="4160520"/>
-            <a:ext cx="3088538" cy="731520"/>
-          </a:xfrm>
-          <a:prstGeom prst="rect">
-            <a:avLst/>
-          </a:prstGeom>
-          <a:noFill/>
-          <a:ln/>
-        </p:spPr>
-        <p:txBody>
-          <a:bodyPr wrap="square" lIns="0" tIns="0" rIns="0" bIns="0" rtlCol="0" anchor="ctr"/>
-          <a:lstStyle/>
-          <a:p>
-            <a:pPr indent="0" marL="0">
-              <a:buNone/>
-            </a:pPr>
-            <a:r>
-              <a:rPr lang="en-US" sz="3600" b="1" dirty="0">
-                <a:solidFill>
-                  <a:srgbClr val="0F2F6F"/>
-                </a:solidFill>
-                <a:latin typeface="Malgun Gothic" pitchFamily="34" charset="0"/>
-                <a:ea typeface="Malgun Gothic" pitchFamily="34" charset="-122"/>
-                <a:cs typeface="Malgun Gothic" pitchFamily="34" charset="-120"/>
-              </a:rPr>
-              <a:t>3,455개</a:t>
-            </a:r>
-            <a:endParaRPr lang="en-US" sz="3600" dirty="0"/>
-          </a:p>
-        </p:txBody>
-      </p:sp>
-      <p:sp>
-        <p:nvSpPr>
-          <p:cNvPr id="16" name="Text 14"/>
-          <p:cNvSpPr txBox="1"/>
-          <p:nvPr/>
-        </p:nvSpPr>
-        <p:spPr>
-          <a:xfrm>
-            <a:off x="731520" y="4919472"/>
-            <a:ext cx="3088538" cy="320040"/>
-          </a:xfrm>
-          <a:prstGeom prst="rect">
-            <a:avLst/>
-          </a:prstGeom>
-          <a:noFill/>
-          <a:ln/>
-        </p:spPr>
-        <p:txBody>
-          <a:bodyPr wrap="square" lIns="0" tIns="0" rIns="0" bIns="0" rtlCol="0" anchor="ctr"/>
-          <a:lstStyle/>
-          <a:p>
-            <a:pPr indent="0" marL="0">
-              <a:buNone/>
-            </a:pPr>
-            <a:r>
-              <a:rPr lang="en-US" sz="1400" b="1" dirty="0">
+        </p:spPr>
+      </p:sp>
+      <p:sp>
+        <p:nvSpPr>
+          <p:cNvPr id="11" name="Text 9"/>
+          <p:cNvSpPr txBox="1"/>
+          <p:nvPr/>
+        </p:nvSpPr>
+        <p:spPr>
+          <a:xfrm>
+            <a:off x="6126480" y="1600200"/>
+            <a:ext cx="2560320" cy="658368"/>
+          </a:xfrm>
+          <a:prstGeom prst="rect">
+            <a:avLst/>
+          </a:prstGeom>
+          <a:noFill/>
+          <a:ln/>
+        </p:spPr>
+        <p:txBody>
+          <a:bodyPr wrap="square" lIns="0" tIns="0" rIns="0" bIns="0" rtlCol="0" anchor="ctr"/>
+          <a:lstStyle/>
+          <a:p>
+            <a:pPr algn="ctr" indent="0" marL="0">
+              <a:buNone/>
+            </a:pPr>
+            <a:r>
+              <a:rPr lang="en-US" sz="1350" b="1" dirty="0">
                 <a:solidFill>
                   <a:srgbClr val="1F2933"/>
                 </a:solidFill>
@@ -7123,38 +9327,16 @@
                 <a:ea typeface="Malgun Gothic" pitchFamily="34" charset="-122"/>
                 <a:cs typeface="Malgun Gothic" pitchFamily="34" charset="-120"/>
               </a:rPr>
-              <a:t>색인 청크</a:t>
-            </a:r>
-            <a:endParaRPr lang="en-US" sz="1400" dirty="0"/>
-          </a:p>
-        </p:txBody>
-      </p:sp>
-      <p:sp>
-        <p:nvSpPr>
-          <p:cNvPr id="17" name="Text 15"/>
-          <p:cNvSpPr txBox="1"/>
-          <p:nvPr/>
-        </p:nvSpPr>
-        <p:spPr>
-          <a:xfrm>
-            <a:off x="731520" y="5230368"/>
-            <a:ext cx="3088538" cy="457200"/>
-          </a:xfrm>
-          <a:prstGeom prst="rect">
-            <a:avLst/>
-          </a:prstGeom>
-          <a:noFill/>
-          <a:ln/>
-        </p:spPr>
-        <p:txBody>
-          <a:bodyPr wrap="square" lIns="0" tIns="0" rIns="0" bIns="0" rtlCol="0" anchor="ctr"/>
-          <a:lstStyle/>
-          <a:p>
-            <a:pPr indent="0" marL="0">
-              <a:buNone/>
-            </a:pPr>
-            <a:r>
-              <a:rPr lang="en-US" sz="1100" dirty="0">
+              <a:t>의도 라우팅</a:t>
+            </a:r>
+            <a:endParaRPr lang="en-US" sz="1350" dirty="0"/>
+          </a:p>
+          <a:p>
+            <a:pPr algn="ctr" indent="0" marL="0">
+              <a:buNone/>
+            </a:pPr>
+            <a:r>
+              <a:rPr lang="en-US" sz="1050" dirty="0">
                 <a:solidFill>
                   <a:srgbClr val="5B6673"/>
                 </a:solidFill>
@@ -7162,30 +9344,428 @@
                 <a:ea typeface="Malgun Gothic" pitchFamily="34" charset="-122"/>
                 <a:cs typeface="Malgun Gothic" pitchFamily="34" charset="-120"/>
               </a:rPr>
-              <a:t>보건복지부 사업안내 + 대전 공개데이터</a:t>
-            </a:r>
-            <a:endParaRPr lang="en-US" sz="1100" dirty="0"/>
-          </a:p>
-        </p:txBody>
-      </p:sp>
-      <p:sp>
-        <p:nvSpPr>
-          <p:cNvPr id="18" name="Shape 16"/>
+              <a:t>인사·잡담 vs 복지 질문</a:t>
+            </a:r>
+            <a:endParaRPr lang="en-US" sz="1350" dirty="0"/>
+          </a:p>
+        </p:txBody>
+      </p:sp>
+      <p:sp>
+        <p:nvSpPr>
+          <p:cNvPr id="12" name="Shape 10"/>
           <p:cNvSpPr/>
           <p:nvPr/>
         </p:nvSpPr>
         <p:spPr>
           <a:xfrm>
-            <a:off x="4368698" y="3977640"/>
-            <a:ext cx="3454298" cy="1783080"/>
+            <a:off x="2377440" y="2258568"/>
+            <a:ext cx="0" cy="530352"/>
+          </a:xfrm>
+          <a:prstGeom prst="line">
+            <a:avLst/>
+          </a:prstGeom>
+          <a:noFill/>
+          <a:ln w="31750">
+            <a:solidFill>
+              <a:srgbClr val="E0A83C"/>
+            </a:solidFill>
+            <a:prstDash val="solid"/>
+            <a:tailEnd type="triangle"/>
+          </a:ln>
+        </p:spPr>
+      </p:sp>
+      <p:sp>
+        <p:nvSpPr>
+          <p:cNvPr id="13" name="Shape 11"/>
+          <p:cNvSpPr/>
+          <p:nvPr/>
+        </p:nvSpPr>
+        <p:spPr>
+          <a:xfrm>
+            <a:off x="9707728" y="2258568"/>
+            <a:ext cx="0" cy="530352"/>
+          </a:xfrm>
+          <a:prstGeom prst="line">
+            <a:avLst/>
+          </a:prstGeom>
+          <a:noFill/>
+          <a:ln w="31750">
+            <a:solidFill>
+              <a:srgbClr val="E0A83C"/>
+            </a:solidFill>
+            <a:prstDash val="solid"/>
+            <a:tailEnd type="triangle"/>
+          </a:ln>
+        </p:spPr>
+      </p:sp>
+      <p:sp>
+        <p:nvSpPr>
+          <p:cNvPr id="14" name="Shape 12"/>
+          <p:cNvSpPr/>
+          <p:nvPr/>
+        </p:nvSpPr>
+        <p:spPr>
+          <a:xfrm>
+            <a:off x="548640" y="2788920"/>
+            <a:ext cx="6766560" cy="1874520"/>
           </a:xfrm>
           <a:prstGeom prst="roundRect">
             <a:avLst>
-              <a:gd name="adj" fmla="val 4615"/>
+              <a:gd name="adj" fmla="val 3902"/>
             </a:avLst>
           </a:prstGeom>
           <a:solidFill>
-            <a:srgbClr val="FFFFFF"/>
+            <a:srgbClr val="EAF0FA"/>
+          </a:solidFill>
+          <a:ln w="15240">
+            <a:solidFill>
+              <a:srgbClr val="0F2F6F"/>
+            </a:solidFill>
+            <a:prstDash val="solid"/>
+          </a:ln>
+        </p:spPr>
+      </p:sp>
+      <p:sp>
+        <p:nvSpPr>
+          <p:cNvPr id="15" name="Text 13"/>
+          <p:cNvSpPr txBox="1"/>
+          <p:nvPr/>
+        </p:nvSpPr>
+        <p:spPr>
+          <a:xfrm>
+            <a:off x="777240" y="2898648"/>
+            <a:ext cx="6309360" cy="320040"/>
+          </a:xfrm>
+          <a:prstGeom prst="rect">
+            <a:avLst/>
+          </a:prstGeom>
+          <a:noFill/>
+          <a:ln/>
+        </p:spPr>
+        <p:txBody>
+          <a:bodyPr wrap="square" lIns="0" tIns="0" rIns="0" bIns="0" rtlCol="0" anchor="ctr"/>
+          <a:lstStyle/>
+          <a:p>
+            <a:pPr indent="0" marL="0">
+              <a:buNone/>
+            </a:pPr>
+            <a:r>
+              <a:rPr lang="en-US" sz="1500" b="1" dirty="0">
+                <a:solidFill>
+                  <a:srgbClr val="0F2F6F"/>
+                </a:solidFill>
+                <a:latin typeface="Malgun Gothic" pitchFamily="34" charset="0"/>
+                <a:ea typeface="Malgun Gothic" pitchFamily="34" charset="-122"/>
+                <a:cs typeface="Malgun Gothic" pitchFamily="34" charset="-120"/>
+              </a:rPr>
+              <a:t>Layer 1 · 복지 안내 (RAG)</a:t>
+            </a:r>
+            <a:endParaRPr lang="en-US" sz="1500" dirty="0"/>
+          </a:p>
+        </p:txBody>
+      </p:sp>
+      <p:sp>
+        <p:nvSpPr>
+          <p:cNvPr id="16" name="Text 14"/>
+          <p:cNvSpPr txBox="1"/>
+          <p:nvPr/>
+        </p:nvSpPr>
+        <p:spPr>
+          <a:xfrm>
+            <a:off x="822960" y="3246120"/>
+            <a:ext cx="6217920" cy="1371600"/>
+          </a:xfrm>
+          <a:prstGeom prst="rect">
+            <a:avLst/>
+          </a:prstGeom>
+          <a:noFill/>
+          <a:ln/>
+        </p:spPr>
+        <p:txBody>
+          <a:bodyPr wrap="square" rtlCol="0" anchor="t"/>
+          <a:lstStyle/>
+          <a:p>
+            <a:pPr marL="342900" indent="-342900">
+              <a:spcAft>
+                <a:spcPts val="600"/>
+              </a:spcAft>
+              <a:buSzPct val="100000"/>
+              <a:buChar char="•"/>
+            </a:pPr>
+            <a:r>
+              <a:rPr lang="en-US" sz="1250" dirty="0">
+                <a:solidFill>
+                  <a:srgbClr val="1F2933"/>
+                </a:solidFill>
+                <a:latin typeface="Malgun Gothic" pitchFamily="34" charset="0"/>
+                <a:ea typeface="Malgun Gothic" pitchFamily="34" charset="-122"/>
+                <a:cs typeface="Malgun Gothic" pitchFamily="34" charset="-120"/>
+              </a:rPr>
+              <a:t>정제 → 섹션 청킹 → bge-m3 임베딩</a:t>
+            </a:r>
+            <a:endParaRPr lang="en-US" sz="1250" dirty="0"/>
+          </a:p>
+          <a:p>
+            <a:pPr marL="342900" indent="-342900">
+              <a:spcAft>
+                <a:spcPts val="600"/>
+              </a:spcAft>
+              <a:buSzPct val="100000"/>
+              <a:buChar char="•"/>
+            </a:pPr>
+            <a:r>
+              <a:rPr lang="en-US" sz="1250" dirty="0">
+                <a:solidFill>
+                  <a:srgbClr val="1F2933"/>
+                </a:solidFill>
+                <a:latin typeface="Malgun Gothic" pitchFamily="34" charset="0"/>
+                <a:ea typeface="Malgun Gothic" pitchFamily="34" charset="-122"/>
+                <a:cs typeface="Malgun Gothic" pitchFamily="34" charset="-120"/>
+              </a:rPr>
+              <a:t>ChromaDB 후보 10 → cross-encoder 재랭킹</a:t>
+            </a:r>
+            <a:endParaRPr lang="en-US" sz="1250" dirty="0"/>
+          </a:p>
+          <a:p>
+            <a:pPr marL="342900" indent="-342900">
+              <a:spcAft>
+                <a:spcPts val="600"/>
+              </a:spcAft>
+              <a:buSzPct val="100000"/>
+              <a:buChar char="•"/>
+            </a:pPr>
+            <a:r>
+              <a:rPr lang="en-US" sz="1250" dirty="0">
+                <a:solidFill>
+                  <a:srgbClr val="1F2933"/>
+                </a:solidFill>
+                <a:latin typeface="Malgun Gothic" pitchFamily="34" charset="0"/>
+                <a:ea typeface="Malgun Gothic" pitchFamily="34" charset="-122"/>
+                <a:cs typeface="Malgun Gothic" pitchFamily="34" charset="-120"/>
+              </a:rPr>
+              <a:t>관련성 게이트 → 상위 3개 근거 선택</a:t>
+            </a:r>
+            <a:endParaRPr lang="en-US" sz="1250" dirty="0"/>
+          </a:p>
+        </p:txBody>
+      </p:sp>
+      <p:sp>
+        <p:nvSpPr>
+          <p:cNvPr id="17" name="Shape 15"/>
+          <p:cNvSpPr/>
+          <p:nvPr/>
+        </p:nvSpPr>
+        <p:spPr>
+          <a:xfrm>
+            <a:off x="7772400" y="2788920"/>
+            <a:ext cx="3870655" cy="1874520"/>
+          </a:xfrm>
+          <a:prstGeom prst="roundRect">
+            <a:avLst>
+              <a:gd name="adj" fmla="val 3902"/>
+            </a:avLst>
+          </a:prstGeom>
+          <a:solidFill>
+            <a:srgbClr val="FBF3E3"/>
+          </a:solidFill>
+          <a:ln w="15240">
+            <a:solidFill>
+              <a:srgbClr val="E0A83C"/>
+            </a:solidFill>
+            <a:prstDash val="solid"/>
+          </a:ln>
+        </p:spPr>
+      </p:sp>
+      <p:sp>
+        <p:nvSpPr>
+          <p:cNvPr id="18" name="Text 16"/>
+          <p:cNvSpPr txBox="1"/>
+          <p:nvPr/>
+        </p:nvSpPr>
+        <p:spPr>
+          <a:xfrm>
+            <a:off x="8001000" y="2898648"/>
+            <a:ext cx="3413455" cy="320040"/>
+          </a:xfrm>
+          <a:prstGeom prst="rect">
+            <a:avLst/>
+          </a:prstGeom>
+          <a:noFill/>
+          <a:ln/>
+        </p:spPr>
+        <p:txBody>
+          <a:bodyPr wrap="square" lIns="0" tIns="0" rIns="0" bIns="0" rtlCol="0" anchor="ctr"/>
+          <a:lstStyle/>
+          <a:p>
+            <a:pPr indent="0" marL="0">
+              <a:buNone/>
+            </a:pPr>
+            <a:r>
+              <a:rPr lang="en-US" sz="1500" b="1" dirty="0">
+                <a:solidFill>
+                  <a:srgbClr val="B8862B"/>
+                </a:solidFill>
+                <a:latin typeface="Malgun Gothic" pitchFamily="34" charset="0"/>
+                <a:ea typeface="Malgun Gothic" pitchFamily="34" charset="-122"/>
+                <a:cs typeface="Malgun Gothic" pitchFamily="34" charset="-120"/>
+              </a:rPr>
+              <a:t>Layer 2 · 이상신호 감지</a:t>
+            </a:r>
+            <a:endParaRPr lang="en-US" sz="1500" dirty="0"/>
+          </a:p>
+        </p:txBody>
+      </p:sp>
+      <p:sp>
+        <p:nvSpPr>
+          <p:cNvPr id="19" name="Text 17"/>
+          <p:cNvSpPr txBox="1"/>
+          <p:nvPr/>
+        </p:nvSpPr>
+        <p:spPr>
+          <a:xfrm>
+            <a:off x="8046720" y="3246120"/>
+            <a:ext cx="3322015" cy="1371600"/>
+          </a:xfrm>
+          <a:prstGeom prst="rect">
+            <a:avLst/>
+          </a:prstGeom>
+          <a:noFill/>
+          <a:ln/>
+        </p:spPr>
+        <p:txBody>
+          <a:bodyPr wrap="square" rtlCol="0" anchor="t"/>
+          <a:lstStyle/>
+          <a:p>
+            <a:pPr marL="342900" indent="-342900">
+              <a:spcAft>
+                <a:spcPts val="600"/>
+              </a:spcAft>
+              <a:buSzPct val="100000"/>
+              <a:buChar char="•"/>
+            </a:pPr>
+            <a:r>
+              <a:rPr lang="en-US" sz="1250" dirty="0">
+                <a:solidFill>
+                  <a:srgbClr val="1F2933"/>
+                </a:solidFill>
+                <a:latin typeface="Malgun Gothic" pitchFamily="34" charset="0"/>
+                <a:ea typeface="Malgun Gothic" pitchFamily="34" charset="-122"/>
+                <a:cs typeface="Malgun Gothic" pitchFamily="34" charset="-120"/>
+              </a:rPr>
+              <a:t>증상 반복 카운트</a:t>
+            </a:r>
+            <a:endParaRPr lang="en-US" sz="1250" dirty="0"/>
+          </a:p>
+          <a:p>
+            <a:pPr marL="342900" indent="-342900">
+              <a:spcAft>
+                <a:spcPts val="600"/>
+              </a:spcAft>
+              <a:buSzPct val="100000"/>
+              <a:buChar char="•"/>
+            </a:pPr>
+            <a:r>
+              <a:rPr lang="en-US" sz="1250" dirty="0">
+                <a:solidFill>
+                  <a:srgbClr val="1F2933"/>
+                </a:solidFill>
+                <a:latin typeface="Malgun Gothic" pitchFamily="34" charset="0"/>
+                <a:ea typeface="Malgun Gothic" pitchFamily="34" charset="-122"/>
+                <a:cs typeface="Malgun Gothic" pitchFamily="34" charset="-120"/>
+              </a:rPr>
+              <a:t>부정 감정 점수</a:t>
+            </a:r>
+            <a:endParaRPr lang="en-US" sz="1250" dirty="0"/>
+          </a:p>
+          <a:p>
+            <a:pPr marL="342900" indent="-342900">
+              <a:spcAft>
+                <a:spcPts val="600"/>
+              </a:spcAft>
+              <a:buSzPct val="100000"/>
+              <a:buChar char="•"/>
+            </a:pPr>
+            <a:r>
+              <a:rPr lang="en-US" sz="1250" dirty="0">
+                <a:solidFill>
+                  <a:srgbClr val="1F2933"/>
+                </a:solidFill>
+                <a:latin typeface="Malgun Gothic" pitchFamily="34" charset="0"/>
+                <a:ea typeface="Malgun Gothic" pitchFamily="34" charset="-122"/>
+                <a:cs typeface="Malgun Gothic" pitchFamily="34" charset="-120"/>
+              </a:rPr>
+              <a:t>개인 baseline 대비 변화</a:t>
+            </a:r>
+            <a:endParaRPr lang="en-US" sz="1250" dirty="0"/>
+          </a:p>
+        </p:txBody>
+      </p:sp>
+      <p:sp>
+        <p:nvSpPr>
+          <p:cNvPr id="20" name="Shape 18"/>
+          <p:cNvSpPr/>
+          <p:nvPr/>
+        </p:nvSpPr>
+        <p:spPr>
+          <a:xfrm>
+            <a:off x="2377440" y="4663440"/>
+            <a:ext cx="0" cy="365760"/>
+          </a:xfrm>
+          <a:prstGeom prst="line">
+            <a:avLst/>
+          </a:prstGeom>
+          <a:noFill/>
+          <a:ln w="31750">
+            <a:solidFill>
+              <a:srgbClr val="E0A83C"/>
+            </a:solidFill>
+            <a:prstDash val="solid"/>
+            <a:tailEnd type="triangle"/>
+          </a:ln>
+        </p:spPr>
+      </p:sp>
+      <p:sp>
+        <p:nvSpPr>
+          <p:cNvPr id="21" name="Shape 19"/>
+          <p:cNvSpPr/>
+          <p:nvPr/>
+        </p:nvSpPr>
+        <p:spPr>
+          <a:xfrm>
+            <a:off x="9707728" y="4663440"/>
+            <a:ext cx="0" cy="365760"/>
+          </a:xfrm>
+          <a:prstGeom prst="line">
+            <a:avLst/>
+          </a:prstGeom>
+          <a:noFill/>
+          <a:ln w="31750">
+            <a:solidFill>
+              <a:srgbClr val="E0A83C"/>
+            </a:solidFill>
+            <a:prstDash val="solid"/>
+            <a:tailEnd type="triangle"/>
+          </a:ln>
+        </p:spPr>
+      </p:sp>
+      <p:sp>
+        <p:nvSpPr>
+          <p:cNvPr id="22" name="Shape 20"/>
+          <p:cNvSpPr/>
+          <p:nvPr/>
+        </p:nvSpPr>
+        <p:spPr>
+          <a:xfrm>
+            <a:off x="548640" y="5029200"/>
+            <a:ext cx="6766560" cy="685800"/>
+          </a:xfrm>
+          <a:prstGeom prst="roundRect">
+            <a:avLst>
+              <a:gd name="adj" fmla="val 9333"/>
+            </a:avLst>
+          </a:prstGeom>
+          <a:solidFill>
+            <a:srgbClr val="0F2F6F"/>
           </a:solidFill>
           <a:ln w="12700">
             <a:solidFill>
@@ -7193,150 +9773,82 @@
             </a:solidFill>
             <a:prstDash val="solid"/>
           </a:ln>
-          <a:effectLst>
-            <a:outerShdw sx="100000" sy="100000" kx="0" ky="0" algn="bl" rotWithShape="0" blurRad="76200" dist="25400" dir="5400000">
-              <a:srgbClr val="9AA5B5">
-                <a:alpha val="35000"/>
-              </a:srgbClr>
-            </a:outerShdw>
-          </a:effectLst>
-        </p:spPr>
-      </p:sp>
-      <p:sp>
-        <p:nvSpPr>
-          <p:cNvPr id="19" name="Text 17"/>
-          <p:cNvSpPr txBox="1"/>
-          <p:nvPr/>
-        </p:nvSpPr>
-        <p:spPr>
-          <a:xfrm>
-            <a:off x="4551578" y="4160520"/>
-            <a:ext cx="3088538" cy="731520"/>
-          </a:xfrm>
-          <a:prstGeom prst="rect">
-            <a:avLst/>
-          </a:prstGeom>
-          <a:noFill/>
-          <a:ln/>
-        </p:spPr>
-        <p:txBody>
-          <a:bodyPr wrap="square" lIns="0" tIns="0" rIns="0" bIns="0" rtlCol="0" anchor="ctr"/>
-          <a:lstStyle/>
-          <a:p>
-            <a:pPr indent="0" marL="0">
-              <a:buNone/>
-            </a:pPr>
-            <a:r>
-              <a:rPr lang="en-US" sz="3600" b="1" dirty="0">
-                <a:solidFill>
-                  <a:srgbClr val="0F2F6F"/>
-                </a:solidFill>
-                <a:latin typeface="Malgun Gothic" pitchFamily="34" charset="0"/>
-                <a:ea typeface="Malgun Gothic" pitchFamily="34" charset="-122"/>
-                <a:cs typeface="Malgun Gothic" pitchFamily="34" charset="-120"/>
-              </a:rPr>
-              <a:t>92%</a:t>
-            </a:r>
-            <a:endParaRPr lang="en-US" sz="3600" dirty="0"/>
-          </a:p>
-        </p:txBody>
-      </p:sp>
-      <p:sp>
-        <p:nvSpPr>
-          <p:cNvPr id="20" name="Text 18"/>
-          <p:cNvSpPr txBox="1"/>
-          <p:nvPr/>
-        </p:nvSpPr>
-        <p:spPr>
-          <a:xfrm>
-            <a:off x="4551578" y="4919472"/>
-            <a:ext cx="3088538" cy="320040"/>
-          </a:xfrm>
-          <a:prstGeom prst="rect">
-            <a:avLst/>
-          </a:prstGeom>
-          <a:noFill/>
-          <a:ln/>
-        </p:spPr>
-        <p:txBody>
-          <a:bodyPr wrap="square" lIns="0" tIns="0" rIns="0" bIns="0" rtlCol="0" anchor="ctr"/>
-          <a:lstStyle/>
-          <a:p>
-            <a:pPr indent="0" marL="0">
-              <a:buNone/>
-            </a:pPr>
-            <a:r>
-              <a:rPr lang="en-US" sz="1400" b="1" dirty="0">
-                <a:solidFill>
-                  <a:srgbClr val="1F2933"/>
-                </a:solidFill>
-                <a:latin typeface="Malgun Gothic" pitchFamily="34" charset="0"/>
-                <a:ea typeface="Malgun Gothic" pitchFamily="34" charset="-122"/>
-                <a:cs typeface="Malgun Gothic" pitchFamily="34" charset="-120"/>
-              </a:rPr>
-              <a:t>200문항 정답률</a:t>
-            </a:r>
-            <a:endParaRPr lang="en-US" sz="1400" dirty="0"/>
-          </a:p>
-        </p:txBody>
-      </p:sp>
-      <p:sp>
-        <p:nvSpPr>
-          <p:cNvPr id="21" name="Text 19"/>
-          <p:cNvSpPr txBox="1"/>
-          <p:nvPr/>
-        </p:nvSpPr>
-        <p:spPr>
-          <a:xfrm>
-            <a:off x="4551578" y="5230368"/>
-            <a:ext cx="3088538" cy="457200"/>
-          </a:xfrm>
-          <a:prstGeom prst="rect">
-            <a:avLst/>
-          </a:prstGeom>
-          <a:noFill/>
-          <a:ln/>
-        </p:spPr>
-        <p:txBody>
-          <a:bodyPr wrap="square" lIns="0" tIns="0" rIns="0" bIns="0" rtlCol="0" anchor="ctr"/>
-          <a:lstStyle/>
-          <a:p>
-            <a:pPr indent="0" marL="0">
-              <a:buNone/>
-            </a:pPr>
-            <a:r>
-              <a:rPr lang="en-US" sz="1100" dirty="0">
-                <a:solidFill>
-                  <a:srgbClr val="5B6673"/>
-                </a:solidFill>
-                <a:latin typeface="Malgun Gothic" pitchFamily="34" charset="0"/>
-                <a:ea typeface="Malgun Gothic" pitchFamily="34" charset="-122"/>
-                <a:cs typeface="Malgun Gothic" pitchFamily="34" charset="-120"/>
-              </a:rPr>
-              <a:t>범위 밖 거절 100% · 사실정확도 98%</a:t>
-            </a:r>
-            <a:endParaRPr lang="en-US" sz="1100" dirty="0"/>
-          </a:p>
-        </p:txBody>
-      </p:sp>
-      <p:sp>
-        <p:nvSpPr>
-          <p:cNvPr id="22" name="Shape 20"/>
+        </p:spPr>
+      </p:sp>
+      <p:sp>
+        <p:nvSpPr>
+          <p:cNvPr id="23" name="Text 21"/>
+          <p:cNvSpPr txBox="1"/>
+          <p:nvPr/>
+        </p:nvSpPr>
+        <p:spPr>
+          <a:xfrm>
+            <a:off x="640080" y="5029200"/>
+            <a:ext cx="6583680" cy="685800"/>
+          </a:xfrm>
+          <a:prstGeom prst="rect">
+            <a:avLst/>
+          </a:prstGeom>
+          <a:noFill/>
+          <a:ln/>
+        </p:spPr>
+        <p:txBody>
+          <a:bodyPr wrap="square" lIns="0" tIns="0" rIns="0" bIns="0" rtlCol="0" anchor="ctr"/>
+          <a:lstStyle/>
+          <a:p>
+            <a:pPr algn="ctr" indent="0" marL="0">
+              <a:buNone/>
+            </a:pPr>
+            <a:r>
+              <a:rPr lang="en-US" sz="1350" b="1" dirty="0">
+                <a:solidFill>
+                  <a:srgbClr val="FFFFFF"/>
+                </a:solidFill>
+                <a:latin typeface="Malgun Gothic" pitchFamily="34" charset="0"/>
+                <a:ea typeface="Malgun Gothic" pitchFamily="34" charset="-122"/>
+                <a:cs typeface="Malgun Gothic" pitchFamily="34" charset="-120"/>
+              </a:rPr>
+              <a:t>로컬 LLM (EXAONE 3.5)</a:t>
+            </a:r>
+            <a:endParaRPr lang="en-US" sz="1350" dirty="0"/>
+          </a:p>
+          <a:p>
+            <a:pPr algn="ctr" indent="0" marL="0">
+              <a:buNone/>
+            </a:pPr>
+            <a:r>
+              <a:rPr lang="en-US" sz="1050" dirty="0">
+                <a:solidFill>
+                  <a:srgbClr val="CADCFC"/>
+                </a:solidFill>
+                <a:latin typeface="Malgun Gothic" pitchFamily="34" charset="0"/>
+                <a:ea typeface="Malgun Gothic" pitchFamily="34" charset="-122"/>
+                <a:cs typeface="Malgun Gothic" pitchFamily="34" charset="-120"/>
+              </a:rPr>
+              <a:t>검색 근거로만 한국어 답변</a:t>
+            </a:r>
+            <a:endParaRPr lang="en-US" sz="1350" dirty="0"/>
+          </a:p>
+        </p:txBody>
+      </p:sp>
+      <p:sp>
+        <p:nvSpPr>
+          <p:cNvPr id="24" name="Shape 22"/>
           <p:cNvSpPr/>
           <p:nvPr/>
         </p:nvSpPr>
         <p:spPr>
           <a:xfrm>
-            <a:off x="8188757" y="3977640"/>
-            <a:ext cx="3454298" cy="1783080"/>
+            <a:off x="7772400" y="5029200"/>
+            <a:ext cx="3870655" cy="685800"/>
           </a:xfrm>
           <a:prstGeom prst="roundRect">
             <a:avLst>
-              <a:gd name="adj" fmla="val 4615"/>
+              <a:gd name="adj" fmla="val 9333"/>
             </a:avLst>
           </a:prstGeom>
           <a:solidFill>
-            <a:srgbClr val="FFFFFF"/>
+            <a:srgbClr val="E0A83C"/>
           </a:solidFill>
           <a:ln w="12700">
             <a:solidFill>
@@ -7344,129 +9856,102 @@
             </a:solidFill>
             <a:prstDash val="solid"/>
           </a:ln>
-          <a:effectLst>
-            <a:outerShdw sx="100000" sy="100000" kx="0" ky="0" algn="bl" rotWithShape="0" blurRad="76200" dist="25400" dir="5400000">
-              <a:srgbClr val="9AA5B5">
-                <a:alpha val="35000"/>
-              </a:srgbClr>
-            </a:outerShdw>
-          </a:effectLst>
-        </p:spPr>
-      </p:sp>
-      <p:sp>
-        <p:nvSpPr>
-          <p:cNvPr id="23" name="Text 21"/>
-          <p:cNvSpPr txBox="1"/>
-          <p:nvPr/>
-        </p:nvSpPr>
-        <p:spPr>
-          <a:xfrm>
-            <a:off x="8371637" y="4160520"/>
-            <a:ext cx="3088538" cy="731520"/>
-          </a:xfrm>
-          <a:prstGeom prst="rect">
-            <a:avLst/>
-          </a:prstGeom>
-          <a:noFill/>
-          <a:ln/>
-        </p:spPr>
-        <p:txBody>
-          <a:bodyPr wrap="square" lIns="0" tIns="0" rIns="0" bIns="0" rtlCol="0" anchor="ctr"/>
-          <a:lstStyle/>
-          <a:p>
-            <a:pPr indent="0" marL="0">
-              <a:buNone/>
-            </a:pPr>
-            <a:r>
-              <a:rPr lang="en-US" sz="3600" b="1" dirty="0">
-                <a:solidFill>
-                  <a:srgbClr val="B8862B"/>
-                </a:solidFill>
-                <a:latin typeface="Malgun Gothic" pitchFamily="34" charset="0"/>
-                <a:ea typeface="Malgun Gothic" pitchFamily="34" charset="-122"/>
-                <a:cs typeface="Malgun Gothic" pitchFamily="34" charset="-120"/>
-              </a:rPr>
-              <a:t>+14%p</a:t>
-            </a:r>
-            <a:endParaRPr lang="en-US" sz="3600" dirty="0"/>
-          </a:p>
-        </p:txBody>
-      </p:sp>
-      <p:sp>
-        <p:nvSpPr>
-          <p:cNvPr id="24" name="Text 22"/>
-          <p:cNvSpPr txBox="1"/>
-          <p:nvPr/>
-        </p:nvSpPr>
-        <p:spPr>
-          <a:xfrm>
-            <a:off x="8371637" y="4919472"/>
-            <a:ext cx="3088538" cy="320040"/>
-          </a:xfrm>
-          <a:prstGeom prst="rect">
-            <a:avLst/>
-          </a:prstGeom>
-          <a:noFill/>
-          <a:ln/>
-        </p:spPr>
-        <p:txBody>
-          <a:bodyPr wrap="square" lIns="0" tIns="0" rIns="0" bIns="0" rtlCol="0" anchor="ctr"/>
-          <a:lstStyle/>
-          <a:p>
-            <a:pPr indent="0" marL="0">
+        </p:spPr>
+      </p:sp>
+      <p:sp>
+        <p:nvSpPr>
+          <p:cNvPr id="25" name="Text 23"/>
+          <p:cNvSpPr txBox="1"/>
+          <p:nvPr/>
+        </p:nvSpPr>
+        <p:spPr>
+          <a:xfrm>
+            <a:off x="7863840" y="5029200"/>
+            <a:ext cx="3687775" cy="685800"/>
+          </a:xfrm>
+          <a:prstGeom prst="rect">
+            <a:avLst/>
+          </a:prstGeom>
+          <a:noFill/>
+          <a:ln/>
+        </p:spPr>
+        <p:txBody>
+          <a:bodyPr wrap="square" lIns="0" tIns="0" rIns="0" bIns="0" rtlCol="0" anchor="ctr"/>
+          <a:lstStyle/>
+          <a:p>
+            <a:pPr algn="ctr" indent="0" marL="0">
+              <a:buNone/>
+            </a:pPr>
+            <a:r>
+              <a:rPr lang="en-US" sz="1350" b="1" dirty="0">
+                <a:solidFill>
+                  <a:srgbClr val="FFFFFF"/>
+                </a:solidFill>
+                <a:latin typeface="Malgun Gothic" pitchFamily="34" charset="0"/>
+                <a:ea typeface="Malgun Gothic" pitchFamily="34" charset="-122"/>
+                <a:cs typeface="Malgun Gothic" pitchFamily="34" charset="-120"/>
+              </a:rPr>
+              <a:t>사회복지사 알림 요약</a:t>
+            </a:r>
+            <a:endParaRPr lang="en-US" sz="1350" dirty="0"/>
+          </a:p>
+          <a:p>
+            <a:pPr algn="ctr" indent="0" marL="0">
+              <a:buNone/>
+            </a:pPr>
+            <a:r>
+              <a:rPr lang="en-US" sz="1050" dirty="0">
+                <a:solidFill>
+                  <a:srgbClr val="CADCFC"/>
+                </a:solidFill>
+                <a:latin typeface="Malgun Gothic" pitchFamily="34" charset="0"/>
+                <a:ea typeface="Malgun Gothic" pitchFamily="34" charset="-122"/>
+                <a:cs typeface="Malgun Gothic" pitchFamily="34" charset="-120"/>
+              </a:rPr>
+              <a:t>이상신호 감지 시</a:t>
+            </a:r>
+            <a:endParaRPr lang="en-US" sz="1350" dirty="0"/>
+          </a:p>
+        </p:txBody>
+      </p:sp>
+      <p:sp>
+        <p:nvSpPr>
+          <p:cNvPr id="26" name="Text 24"/>
+          <p:cNvSpPr txBox="1"/>
+          <p:nvPr/>
+        </p:nvSpPr>
+        <p:spPr>
+          <a:xfrm>
+            <a:off x="548640" y="5943600"/>
+            <a:ext cx="11094415" cy="457200"/>
+          </a:xfrm>
+          <a:prstGeom prst="rect">
+            <a:avLst/>
+          </a:prstGeom>
+          <a:solidFill>
+            <a:srgbClr val="EAF0FA"/>
+          </a:solidFill>
+          <a:ln/>
+        </p:spPr>
+        <p:txBody>
+          <a:bodyPr wrap="square" lIns="50800" tIns="50800" rIns="50800" bIns="50800" rtlCol="0" anchor="ctr"/>
+          <a:lstStyle/>
+          <a:p>
+            <a:pPr algn="ctr" indent="0" marL="0">
               <a:buNone/>
             </a:pPr>
             <a:r>
               <a:rPr lang="en-US" sz="1400" b="1" dirty="0">
                 <a:solidFill>
-                  <a:srgbClr val="1F2933"/>
-                </a:solidFill>
-                <a:latin typeface="Malgun Gothic" pitchFamily="34" charset="0"/>
-                <a:ea typeface="Malgun Gothic" pitchFamily="34" charset="-122"/>
-                <a:cs typeface="Malgun Gothic" pitchFamily="34" charset="-120"/>
-              </a:rPr>
-              <a:t>재랭킹 효과</a:t>
+                  <a:srgbClr val="0F2F6F"/>
+                </a:solidFill>
+                <a:latin typeface="Malgun Gothic" pitchFamily="34" charset="0"/>
+                <a:ea typeface="Malgun Gothic" pitchFamily="34" charset="-122"/>
+                <a:cs typeface="Malgun Gothic" pitchFamily="34" charset="-120"/>
+              </a:rPr>
+              <a:t>🔒  전 과정 로컬 · 대화는 기기·가정 네트워크를 벗어나지 않습니다</a:t>
             </a:r>
             <a:endParaRPr lang="en-US" sz="1400" dirty="0"/>
-          </a:p>
-        </p:txBody>
-      </p:sp>
-      <p:sp>
-        <p:nvSpPr>
-          <p:cNvPr id="25" name="Text 23"/>
-          <p:cNvSpPr txBox="1"/>
-          <p:nvPr/>
-        </p:nvSpPr>
-        <p:spPr>
-          <a:xfrm>
-            <a:off x="8371637" y="5230368"/>
-            <a:ext cx="3088538" cy="457200"/>
-          </a:xfrm>
-          <a:prstGeom prst="rect">
-            <a:avLst/>
-          </a:prstGeom>
-          <a:noFill/>
-          <a:ln/>
-        </p:spPr>
-        <p:txBody>
-          <a:bodyPr wrap="square" lIns="0" tIns="0" rIns="0" bIns="0" rtlCol="0" anchor="ctr"/>
-          <a:lstStyle/>
-          <a:p>
-            <a:pPr indent="0" marL="0">
-              <a:buNone/>
-            </a:pPr>
-            <a:r>
-              <a:rPr lang="en-US" sz="1100" dirty="0">
-                <a:solidFill>
-                  <a:srgbClr val="5B6673"/>
-                </a:solidFill>
-                <a:latin typeface="Malgun Gothic" pitchFamily="34" charset="0"/>
-                <a:ea typeface="Malgun Gothic" pitchFamily="34" charset="-122"/>
-                <a:cs typeface="Malgun Gothic" pitchFamily="34" charset="-120"/>
-              </a:rPr>
-              <a:t>잘못된 근거 상위노출 완화</a:t>
-            </a:r>
-            <a:endParaRPr lang="en-US" sz="1100" dirty="0"/>
           </a:p>
         </p:txBody>
       </p:sp>
@@ -7535,7 +10020,7 @@
                 <a:ea typeface="Malgun Gothic" pitchFamily="34" charset="-122"/>
                 <a:cs typeface="Malgun Gothic" pitchFamily="34" charset="-120"/>
               </a:rPr>
-              <a:t>COMMUNITY</a:t>
+              <a:t>DEMO</a:t>
             </a:r>
             <a:endParaRPr lang="en-US" sz="1300" dirty="0"/>
           </a:p>
@@ -7574,7 +10059,7 @@
                 <a:ea typeface="Malgun Gothic" pitchFamily="34" charset="-122"/>
                 <a:cs typeface="Malgun Gothic" pitchFamily="34" charset="-120"/>
               </a:rPr>
-              <a:t>지역사회 연계 방안</a:t>
+              <a:t>핵심 기능 데모 · 데이터 · 성능</a:t>
             </a:r>
             <a:endParaRPr lang="en-US" sz="3200" dirty="0"/>
           </a:p>
@@ -7582,57 +10067,18 @@
       </p:sp>
       <p:sp>
         <p:nvSpPr>
-          <p:cNvPr id="4" name="Text 2"/>
-          <p:cNvSpPr txBox="1"/>
-          <p:nvPr/>
-        </p:nvSpPr>
-        <p:spPr>
-          <a:xfrm>
-            <a:off x="548640" y="1554480"/>
-            <a:ext cx="5943600" cy="365760"/>
-          </a:xfrm>
-          <a:prstGeom prst="rect">
-            <a:avLst/>
-          </a:prstGeom>
-          <a:noFill/>
-          <a:ln/>
-        </p:spPr>
-        <p:txBody>
-          <a:bodyPr wrap="square" lIns="0" tIns="0" rIns="0" bIns="0" rtlCol="0" anchor="ctr"/>
-          <a:lstStyle/>
-          <a:p>
-            <a:pPr indent="0" marL="0">
-              <a:buNone/>
-            </a:pPr>
-            <a:r>
-              <a:rPr lang="en-US" sz="1600" b="1" dirty="0">
-                <a:solidFill>
-                  <a:srgbClr val="0F2F6F"/>
-                </a:solidFill>
-                <a:latin typeface="Malgun Gothic" pitchFamily="34" charset="0"/>
-                <a:ea typeface="Malgun Gothic" pitchFamily="34" charset="-122"/>
-                <a:cs typeface="Malgun Gothic" pitchFamily="34" charset="-120"/>
-              </a:rPr>
-              <a:t>누구와 연결되나</a:t>
-            </a:r>
-            <a:endParaRPr lang="en-US" sz="1600" dirty="0"/>
-          </a:p>
-        </p:txBody>
-      </p:sp>
-      <p:sp>
-        <p:nvSpPr>
-          <p:cNvPr id="5" name="Shape 3"/>
+          <p:cNvPr id="4" name="Shape 2"/>
           <p:cNvSpPr/>
           <p:nvPr/>
         </p:nvSpPr>
         <p:spPr>
           <a:xfrm>
-            <a:off x="548640" y="2057400"/>
-            <a:ext cx="5760720" cy="822960"/>
+            <a:off x="548640" y="1600200"/>
+            <a:ext cx="5364328" cy="2148840"/>
           </a:xfrm>
           <a:prstGeom prst="roundRect">
             <a:avLst>
-              <a:gd name="adj" fmla="val 10000"/>
+              <a:gd name="adj" fmla="val 3830"/>
             </a:avLst>
           </a:prstGeom>
           <a:solidFill>
@@ -7655,17 +10101,19 @@
       </p:sp>
       <p:sp>
         <p:nvSpPr>
-          <p:cNvPr id="6" name="Shape 4"/>
+          <p:cNvPr id="5" name="Shape 3"/>
           <p:cNvSpPr/>
           <p:nvPr/>
         </p:nvSpPr>
         <p:spPr>
           <a:xfrm>
-            <a:off x="777240" y="2231136"/>
-            <a:ext cx="475488" cy="475488"/>
-          </a:xfrm>
-          <a:prstGeom prst="ellipse">
-            <a:avLst/>
+            <a:off x="822960" y="1810512"/>
+            <a:ext cx="1371600" cy="365760"/>
+          </a:xfrm>
+          <a:prstGeom prst="roundRect">
+            <a:avLst>
+              <a:gd name="adj" fmla="val 15000"/>
+            </a:avLst>
           </a:prstGeom>
           <a:solidFill>
             <a:srgbClr val="0F2F6F"/>
@@ -7675,40 +10123,79 @@
       </p:sp>
       <p:sp>
         <p:nvSpPr>
+          <p:cNvPr id="6" name="Text 4"/>
+          <p:cNvSpPr txBox="1"/>
+          <p:nvPr/>
+        </p:nvSpPr>
+        <p:spPr>
+          <a:xfrm>
+            <a:off x="822960" y="1810512"/>
+            <a:ext cx="1371600" cy="365760"/>
+          </a:xfrm>
+          <a:prstGeom prst="rect">
+            <a:avLst/>
+          </a:prstGeom>
+          <a:noFill/>
+          <a:ln/>
+        </p:spPr>
+        <p:txBody>
+          <a:bodyPr wrap="square" lIns="0" tIns="0" rIns="0" bIns="0" rtlCol="0" anchor="ctr"/>
+          <a:lstStyle/>
+          <a:p>
+            <a:pPr algn="ctr" indent="0" marL="0">
+              <a:buNone/>
+            </a:pPr>
+            <a:r>
+              <a:rPr lang="en-US" sz="1200" b="1" dirty="0">
+                <a:solidFill>
+                  <a:srgbClr val="FFFFFF"/>
+                </a:solidFill>
+                <a:latin typeface="Malgun Gothic" pitchFamily="34" charset="0"/>
+                <a:ea typeface="Malgun Gothic" pitchFamily="34" charset="-122"/>
+                <a:cs typeface="Malgun Gothic" pitchFamily="34" charset="-120"/>
+              </a:rPr>
+              <a:t>데모 A</a:t>
+            </a:r>
+            <a:endParaRPr lang="en-US" sz="1200" dirty="0"/>
+          </a:p>
+        </p:txBody>
+      </p:sp>
+      <p:sp>
+        <p:nvSpPr>
           <p:cNvPr id="7" name="Text 5"/>
           <p:cNvSpPr txBox="1"/>
           <p:nvPr/>
         </p:nvSpPr>
         <p:spPr>
           <a:xfrm>
-            <a:off x="777240" y="2231136"/>
-            <a:ext cx="475488" cy="475488"/>
-          </a:xfrm>
-          <a:prstGeom prst="rect">
-            <a:avLst/>
-          </a:prstGeom>
-          <a:noFill/>
-          <a:ln/>
-        </p:spPr>
-        <p:txBody>
-          <a:bodyPr wrap="square" lIns="0" tIns="0" rIns="0" bIns="0" rtlCol="0" anchor="ctr"/>
-          <a:lstStyle/>
-          <a:p>
-            <a:pPr algn="ctr" indent="0" marL="0">
-              <a:buNone/>
-            </a:pPr>
-            <a:r>
-              <a:rPr lang="en-US" sz="1500" b="1" dirty="0">
-                <a:solidFill>
-                  <a:srgbClr val="FFFFFF"/>
-                </a:solidFill>
-                <a:latin typeface="Malgun Gothic" pitchFamily="34" charset="0"/>
-                <a:ea typeface="Malgun Gothic" pitchFamily="34" charset="-122"/>
-                <a:cs typeface="Malgun Gothic" pitchFamily="34" charset="-120"/>
-              </a:rPr>
-              <a:t>1</a:t>
-            </a:r>
-            <a:endParaRPr lang="en-US" sz="1500" dirty="0"/>
+            <a:off x="2331720" y="1810512"/>
+            <a:ext cx="3352648" cy="365760"/>
+          </a:xfrm>
+          <a:prstGeom prst="rect">
+            <a:avLst/>
+          </a:prstGeom>
+          <a:noFill/>
+          <a:ln/>
+        </p:spPr>
+        <p:txBody>
+          <a:bodyPr wrap="square" lIns="0" tIns="0" rIns="0" bIns="0" rtlCol="0" anchor="ctr"/>
+          <a:lstStyle/>
+          <a:p>
+            <a:pPr indent="0" marL="0">
+              <a:buNone/>
+            </a:pPr>
+            <a:r>
+              <a:rPr lang="en-US" sz="1600" b="1" dirty="0">
+                <a:solidFill>
+                  <a:srgbClr val="0F2F6F"/>
+                </a:solidFill>
+                <a:latin typeface="Malgun Gothic" pitchFamily="34" charset="0"/>
+                <a:ea typeface="Malgun Gothic" pitchFamily="34" charset="-122"/>
+                <a:cs typeface="Malgun Gothic" pitchFamily="34" charset="-120"/>
+              </a:rPr>
+              <a:t>복지 Q&amp;A</a:t>
+            </a:r>
+            <a:endParaRPr lang="en-US" sz="1600" dirty="0"/>
           </a:p>
         </p:txBody>
       </p:sp>
@@ -7720,24 +10207,28 @@
         </p:nvSpPr>
         <p:spPr>
           <a:xfrm>
-            <a:off x="1417320" y="2167128"/>
-            <a:ext cx="4754880" cy="347472"/>
-          </a:xfrm>
-          <a:prstGeom prst="rect">
-            <a:avLst/>
-          </a:prstGeom>
-          <a:noFill/>
-          <a:ln/>
-        </p:spPr>
-        <p:txBody>
-          <a:bodyPr wrap="square" lIns="0" tIns="0" rIns="0" bIns="0" rtlCol="0" anchor="ctr"/>
-          <a:lstStyle/>
-          <a:p>
-            <a:pPr indent="0" marL="0">
-              <a:buNone/>
-            </a:pPr>
-            <a:r>
-              <a:rPr lang="en-US" sz="1450" b="1" dirty="0">
+            <a:off x="822960" y="2286000"/>
+            <a:ext cx="4815688" cy="1371600"/>
+          </a:xfrm>
+          <a:prstGeom prst="rect">
+            <a:avLst/>
+          </a:prstGeom>
+          <a:noFill/>
+          <a:ln/>
+        </p:spPr>
+        <p:txBody>
+          <a:bodyPr wrap="square" rtlCol="0" anchor="t"/>
+          <a:lstStyle/>
+          <a:p>
+            <a:pPr marL="342900" indent="-342900">
+              <a:spcAft>
+                <a:spcPts val="600"/>
+              </a:spcAft>
+              <a:buSzPct val="100000"/>
+              <a:buChar char="•"/>
+            </a:pPr>
+            <a:r>
+              <a:rPr lang="en-US" sz="1300" dirty="0">
                 <a:solidFill>
                   <a:srgbClr val="1F2933"/>
                 </a:solidFill>
@@ -7745,50 +10236,87 @@
                 <a:ea typeface="Malgun Gothic" pitchFamily="34" charset="-122"/>
                 <a:cs typeface="Malgun Gothic" pitchFamily="34" charset="-120"/>
               </a:rPr>
-              <a:t>주민센터 · 구청 노인복지과</a:t>
-            </a:r>
-            <a:endParaRPr lang="en-US" sz="1450" dirty="0"/>
-          </a:p>
-        </p:txBody>
-      </p:sp>
-      <p:sp>
-        <p:nvSpPr>
-          <p:cNvPr id="9" name="Text 7"/>
-          <p:cNvSpPr txBox="1"/>
-          <p:nvPr/>
-        </p:nvSpPr>
-        <p:spPr>
-          <a:xfrm>
-            <a:off x="1417320" y="2496312"/>
-            <a:ext cx="4754880" cy="310896"/>
-          </a:xfrm>
-          <a:prstGeom prst="rect">
-            <a:avLst/>
-          </a:prstGeom>
-          <a:noFill/>
-          <a:ln/>
-        </p:spPr>
-        <p:txBody>
-          <a:bodyPr wrap="square" lIns="0" tIns="0" rIns="0" bIns="0" rtlCol="0" anchor="ctr"/>
-          <a:lstStyle/>
-          <a:p>
-            <a:pPr indent="0" marL="0">
-              <a:buNone/>
-            </a:pPr>
-            <a:r>
-              <a:rPr lang="en-US" sz="1200" dirty="0">
-                <a:solidFill>
-                  <a:srgbClr val="5B6673"/>
-                </a:solidFill>
-                <a:latin typeface="Malgun Gothic" pitchFamily="34" charset="0"/>
-                <a:ea typeface="Malgun Gothic" pitchFamily="34" charset="-122"/>
-                <a:cs typeface="Malgun Gothic" pitchFamily="34" charset="-120"/>
-              </a:rPr>
-              <a:t>신청·상담 연결</a:t>
-            </a:r>
-            <a:endParaRPr lang="en-US" sz="1200" dirty="0"/>
-          </a:p>
-        </p:txBody>
+              <a:t>"기초연금은 어떻게 신청하나요?" → 문서 근거 기반 정확 안내</a:t>
+            </a:r>
+            <a:endParaRPr lang="en-US" sz="1300" dirty="0"/>
+          </a:p>
+          <a:p>
+            <a:pPr marL="342900" indent="-342900">
+              <a:spcAft>
+                <a:spcPts val="600"/>
+              </a:spcAft>
+              <a:buSzPct val="100000"/>
+              <a:buChar char="•"/>
+            </a:pPr>
+            <a:r>
+              <a:rPr lang="en-US" sz="1300" dirty="0">
+                <a:solidFill>
+                  <a:srgbClr val="1F2933"/>
+                </a:solidFill>
+                <a:latin typeface="Malgun Gothic" pitchFamily="34" charset="0"/>
+                <a:ea typeface="Malgun Gothic" pitchFamily="34" charset="-122"/>
+                <a:cs typeface="Malgun Gothic" pitchFamily="34" charset="-120"/>
+              </a:rPr>
+              <a:t>범위 밖 질문은 지어내지 않고 안전하게 거절</a:t>
+            </a:r>
+            <a:endParaRPr lang="en-US" sz="1300" dirty="0"/>
+          </a:p>
+          <a:p>
+            <a:pPr marL="342900" indent="-342900">
+              <a:spcAft>
+                <a:spcPts val="600"/>
+              </a:spcAft>
+              <a:buSzPct val="100000"/>
+              <a:buChar char="•"/>
+            </a:pPr>
+            <a:r>
+              <a:rPr lang="en-US" sz="1300" dirty="0">
+                <a:solidFill>
+                  <a:srgbClr val="1F2933"/>
+                </a:solidFill>
+                <a:latin typeface="Malgun Gothic" pitchFamily="34" charset="0"/>
+                <a:ea typeface="Malgun Gothic" pitchFamily="34" charset="-122"/>
+                <a:cs typeface="Malgun Gothic" pitchFamily="34" charset="-120"/>
+              </a:rPr>
+              <a:t>인사·잡담은 따뜻한 대화형 응답</a:t>
+            </a:r>
+            <a:endParaRPr lang="en-US" sz="1300" dirty="0"/>
+          </a:p>
+        </p:txBody>
+      </p:sp>
+      <p:sp>
+        <p:nvSpPr>
+          <p:cNvPr id="9" name="Shape 7"/>
+          <p:cNvSpPr/>
+          <p:nvPr/>
+        </p:nvSpPr>
+        <p:spPr>
+          <a:xfrm>
+            <a:off x="6278728" y="1600200"/>
+            <a:ext cx="5364328" cy="2148840"/>
+          </a:xfrm>
+          <a:prstGeom prst="roundRect">
+            <a:avLst>
+              <a:gd name="adj" fmla="val 3830"/>
+            </a:avLst>
+          </a:prstGeom>
+          <a:solidFill>
+            <a:srgbClr val="FBF3E3"/>
+          </a:solidFill>
+          <a:ln w="12700">
+            <a:solidFill>
+              <a:srgbClr val="D8E0EC"/>
+            </a:solidFill>
+            <a:prstDash val="solid"/>
+          </a:ln>
+          <a:effectLst>
+            <a:outerShdw sx="100000" sy="100000" kx="0" ky="0" algn="bl" rotWithShape="0" blurRad="76200" dist="25400" dir="5400000">
+              <a:srgbClr val="9AA5B5">
+                <a:alpha val="35000"/>
+              </a:srgbClr>
+            </a:outerShdw>
+          </a:effectLst>
+        </p:spPr>
       </p:sp>
       <p:sp>
         <p:nvSpPr>
@@ -7798,7 +10326,794 @@
         </p:nvSpPr>
         <p:spPr>
           <a:xfrm>
-            <a:off x="548640" y="3017520"/>
+            <a:off x="6553048" y="1810512"/>
+            <a:ext cx="1371600" cy="365760"/>
+          </a:xfrm>
+          <a:prstGeom prst="roundRect">
+            <a:avLst>
+              <a:gd name="adj" fmla="val 15000"/>
+            </a:avLst>
+          </a:prstGeom>
+          <a:solidFill>
+            <a:srgbClr val="E0A83C"/>
+          </a:solidFill>
+          <a:ln/>
+        </p:spPr>
+      </p:sp>
+      <p:sp>
+        <p:nvSpPr>
+          <p:cNvPr id="11" name="Text 9"/>
+          <p:cNvSpPr txBox="1"/>
+          <p:nvPr/>
+        </p:nvSpPr>
+        <p:spPr>
+          <a:xfrm>
+            <a:off x="6553048" y="1810512"/>
+            <a:ext cx="1371600" cy="365760"/>
+          </a:xfrm>
+          <a:prstGeom prst="rect">
+            <a:avLst/>
+          </a:prstGeom>
+          <a:noFill/>
+          <a:ln/>
+        </p:spPr>
+        <p:txBody>
+          <a:bodyPr wrap="square" lIns="0" tIns="0" rIns="0" bIns="0" rtlCol="0" anchor="ctr"/>
+          <a:lstStyle/>
+          <a:p>
+            <a:pPr algn="ctr" indent="0" marL="0">
+              <a:buNone/>
+            </a:pPr>
+            <a:r>
+              <a:rPr lang="en-US" sz="1200" b="1" dirty="0">
+                <a:solidFill>
+                  <a:srgbClr val="FFFFFF"/>
+                </a:solidFill>
+                <a:latin typeface="Malgun Gothic" pitchFamily="34" charset="0"/>
+                <a:ea typeface="Malgun Gothic" pitchFamily="34" charset="-122"/>
+                <a:cs typeface="Malgun Gothic" pitchFamily="34" charset="-120"/>
+              </a:rPr>
+              <a:t>데모 B</a:t>
+            </a:r>
+            <a:endParaRPr lang="en-US" sz="1200" dirty="0"/>
+          </a:p>
+        </p:txBody>
+      </p:sp>
+      <p:sp>
+        <p:nvSpPr>
+          <p:cNvPr id="12" name="Text 10"/>
+          <p:cNvSpPr txBox="1"/>
+          <p:nvPr/>
+        </p:nvSpPr>
+        <p:spPr>
+          <a:xfrm>
+            <a:off x="8061808" y="1810512"/>
+            <a:ext cx="3352648" cy="365760"/>
+          </a:xfrm>
+          <a:prstGeom prst="rect">
+            <a:avLst/>
+          </a:prstGeom>
+          <a:noFill/>
+          <a:ln/>
+        </p:spPr>
+        <p:txBody>
+          <a:bodyPr wrap="square" lIns="0" tIns="0" rIns="0" bIns="0" rtlCol="0" anchor="ctr"/>
+          <a:lstStyle/>
+          <a:p>
+            <a:pPr indent="0" marL="0">
+              <a:buNone/>
+            </a:pPr>
+            <a:r>
+              <a:rPr lang="en-US" sz="1600" b="1" dirty="0">
+                <a:solidFill>
+                  <a:srgbClr val="B8862B"/>
+                </a:solidFill>
+                <a:latin typeface="Malgun Gothic" pitchFamily="34" charset="0"/>
+                <a:ea typeface="Malgun Gothic" pitchFamily="34" charset="-122"/>
+                <a:cs typeface="Malgun Gothic" pitchFamily="34" charset="-120"/>
+              </a:rPr>
+              <a:t>이상신호 감지</a:t>
+            </a:r>
+            <a:endParaRPr lang="en-US" sz="1600" dirty="0"/>
+          </a:p>
+        </p:txBody>
+      </p:sp>
+      <p:sp>
+        <p:nvSpPr>
+          <p:cNvPr id="13" name="Text 11"/>
+          <p:cNvSpPr txBox="1"/>
+          <p:nvPr/>
+        </p:nvSpPr>
+        <p:spPr>
+          <a:xfrm>
+            <a:off x="6553048" y="2286000"/>
+            <a:ext cx="4815688" cy="1371600"/>
+          </a:xfrm>
+          <a:prstGeom prst="rect">
+            <a:avLst/>
+          </a:prstGeom>
+          <a:noFill/>
+          <a:ln/>
+        </p:spPr>
+        <p:txBody>
+          <a:bodyPr wrap="square" rtlCol="0" anchor="t"/>
+          <a:lstStyle/>
+          <a:p>
+            <a:pPr marL="342900" indent="-342900">
+              <a:spcAft>
+                <a:spcPts val="600"/>
+              </a:spcAft>
+              <a:buSzPct val="100000"/>
+              <a:buChar char="•"/>
+            </a:pPr>
+            <a:r>
+              <a:rPr lang="en-US" sz="1300" dirty="0">
+                <a:solidFill>
+                  <a:srgbClr val="1F2933"/>
+                </a:solidFill>
+                <a:latin typeface="Malgun Gothic" pitchFamily="34" charset="0"/>
+                <a:ea typeface="Malgun Gothic" pitchFamily="34" charset="-122"/>
+                <a:cs typeface="Malgun Gothic" pitchFamily="34" charset="-120"/>
+              </a:rPr>
+              <a:t>증상 반복 + 부정 감정 대화 감지</a:t>
+            </a:r>
+            <a:endParaRPr lang="en-US" sz="1300" dirty="0"/>
+          </a:p>
+          <a:p>
+            <a:pPr marL="342900" indent="-342900">
+              <a:spcAft>
+                <a:spcPts val="600"/>
+              </a:spcAft>
+              <a:buSzPct val="100000"/>
+              <a:buChar char="•"/>
+            </a:pPr>
+            <a:r>
+              <a:rPr lang="en-US" sz="1300" dirty="0">
+                <a:solidFill>
+                  <a:srgbClr val="1F2933"/>
+                </a:solidFill>
+                <a:latin typeface="Malgun Gothic" pitchFamily="34" charset="0"/>
+                <a:ea typeface="Malgun Gothic" pitchFamily="34" charset="-122"/>
+                <a:cs typeface="Malgun Gothic" pitchFamily="34" charset="-120"/>
+              </a:rPr>
+              <a:t>위기 키워드 시 즉시 긴급 알림</a:t>
+            </a:r>
+            <a:endParaRPr lang="en-US" sz="1300" dirty="0"/>
+          </a:p>
+          <a:p>
+            <a:pPr marL="342900" indent="-342900">
+              <a:spcAft>
+                <a:spcPts val="600"/>
+              </a:spcAft>
+              <a:buSzPct val="100000"/>
+              <a:buChar char="•"/>
+            </a:pPr>
+            <a:r>
+              <a:rPr lang="en-US" sz="1300" dirty="0">
+                <a:solidFill>
+                  <a:srgbClr val="1F2933"/>
+                </a:solidFill>
+                <a:latin typeface="Malgun Gothic" pitchFamily="34" charset="0"/>
+                <a:ea typeface="Malgun Gothic" pitchFamily="34" charset="-122"/>
+                <a:cs typeface="Malgun Gothic" pitchFamily="34" charset="-120"/>
+              </a:rPr>
+              <a:t>→ 사회복지사 알림 요약 생성</a:t>
+            </a:r>
+            <a:endParaRPr lang="en-US" sz="1300" dirty="0"/>
+          </a:p>
+        </p:txBody>
+      </p:sp>
+      <p:sp>
+        <p:nvSpPr>
+          <p:cNvPr id="14" name="Shape 12"/>
+          <p:cNvSpPr/>
+          <p:nvPr/>
+        </p:nvSpPr>
+        <p:spPr>
+          <a:xfrm>
+            <a:off x="548640" y="3977640"/>
+            <a:ext cx="3454298" cy="1783080"/>
+          </a:xfrm>
+          <a:prstGeom prst="roundRect">
+            <a:avLst>
+              <a:gd name="adj" fmla="val 4615"/>
+            </a:avLst>
+          </a:prstGeom>
+          <a:solidFill>
+            <a:srgbClr val="FFFFFF"/>
+          </a:solidFill>
+          <a:ln w="12700">
+            <a:solidFill>
+              <a:srgbClr val="D8E0EC"/>
+            </a:solidFill>
+            <a:prstDash val="solid"/>
+          </a:ln>
+          <a:effectLst>
+            <a:outerShdw sx="100000" sy="100000" kx="0" ky="0" algn="bl" rotWithShape="0" blurRad="76200" dist="25400" dir="5400000">
+              <a:srgbClr val="9AA5B5">
+                <a:alpha val="35000"/>
+              </a:srgbClr>
+            </a:outerShdw>
+          </a:effectLst>
+        </p:spPr>
+      </p:sp>
+      <p:sp>
+        <p:nvSpPr>
+          <p:cNvPr id="15" name="Text 13"/>
+          <p:cNvSpPr txBox="1"/>
+          <p:nvPr/>
+        </p:nvSpPr>
+        <p:spPr>
+          <a:xfrm>
+            <a:off x="731520" y="4160520"/>
+            <a:ext cx="3088538" cy="731520"/>
+          </a:xfrm>
+          <a:prstGeom prst="rect">
+            <a:avLst/>
+          </a:prstGeom>
+          <a:noFill/>
+          <a:ln/>
+        </p:spPr>
+        <p:txBody>
+          <a:bodyPr wrap="square" lIns="0" tIns="0" rIns="0" bIns="0" rtlCol="0" anchor="ctr"/>
+          <a:lstStyle/>
+          <a:p>
+            <a:pPr indent="0" marL="0">
+              <a:buNone/>
+            </a:pPr>
+            <a:r>
+              <a:rPr lang="en-US" sz="3600" b="1" dirty="0">
+                <a:solidFill>
+                  <a:srgbClr val="0F2F6F"/>
+                </a:solidFill>
+                <a:latin typeface="Malgun Gothic" pitchFamily="34" charset="0"/>
+                <a:ea typeface="Malgun Gothic" pitchFamily="34" charset="-122"/>
+                <a:cs typeface="Malgun Gothic" pitchFamily="34" charset="-120"/>
+              </a:rPr>
+              <a:t>3,455개</a:t>
+            </a:r>
+            <a:endParaRPr lang="en-US" sz="3600" dirty="0"/>
+          </a:p>
+        </p:txBody>
+      </p:sp>
+      <p:sp>
+        <p:nvSpPr>
+          <p:cNvPr id="16" name="Text 14"/>
+          <p:cNvSpPr txBox="1"/>
+          <p:nvPr/>
+        </p:nvSpPr>
+        <p:spPr>
+          <a:xfrm>
+            <a:off x="731520" y="4919472"/>
+            <a:ext cx="3088538" cy="320040"/>
+          </a:xfrm>
+          <a:prstGeom prst="rect">
+            <a:avLst/>
+          </a:prstGeom>
+          <a:noFill/>
+          <a:ln/>
+        </p:spPr>
+        <p:txBody>
+          <a:bodyPr wrap="square" lIns="0" tIns="0" rIns="0" bIns="0" rtlCol="0" anchor="ctr"/>
+          <a:lstStyle/>
+          <a:p>
+            <a:pPr indent="0" marL="0">
+              <a:buNone/>
+            </a:pPr>
+            <a:r>
+              <a:rPr lang="en-US" sz="1400" b="1" dirty="0">
+                <a:solidFill>
+                  <a:srgbClr val="1F2933"/>
+                </a:solidFill>
+                <a:latin typeface="Malgun Gothic" pitchFamily="34" charset="0"/>
+                <a:ea typeface="Malgun Gothic" pitchFamily="34" charset="-122"/>
+                <a:cs typeface="Malgun Gothic" pitchFamily="34" charset="-120"/>
+              </a:rPr>
+              <a:t>색인 청크</a:t>
+            </a:r>
+            <a:endParaRPr lang="en-US" sz="1400" dirty="0"/>
+          </a:p>
+        </p:txBody>
+      </p:sp>
+      <p:sp>
+        <p:nvSpPr>
+          <p:cNvPr id="17" name="Text 15"/>
+          <p:cNvSpPr txBox="1"/>
+          <p:nvPr/>
+        </p:nvSpPr>
+        <p:spPr>
+          <a:xfrm>
+            <a:off x="731520" y="5230368"/>
+            <a:ext cx="3088538" cy="457200"/>
+          </a:xfrm>
+          <a:prstGeom prst="rect">
+            <a:avLst/>
+          </a:prstGeom>
+          <a:noFill/>
+          <a:ln/>
+        </p:spPr>
+        <p:txBody>
+          <a:bodyPr wrap="square" lIns="0" tIns="0" rIns="0" bIns="0" rtlCol="0" anchor="ctr"/>
+          <a:lstStyle/>
+          <a:p>
+            <a:pPr indent="0" marL="0">
+              <a:buNone/>
+            </a:pPr>
+            <a:r>
+              <a:rPr lang="en-US" sz="1100" dirty="0">
+                <a:solidFill>
+                  <a:srgbClr val="5B6673"/>
+                </a:solidFill>
+                <a:latin typeface="Malgun Gothic" pitchFamily="34" charset="0"/>
+                <a:ea typeface="Malgun Gothic" pitchFamily="34" charset="-122"/>
+                <a:cs typeface="Malgun Gothic" pitchFamily="34" charset="-120"/>
+              </a:rPr>
+              <a:t>보건복지부 사업안내 + 대전 공개데이터</a:t>
+            </a:r>
+            <a:endParaRPr lang="en-US" sz="1100" dirty="0"/>
+          </a:p>
+        </p:txBody>
+      </p:sp>
+      <p:sp>
+        <p:nvSpPr>
+          <p:cNvPr id="18" name="Shape 16"/>
+          <p:cNvSpPr/>
+          <p:nvPr/>
+        </p:nvSpPr>
+        <p:spPr>
+          <a:xfrm>
+            <a:off x="4368698" y="3977640"/>
+            <a:ext cx="3454298" cy="1783080"/>
+          </a:xfrm>
+          <a:prstGeom prst="roundRect">
+            <a:avLst>
+              <a:gd name="adj" fmla="val 4615"/>
+            </a:avLst>
+          </a:prstGeom>
+          <a:solidFill>
+            <a:srgbClr val="FFFFFF"/>
+          </a:solidFill>
+          <a:ln w="12700">
+            <a:solidFill>
+              <a:srgbClr val="D8E0EC"/>
+            </a:solidFill>
+            <a:prstDash val="solid"/>
+          </a:ln>
+          <a:effectLst>
+            <a:outerShdw sx="100000" sy="100000" kx="0" ky="0" algn="bl" rotWithShape="0" blurRad="76200" dist="25400" dir="5400000">
+              <a:srgbClr val="9AA5B5">
+                <a:alpha val="35000"/>
+              </a:srgbClr>
+            </a:outerShdw>
+          </a:effectLst>
+        </p:spPr>
+      </p:sp>
+      <p:sp>
+        <p:nvSpPr>
+          <p:cNvPr id="19" name="Text 17"/>
+          <p:cNvSpPr txBox="1"/>
+          <p:nvPr/>
+        </p:nvSpPr>
+        <p:spPr>
+          <a:xfrm>
+            <a:off x="4551578" y="4160520"/>
+            <a:ext cx="3088538" cy="731520"/>
+          </a:xfrm>
+          <a:prstGeom prst="rect">
+            <a:avLst/>
+          </a:prstGeom>
+          <a:noFill/>
+          <a:ln/>
+        </p:spPr>
+        <p:txBody>
+          <a:bodyPr wrap="square" lIns="0" tIns="0" rIns="0" bIns="0" rtlCol="0" anchor="ctr"/>
+          <a:lstStyle/>
+          <a:p>
+            <a:pPr indent="0" marL="0">
+              <a:buNone/>
+            </a:pPr>
+            <a:r>
+              <a:rPr lang="en-US" sz="3600" b="1" dirty="0">
+                <a:solidFill>
+                  <a:srgbClr val="0F2F6F"/>
+                </a:solidFill>
+                <a:latin typeface="Malgun Gothic" pitchFamily="34" charset="0"/>
+                <a:ea typeface="Malgun Gothic" pitchFamily="34" charset="-122"/>
+                <a:cs typeface="Malgun Gothic" pitchFamily="34" charset="-120"/>
+              </a:rPr>
+              <a:t>92%</a:t>
+            </a:r>
+            <a:endParaRPr lang="en-US" sz="3600" dirty="0"/>
+          </a:p>
+        </p:txBody>
+      </p:sp>
+      <p:sp>
+        <p:nvSpPr>
+          <p:cNvPr id="20" name="Text 18"/>
+          <p:cNvSpPr txBox="1"/>
+          <p:nvPr/>
+        </p:nvSpPr>
+        <p:spPr>
+          <a:xfrm>
+            <a:off x="4551578" y="4919472"/>
+            <a:ext cx="3088538" cy="320040"/>
+          </a:xfrm>
+          <a:prstGeom prst="rect">
+            <a:avLst/>
+          </a:prstGeom>
+          <a:noFill/>
+          <a:ln/>
+        </p:spPr>
+        <p:txBody>
+          <a:bodyPr wrap="square" lIns="0" tIns="0" rIns="0" bIns="0" rtlCol="0" anchor="ctr"/>
+          <a:lstStyle/>
+          <a:p>
+            <a:pPr indent="0" marL="0">
+              <a:buNone/>
+            </a:pPr>
+            <a:r>
+              <a:rPr lang="en-US" sz="1400" b="1" dirty="0">
+                <a:solidFill>
+                  <a:srgbClr val="1F2933"/>
+                </a:solidFill>
+                <a:latin typeface="Malgun Gothic" pitchFamily="34" charset="0"/>
+                <a:ea typeface="Malgun Gothic" pitchFamily="34" charset="-122"/>
+                <a:cs typeface="Malgun Gothic" pitchFamily="34" charset="-120"/>
+              </a:rPr>
+              <a:t>200문항 정답률</a:t>
+            </a:r>
+            <a:endParaRPr lang="en-US" sz="1400" dirty="0"/>
+          </a:p>
+        </p:txBody>
+      </p:sp>
+      <p:sp>
+        <p:nvSpPr>
+          <p:cNvPr id="21" name="Text 19"/>
+          <p:cNvSpPr txBox="1"/>
+          <p:nvPr/>
+        </p:nvSpPr>
+        <p:spPr>
+          <a:xfrm>
+            <a:off x="4551578" y="5230368"/>
+            <a:ext cx="3088538" cy="457200"/>
+          </a:xfrm>
+          <a:prstGeom prst="rect">
+            <a:avLst/>
+          </a:prstGeom>
+          <a:noFill/>
+          <a:ln/>
+        </p:spPr>
+        <p:txBody>
+          <a:bodyPr wrap="square" lIns="0" tIns="0" rIns="0" bIns="0" rtlCol="0" anchor="ctr"/>
+          <a:lstStyle/>
+          <a:p>
+            <a:pPr indent="0" marL="0">
+              <a:buNone/>
+            </a:pPr>
+            <a:r>
+              <a:rPr lang="en-US" sz="1100" dirty="0">
+                <a:solidFill>
+                  <a:srgbClr val="5B6673"/>
+                </a:solidFill>
+                <a:latin typeface="Malgun Gothic" pitchFamily="34" charset="0"/>
+                <a:ea typeface="Malgun Gothic" pitchFamily="34" charset="-122"/>
+                <a:cs typeface="Malgun Gothic" pitchFamily="34" charset="-120"/>
+              </a:rPr>
+              <a:t>범위 밖 거절 100% · 사실정확도 98%</a:t>
+            </a:r>
+            <a:endParaRPr lang="en-US" sz="1100" dirty="0"/>
+          </a:p>
+        </p:txBody>
+      </p:sp>
+      <p:sp>
+        <p:nvSpPr>
+          <p:cNvPr id="22" name="Shape 20"/>
+          <p:cNvSpPr/>
+          <p:nvPr/>
+        </p:nvSpPr>
+        <p:spPr>
+          <a:xfrm>
+            <a:off x="8188757" y="3977640"/>
+            <a:ext cx="3454298" cy="1783080"/>
+          </a:xfrm>
+          <a:prstGeom prst="roundRect">
+            <a:avLst>
+              <a:gd name="adj" fmla="val 4615"/>
+            </a:avLst>
+          </a:prstGeom>
+          <a:solidFill>
+            <a:srgbClr val="FFFFFF"/>
+          </a:solidFill>
+          <a:ln w="12700">
+            <a:solidFill>
+              <a:srgbClr val="D8E0EC"/>
+            </a:solidFill>
+            <a:prstDash val="solid"/>
+          </a:ln>
+          <a:effectLst>
+            <a:outerShdw sx="100000" sy="100000" kx="0" ky="0" algn="bl" rotWithShape="0" blurRad="76200" dist="25400" dir="5400000">
+              <a:srgbClr val="9AA5B5">
+                <a:alpha val="35000"/>
+              </a:srgbClr>
+            </a:outerShdw>
+          </a:effectLst>
+        </p:spPr>
+      </p:sp>
+      <p:sp>
+        <p:nvSpPr>
+          <p:cNvPr id="23" name="Text 21"/>
+          <p:cNvSpPr txBox="1"/>
+          <p:nvPr/>
+        </p:nvSpPr>
+        <p:spPr>
+          <a:xfrm>
+            <a:off x="8371637" y="4160520"/>
+            <a:ext cx="3088538" cy="731520"/>
+          </a:xfrm>
+          <a:prstGeom prst="rect">
+            <a:avLst/>
+          </a:prstGeom>
+          <a:noFill/>
+          <a:ln/>
+        </p:spPr>
+        <p:txBody>
+          <a:bodyPr wrap="square" lIns="0" tIns="0" rIns="0" bIns="0" rtlCol="0" anchor="ctr"/>
+          <a:lstStyle/>
+          <a:p>
+            <a:pPr indent="0" marL="0">
+              <a:buNone/>
+            </a:pPr>
+            <a:r>
+              <a:rPr lang="en-US" sz="3600" b="1" dirty="0">
+                <a:solidFill>
+                  <a:srgbClr val="B8862B"/>
+                </a:solidFill>
+                <a:latin typeface="Malgun Gothic" pitchFamily="34" charset="0"/>
+                <a:ea typeface="Malgun Gothic" pitchFamily="34" charset="-122"/>
+                <a:cs typeface="Malgun Gothic" pitchFamily="34" charset="-120"/>
+              </a:rPr>
+              <a:t>+14%p</a:t>
+            </a:r>
+            <a:endParaRPr lang="en-US" sz="3600" dirty="0"/>
+          </a:p>
+        </p:txBody>
+      </p:sp>
+      <p:sp>
+        <p:nvSpPr>
+          <p:cNvPr id="24" name="Text 22"/>
+          <p:cNvSpPr txBox="1"/>
+          <p:nvPr/>
+        </p:nvSpPr>
+        <p:spPr>
+          <a:xfrm>
+            <a:off x="8371637" y="4919472"/>
+            <a:ext cx="3088538" cy="320040"/>
+          </a:xfrm>
+          <a:prstGeom prst="rect">
+            <a:avLst/>
+          </a:prstGeom>
+          <a:noFill/>
+          <a:ln/>
+        </p:spPr>
+        <p:txBody>
+          <a:bodyPr wrap="square" lIns="0" tIns="0" rIns="0" bIns="0" rtlCol="0" anchor="ctr"/>
+          <a:lstStyle/>
+          <a:p>
+            <a:pPr indent="0" marL="0">
+              <a:buNone/>
+            </a:pPr>
+            <a:r>
+              <a:rPr lang="en-US" sz="1400" b="1" dirty="0">
+                <a:solidFill>
+                  <a:srgbClr val="1F2933"/>
+                </a:solidFill>
+                <a:latin typeface="Malgun Gothic" pitchFamily="34" charset="0"/>
+                <a:ea typeface="Malgun Gothic" pitchFamily="34" charset="-122"/>
+                <a:cs typeface="Malgun Gothic" pitchFamily="34" charset="-120"/>
+              </a:rPr>
+              <a:t>재랭킹 효과</a:t>
+            </a:r>
+            <a:endParaRPr lang="en-US" sz="1400" dirty="0"/>
+          </a:p>
+        </p:txBody>
+      </p:sp>
+      <p:sp>
+        <p:nvSpPr>
+          <p:cNvPr id="25" name="Text 23"/>
+          <p:cNvSpPr txBox="1"/>
+          <p:nvPr/>
+        </p:nvSpPr>
+        <p:spPr>
+          <a:xfrm>
+            <a:off x="8371637" y="5230368"/>
+            <a:ext cx="3088538" cy="457200"/>
+          </a:xfrm>
+          <a:prstGeom prst="rect">
+            <a:avLst/>
+          </a:prstGeom>
+          <a:noFill/>
+          <a:ln/>
+        </p:spPr>
+        <p:txBody>
+          <a:bodyPr wrap="square" lIns="0" tIns="0" rIns="0" bIns="0" rtlCol="0" anchor="ctr"/>
+          <a:lstStyle/>
+          <a:p>
+            <a:pPr indent="0" marL="0">
+              <a:buNone/>
+            </a:pPr>
+            <a:r>
+              <a:rPr lang="en-US" sz="1100" dirty="0">
+                <a:solidFill>
+                  <a:srgbClr val="5B6673"/>
+                </a:solidFill>
+                <a:latin typeface="Malgun Gothic" pitchFamily="34" charset="0"/>
+                <a:ea typeface="Malgun Gothic" pitchFamily="34" charset="-122"/>
+                <a:cs typeface="Malgun Gothic" pitchFamily="34" charset="-120"/>
+              </a:rPr>
+              <a:t>잘못된 근거 상위노출 완화</a:t>
+            </a:r>
+            <a:endParaRPr lang="en-US" sz="1100" dirty="0"/>
+          </a:p>
+        </p:txBody>
+      </p:sp>
+    </p:spTree>
+  </p:cSld>
+  <p:clrMapOvr>
+    <a:masterClrMapping/>
+  </p:clrMapOvr>
+</p:sld>
+</file>
+
+<file path=ppt/slides/slide8.xml><?xml version="1.0" encoding="utf-8"?>
+<p:sld xmlns:a="http://schemas.openxmlformats.org/drawingml/2006/main" xmlns:r="http://schemas.openxmlformats.org/officeDocument/2006/relationships" xmlns:p="http://schemas.openxmlformats.org/presentationml/2006/main">
+  <p:cSld name="Slide 8">
+    <p:bg>
+      <p:bgPr>
+        <a:solidFill>
+          <a:srgbClr val="FFFFFF"/>
+        </a:solidFill>
+      </p:bgPr>
+    </p:bg>
+    <p:spTree>
+      <p:nvGrpSpPr>
+        <p:cNvPr id="1" name=""/>
+        <p:cNvGrpSpPr/>
+        <p:nvPr/>
+      </p:nvGrpSpPr>
+      <p:grpSpPr>
+        <a:xfrm>
+          <a:off x="0" y="0"/>
+          <a:ext cx="0" cy="0"/>
+          <a:chOff x="0" y="0"/>
+          <a:chExt cx="0" cy="0"/>
+        </a:xfrm>
+      </p:grpSpPr>
+      <p:sp>
+        <p:nvSpPr>
+          <p:cNvPr id="2" name="Text 0"/>
+          <p:cNvSpPr txBox="1"/>
+          <p:nvPr/>
+        </p:nvSpPr>
+        <p:spPr>
+          <a:xfrm>
+            <a:off x="548640" y="457200"/>
+            <a:ext cx="11094415" cy="274320"/>
+          </a:xfrm>
+          <a:prstGeom prst="rect">
+            <a:avLst/>
+          </a:prstGeom>
+          <a:noFill/>
+          <a:ln/>
+        </p:spPr>
+        <p:txBody>
+          <a:bodyPr wrap="square" lIns="0" tIns="0" rIns="0" bIns="0" rtlCol="0" anchor="ctr"/>
+          <a:lstStyle/>
+          <a:p>
+            <a:pPr indent="0" marL="0">
+              <a:buNone/>
+            </a:pPr>
+            <a:r>
+              <a:rPr lang="en-US" sz="1300" b="1" spc="200" kern="0" dirty="0">
+                <a:solidFill>
+                  <a:srgbClr val="E0A83C"/>
+                </a:solidFill>
+                <a:latin typeface="Malgun Gothic" pitchFamily="34" charset="0"/>
+                <a:ea typeface="Malgun Gothic" pitchFamily="34" charset="-122"/>
+                <a:cs typeface="Malgun Gothic" pitchFamily="34" charset="-120"/>
+              </a:rPr>
+              <a:t>COMMUNITY</a:t>
+            </a:r>
+            <a:endParaRPr lang="en-US" sz="1300" dirty="0"/>
+          </a:p>
+        </p:txBody>
+      </p:sp>
+      <p:sp>
+        <p:nvSpPr>
+          <p:cNvPr id="3" name="Text 1"/>
+          <p:cNvSpPr txBox="1"/>
+          <p:nvPr/>
+        </p:nvSpPr>
+        <p:spPr>
+          <a:xfrm>
+            <a:off x="548640" y="713232"/>
+            <a:ext cx="11094415" cy="640080"/>
+          </a:xfrm>
+          <a:prstGeom prst="rect">
+            <a:avLst/>
+          </a:prstGeom>
+          <a:noFill/>
+          <a:ln/>
+        </p:spPr>
+        <p:txBody>
+          <a:bodyPr wrap="square" lIns="0" tIns="0" rIns="0" bIns="0" rtlCol="0" anchor="ctr"/>
+          <a:lstStyle/>
+          <a:p>
+            <a:pPr indent="0" marL="0">
+              <a:buNone/>
+            </a:pPr>
+            <a:r>
+              <a:rPr lang="en-US" sz="3200" b="1" dirty="0">
+                <a:solidFill>
+                  <a:srgbClr val="0F2F6F"/>
+                </a:solidFill>
+                <a:latin typeface="Malgun Gothic" pitchFamily="34" charset="0"/>
+                <a:ea typeface="Malgun Gothic" pitchFamily="34" charset="-122"/>
+                <a:cs typeface="Malgun Gothic" pitchFamily="34" charset="-120"/>
+              </a:rPr>
+              <a:t>지역사회 연계 방안</a:t>
+            </a:r>
+            <a:endParaRPr lang="en-US" sz="3200" dirty="0"/>
+          </a:p>
+        </p:txBody>
+      </p:sp>
+      <p:sp>
+        <p:nvSpPr>
+          <p:cNvPr id="4" name="Text 2"/>
+          <p:cNvSpPr txBox="1"/>
+          <p:nvPr/>
+        </p:nvSpPr>
+        <p:spPr>
+          <a:xfrm>
+            <a:off x="548640" y="1554480"/>
+            <a:ext cx="5943600" cy="365760"/>
+          </a:xfrm>
+          <a:prstGeom prst="rect">
+            <a:avLst/>
+          </a:prstGeom>
+          <a:noFill/>
+          <a:ln/>
+        </p:spPr>
+        <p:txBody>
+          <a:bodyPr wrap="square" lIns="0" tIns="0" rIns="0" bIns="0" rtlCol="0" anchor="ctr"/>
+          <a:lstStyle/>
+          <a:p>
+            <a:pPr indent="0" marL="0">
+              <a:buNone/>
+            </a:pPr>
+            <a:r>
+              <a:rPr lang="en-US" sz="1600" b="1" dirty="0">
+                <a:solidFill>
+                  <a:srgbClr val="0F2F6F"/>
+                </a:solidFill>
+                <a:latin typeface="Malgun Gothic" pitchFamily="34" charset="0"/>
+                <a:ea typeface="Malgun Gothic" pitchFamily="34" charset="-122"/>
+                <a:cs typeface="Malgun Gothic" pitchFamily="34" charset="-120"/>
+              </a:rPr>
+              <a:t>누구와 연결되나</a:t>
+            </a:r>
+            <a:endParaRPr lang="en-US" sz="1600" dirty="0"/>
+          </a:p>
+        </p:txBody>
+      </p:sp>
+      <p:sp>
+        <p:nvSpPr>
+          <p:cNvPr id="5" name="Shape 3"/>
+          <p:cNvSpPr/>
+          <p:nvPr/>
+        </p:nvSpPr>
+        <p:spPr>
+          <a:xfrm>
+            <a:off x="548640" y="2057400"/>
             <a:ext cx="5760720" cy="822960"/>
           </a:xfrm>
           <a:prstGeom prst="roundRect">
@@ -7826,13 +11141,13 @@
       </p:sp>
       <p:sp>
         <p:nvSpPr>
-          <p:cNvPr id="11" name="Shape 9"/>
+          <p:cNvPr id="6" name="Shape 4"/>
           <p:cNvSpPr/>
           <p:nvPr/>
         </p:nvSpPr>
         <p:spPr>
           <a:xfrm>
-            <a:off x="777240" y="3191256"/>
+            <a:off x="777240" y="2231136"/>
             <a:ext cx="475488" cy="475488"/>
           </a:xfrm>
           <a:prstGeom prst="ellipse">
@@ -7846,13 +11161,13 @@
       </p:sp>
       <p:sp>
         <p:nvSpPr>
-          <p:cNvPr id="12" name="Text 10"/>
-          <p:cNvSpPr txBox="1"/>
-          <p:nvPr/>
-        </p:nvSpPr>
-        <p:spPr>
-          <a:xfrm>
-            <a:off x="777240" y="3191256"/>
+          <p:cNvPr id="7" name="Text 5"/>
+          <p:cNvSpPr txBox="1"/>
+          <p:nvPr/>
+        </p:nvSpPr>
+        <p:spPr>
+          <a:xfrm>
+            <a:off x="777240" y="2231136"/>
             <a:ext cx="475488" cy="475488"/>
           </a:xfrm>
           <a:prstGeom prst="rect">
@@ -7877,7 +11192,7 @@
                 <a:ea typeface="Malgun Gothic" pitchFamily="34" charset="-122"/>
                 <a:cs typeface="Malgun Gothic" pitchFamily="34" charset="-120"/>
               </a:rPr>
-              <a:t>2</a:t>
+              <a:t>1</a:t>
             </a:r>
             <a:endParaRPr lang="en-US" sz="1500" dirty="0"/>
           </a:p>
@@ -7885,13 +11200,13 @@
       </p:sp>
       <p:sp>
         <p:nvSpPr>
-          <p:cNvPr id="13" name="Text 11"/>
-          <p:cNvSpPr txBox="1"/>
-          <p:nvPr/>
-        </p:nvSpPr>
-        <p:spPr>
-          <a:xfrm>
-            <a:off x="1417320" y="3127248"/>
+          <p:cNvPr id="8" name="Text 6"/>
+          <p:cNvSpPr txBox="1"/>
+          <p:nvPr/>
+        </p:nvSpPr>
+        <p:spPr>
+          <a:xfrm>
+            <a:off x="1417320" y="2167128"/>
             <a:ext cx="4754880" cy="347472"/>
           </a:xfrm>
           <a:prstGeom prst="rect">
@@ -7916,7 +11231,7 @@
                 <a:ea typeface="Malgun Gothic" pitchFamily="34" charset="-122"/>
                 <a:cs typeface="Malgun Gothic" pitchFamily="34" charset="-120"/>
               </a:rPr>
-              <a:t>사회복지사 · 생활지원사</a:t>
+              <a:t>주민센터 · 구청 노인복지과</a:t>
             </a:r>
             <a:endParaRPr lang="en-US" sz="1450" dirty="0"/>
           </a:p>
@@ -7924,13 +11239,13 @@
       </p:sp>
       <p:sp>
         <p:nvSpPr>
-          <p:cNvPr id="14" name="Text 12"/>
-          <p:cNvSpPr txBox="1"/>
-          <p:nvPr/>
-        </p:nvSpPr>
-        <p:spPr>
-          <a:xfrm>
-            <a:off x="1417320" y="3456432"/>
+          <p:cNvPr id="9" name="Text 7"/>
+          <p:cNvSpPr txBox="1"/>
+          <p:nvPr/>
+        </p:nvSpPr>
+        <p:spPr>
+          <a:xfrm>
+            <a:off x="1417320" y="2496312"/>
             <a:ext cx="4754880" cy="310896"/>
           </a:xfrm>
           <a:prstGeom prst="rect">
@@ -7955,7 +11270,7 @@
                 <a:ea typeface="Malgun Gothic" pitchFamily="34" charset="-122"/>
                 <a:cs typeface="Malgun Gothic" pitchFamily="34" charset="-120"/>
               </a:rPr>
-              <a:t>이상신호 알림 → 방문·전화 대응</a:t>
+              <a:t>신청·상담 연결</a:t>
             </a:r>
             <a:endParaRPr lang="en-US" sz="1200" dirty="0"/>
           </a:p>
@@ -7963,13 +11278,13 @@
       </p:sp>
       <p:sp>
         <p:nvSpPr>
-          <p:cNvPr id="15" name="Shape 13"/>
+          <p:cNvPr id="10" name="Shape 8"/>
           <p:cNvSpPr/>
           <p:nvPr/>
         </p:nvSpPr>
         <p:spPr>
           <a:xfrm>
-            <a:off x="548640" y="3977640"/>
+            <a:off x="548640" y="3017520"/>
             <a:ext cx="5760720" cy="822960"/>
           </a:xfrm>
           <a:prstGeom prst="roundRect">
@@ -7997,6 +11312,177 @@
       </p:sp>
       <p:sp>
         <p:nvSpPr>
+          <p:cNvPr id="11" name="Shape 9"/>
+          <p:cNvSpPr/>
+          <p:nvPr/>
+        </p:nvSpPr>
+        <p:spPr>
+          <a:xfrm>
+            <a:off x="777240" y="3191256"/>
+            <a:ext cx="475488" cy="475488"/>
+          </a:xfrm>
+          <a:prstGeom prst="ellipse">
+            <a:avLst/>
+          </a:prstGeom>
+          <a:solidFill>
+            <a:srgbClr val="0F2F6F"/>
+          </a:solidFill>
+          <a:ln/>
+        </p:spPr>
+      </p:sp>
+      <p:sp>
+        <p:nvSpPr>
+          <p:cNvPr id="12" name="Text 10"/>
+          <p:cNvSpPr txBox="1"/>
+          <p:nvPr/>
+        </p:nvSpPr>
+        <p:spPr>
+          <a:xfrm>
+            <a:off x="777240" y="3191256"/>
+            <a:ext cx="475488" cy="475488"/>
+          </a:xfrm>
+          <a:prstGeom prst="rect">
+            <a:avLst/>
+          </a:prstGeom>
+          <a:noFill/>
+          <a:ln/>
+        </p:spPr>
+        <p:txBody>
+          <a:bodyPr wrap="square" lIns="0" tIns="0" rIns="0" bIns="0" rtlCol="0" anchor="ctr"/>
+          <a:lstStyle/>
+          <a:p>
+            <a:pPr algn="ctr" indent="0" marL="0">
+              <a:buNone/>
+            </a:pPr>
+            <a:r>
+              <a:rPr lang="en-US" sz="1500" b="1" dirty="0">
+                <a:solidFill>
+                  <a:srgbClr val="FFFFFF"/>
+                </a:solidFill>
+                <a:latin typeface="Malgun Gothic" pitchFamily="34" charset="0"/>
+                <a:ea typeface="Malgun Gothic" pitchFamily="34" charset="-122"/>
+                <a:cs typeface="Malgun Gothic" pitchFamily="34" charset="-120"/>
+              </a:rPr>
+              <a:t>2</a:t>
+            </a:r>
+            <a:endParaRPr lang="en-US" sz="1500" dirty="0"/>
+          </a:p>
+        </p:txBody>
+      </p:sp>
+      <p:sp>
+        <p:nvSpPr>
+          <p:cNvPr id="13" name="Text 11"/>
+          <p:cNvSpPr txBox="1"/>
+          <p:nvPr/>
+        </p:nvSpPr>
+        <p:spPr>
+          <a:xfrm>
+            <a:off x="1417320" y="3127248"/>
+            <a:ext cx="4754880" cy="347472"/>
+          </a:xfrm>
+          <a:prstGeom prst="rect">
+            <a:avLst/>
+          </a:prstGeom>
+          <a:noFill/>
+          <a:ln/>
+        </p:spPr>
+        <p:txBody>
+          <a:bodyPr wrap="square" lIns="0" tIns="0" rIns="0" bIns="0" rtlCol="0" anchor="ctr"/>
+          <a:lstStyle/>
+          <a:p>
+            <a:pPr indent="0" marL="0">
+              <a:buNone/>
+            </a:pPr>
+            <a:r>
+              <a:rPr lang="en-US" sz="1450" b="1" dirty="0">
+                <a:solidFill>
+                  <a:srgbClr val="1F2933"/>
+                </a:solidFill>
+                <a:latin typeface="Malgun Gothic" pitchFamily="34" charset="0"/>
+                <a:ea typeface="Malgun Gothic" pitchFamily="34" charset="-122"/>
+                <a:cs typeface="Malgun Gothic" pitchFamily="34" charset="-120"/>
+              </a:rPr>
+              <a:t>사회복지사 · 생활지원사</a:t>
+            </a:r>
+            <a:endParaRPr lang="en-US" sz="1450" dirty="0"/>
+          </a:p>
+        </p:txBody>
+      </p:sp>
+      <p:sp>
+        <p:nvSpPr>
+          <p:cNvPr id="14" name="Text 12"/>
+          <p:cNvSpPr txBox="1"/>
+          <p:nvPr/>
+        </p:nvSpPr>
+        <p:spPr>
+          <a:xfrm>
+            <a:off x="1417320" y="3456432"/>
+            <a:ext cx="4754880" cy="310896"/>
+          </a:xfrm>
+          <a:prstGeom prst="rect">
+            <a:avLst/>
+          </a:prstGeom>
+          <a:noFill/>
+          <a:ln/>
+        </p:spPr>
+        <p:txBody>
+          <a:bodyPr wrap="square" lIns="0" tIns="0" rIns="0" bIns="0" rtlCol="0" anchor="ctr"/>
+          <a:lstStyle/>
+          <a:p>
+            <a:pPr indent="0" marL="0">
+              <a:buNone/>
+            </a:pPr>
+            <a:r>
+              <a:rPr lang="en-US" sz="1200" dirty="0">
+                <a:solidFill>
+                  <a:srgbClr val="5B6673"/>
+                </a:solidFill>
+                <a:latin typeface="Malgun Gothic" pitchFamily="34" charset="0"/>
+                <a:ea typeface="Malgun Gothic" pitchFamily="34" charset="-122"/>
+                <a:cs typeface="Malgun Gothic" pitchFamily="34" charset="-120"/>
+              </a:rPr>
+              <a:t>이상신호 알림 → 방문·전화 대응</a:t>
+            </a:r>
+            <a:endParaRPr lang="en-US" sz="1200" dirty="0"/>
+          </a:p>
+        </p:txBody>
+      </p:sp>
+      <p:sp>
+        <p:nvSpPr>
+          <p:cNvPr id="15" name="Shape 13"/>
+          <p:cNvSpPr/>
+          <p:nvPr/>
+        </p:nvSpPr>
+        <p:spPr>
+          <a:xfrm>
+            <a:off x="548640" y="3977640"/>
+            <a:ext cx="5760720" cy="822960"/>
+          </a:xfrm>
+          <a:prstGeom prst="roundRect">
+            <a:avLst>
+              <a:gd name="adj" fmla="val 10000"/>
+            </a:avLst>
+          </a:prstGeom>
+          <a:solidFill>
+            <a:srgbClr val="F4F7FC"/>
+          </a:solidFill>
+          <a:ln w="12700">
+            <a:solidFill>
+              <a:srgbClr val="D8E0EC"/>
+            </a:solidFill>
+            <a:prstDash val="solid"/>
+          </a:ln>
+          <a:effectLst>
+            <a:outerShdw sx="100000" sy="100000" kx="0" ky="0" algn="bl" rotWithShape="0" blurRad="76200" dist="25400" dir="5400000">
+              <a:srgbClr val="9AA5B5">
+                <a:alpha val="35000"/>
+              </a:srgbClr>
+            </a:outerShdw>
+          </a:effectLst>
+        </p:spPr>
+      </p:sp>
+      <p:sp>
+        <p:nvSpPr>
           <p:cNvPr id="16" name="Shape 14"/>
           <p:cNvSpPr/>
           <p:nvPr/>
@@ -8456,9 +11942,9 @@
 </p:sld>
 </file>
 
-<file path=ppt/slides/slide8.xml><?xml version="1.0" encoding="utf-8"?>
+<file path=ppt/slides/slide9.xml><?xml version="1.0" encoding="utf-8"?>
 <p:sld xmlns:a="http://schemas.openxmlformats.org/drawingml/2006/main" xmlns:r="http://schemas.openxmlformats.org/officeDocument/2006/relationships" xmlns:p="http://schemas.openxmlformats.org/presentationml/2006/main">
-  <p:cSld name="Slide 8">
+  <p:cSld name="Slide 9">
     <p:bg>
       <p:bgPr>
         <a:solidFill>
@@ -9113,1583 +12599,6 @@
               <a:t>“혼자가 아니라고 느끼게 하는 기술”</a:t>
             </a:r>
             <a:endParaRPr lang="en-US" sz="2400" dirty="0"/>
-          </a:p>
-        </p:txBody>
-      </p:sp>
-    </p:spTree>
-  </p:cSld>
-  <p:clrMapOvr>
-    <a:masterClrMapping/>
-  </p:clrMapOvr>
-</p:sld>
-</file>
-
-<file path=ppt/slides/slide9.xml><?xml version="1.0" encoding="utf-8"?>
-<p:sld xmlns:a="http://schemas.openxmlformats.org/drawingml/2006/main" xmlns:r="http://schemas.openxmlformats.org/officeDocument/2006/relationships" xmlns:p="http://schemas.openxmlformats.org/presentationml/2006/main">
-  <p:cSld name="Slide 9">
-    <p:bg>
-      <p:bgPr>
-        <a:solidFill>
-          <a:srgbClr val="FFFFFF"/>
-        </a:solidFill>
-      </p:bgPr>
-    </p:bg>
-    <p:spTree>
-      <p:nvGrpSpPr>
-        <p:cNvPr id="1" name=""/>
-        <p:cNvGrpSpPr/>
-        <p:nvPr/>
-      </p:nvGrpSpPr>
-      <p:grpSpPr>
-        <a:xfrm>
-          <a:off x="0" y="0"/>
-          <a:ext cx="0" cy="0"/>
-          <a:chOff x="0" y="0"/>
-          <a:chExt cx="0" cy="0"/>
-        </a:xfrm>
-      </p:grpSpPr>
-      <p:sp>
-        <p:nvSpPr>
-          <p:cNvPr id="2" name="Text 0"/>
-          <p:cNvSpPr txBox="1"/>
-          <p:nvPr/>
-        </p:nvSpPr>
-        <p:spPr>
-          <a:xfrm>
-            <a:off x="548640" y="457200"/>
-            <a:ext cx="11094415" cy="274320"/>
-          </a:xfrm>
-          <a:prstGeom prst="rect">
-            <a:avLst/>
-          </a:prstGeom>
-          <a:noFill/>
-          <a:ln/>
-        </p:spPr>
-        <p:txBody>
-          <a:bodyPr wrap="square" lIns="0" tIns="0" rIns="0" bIns="0" rtlCol="0" anchor="ctr"/>
-          <a:lstStyle/>
-          <a:p>
-            <a:pPr indent="0" marL="0">
-              <a:buNone/>
-            </a:pPr>
-            <a:r>
-              <a:rPr lang="en-US" sz="1300" b="1" spc="200" kern="0" dirty="0">
-                <a:solidFill>
-                  <a:srgbClr val="E0A83C"/>
-                </a:solidFill>
-                <a:latin typeface="Malgun Gothic" pitchFamily="34" charset="0"/>
-                <a:ea typeface="Malgun Gothic" pitchFamily="34" charset="-122"/>
-                <a:cs typeface="Malgun Gothic" pitchFamily="34" charset="-120"/>
-              </a:rPr>
-              <a:t>ROADMAP</a:t>
-            </a:r>
-            <a:endParaRPr lang="en-US" sz="1300" dirty="0"/>
-          </a:p>
-        </p:txBody>
-      </p:sp>
-      <p:sp>
-        <p:nvSpPr>
-          <p:cNvPr id="3" name="Text 1"/>
-          <p:cNvSpPr txBox="1"/>
-          <p:nvPr/>
-        </p:nvSpPr>
-        <p:spPr>
-          <a:xfrm>
-            <a:off x="548640" y="713232"/>
-            <a:ext cx="11094415" cy="640080"/>
-          </a:xfrm>
-          <a:prstGeom prst="rect">
-            <a:avLst/>
-          </a:prstGeom>
-          <a:noFill/>
-          <a:ln/>
-        </p:spPr>
-        <p:txBody>
-          <a:bodyPr wrap="square" lIns="0" tIns="0" rIns="0" bIns="0" rtlCol="0" anchor="ctr"/>
-          <a:lstStyle/>
-          <a:p>
-            <a:pPr indent="0" marL="0">
-              <a:buNone/>
-            </a:pPr>
-            <a:r>
-              <a:rPr lang="en-US" sz="3200" b="1" dirty="0">
-                <a:solidFill>
-                  <a:srgbClr val="0F2F6F"/>
-                </a:solidFill>
-                <a:latin typeface="Malgun Gothic" pitchFamily="34" charset="0"/>
-                <a:ea typeface="Malgun Gothic" pitchFamily="34" charset="-122"/>
-                <a:cs typeface="Malgun Gothic" pitchFamily="34" charset="-120"/>
-              </a:rPr>
-              <a:t>진행 현황과 계획</a:t>
-            </a:r>
-            <a:endParaRPr lang="en-US" sz="3200" dirty="0"/>
-          </a:p>
-        </p:txBody>
-      </p:sp>
-      <p:sp>
-        <p:nvSpPr>
-          <p:cNvPr id="4" name="Shape 2"/>
-          <p:cNvSpPr/>
-          <p:nvPr/>
-        </p:nvSpPr>
-        <p:spPr>
-          <a:xfrm>
-            <a:off x="548640" y="1691640"/>
-            <a:ext cx="3484778" cy="1325880"/>
-          </a:xfrm>
-          <a:prstGeom prst="roundRect">
-            <a:avLst>
-              <a:gd name="adj" fmla="val 6207"/>
-            </a:avLst>
-          </a:prstGeom>
-          <a:solidFill>
-            <a:srgbClr val="F4F7FC"/>
-          </a:solidFill>
-          <a:ln w="12700">
-            <a:solidFill>
-              <a:srgbClr val="D8E0EC"/>
-            </a:solidFill>
-            <a:prstDash val="solid"/>
-          </a:ln>
-          <a:effectLst>
-            <a:outerShdw sx="100000" sy="100000" kx="0" ky="0" algn="bl" rotWithShape="0" blurRad="76200" dist="25400" dir="5400000">
-              <a:srgbClr val="9AA5B5">
-                <a:alpha val="35000"/>
-              </a:srgbClr>
-            </a:outerShdw>
-          </a:effectLst>
-        </p:spPr>
-      </p:sp>
-      <p:sp>
-        <p:nvSpPr>
-          <p:cNvPr id="5" name="Shape 3"/>
-          <p:cNvSpPr/>
-          <p:nvPr/>
-        </p:nvSpPr>
-        <p:spPr>
-          <a:xfrm>
-            <a:off x="804672" y="1920240"/>
-            <a:ext cx="548640" cy="548640"/>
-          </a:xfrm>
-          <a:prstGeom prst="ellipse">
-            <a:avLst/>
-          </a:prstGeom>
-          <a:solidFill>
-            <a:srgbClr val="0F2F6F"/>
-          </a:solidFill>
-          <a:ln/>
-        </p:spPr>
-      </p:sp>
-      <p:sp>
-        <p:nvSpPr>
-          <p:cNvPr id="6" name="Text 4"/>
-          <p:cNvSpPr txBox="1"/>
-          <p:nvPr/>
-        </p:nvSpPr>
-        <p:spPr>
-          <a:xfrm>
-            <a:off x="804672" y="1920240"/>
-            <a:ext cx="548640" cy="548640"/>
-          </a:xfrm>
-          <a:prstGeom prst="rect">
-            <a:avLst/>
-          </a:prstGeom>
-          <a:noFill/>
-          <a:ln/>
-        </p:spPr>
-        <p:txBody>
-          <a:bodyPr wrap="square" lIns="0" tIns="0" rIns="0" bIns="0" rtlCol="0" anchor="ctr"/>
-          <a:lstStyle/>
-          <a:p>
-            <a:pPr algn="ctr" indent="0" marL="0">
-              <a:buNone/>
-            </a:pPr>
-            <a:r>
-              <a:rPr lang="en-US" sz="1500" b="1" dirty="0">
-                <a:solidFill>
-                  <a:srgbClr val="FFFFFF"/>
-                </a:solidFill>
-                <a:latin typeface="Malgun Gothic" pitchFamily="34" charset="0"/>
-                <a:ea typeface="Malgun Gothic" pitchFamily="34" charset="-122"/>
-                <a:cs typeface="Malgun Gothic" pitchFamily="34" charset="-120"/>
-              </a:rPr>
-              <a:t>1</a:t>
-            </a:r>
-            <a:endParaRPr lang="en-US" sz="1500" dirty="0"/>
-          </a:p>
-        </p:txBody>
-      </p:sp>
-      <p:sp>
-        <p:nvSpPr>
-          <p:cNvPr id="7" name="Text 5"/>
-          <p:cNvSpPr txBox="1"/>
-          <p:nvPr/>
-        </p:nvSpPr>
-        <p:spPr>
-          <a:xfrm>
-            <a:off x="1508760" y="1874520"/>
-            <a:ext cx="2341778" cy="548640"/>
-          </a:xfrm>
-          <a:prstGeom prst="rect">
-            <a:avLst/>
-          </a:prstGeom>
-          <a:noFill/>
-          <a:ln/>
-        </p:spPr>
-        <p:txBody>
-          <a:bodyPr wrap="square" lIns="0" tIns="0" rIns="0" bIns="0" rtlCol="0" anchor="ctr"/>
-          <a:lstStyle/>
-          <a:p>
-            <a:pPr indent="0" marL="0">
-              <a:buNone/>
-            </a:pPr>
-            <a:r>
-              <a:rPr lang="en-US" sz="1450" b="1" dirty="0">
-                <a:solidFill>
-                  <a:srgbClr val="0F2F6F"/>
-                </a:solidFill>
-                <a:latin typeface="Malgun Gothic" pitchFamily="34" charset="0"/>
-                <a:ea typeface="Malgun Gothic" pitchFamily="34" charset="-122"/>
-                <a:cs typeface="Malgun Gothic" pitchFamily="34" charset="-120"/>
-              </a:rPr>
-              <a:t>텍스트 대화 (RAG Q&amp;A)</a:t>
-            </a:r>
-            <a:endParaRPr lang="en-US" sz="1450" dirty="0"/>
-          </a:p>
-        </p:txBody>
-      </p:sp>
-      <p:sp>
-        <p:nvSpPr>
-          <p:cNvPr id="8" name="Shape 6"/>
-          <p:cNvSpPr/>
-          <p:nvPr/>
-        </p:nvSpPr>
-        <p:spPr>
-          <a:xfrm>
-            <a:off x="822960" y="2532888"/>
-            <a:ext cx="1051560" cy="292608"/>
-          </a:xfrm>
-          <a:prstGeom prst="roundRect">
-            <a:avLst>
-              <a:gd name="adj" fmla="val 15625"/>
-            </a:avLst>
-          </a:prstGeom>
-          <a:solidFill>
-            <a:srgbClr val="2E7D46"/>
-          </a:solidFill>
-          <a:ln/>
-        </p:spPr>
-      </p:sp>
-      <p:sp>
-        <p:nvSpPr>
-          <p:cNvPr id="9" name="Text 7"/>
-          <p:cNvSpPr txBox="1"/>
-          <p:nvPr/>
-        </p:nvSpPr>
-        <p:spPr>
-          <a:xfrm>
-            <a:off x="822960" y="2532888"/>
-            <a:ext cx="1051560" cy="292608"/>
-          </a:xfrm>
-          <a:prstGeom prst="rect">
-            <a:avLst/>
-          </a:prstGeom>
-          <a:noFill/>
-          <a:ln/>
-        </p:spPr>
-        <p:txBody>
-          <a:bodyPr wrap="square" lIns="0" tIns="0" rIns="0" bIns="0" rtlCol="0" anchor="ctr"/>
-          <a:lstStyle/>
-          <a:p>
-            <a:pPr algn="ctr" indent="0" marL="0">
-              <a:buNone/>
-            </a:pPr>
-            <a:r>
-              <a:rPr lang="en-US" sz="1100" b="1" dirty="0">
-                <a:solidFill>
-                  <a:srgbClr val="FFFFFF"/>
-                </a:solidFill>
-                <a:latin typeface="Malgun Gothic" pitchFamily="34" charset="0"/>
-                <a:ea typeface="Malgun Gothic" pitchFamily="34" charset="-122"/>
-                <a:cs typeface="Malgun Gothic" pitchFamily="34" charset="-120"/>
-              </a:rPr>
-              <a:t>완료</a:t>
-            </a:r>
-            <a:endParaRPr lang="en-US" sz="1100" dirty="0"/>
-          </a:p>
-        </p:txBody>
-      </p:sp>
-      <p:sp>
-        <p:nvSpPr>
-          <p:cNvPr id="10" name="Text 8"/>
-          <p:cNvSpPr txBox="1"/>
-          <p:nvPr/>
-        </p:nvSpPr>
-        <p:spPr>
-          <a:xfrm>
-            <a:off x="1965960" y="2514600"/>
-            <a:ext cx="1884578" cy="365760"/>
-          </a:xfrm>
-          <a:prstGeom prst="rect">
-            <a:avLst/>
-          </a:prstGeom>
-          <a:noFill/>
-          <a:ln/>
-        </p:spPr>
-        <p:txBody>
-          <a:bodyPr wrap="square" lIns="0" tIns="0" rIns="0" bIns="0" rtlCol="0" anchor="ctr"/>
-          <a:lstStyle/>
-          <a:p>
-            <a:pPr indent="0" marL="0">
-              <a:buNone/>
-            </a:pPr>
-            <a:r>
-              <a:rPr lang="en-US" sz="1150" dirty="0">
-                <a:solidFill>
-                  <a:srgbClr val="5B6673"/>
-                </a:solidFill>
-                <a:latin typeface="Malgun Gothic" pitchFamily="34" charset="0"/>
-                <a:ea typeface="Malgun Gothic" pitchFamily="34" charset="-122"/>
-                <a:cs typeface="Malgun Gothic" pitchFamily="34" charset="-120"/>
-              </a:rPr>
-              <a:t>완료 · 오늘 발표 핵심</a:t>
-            </a:r>
-            <a:endParaRPr lang="en-US" sz="1150" dirty="0"/>
-          </a:p>
-        </p:txBody>
-      </p:sp>
-      <p:sp>
-        <p:nvSpPr>
-          <p:cNvPr id="11" name="Shape 9"/>
-          <p:cNvSpPr/>
-          <p:nvPr/>
-        </p:nvSpPr>
-        <p:spPr>
-          <a:xfrm>
-            <a:off x="4353458" y="1691640"/>
-            <a:ext cx="3484778" cy="1325880"/>
-          </a:xfrm>
-          <a:prstGeom prst="roundRect">
-            <a:avLst>
-              <a:gd name="adj" fmla="val 6207"/>
-            </a:avLst>
-          </a:prstGeom>
-          <a:solidFill>
-            <a:srgbClr val="F4F7FC"/>
-          </a:solidFill>
-          <a:ln w="12700">
-            <a:solidFill>
-              <a:srgbClr val="D8E0EC"/>
-            </a:solidFill>
-            <a:prstDash val="solid"/>
-          </a:ln>
-          <a:effectLst>
-            <a:outerShdw sx="100000" sy="100000" kx="0" ky="0" algn="bl" rotWithShape="0" blurRad="76200" dist="25400" dir="5400000">
-              <a:srgbClr val="9AA5B5">
-                <a:alpha val="35000"/>
-              </a:srgbClr>
-            </a:outerShdw>
-          </a:effectLst>
-        </p:spPr>
-      </p:sp>
-      <p:sp>
-        <p:nvSpPr>
-          <p:cNvPr id="12" name="Shape 10"/>
-          <p:cNvSpPr/>
-          <p:nvPr/>
-        </p:nvSpPr>
-        <p:spPr>
-          <a:xfrm>
-            <a:off x="4609490" y="1920240"/>
-            <a:ext cx="548640" cy="548640"/>
-          </a:xfrm>
-          <a:prstGeom prst="ellipse">
-            <a:avLst/>
-          </a:prstGeom>
-          <a:solidFill>
-            <a:srgbClr val="0F2F6F"/>
-          </a:solidFill>
-          <a:ln/>
-        </p:spPr>
-      </p:sp>
-      <p:sp>
-        <p:nvSpPr>
-          <p:cNvPr id="13" name="Text 11"/>
-          <p:cNvSpPr txBox="1"/>
-          <p:nvPr/>
-        </p:nvSpPr>
-        <p:spPr>
-          <a:xfrm>
-            <a:off x="4609490" y="1920240"/>
-            <a:ext cx="548640" cy="548640"/>
-          </a:xfrm>
-          <a:prstGeom prst="rect">
-            <a:avLst/>
-          </a:prstGeom>
-          <a:noFill/>
-          <a:ln/>
-        </p:spPr>
-        <p:txBody>
-          <a:bodyPr wrap="square" lIns="0" tIns="0" rIns="0" bIns="0" rtlCol="0" anchor="ctr"/>
-          <a:lstStyle/>
-          <a:p>
-            <a:pPr algn="ctr" indent="0" marL="0">
-              <a:buNone/>
-            </a:pPr>
-            <a:r>
-              <a:rPr lang="en-US" sz="1500" b="1" dirty="0">
-                <a:solidFill>
-                  <a:srgbClr val="FFFFFF"/>
-                </a:solidFill>
-                <a:latin typeface="Malgun Gothic" pitchFamily="34" charset="0"/>
-                <a:ea typeface="Malgun Gothic" pitchFamily="34" charset="-122"/>
-                <a:cs typeface="Malgun Gothic" pitchFamily="34" charset="-120"/>
-              </a:rPr>
-              <a:t>2</a:t>
-            </a:r>
-            <a:endParaRPr lang="en-US" sz="1500" dirty="0"/>
-          </a:p>
-        </p:txBody>
-      </p:sp>
-      <p:sp>
-        <p:nvSpPr>
-          <p:cNvPr id="14" name="Text 12"/>
-          <p:cNvSpPr txBox="1"/>
-          <p:nvPr/>
-        </p:nvSpPr>
-        <p:spPr>
-          <a:xfrm>
-            <a:off x="5313578" y="1874520"/>
-            <a:ext cx="2341778" cy="548640"/>
-          </a:xfrm>
-          <a:prstGeom prst="rect">
-            <a:avLst/>
-          </a:prstGeom>
-          <a:noFill/>
-          <a:ln/>
-        </p:spPr>
-        <p:txBody>
-          <a:bodyPr wrap="square" lIns="0" tIns="0" rIns="0" bIns="0" rtlCol="0" anchor="ctr"/>
-          <a:lstStyle/>
-          <a:p>
-            <a:pPr indent="0" marL="0">
-              <a:buNone/>
-            </a:pPr>
-            <a:r>
-              <a:rPr lang="en-US" sz="1450" b="1" dirty="0">
-                <a:solidFill>
-                  <a:srgbClr val="0F2F6F"/>
-                </a:solidFill>
-                <a:latin typeface="Malgun Gothic" pitchFamily="34" charset="0"/>
-                <a:ea typeface="Malgun Gothic" pitchFamily="34" charset="-122"/>
-                <a:cs typeface="Malgun Gothic" pitchFamily="34" charset="-120"/>
-              </a:rPr>
-              <a:t>이상신호 감지</a:t>
-            </a:r>
-            <a:endParaRPr lang="en-US" sz="1450" dirty="0"/>
-          </a:p>
-        </p:txBody>
-      </p:sp>
-      <p:sp>
-        <p:nvSpPr>
-          <p:cNvPr id="15" name="Shape 13"/>
-          <p:cNvSpPr/>
-          <p:nvPr/>
-        </p:nvSpPr>
-        <p:spPr>
-          <a:xfrm>
-            <a:off x="4627778" y="2532888"/>
-            <a:ext cx="1051560" cy="292608"/>
-          </a:xfrm>
-          <a:prstGeom prst="roundRect">
-            <a:avLst>
-              <a:gd name="adj" fmla="val 15625"/>
-            </a:avLst>
-          </a:prstGeom>
-          <a:solidFill>
-            <a:srgbClr val="2E7D46"/>
-          </a:solidFill>
-          <a:ln/>
-        </p:spPr>
-      </p:sp>
-      <p:sp>
-        <p:nvSpPr>
-          <p:cNvPr id="16" name="Text 14"/>
-          <p:cNvSpPr txBox="1"/>
-          <p:nvPr/>
-        </p:nvSpPr>
-        <p:spPr>
-          <a:xfrm>
-            <a:off x="4627778" y="2532888"/>
-            <a:ext cx="1051560" cy="292608"/>
-          </a:xfrm>
-          <a:prstGeom prst="rect">
-            <a:avLst/>
-          </a:prstGeom>
-          <a:noFill/>
-          <a:ln/>
-        </p:spPr>
-        <p:txBody>
-          <a:bodyPr wrap="square" lIns="0" tIns="0" rIns="0" bIns="0" rtlCol="0" anchor="ctr"/>
-          <a:lstStyle/>
-          <a:p>
-            <a:pPr algn="ctr" indent="0" marL="0">
-              <a:buNone/>
-            </a:pPr>
-            <a:r>
-              <a:rPr lang="en-US" sz="1100" b="1" dirty="0">
-                <a:solidFill>
-                  <a:srgbClr val="FFFFFF"/>
-                </a:solidFill>
-                <a:latin typeface="Malgun Gothic" pitchFamily="34" charset="0"/>
-                <a:ea typeface="Malgun Gothic" pitchFamily="34" charset="-122"/>
-                <a:cs typeface="Malgun Gothic" pitchFamily="34" charset="-120"/>
-              </a:rPr>
-              <a:t>완료</a:t>
-            </a:r>
-            <a:endParaRPr lang="en-US" sz="1100" dirty="0"/>
-          </a:p>
-        </p:txBody>
-      </p:sp>
-      <p:sp>
-        <p:nvSpPr>
-          <p:cNvPr id="17" name="Text 15"/>
-          <p:cNvSpPr txBox="1"/>
-          <p:nvPr/>
-        </p:nvSpPr>
-        <p:spPr>
-          <a:xfrm>
-            <a:off x="5770778" y="2514600"/>
-            <a:ext cx="1884578" cy="365760"/>
-          </a:xfrm>
-          <a:prstGeom prst="rect">
-            <a:avLst/>
-          </a:prstGeom>
-          <a:noFill/>
-          <a:ln/>
-        </p:spPr>
-        <p:txBody>
-          <a:bodyPr wrap="square" lIns="0" tIns="0" rIns="0" bIns="0" rtlCol="0" anchor="ctr"/>
-          <a:lstStyle/>
-          <a:p>
-            <a:pPr indent="0" marL="0">
-              <a:buNone/>
-            </a:pPr>
-            <a:r>
-              <a:rPr lang="en-US" sz="1150" dirty="0">
-                <a:solidFill>
-                  <a:srgbClr val="5B6673"/>
-                </a:solidFill>
-                <a:latin typeface="Malgun Gothic" pitchFamily="34" charset="0"/>
-                <a:ea typeface="Malgun Gothic" pitchFamily="34" charset="-122"/>
-                <a:cs typeface="Malgun Gothic" pitchFamily="34" charset="-120"/>
-              </a:rPr>
-              <a:t>구현 (고도화 예정)</a:t>
-            </a:r>
-            <a:endParaRPr lang="en-US" sz="1150" dirty="0"/>
-          </a:p>
-        </p:txBody>
-      </p:sp>
-      <p:sp>
-        <p:nvSpPr>
-          <p:cNvPr id="18" name="Shape 16"/>
-          <p:cNvSpPr/>
-          <p:nvPr/>
-        </p:nvSpPr>
-        <p:spPr>
-          <a:xfrm>
-            <a:off x="8158277" y="1691640"/>
-            <a:ext cx="3484778" cy="1325880"/>
-          </a:xfrm>
-          <a:prstGeom prst="roundRect">
-            <a:avLst>
-              <a:gd name="adj" fmla="val 6207"/>
-            </a:avLst>
-          </a:prstGeom>
-          <a:solidFill>
-            <a:srgbClr val="F4F7FC"/>
-          </a:solidFill>
-          <a:ln w="12700">
-            <a:solidFill>
-              <a:srgbClr val="D8E0EC"/>
-            </a:solidFill>
-            <a:prstDash val="solid"/>
-          </a:ln>
-          <a:effectLst>
-            <a:outerShdw sx="100000" sy="100000" kx="0" ky="0" algn="bl" rotWithShape="0" blurRad="76200" dist="25400" dir="5400000">
-              <a:srgbClr val="9AA5B5">
-                <a:alpha val="35000"/>
-              </a:srgbClr>
-            </a:outerShdw>
-          </a:effectLst>
-        </p:spPr>
-      </p:sp>
-      <p:sp>
-        <p:nvSpPr>
-          <p:cNvPr id="19" name="Shape 17"/>
-          <p:cNvSpPr/>
-          <p:nvPr/>
-        </p:nvSpPr>
-        <p:spPr>
-          <a:xfrm>
-            <a:off x="8414309" y="1920240"/>
-            <a:ext cx="548640" cy="548640"/>
-          </a:xfrm>
-          <a:prstGeom prst="ellipse">
-            <a:avLst/>
-          </a:prstGeom>
-          <a:solidFill>
-            <a:srgbClr val="0F2F6F"/>
-          </a:solidFill>
-          <a:ln/>
-        </p:spPr>
-      </p:sp>
-      <p:sp>
-        <p:nvSpPr>
-          <p:cNvPr id="20" name="Text 18"/>
-          <p:cNvSpPr txBox="1"/>
-          <p:nvPr/>
-        </p:nvSpPr>
-        <p:spPr>
-          <a:xfrm>
-            <a:off x="8414309" y="1920240"/>
-            <a:ext cx="548640" cy="548640"/>
-          </a:xfrm>
-          <a:prstGeom prst="rect">
-            <a:avLst/>
-          </a:prstGeom>
-          <a:noFill/>
-          <a:ln/>
-        </p:spPr>
-        <p:txBody>
-          <a:bodyPr wrap="square" lIns="0" tIns="0" rIns="0" bIns="0" rtlCol="0" anchor="ctr"/>
-          <a:lstStyle/>
-          <a:p>
-            <a:pPr algn="ctr" indent="0" marL="0">
-              <a:buNone/>
-            </a:pPr>
-            <a:r>
-              <a:rPr lang="en-US" sz="1500" b="1" dirty="0">
-                <a:solidFill>
-                  <a:srgbClr val="FFFFFF"/>
-                </a:solidFill>
-                <a:latin typeface="Malgun Gothic" pitchFamily="34" charset="0"/>
-                <a:ea typeface="Malgun Gothic" pitchFamily="34" charset="-122"/>
-                <a:cs typeface="Malgun Gothic" pitchFamily="34" charset="-120"/>
-              </a:rPr>
-              <a:t>3</a:t>
-            </a:r>
-            <a:endParaRPr lang="en-US" sz="1500" dirty="0"/>
-          </a:p>
-        </p:txBody>
-      </p:sp>
-      <p:sp>
-        <p:nvSpPr>
-          <p:cNvPr id="21" name="Text 19"/>
-          <p:cNvSpPr txBox="1"/>
-          <p:nvPr/>
-        </p:nvSpPr>
-        <p:spPr>
-          <a:xfrm>
-            <a:off x="9118397" y="1874520"/>
-            <a:ext cx="2341778" cy="548640"/>
-          </a:xfrm>
-          <a:prstGeom prst="rect">
-            <a:avLst/>
-          </a:prstGeom>
-          <a:noFill/>
-          <a:ln/>
-        </p:spPr>
-        <p:txBody>
-          <a:bodyPr wrap="square" lIns="0" tIns="0" rIns="0" bIns="0" rtlCol="0" anchor="ctr"/>
-          <a:lstStyle/>
-          <a:p>
-            <a:pPr indent="0" marL="0">
-              <a:buNone/>
-            </a:pPr>
-            <a:r>
-              <a:rPr lang="en-US" sz="1450" b="1" dirty="0">
-                <a:solidFill>
-                  <a:srgbClr val="0F2F6F"/>
-                </a:solidFill>
-                <a:latin typeface="Malgun Gothic" pitchFamily="34" charset="0"/>
-                <a:ea typeface="Malgun Gothic" pitchFamily="34" charset="-122"/>
-                <a:cs typeface="Malgun Gothic" pitchFamily="34" charset="-120"/>
-              </a:rPr>
-              <a:t>두 기능 융합</a:t>
-            </a:r>
-            <a:endParaRPr lang="en-US" sz="1450" dirty="0"/>
-          </a:p>
-        </p:txBody>
-      </p:sp>
-      <p:sp>
-        <p:nvSpPr>
-          <p:cNvPr id="22" name="Shape 20"/>
-          <p:cNvSpPr/>
-          <p:nvPr/>
-        </p:nvSpPr>
-        <p:spPr>
-          <a:xfrm>
-            <a:off x="8432597" y="2532888"/>
-            <a:ext cx="1051560" cy="292608"/>
-          </a:xfrm>
-          <a:prstGeom prst="roundRect">
-            <a:avLst>
-              <a:gd name="adj" fmla="val 15625"/>
-            </a:avLst>
-          </a:prstGeom>
-          <a:solidFill>
-            <a:srgbClr val="2E7D46"/>
-          </a:solidFill>
-          <a:ln/>
-        </p:spPr>
-      </p:sp>
-      <p:sp>
-        <p:nvSpPr>
-          <p:cNvPr id="23" name="Text 21"/>
-          <p:cNvSpPr txBox="1"/>
-          <p:nvPr/>
-        </p:nvSpPr>
-        <p:spPr>
-          <a:xfrm>
-            <a:off x="8432597" y="2532888"/>
-            <a:ext cx="1051560" cy="292608"/>
-          </a:xfrm>
-          <a:prstGeom prst="rect">
-            <a:avLst/>
-          </a:prstGeom>
-          <a:noFill/>
-          <a:ln/>
-        </p:spPr>
-        <p:txBody>
-          <a:bodyPr wrap="square" lIns="0" tIns="0" rIns="0" bIns="0" rtlCol="0" anchor="ctr"/>
-          <a:lstStyle/>
-          <a:p>
-            <a:pPr algn="ctr" indent="0" marL="0">
-              <a:buNone/>
-            </a:pPr>
-            <a:r>
-              <a:rPr lang="en-US" sz="1100" b="1" dirty="0">
-                <a:solidFill>
-                  <a:srgbClr val="FFFFFF"/>
-                </a:solidFill>
-                <a:latin typeface="Malgun Gothic" pitchFamily="34" charset="0"/>
-                <a:ea typeface="Malgun Gothic" pitchFamily="34" charset="-122"/>
-                <a:cs typeface="Malgun Gothic" pitchFamily="34" charset="-120"/>
-              </a:rPr>
-              <a:t>완료</a:t>
-            </a:r>
-            <a:endParaRPr lang="en-US" sz="1100" dirty="0"/>
-          </a:p>
-        </p:txBody>
-      </p:sp>
-      <p:sp>
-        <p:nvSpPr>
-          <p:cNvPr id="24" name="Text 22"/>
-          <p:cNvSpPr txBox="1"/>
-          <p:nvPr/>
-        </p:nvSpPr>
-        <p:spPr>
-          <a:xfrm>
-            <a:off x="9575597" y="2514600"/>
-            <a:ext cx="1884578" cy="365760"/>
-          </a:xfrm>
-          <a:prstGeom prst="rect">
-            <a:avLst/>
-          </a:prstGeom>
-          <a:noFill/>
-          <a:ln/>
-        </p:spPr>
-        <p:txBody>
-          <a:bodyPr wrap="square" lIns="0" tIns="0" rIns="0" bIns="0" rtlCol="0" anchor="ctr"/>
-          <a:lstStyle/>
-          <a:p>
-            <a:pPr indent="0" marL="0">
-              <a:buNone/>
-            </a:pPr>
-            <a:r>
-              <a:rPr lang="en-US" sz="1150" dirty="0">
-                <a:solidFill>
-                  <a:srgbClr val="5B6673"/>
-                </a:solidFill>
-                <a:latin typeface="Malgun Gothic" pitchFamily="34" charset="0"/>
-                <a:ea typeface="Malgun Gothic" pitchFamily="34" charset="-122"/>
-                <a:cs typeface="Malgun Gothic" pitchFamily="34" charset="-120"/>
-              </a:rPr>
-              <a:t>통합 완료</a:t>
-            </a:r>
-            <a:endParaRPr lang="en-US" sz="1150" dirty="0"/>
-          </a:p>
-        </p:txBody>
-      </p:sp>
-      <p:sp>
-        <p:nvSpPr>
-          <p:cNvPr id="25" name="Shape 23"/>
-          <p:cNvSpPr/>
-          <p:nvPr/>
-        </p:nvSpPr>
-        <p:spPr>
-          <a:xfrm>
-            <a:off x="548640" y="3246120"/>
-            <a:ext cx="3484778" cy="1325880"/>
-          </a:xfrm>
-          <a:prstGeom prst="roundRect">
-            <a:avLst>
-              <a:gd name="adj" fmla="val 6207"/>
-            </a:avLst>
-          </a:prstGeom>
-          <a:solidFill>
-            <a:srgbClr val="F4F7FC"/>
-          </a:solidFill>
-          <a:ln w="12700">
-            <a:solidFill>
-              <a:srgbClr val="D8E0EC"/>
-            </a:solidFill>
-            <a:prstDash val="solid"/>
-          </a:ln>
-          <a:effectLst>
-            <a:outerShdw sx="100000" sy="100000" kx="0" ky="0" algn="bl" rotWithShape="0" blurRad="76200" dist="25400" dir="5400000">
-              <a:srgbClr val="9AA5B5">
-                <a:alpha val="35000"/>
-              </a:srgbClr>
-            </a:outerShdw>
-          </a:effectLst>
-        </p:spPr>
-      </p:sp>
-      <p:sp>
-        <p:nvSpPr>
-          <p:cNvPr id="26" name="Shape 24"/>
-          <p:cNvSpPr/>
-          <p:nvPr/>
-        </p:nvSpPr>
-        <p:spPr>
-          <a:xfrm>
-            <a:off x="804672" y="3474720"/>
-            <a:ext cx="548640" cy="548640"/>
-          </a:xfrm>
-          <a:prstGeom prst="ellipse">
-            <a:avLst/>
-          </a:prstGeom>
-          <a:solidFill>
-            <a:srgbClr val="0F2F6F"/>
-          </a:solidFill>
-          <a:ln/>
-        </p:spPr>
-      </p:sp>
-      <p:sp>
-        <p:nvSpPr>
-          <p:cNvPr id="27" name="Text 25"/>
-          <p:cNvSpPr txBox="1"/>
-          <p:nvPr/>
-        </p:nvSpPr>
-        <p:spPr>
-          <a:xfrm>
-            <a:off x="804672" y="3474720"/>
-            <a:ext cx="548640" cy="548640"/>
-          </a:xfrm>
-          <a:prstGeom prst="rect">
-            <a:avLst/>
-          </a:prstGeom>
-          <a:noFill/>
-          <a:ln/>
-        </p:spPr>
-        <p:txBody>
-          <a:bodyPr wrap="square" lIns="0" tIns="0" rIns="0" bIns="0" rtlCol="0" anchor="ctr"/>
-          <a:lstStyle/>
-          <a:p>
-            <a:pPr algn="ctr" indent="0" marL="0">
-              <a:buNone/>
-            </a:pPr>
-            <a:r>
-              <a:rPr lang="en-US" sz="1500" b="1" dirty="0">
-                <a:solidFill>
-                  <a:srgbClr val="FFFFFF"/>
-                </a:solidFill>
-                <a:latin typeface="Malgun Gothic" pitchFamily="34" charset="0"/>
-                <a:ea typeface="Malgun Gothic" pitchFamily="34" charset="-122"/>
-                <a:cs typeface="Malgun Gothic" pitchFamily="34" charset="-120"/>
-              </a:rPr>
-              <a:t>4</a:t>
-            </a:r>
-            <a:endParaRPr lang="en-US" sz="1500" dirty="0"/>
-          </a:p>
-        </p:txBody>
-      </p:sp>
-      <p:sp>
-        <p:nvSpPr>
-          <p:cNvPr id="28" name="Text 26"/>
-          <p:cNvSpPr txBox="1"/>
-          <p:nvPr/>
-        </p:nvSpPr>
-        <p:spPr>
-          <a:xfrm>
-            <a:off x="1508760" y="3429000"/>
-            <a:ext cx="2341778" cy="548640"/>
-          </a:xfrm>
-          <a:prstGeom prst="rect">
-            <a:avLst/>
-          </a:prstGeom>
-          <a:noFill/>
-          <a:ln/>
-        </p:spPr>
-        <p:txBody>
-          <a:bodyPr wrap="square" lIns="0" tIns="0" rIns="0" bIns="0" rtlCol="0" anchor="ctr"/>
-          <a:lstStyle/>
-          <a:p>
-            <a:pPr indent="0" marL="0">
-              <a:buNone/>
-            </a:pPr>
-            <a:r>
-              <a:rPr lang="en-US" sz="1450" b="1" dirty="0">
-                <a:solidFill>
-                  <a:srgbClr val="0F2F6F"/>
-                </a:solidFill>
-                <a:latin typeface="Malgun Gothic" pitchFamily="34" charset="0"/>
-                <a:ea typeface="Malgun Gothic" pitchFamily="34" charset="-122"/>
-                <a:cs typeface="Malgun Gothic" pitchFamily="34" charset="-120"/>
-              </a:rPr>
-              <a:t>음성 대화 (STT·TTS)</a:t>
-            </a:r>
-            <a:endParaRPr lang="en-US" sz="1450" dirty="0"/>
-          </a:p>
-        </p:txBody>
-      </p:sp>
-      <p:sp>
-        <p:nvSpPr>
-          <p:cNvPr id="29" name="Shape 27"/>
-          <p:cNvSpPr/>
-          <p:nvPr/>
-        </p:nvSpPr>
-        <p:spPr>
-          <a:xfrm>
-            <a:off x="822960" y="4087368"/>
-            <a:ext cx="1051560" cy="292608"/>
-          </a:xfrm>
-          <a:prstGeom prst="roundRect">
-            <a:avLst>
-              <a:gd name="adj" fmla="val 15625"/>
-            </a:avLst>
-          </a:prstGeom>
-          <a:solidFill>
-            <a:srgbClr val="E0A83C"/>
-          </a:solidFill>
-          <a:ln/>
-        </p:spPr>
-      </p:sp>
-      <p:sp>
-        <p:nvSpPr>
-          <p:cNvPr id="30" name="Text 28"/>
-          <p:cNvSpPr txBox="1"/>
-          <p:nvPr/>
-        </p:nvSpPr>
-        <p:spPr>
-          <a:xfrm>
-            <a:off x="822960" y="4087368"/>
-            <a:ext cx="1051560" cy="292608"/>
-          </a:xfrm>
-          <a:prstGeom prst="rect">
-            <a:avLst/>
-          </a:prstGeom>
-          <a:noFill/>
-          <a:ln/>
-        </p:spPr>
-        <p:txBody>
-          <a:bodyPr wrap="square" lIns="0" tIns="0" rIns="0" bIns="0" rtlCol="0" anchor="ctr"/>
-          <a:lstStyle/>
-          <a:p>
-            <a:pPr algn="ctr" indent="0" marL="0">
-              <a:buNone/>
-            </a:pPr>
-            <a:r>
-              <a:rPr lang="en-US" sz="1100" b="1" dirty="0">
-                <a:solidFill>
-                  <a:srgbClr val="FFFFFF"/>
-                </a:solidFill>
-                <a:latin typeface="Malgun Gothic" pitchFamily="34" charset="0"/>
-                <a:ea typeface="Malgun Gothic" pitchFamily="34" charset="-122"/>
-                <a:cs typeface="Malgun Gothic" pitchFamily="34" charset="-120"/>
-              </a:rPr>
-              <a:t>진행중</a:t>
-            </a:r>
-            <a:endParaRPr lang="en-US" sz="1100" dirty="0"/>
-          </a:p>
-        </p:txBody>
-      </p:sp>
-      <p:sp>
-        <p:nvSpPr>
-          <p:cNvPr id="31" name="Text 29"/>
-          <p:cNvSpPr txBox="1"/>
-          <p:nvPr/>
-        </p:nvSpPr>
-        <p:spPr>
-          <a:xfrm>
-            <a:off x="1965960" y="4069080"/>
-            <a:ext cx="1884578" cy="365760"/>
-          </a:xfrm>
-          <a:prstGeom prst="rect">
-            <a:avLst/>
-          </a:prstGeom>
-          <a:noFill/>
-          <a:ln/>
-        </p:spPr>
-        <p:txBody>
-          <a:bodyPr wrap="square" lIns="0" tIns="0" rIns="0" bIns="0" rtlCol="0" anchor="ctr"/>
-          <a:lstStyle/>
-          <a:p>
-            <a:pPr indent="0" marL="0">
-              <a:buNone/>
-            </a:pPr>
-            <a:r>
-              <a:rPr lang="en-US" sz="1150" dirty="0">
-                <a:solidFill>
-                  <a:srgbClr val="5B6673"/>
-                </a:solidFill>
-                <a:latin typeface="Malgun Gothic" pitchFamily="34" charset="0"/>
-                <a:ea typeface="Malgun Gothic" pitchFamily="34" charset="-122"/>
-                <a:cs typeface="Malgun Gothic" pitchFamily="34" charset="-120"/>
-              </a:rPr>
-              <a:t>실험 구현</a:t>
-            </a:r>
-            <a:endParaRPr lang="en-US" sz="1150" dirty="0"/>
-          </a:p>
-        </p:txBody>
-      </p:sp>
-      <p:sp>
-        <p:nvSpPr>
-          <p:cNvPr id="32" name="Shape 30"/>
-          <p:cNvSpPr/>
-          <p:nvPr/>
-        </p:nvSpPr>
-        <p:spPr>
-          <a:xfrm>
-            <a:off x="4353458" y="3246120"/>
-            <a:ext cx="3484778" cy="1325880"/>
-          </a:xfrm>
-          <a:prstGeom prst="roundRect">
-            <a:avLst>
-              <a:gd name="adj" fmla="val 6207"/>
-            </a:avLst>
-          </a:prstGeom>
-          <a:solidFill>
-            <a:srgbClr val="F4F7FC"/>
-          </a:solidFill>
-          <a:ln w="12700">
-            <a:solidFill>
-              <a:srgbClr val="D8E0EC"/>
-            </a:solidFill>
-            <a:prstDash val="solid"/>
-          </a:ln>
-          <a:effectLst>
-            <a:outerShdw sx="100000" sy="100000" kx="0" ky="0" algn="bl" rotWithShape="0" blurRad="76200" dist="25400" dir="5400000">
-              <a:srgbClr val="9AA5B5">
-                <a:alpha val="35000"/>
-              </a:srgbClr>
-            </a:outerShdw>
-          </a:effectLst>
-        </p:spPr>
-      </p:sp>
-      <p:sp>
-        <p:nvSpPr>
-          <p:cNvPr id="33" name="Shape 31"/>
-          <p:cNvSpPr/>
-          <p:nvPr/>
-        </p:nvSpPr>
-        <p:spPr>
-          <a:xfrm>
-            <a:off x="4609490" y="3474720"/>
-            <a:ext cx="548640" cy="548640"/>
-          </a:xfrm>
-          <a:prstGeom prst="ellipse">
-            <a:avLst/>
-          </a:prstGeom>
-          <a:solidFill>
-            <a:srgbClr val="0F2F6F"/>
-          </a:solidFill>
-          <a:ln/>
-        </p:spPr>
-      </p:sp>
-      <p:sp>
-        <p:nvSpPr>
-          <p:cNvPr id="34" name="Text 32"/>
-          <p:cNvSpPr txBox="1"/>
-          <p:nvPr/>
-        </p:nvSpPr>
-        <p:spPr>
-          <a:xfrm>
-            <a:off x="4609490" y="3474720"/>
-            <a:ext cx="548640" cy="548640"/>
-          </a:xfrm>
-          <a:prstGeom prst="rect">
-            <a:avLst/>
-          </a:prstGeom>
-          <a:noFill/>
-          <a:ln/>
-        </p:spPr>
-        <p:txBody>
-          <a:bodyPr wrap="square" lIns="0" tIns="0" rIns="0" bIns="0" rtlCol="0" anchor="ctr"/>
-          <a:lstStyle/>
-          <a:p>
-            <a:pPr algn="ctr" indent="0" marL="0">
-              <a:buNone/>
-            </a:pPr>
-            <a:r>
-              <a:rPr lang="en-US" sz="1500" b="1" dirty="0">
-                <a:solidFill>
-                  <a:srgbClr val="FFFFFF"/>
-                </a:solidFill>
-                <a:latin typeface="Malgun Gothic" pitchFamily="34" charset="0"/>
-                <a:ea typeface="Malgun Gothic" pitchFamily="34" charset="-122"/>
-                <a:cs typeface="Malgun Gothic" pitchFamily="34" charset="-120"/>
-              </a:rPr>
-              <a:t>5</a:t>
-            </a:r>
-            <a:endParaRPr lang="en-US" sz="1500" dirty="0"/>
-          </a:p>
-        </p:txBody>
-      </p:sp>
-      <p:sp>
-        <p:nvSpPr>
-          <p:cNvPr id="35" name="Text 33"/>
-          <p:cNvSpPr txBox="1"/>
-          <p:nvPr/>
-        </p:nvSpPr>
-        <p:spPr>
-          <a:xfrm>
-            <a:off x="5313578" y="3429000"/>
-            <a:ext cx="2341778" cy="548640"/>
-          </a:xfrm>
-          <a:prstGeom prst="rect">
-            <a:avLst/>
-          </a:prstGeom>
-          <a:noFill/>
-          <a:ln/>
-        </p:spPr>
-        <p:txBody>
-          <a:bodyPr wrap="square" lIns="0" tIns="0" rIns="0" bIns="0" rtlCol="0" anchor="ctr"/>
-          <a:lstStyle/>
-          <a:p>
-            <a:pPr indent="0" marL="0">
-              <a:buNone/>
-            </a:pPr>
-            <a:r>
-              <a:rPr lang="en-US" sz="1450" b="1" dirty="0">
-                <a:solidFill>
-                  <a:srgbClr val="0F2F6F"/>
-                </a:solidFill>
-                <a:latin typeface="Malgun Gothic" pitchFamily="34" charset="0"/>
-                <a:ea typeface="Malgun Gothic" pitchFamily="34" charset="-122"/>
-                <a:cs typeface="Malgun Gothic" pitchFamily="34" charset="-120"/>
-              </a:rPr>
-              <a:t>UI/UX (모바일·PWA)</a:t>
-            </a:r>
-            <a:endParaRPr lang="en-US" sz="1450" dirty="0"/>
-          </a:p>
-        </p:txBody>
-      </p:sp>
-      <p:sp>
-        <p:nvSpPr>
-          <p:cNvPr id="36" name="Shape 34"/>
-          <p:cNvSpPr/>
-          <p:nvPr/>
-        </p:nvSpPr>
-        <p:spPr>
-          <a:xfrm>
-            <a:off x="4627778" y="4087368"/>
-            <a:ext cx="1051560" cy="292608"/>
-          </a:xfrm>
-          <a:prstGeom prst="roundRect">
-            <a:avLst>
-              <a:gd name="adj" fmla="val 15625"/>
-            </a:avLst>
-          </a:prstGeom>
-          <a:solidFill>
-            <a:srgbClr val="2E7D46"/>
-          </a:solidFill>
-          <a:ln/>
-        </p:spPr>
-      </p:sp>
-      <p:sp>
-        <p:nvSpPr>
-          <p:cNvPr id="37" name="Text 35"/>
-          <p:cNvSpPr txBox="1"/>
-          <p:nvPr/>
-        </p:nvSpPr>
-        <p:spPr>
-          <a:xfrm>
-            <a:off x="4627778" y="4087368"/>
-            <a:ext cx="1051560" cy="292608"/>
-          </a:xfrm>
-          <a:prstGeom prst="rect">
-            <a:avLst/>
-          </a:prstGeom>
-          <a:noFill/>
-          <a:ln/>
-        </p:spPr>
-        <p:txBody>
-          <a:bodyPr wrap="square" lIns="0" tIns="0" rIns="0" bIns="0" rtlCol="0" anchor="ctr"/>
-          <a:lstStyle/>
-          <a:p>
-            <a:pPr algn="ctr" indent="0" marL="0">
-              <a:buNone/>
-            </a:pPr>
-            <a:r>
-              <a:rPr lang="en-US" sz="1100" b="1" dirty="0">
-                <a:solidFill>
-                  <a:srgbClr val="FFFFFF"/>
-                </a:solidFill>
-                <a:latin typeface="Malgun Gothic" pitchFamily="34" charset="0"/>
-                <a:ea typeface="Malgun Gothic" pitchFamily="34" charset="-122"/>
-                <a:cs typeface="Malgun Gothic" pitchFamily="34" charset="-120"/>
-              </a:rPr>
-              <a:t>완료</a:t>
-            </a:r>
-            <a:endParaRPr lang="en-US" sz="1100" dirty="0"/>
-          </a:p>
-        </p:txBody>
-      </p:sp>
-      <p:sp>
-        <p:nvSpPr>
-          <p:cNvPr id="38" name="Text 36"/>
-          <p:cNvSpPr txBox="1"/>
-          <p:nvPr/>
-        </p:nvSpPr>
-        <p:spPr>
-          <a:xfrm>
-            <a:off x="5770778" y="4069080"/>
-            <a:ext cx="1884578" cy="365760"/>
-          </a:xfrm>
-          <a:prstGeom prst="rect">
-            <a:avLst/>
-          </a:prstGeom>
-          <a:noFill/>
-          <a:ln/>
-        </p:spPr>
-        <p:txBody>
-          <a:bodyPr wrap="square" lIns="0" tIns="0" rIns="0" bIns="0" rtlCol="0" anchor="ctr"/>
-          <a:lstStyle/>
-          <a:p>
-            <a:pPr indent="0" marL="0">
-              <a:buNone/>
-            </a:pPr>
-            <a:r>
-              <a:rPr lang="en-US" sz="1150" dirty="0">
-                <a:solidFill>
-                  <a:srgbClr val="5B6673"/>
-                </a:solidFill>
-                <a:latin typeface="Malgun Gothic" pitchFamily="34" charset="0"/>
-                <a:ea typeface="Malgun Gothic" pitchFamily="34" charset="-122"/>
-                <a:cs typeface="Malgun Gothic" pitchFamily="34" charset="-120"/>
-              </a:rPr>
-              <a:t>구현</a:t>
-            </a:r>
-            <a:endParaRPr lang="en-US" sz="1150" dirty="0"/>
-          </a:p>
-        </p:txBody>
-      </p:sp>
-      <p:sp>
-        <p:nvSpPr>
-          <p:cNvPr id="39" name="Shape 37"/>
-          <p:cNvSpPr/>
-          <p:nvPr/>
-        </p:nvSpPr>
-        <p:spPr>
-          <a:xfrm>
-            <a:off x="8158277" y="3246120"/>
-            <a:ext cx="3484778" cy="1325880"/>
-          </a:xfrm>
-          <a:prstGeom prst="roundRect">
-            <a:avLst>
-              <a:gd name="adj" fmla="val 6207"/>
-            </a:avLst>
-          </a:prstGeom>
-          <a:solidFill>
-            <a:srgbClr val="F4F7FC"/>
-          </a:solidFill>
-          <a:ln w="12700">
-            <a:solidFill>
-              <a:srgbClr val="D8E0EC"/>
-            </a:solidFill>
-            <a:prstDash val="solid"/>
-          </a:ln>
-          <a:effectLst>
-            <a:outerShdw sx="100000" sy="100000" kx="0" ky="0" algn="bl" rotWithShape="0" blurRad="76200" dist="25400" dir="5400000">
-              <a:srgbClr val="9AA5B5">
-                <a:alpha val="35000"/>
-              </a:srgbClr>
-            </a:outerShdw>
-          </a:effectLst>
-        </p:spPr>
-      </p:sp>
-      <p:sp>
-        <p:nvSpPr>
-          <p:cNvPr id="40" name="Shape 38"/>
-          <p:cNvSpPr/>
-          <p:nvPr/>
-        </p:nvSpPr>
-        <p:spPr>
-          <a:xfrm>
-            <a:off x="8414309" y="3474720"/>
-            <a:ext cx="548640" cy="548640"/>
-          </a:xfrm>
-          <a:prstGeom prst="ellipse">
-            <a:avLst/>
-          </a:prstGeom>
-          <a:solidFill>
-            <a:srgbClr val="0F2F6F"/>
-          </a:solidFill>
-          <a:ln/>
-        </p:spPr>
-      </p:sp>
-      <p:sp>
-        <p:nvSpPr>
-          <p:cNvPr id="41" name="Text 39"/>
-          <p:cNvSpPr txBox="1"/>
-          <p:nvPr/>
-        </p:nvSpPr>
-        <p:spPr>
-          <a:xfrm>
-            <a:off x="8414309" y="3474720"/>
-            <a:ext cx="548640" cy="548640"/>
-          </a:xfrm>
-          <a:prstGeom prst="rect">
-            <a:avLst/>
-          </a:prstGeom>
-          <a:noFill/>
-          <a:ln/>
-        </p:spPr>
-        <p:txBody>
-          <a:bodyPr wrap="square" lIns="0" tIns="0" rIns="0" bIns="0" rtlCol="0" anchor="ctr"/>
-          <a:lstStyle/>
-          <a:p>
-            <a:pPr algn="ctr" indent="0" marL="0">
-              <a:buNone/>
-            </a:pPr>
-            <a:r>
-              <a:rPr lang="en-US" sz="1500" b="1" dirty="0">
-                <a:solidFill>
-                  <a:srgbClr val="FFFFFF"/>
-                </a:solidFill>
-                <a:latin typeface="Malgun Gothic" pitchFamily="34" charset="0"/>
-                <a:ea typeface="Malgun Gothic" pitchFamily="34" charset="-122"/>
-                <a:cs typeface="Malgun Gothic" pitchFamily="34" charset="-120"/>
-              </a:rPr>
-              <a:t>6</a:t>
-            </a:r>
-            <a:endParaRPr lang="en-US" sz="1500" dirty="0"/>
-          </a:p>
-        </p:txBody>
-      </p:sp>
-      <p:sp>
-        <p:nvSpPr>
-          <p:cNvPr id="42" name="Text 40"/>
-          <p:cNvSpPr txBox="1"/>
-          <p:nvPr/>
-        </p:nvSpPr>
-        <p:spPr>
-          <a:xfrm>
-            <a:off x="9118397" y="3429000"/>
-            <a:ext cx="2341778" cy="548640"/>
-          </a:xfrm>
-          <a:prstGeom prst="rect">
-            <a:avLst/>
-          </a:prstGeom>
-          <a:noFill/>
-          <a:ln/>
-        </p:spPr>
-        <p:txBody>
-          <a:bodyPr wrap="square" lIns="0" tIns="0" rIns="0" bIns="0" rtlCol="0" anchor="ctr"/>
-          <a:lstStyle/>
-          <a:p>
-            <a:pPr indent="0" marL="0">
-              <a:buNone/>
-            </a:pPr>
-            <a:r>
-              <a:rPr lang="en-US" sz="1450" b="1" dirty="0">
-                <a:solidFill>
-                  <a:srgbClr val="0F2F6F"/>
-                </a:solidFill>
-                <a:latin typeface="Malgun Gothic" pitchFamily="34" charset="0"/>
-                <a:ea typeface="Malgun Gothic" pitchFamily="34" charset="-122"/>
-                <a:cs typeface="Malgun Gothic" pitchFamily="34" charset="-120"/>
-              </a:rPr>
-              <a:t>평가 · 실증</a:t>
-            </a:r>
-            <a:endParaRPr lang="en-US" sz="1450" dirty="0"/>
-          </a:p>
-        </p:txBody>
-      </p:sp>
-      <p:sp>
-        <p:nvSpPr>
-          <p:cNvPr id="43" name="Shape 41"/>
-          <p:cNvSpPr/>
-          <p:nvPr/>
-        </p:nvSpPr>
-        <p:spPr>
-          <a:xfrm>
-            <a:off x="8432597" y="4087368"/>
-            <a:ext cx="1051560" cy="292608"/>
-          </a:xfrm>
-          <a:prstGeom prst="roundRect">
-            <a:avLst>
-              <a:gd name="adj" fmla="val 15625"/>
-            </a:avLst>
-          </a:prstGeom>
-          <a:solidFill>
-            <a:srgbClr val="E0A83C"/>
-          </a:solidFill>
-          <a:ln/>
-        </p:spPr>
-      </p:sp>
-      <p:sp>
-        <p:nvSpPr>
-          <p:cNvPr id="44" name="Text 42"/>
-          <p:cNvSpPr txBox="1"/>
-          <p:nvPr/>
-        </p:nvSpPr>
-        <p:spPr>
-          <a:xfrm>
-            <a:off x="8432597" y="4087368"/>
-            <a:ext cx="1051560" cy="292608"/>
-          </a:xfrm>
-          <a:prstGeom prst="rect">
-            <a:avLst/>
-          </a:prstGeom>
-          <a:noFill/>
-          <a:ln/>
-        </p:spPr>
-        <p:txBody>
-          <a:bodyPr wrap="square" lIns="0" tIns="0" rIns="0" bIns="0" rtlCol="0" anchor="ctr"/>
-          <a:lstStyle/>
-          <a:p>
-            <a:pPr algn="ctr" indent="0" marL="0">
-              <a:buNone/>
-            </a:pPr>
-            <a:r>
-              <a:rPr lang="en-US" sz="1100" b="1" dirty="0">
-                <a:solidFill>
-                  <a:srgbClr val="FFFFFF"/>
-                </a:solidFill>
-                <a:latin typeface="Malgun Gothic" pitchFamily="34" charset="0"/>
-                <a:ea typeface="Malgun Gothic" pitchFamily="34" charset="-122"/>
-                <a:cs typeface="Malgun Gothic" pitchFamily="34" charset="-120"/>
-              </a:rPr>
-              <a:t>진행중</a:t>
-            </a:r>
-            <a:endParaRPr lang="en-US" sz="1100" dirty="0"/>
-          </a:p>
-        </p:txBody>
-      </p:sp>
-      <p:sp>
-        <p:nvSpPr>
-          <p:cNvPr id="45" name="Text 43"/>
-          <p:cNvSpPr txBox="1"/>
-          <p:nvPr/>
-        </p:nvSpPr>
-        <p:spPr>
-          <a:xfrm>
-            <a:off x="9575597" y="4069080"/>
-            <a:ext cx="1884578" cy="365760"/>
-          </a:xfrm>
-          <a:prstGeom prst="rect">
-            <a:avLst/>
-          </a:prstGeom>
-          <a:noFill/>
-          <a:ln/>
-        </p:spPr>
-        <p:txBody>
-          <a:bodyPr wrap="square" lIns="0" tIns="0" rIns="0" bIns="0" rtlCol="0" anchor="ctr"/>
-          <a:lstStyle/>
-          <a:p>
-            <a:pPr indent="0" marL="0">
-              <a:buNone/>
-            </a:pPr>
-            <a:r>
-              <a:rPr lang="en-US" sz="1150" dirty="0">
-                <a:solidFill>
-                  <a:srgbClr val="5B6673"/>
-                </a:solidFill>
-                <a:latin typeface="Malgun Gothic" pitchFamily="34" charset="0"/>
-                <a:ea typeface="Malgun Gothic" pitchFamily="34" charset="-122"/>
-                <a:cs typeface="Malgun Gothic" pitchFamily="34" charset="-120"/>
-              </a:rPr>
-              <a:t>하네스 구축 · 현장 실증 예정</a:t>
-            </a:r>
-            <a:endParaRPr lang="en-US" sz="1150" dirty="0"/>
-          </a:p>
-        </p:txBody>
-      </p:sp>
-      <p:sp>
-        <p:nvSpPr>
-          <p:cNvPr id="46" name="Shape 44"/>
-          <p:cNvSpPr/>
-          <p:nvPr/>
-        </p:nvSpPr>
-        <p:spPr>
-          <a:xfrm>
-            <a:off x="548640" y="4892040"/>
-            <a:ext cx="11094415" cy="868680"/>
-          </a:xfrm>
-          <a:prstGeom prst="roundRect">
-            <a:avLst>
-              <a:gd name="adj" fmla="val 8421"/>
-            </a:avLst>
-          </a:prstGeom>
-          <a:solidFill>
-            <a:srgbClr val="EAF0FA"/>
-          </a:solidFill>
-          <a:ln/>
-        </p:spPr>
-      </p:sp>
-      <p:sp>
-        <p:nvSpPr>
-          <p:cNvPr id="47" name="Text 45"/>
-          <p:cNvSpPr txBox="1"/>
-          <p:nvPr/>
-        </p:nvSpPr>
-        <p:spPr>
-          <a:xfrm>
-            <a:off x="914400" y="4892040"/>
-            <a:ext cx="10362895" cy="868680"/>
-          </a:xfrm>
-          <a:prstGeom prst="rect">
-            <a:avLst/>
-          </a:prstGeom>
-          <a:noFill/>
-          <a:ln/>
-        </p:spPr>
-        <p:txBody>
-          <a:bodyPr wrap="square" lIns="0" tIns="0" rIns="0" bIns="0" rtlCol="0" anchor="ctr"/>
-          <a:lstStyle/>
-          <a:p>
-            <a:pPr indent="0" marL="0">
-              <a:buNone/>
-            </a:pPr>
-            <a:r>
-              <a:rPr lang="en-US" sz="1400" b="1" dirty="0">
-                <a:solidFill>
-                  <a:srgbClr val="0F2F6F"/>
-                </a:solidFill>
-                <a:latin typeface="Malgun Gothic" pitchFamily="34" charset="0"/>
-                <a:ea typeface="Malgun Gothic" pitchFamily="34" charset="-122"/>
-                <a:cs typeface="Malgun Gothic" pitchFamily="34" charset="-120"/>
-              </a:rPr>
-              <a:t>다음 단계   </a:t>
-            </a:r>
-            <a:pPr indent="0" marL="0">
-              <a:buNone/>
-            </a:pPr>
-            <a:r>
-              <a:rPr lang="en-US" sz="1400" b="1" dirty="0">
-                <a:solidFill>
-                  <a:srgbClr val="1F2933"/>
-                </a:solidFill>
-                <a:latin typeface="Malgun Gothic" pitchFamily="34" charset="0"/>
-                <a:ea typeface="Malgun Gothic" pitchFamily="34" charset="-122"/>
-                <a:cs typeface="Malgun Gothic" pitchFamily="34" charset="-120"/>
-              </a:rPr>
-              <a:t>경로당 시범 운영 · HWP 문서 지원 · 사람·LLM 평가 보강</a:t>
-            </a:r>
-            <a:endParaRPr lang="en-US" sz="1400" dirty="0"/>
           </a:p>
         </p:txBody>
       </p:sp>

--- a/docs/welfare_ai_10min.pptx
+++ b/docs/welfare_ai_10min.pptx
@@ -1216,7 +1216,7 @@
           <a:p>
             <a:r>
               <a:rPr lang="en-US" dirty="0"/>
-              <a:t>실제 작동 데모 2개 + 데이터 규모/성능 수치. data well-managed를 여기서 증명.</a:t>
+              <a:t>실제 대화 예시: 복지 Q&amp;A(문서 근거 기반) + 이상신호 감지→복지사 알림. 오른쪽에 응답 원칙과 성능(92%/거절 100%/+14%p).</a:t>
             </a:r>
             <a:endParaRPr lang="en-US" dirty="0"/>
           </a:p>
@@ -10059,7 +10059,7 @@
                 <a:ea typeface="Malgun Gothic" pitchFamily="34" charset="-122"/>
                 <a:cs typeface="Malgun Gothic" pitchFamily="34" charset="-120"/>
               </a:rPr>
-              <a:t>핵심 기능 데모 · 데이터 · 성능</a:t>
+              <a:t>핵심 기능 데모 — 실제 대화 예시</a:t>
             </a:r>
             <a:endParaRPr lang="en-US" sz="3200" dirty="0"/>
           </a:p>
@@ -10073,12 +10073,616 @@
         </p:nvSpPr>
         <p:spPr>
           <a:xfrm>
-            <a:off x="548640" y="1600200"/>
-            <a:ext cx="5364328" cy="2148840"/>
+            <a:off x="548640" y="1536192"/>
+            <a:ext cx="6812280" cy="4553712"/>
           </a:xfrm>
           <a:prstGeom prst="roundRect">
             <a:avLst>
-              <a:gd name="adj" fmla="val 3830"/>
+              <a:gd name="adj" fmla="val 1807"/>
+            </a:avLst>
+          </a:prstGeom>
+          <a:solidFill>
+            <a:srgbClr val="F7FAFF"/>
+          </a:solidFill>
+          <a:ln w="12700">
+            <a:solidFill>
+              <a:srgbClr val="D8E0EC"/>
+            </a:solidFill>
+            <a:prstDash val="solid"/>
+          </a:ln>
+          <a:effectLst>
+            <a:outerShdw sx="100000" sy="100000" kx="0" ky="0" algn="bl" rotWithShape="0" blurRad="76200" dist="25400" dir="5400000">
+              <a:srgbClr val="9AA5B5">
+                <a:alpha val="35000"/>
+              </a:srgbClr>
+            </a:outerShdw>
+          </a:effectLst>
+        </p:spPr>
+      </p:sp>
+      <p:sp>
+        <p:nvSpPr>
+          <p:cNvPr id="5" name="Text 3"/>
+          <p:cNvSpPr txBox="1"/>
+          <p:nvPr/>
+        </p:nvSpPr>
+        <p:spPr>
+          <a:xfrm>
+            <a:off x="804672" y="1664208"/>
+            <a:ext cx="6300216" cy="310896"/>
+          </a:xfrm>
+          <a:prstGeom prst="rect">
+            <a:avLst/>
+          </a:prstGeom>
+          <a:noFill/>
+          <a:ln/>
+        </p:spPr>
+        <p:txBody>
+          <a:bodyPr wrap="square" lIns="0" tIns="0" rIns="0" bIns="0" rtlCol="0" anchor="ctr"/>
+          <a:lstStyle/>
+          <a:p>
+            <a:pPr indent="0" marL="0">
+              <a:buNone/>
+            </a:pPr>
+            <a:r>
+              <a:rPr lang="en-US" sz="1300" b="1" dirty="0">
+                <a:solidFill>
+                  <a:srgbClr val="0F2F6F"/>
+                </a:solidFill>
+                <a:latin typeface="Malgun Gothic" pitchFamily="34" charset="0"/>
+                <a:ea typeface="Malgun Gothic" pitchFamily="34" charset="-122"/>
+                <a:cs typeface="Malgun Gothic" pitchFamily="34" charset="-120"/>
+              </a:rPr>
+              <a:t>💬  어르신  ↔  복지 도우미</a:t>
+            </a:r>
+            <a:endParaRPr lang="en-US" sz="1300" dirty="0"/>
+          </a:p>
+        </p:txBody>
+      </p:sp>
+      <p:sp>
+        <p:nvSpPr>
+          <p:cNvPr id="6" name="Shape 4"/>
+          <p:cNvSpPr/>
+          <p:nvPr/>
+        </p:nvSpPr>
+        <p:spPr>
+          <a:xfrm>
+            <a:off x="3447288" y="2121408"/>
+            <a:ext cx="3657600" cy="457200"/>
+          </a:xfrm>
+          <a:prstGeom prst="roundRect">
+            <a:avLst>
+              <a:gd name="adj" fmla="val 18000"/>
+            </a:avLst>
+          </a:prstGeom>
+          <a:solidFill>
+            <a:srgbClr val="0F2F6F"/>
+          </a:solidFill>
+          <a:ln/>
+        </p:spPr>
+      </p:sp>
+      <p:sp>
+        <p:nvSpPr>
+          <p:cNvPr id="7" name="Text 5"/>
+          <p:cNvSpPr txBox="1"/>
+          <p:nvPr/>
+        </p:nvSpPr>
+        <p:spPr>
+          <a:xfrm>
+            <a:off x="3593592" y="2121408"/>
+            <a:ext cx="3364992" cy="457200"/>
+          </a:xfrm>
+          <a:prstGeom prst="rect">
+            <a:avLst/>
+          </a:prstGeom>
+          <a:noFill/>
+          <a:ln/>
+        </p:spPr>
+        <p:txBody>
+          <a:bodyPr wrap="square" lIns="0" tIns="0" rIns="0" bIns="0" rtlCol="0" anchor="ctr"/>
+          <a:lstStyle/>
+          <a:p>
+            <a:pPr indent="0" marL="0">
+              <a:buNone/>
+            </a:pPr>
+            <a:r>
+              <a:rPr lang="en-US" sz="1250" dirty="0">
+                <a:solidFill>
+                  <a:srgbClr val="FFFFFF"/>
+                </a:solidFill>
+                <a:latin typeface="Malgun Gothic" pitchFamily="34" charset="0"/>
+                <a:ea typeface="Malgun Gothic" pitchFamily="34" charset="-122"/>
+                <a:cs typeface="Malgun Gothic" pitchFamily="34" charset="-120"/>
+              </a:rPr>
+              <a:t>기초연금은 어떻게 신청하나요?</a:t>
+            </a:r>
+            <a:endParaRPr lang="en-US" sz="1250" dirty="0"/>
+          </a:p>
+        </p:txBody>
+      </p:sp>
+      <p:sp>
+        <p:nvSpPr>
+          <p:cNvPr id="8" name="Shape 6"/>
+          <p:cNvSpPr/>
+          <p:nvPr/>
+        </p:nvSpPr>
+        <p:spPr>
+          <a:xfrm>
+            <a:off x="804672" y="2688336"/>
+            <a:ext cx="4892040" cy="969264"/>
+          </a:xfrm>
+          <a:prstGeom prst="roundRect">
+            <a:avLst>
+              <a:gd name="adj" fmla="val 8491"/>
+            </a:avLst>
+          </a:prstGeom>
+          <a:solidFill>
+            <a:srgbClr val="FFFFFF"/>
+          </a:solidFill>
+          <a:ln w="12700">
+            <a:solidFill>
+              <a:srgbClr val="D8E0EC"/>
+            </a:solidFill>
+            <a:prstDash val="solid"/>
+          </a:ln>
+        </p:spPr>
+      </p:sp>
+      <p:sp>
+        <p:nvSpPr>
+          <p:cNvPr id="9" name="Text 7"/>
+          <p:cNvSpPr txBox="1"/>
+          <p:nvPr/>
+        </p:nvSpPr>
+        <p:spPr>
+          <a:xfrm>
+            <a:off x="969264" y="2706624"/>
+            <a:ext cx="4562856" cy="932688"/>
+          </a:xfrm>
+          <a:prstGeom prst="rect">
+            <a:avLst/>
+          </a:prstGeom>
+          <a:noFill/>
+          <a:ln/>
+        </p:spPr>
+        <p:txBody>
+          <a:bodyPr wrap="square" lIns="0" tIns="0" rIns="0" bIns="0" rtlCol="0" anchor="ctr"/>
+          <a:lstStyle/>
+          <a:p>
+            <a:pPr indent="0" marL="0">
+              <a:buNone/>
+            </a:pPr>
+            <a:r>
+              <a:rPr lang="en-US" sz="1250" dirty="0">
+                <a:solidFill>
+                  <a:srgbClr val="1F2933"/>
+                </a:solidFill>
+                <a:latin typeface="Malgun Gothic" pitchFamily="34" charset="0"/>
+                <a:ea typeface="Malgun Gothic" pitchFamily="34" charset="-122"/>
+                <a:cs typeface="Malgun Gothic" pitchFamily="34" charset="-120"/>
+              </a:rPr>
+              <a:t>만 65세 이상이시면 신분증과 통장 사본을 가지고 가까운 주민센터나 국민연금공단에서 신청하실 수 있어요.
+</a:t>
+            </a:r>
+            <a:endParaRPr lang="en-US" sz="1250" dirty="0"/>
+          </a:p>
+          <a:p>
+            <a:pPr indent="0" marL="0">
+              <a:buNone/>
+            </a:pPr>
+            <a:r>
+              <a:rPr lang="en-US" sz="950" i="1" dirty="0">
+                <a:solidFill>
+                  <a:srgbClr val="B8862B"/>
+                </a:solidFill>
+                <a:latin typeface="Malgun Gothic" pitchFamily="34" charset="0"/>
+                <a:ea typeface="Malgun Gothic" pitchFamily="34" charset="-122"/>
+                <a:cs typeface="Malgun Gothic" pitchFamily="34" charset="-120"/>
+              </a:rPr>
+              <a:t>📄 문서 근거 기반 응답</a:t>
+            </a:r>
+            <a:endParaRPr lang="en-US" sz="1250" dirty="0"/>
+          </a:p>
+        </p:txBody>
+      </p:sp>
+      <p:sp>
+        <p:nvSpPr>
+          <p:cNvPr id="10" name="Shape 8"/>
+          <p:cNvSpPr/>
+          <p:nvPr/>
+        </p:nvSpPr>
+        <p:spPr>
+          <a:xfrm>
+            <a:off x="2944368" y="3803904"/>
+            <a:ext cx="4160520" cy="457200"/>
+          </a:xfrm>
+          <a:prstGeom prst="roundRect">
+            <a:avLst>
+              <a:gd name="adj" fmla="val 18000"/>
+            </a:avLst>
+          </a:prstGeom>
+          <a:solidFill>
+            <a:srgbClr val="0F2F6F"/>
+          </a:solidFill>
+          <a:ln/>
+        </p:spPr>
+      </p:sp>
+      <p:sp>
+        <p:nvSpPr>
+          <p:cNvPr id="11" name="Text 9"/>
+          <p:cNvSpPr txBox="1"/>
+          <p:nvPr/>
+        </p:nvSpPr>
+        <p:spPr>
+          <a:xfrm>
+            <a:off x="3090672" y="3803904"/>
+            <a:ext cx="3867912" cy="457200"/>
+          </a:xfrm>
+          <a:prstGeom prst="rect">
+            <a:avLst/>
+          </a:prstGeom>
+          <a:noFill/>
+          <a:ln/>
+        </p:spPr>
+        <p:txBody>
+          <a:bodyPr wrap="square" lIns="0" tIns="0" rIns="0" bIns="0" rtlCol="0" anchor="ctr"/>
+          <a:lstStyle/>
+          <a:p>
+            <a:pPr indent="0" marL="0">
+              <a:buNone/>
+            </a:pPr>
+            <a:r>
+              <a:rPr lang="en-US" sz="1250" dirty="0">
+                <a:solidFill>
+                  <a:srgbClr val="FFFFFF"/>
+                </a:solidFill>
+                <a:latin typeface="Malgun Gothic" pitchFamily="34" charset="0"/>
+                <a:ea typeface="Malgun Gothic" pitchFamily="34" charset="-122"/>
+                <a:cs typeface="Malgun Gothic" pitchFamily="34" charset="-120"/>
+              </a:rPr>
+              <a:t>무릎도 아프고 혼자라 외롭고 우울해요…</a:t>
+            </a:r>
+            <a:endParaRPr lang="en-US" sz="1250" dirty="0"/>
+          </a:p>
+        </p:txBody>
+      </p:sp>
+      <p:sp>
+        <p:nvSpPr>
+          <p:cNvPr id="12" name="Shape 10"/>
+          <p:cNvSpPr/>
+          <p:nvPr/>
+        </p:nvSpPr>
+        <p:spPr>
+          <a:xfrm>
+            <a:off x="804672" y="4370832"/>
+            <a:ext cx="4663440" cy="749808"/>
+          </a:xfrm>
+          <a:prstGeom prst="roundRect">
+            <a:avLst>
+              <a:gd name="adj" fmla="val 10976"/>
+            </a:avLst>
+          </a:prstGeom>
+          <a:solidFill>
+            <a:srgbClr val="FFFFFF"/>
+          </a:solidFill>
+          <a:ln w="12700">
+            <a:solidFill>
+              <a:srgbClr val="D8E0EC"/>
+            </a:solidFill>
+            <a:prstDash val="solid"/>
+          </a:ln>
+        </p:spPr>
+      </p:sp>
+      <p:sp>
+        <p:nvSpPr>
+          <p:cNvPr id="13" name="Text 11"/>
+          <p:cNvSpPr txBox="1"/>
+          <p:nvPr/>
+        </p:nvSpPr>
+        <p:spPr>
+          <a:xfrm>
+            <a:off x="969264" y="4389120"/>
+            <a:ext cx="4334256" cy="713232"/>
+          </a:xfrm>
+          <a:prstGeom prst="rect">
+            <a:avLst/>
+          </a:prstGeom>
+          <a:noFill/>
+          <a:ln/>
+        </p:spPr>
+        <p:txBody>
+          <a:bodyPr wrap="square" lIns="0" tIns="0" rIns="0" bIns="0" rtlCol="0" anchor="ctr"/>
+          <a:lstStyle/>
+          <a:p>
+            <a:pPr indent="0" marL="0">
+              <a:buNone/>
+            </a:pPr>
+            <a:r>
+              <a:rPr lang="en-US" sz="1250" dirty="0">
+                <a:solidFill>
+                  <a:srgbClr val="1F2933"/>
+                </a:solidFill>
+                <a:latin typeface="Malgun Gothic" pitchFamily="34" charset="0"/>
+                <a:ea typeface="Malgun Gothic" pitchFamily="34" charset="-122"/>
+                <a:cs typeface="Malgun Gothic" pitchFamily="34" charset="-120"/>
+              </a:rPr>
+              <a:t>많이 힘드셨겠어요. 혼자 견디지 마시고 가까운 정신건강복지센터나 주민센터에 편히 연락해 보세요.</a:t>
+            </a:r>
+            <a:endParaRPr lang="en-US" sz="1250" dirty="0"/>
+          </a:p>
+        </p:txBody>
+      </p:sp>
+      <p:sp>
+        <p:nvSpPr>
+          <p:cNvPr id="14" name="Shape 12"/>
+          <p:cNvSpPr/>
+          <p:nvPr/>
+        </p:nvSpPr>
+        <p:spPr>
+          <a:xfrm>
+            <a:off x="804672" y="5230368"/>
+            <a:ext cx="5852160" cy="502920"/>
+          </a:xfrm>
+          <a:prstGeom prst="roundRect">
+            <a:avLst>
+              <a:gd name="adj" fmla="val 14545"/>
+            </a:avLst>
+          </a:prstGeom>
+          <a:solidFill>
+            <a:srgbClr val="E0A83C"/>
+          </a:solidFill>
+          <a:ln/>
+        </p:spPr>
+      </p:sp>
+      <p:sp>
+        <p:nvSpPr>
+          <p:cNvPr id="15" name="Text 13"/>
+          <p:cNvSpPr txBox="1"/>
+          <p:nvPr/>
+        </p:nvSpPr>
+        <p:spPr>
+          <a:xfrm>
+            <a:off x="804672" y="5230368"/>
+            <a:ext cx="5852160" cy="502920"/>
+          </a:xfrm>
+          <a:prstGeom prst="rect">
+            <a:avLst/>
+          </a:prstGeom>
+          <a:noFill/>
+          <a:ln/>
+        </p:spPr>
+        <p:txBody>
+          <a:bodyPr wrap="square" lIns="0" tIns="0" rIns="0" bIns="0" rtlCol="0" anchor="ctr"/>
+          <a:lstStyle/>
+          <a:p>
+            <a:pPr algn="ctr" indent="0" marL="0">
+              <a:buNone/>
+            </a:pPr>
+            <a:r>
+              <a:rPr lang="en-US" sz="1300" b="1" dirty="0">
+                <a:solidFill>
+                  <a:srgbClr val="0A2352"/>
+                </a:solidFill>
+                <a:latin typeface="Malgun Gothic" pitchFamily="34" charset="0"/>
+                <a:ea typeface="Malgun Gothic" pitchFamily="34" charset="-122"/>
+                <a:cs typeface="Malgun Gothic" pitchFamily="34" charset="-120"/>
+              </a:rPr>
+              <a:t>🚨  이상신호 감지  →  사회복지사에게 알림 전송</a:t>
+            </a:r>
+            <a:endParaRPr lang="en-US" sz="1300" dirty="0"/>
+          </a:p>
+        </p:txBody>
+      </p:sp>
+      <p:sp>
+        <p:nvSpPr>
+          <p:cNvPr id="16" name="Text 14"/>
+          <p:cNvSpPr txBox="1"/>
+          <p:nvPr/>
+        </p:nvSpPr>
+        <p:spPr>
+          <a:xfrm>
+            <a:off x="7744968" y="1572768"/>
+            <a:ext cx="3898087" cy="365760"/>
+          </a:xfrm>
+          <a:prstGeom prst="rect">
+            <a:avLst/>
+          </a:prstGeom>
+          <a:noFill/>
+          <a:ln/>
+        </p:spPr>
+        <p:txBody>
+          <a:bodyPr wrap="square" lIns="0" tIns="0" rIns="0" bIns="0" rtlCol="0" anchor="ctr"/>
+          <a:lstStyle/>
+          <a:p>
+            <a:pPr indent="0" marL="0">
+              <a:buNone/>
+            </a:pPr>
+            <a:r>
+              <a:rPr lang="en-US" sz="1600" b="1" dirty="0">
+                <a:solidFill>
+                  <a:srgbClr val="0F2F6F"/>
+                </a:solidFill>
+                <a:latin typeface="Malgun Gothic" pitchFamily="34" charset="0"/>
+                <a:ea typeface="Malgun Gothic" pitchFamily="34" charset="-122"/>
+                <a:cs typeface="Malgun Gothic" pitchFamily="34" charset="-120"/>
+              </a:rPr>
+              <a:t>AI가 답하는 방식</a:t>
+            </a:r>
+            <a:endParaRPr lang="en-US" sz="1600" dirty="0"/>
+          </a:p>
+        </p:txBody>
+      </p:sp>
+      <p:sp>
+        <p:nvSpPr>
+          <p:cNvPr id="17" name="Text 15"/>
+          <p:cNvSpPr txBox="1"/>
+          <p:nvPr/>
+        </p:nvSpPr>
+        <p:spPr>
+          <a:xfrm>
+            <a:off x="7744968" y="2048256"/>
+            <a:ext cx="3898087" cy="457200"/>
+          </a:xfrm>
+          <a:prstGeom prst="rect">
+            <a:avLst/>
+          </a:prstGeom>
+          <a:noFill/>
+          <a:ln/>
+        </p:spPr>
+        <p:txBody>
+          <a:bodyPr wrap="square" lIns="0" tIns="0" rIns="0" bIns="0" rtlCol="0" anchor="ctr"/>
+          <a:lstStyle/>
+          <a:p>
+            <a:pPr indent="0" marL="0">
+              <a:buNone/>
+            </a:pPr>
+            <a:r>
+              <a:rPr lang="en-US" sz="1400" b="1" dirty="0">
+                <a:solidFill>
+                  <a:srgbClr val="2E7D46"/>
+                </a:solidFill>
+                <a:latin typeface="Malgun Gothic" pitchFamily="34" charset="0"/>
+                <a:ea typeface="Malgun Gothic" pitchFamily="34" charset="-122"/>
+                <a:cs typeface="Malgun Gothic" pitchFamily="34" charset="-120"/>
+              </a:rPr>
+              <a:t>✓  </a:t>
+            </a:r>
+            <a:pPr indent="0" marL="0">
+              <a:buNone/>
+            </a:pPr>
+            <a:r>
+              <a:rPr lang="en-US" sz="1300" dirty="0">
+                <a:solidFill>
+                  <a:srgbClr val="1F2933"/>
+                </a:solidFill>
+                <a:latin typeface="Malgun Gothic" pitchFamily="34" charset="0"/>
+                <a:ea typeface="Malgun Gothic" pitchFamily="34" charset="-122"/>
+                <a:cs typeface="Malgun Gothic" pitchFamily="34" charset="-120"/>
+              </a:rPr>
+              <a:t>문서 근거로만 정확히 답변</a:t>
+            </a:r>
+            <a:endParaRPr lang="en-US" sz="1400" dirty="0"/>
+          </a:p>
+        </p:txBody>
+      </p:sp>
+      <p:sp>
+        <p:nvSpPr>
+          <p:cNvPr id="18" name="Text 16"/>
+          <p:cNvSpPr txBox="1"/>
+          <p:nvPr/>
+        </p:nvSpPr>
+        <p:spPr>
+          <a:xfrm>
+            <a:off x="7744968" y="2596896"/>
+            <a:ext cx="3898087" cy="457200"/>
+          </a:xfrm>
+          <a:prstGeom prst="rect">
+            <a:avLst/>
+          </a:prstGeom>
+          <a:noFill/>
+          <a:ln/>
+        </p:spPr>
+        <p:txBody>
+          <a:bodyPr wrap="square" lIns="0" tIns="0" rIns="0" bIns="0" rtlCol="0" anchor="ctr"/>
+          <a:lstStyle/>
+          <a:p>
+            <a:pPr indent="0" marL="0">
+              <a:buNone/>
+            </a:pPr>
+            <a:r>
+              <a:rPr lang="en-US" sz="1400" b="1" dirty="0">
+                <a:solidFill>
+                  <a:srgbClr val="2E7D46"/>
+                </a:solidFill>
+                <a:latin typeface="Malgun Gothic" pitchFamily="34" charset="0"/>
+                <a:ea typeface="Malgun Gothic" pitchFamily="34" charset="-122"/>
+                <a:cs typeface="Malgun Gothic" pitchFamily="34" charset="-120"/>
+              </a:rPr>
+              <a:t>✓  </a:t>
+            </a:r>
+            <a:pPr indent="0" marL="0">
+              <a:buNone/>
+            </a:pPr>
+            <a:r>
+              <a:rPr lang="en-US" sz="1300" dirty="0">
+                <a:solidFill>
+                  <a:srgbClr val="1F2933"/>
+                </a:solidFill>
+                <a:latin typeface="Malgun Gothic" pitchFamily="34" charset="0"/>
+                <a:ea typeface="Malgun Gothic" pitchFamily="34" charset="-122"/>
+                <a:cs typeface="Malgun Gothic" pitchFamily="34" charset="-120"/>
+              </a:rPr>
+              <a:t>모르면 지어내지 않고 주민센터 안내</a:t>
+            </a:r>
+            <a:endParaRPr lang="en-US" sz="1400" dirty="0"/>
+          </a:p>
+        </p:txBody>
+      </p:sp>
+      <p:sp>
+        <p:nvSpPr>
+          <p:cNvPr id="19" name="Text 17"/>
+          <p:cNvSpPr txBox="1"/>
+          <p:nvPr/>
+        </p:nvSpPr>
+        <p:spPr>
+          <a:xfrm>
+            <a:off x="7744968" y="3145536"/>
+            <a:ext cx="3898087" cy="457200"/>
+          </a:xfrm>
+          <a:prstGeom prst="rect">
+            <a:avLst/>
+          </a:prstGeom>
+          <a:noFill/>
+          <a:ln/>
+        </p:spPr>
+        <p:txBody>
+          <a:bodyPr wrap="square" lIns="0" tIns="0" rIns="0" bIns="0" rtlCol="0" anchor="ctr"/>
+          <a:lstStyle/>
+          <a:p>
+            <a:pPr indent="0" marL="0">
+              <a:buNone/>
+            </a:pPr>
+            <a:r>
+              <a:rPr lang="en-US" sz="1400" b="1" dirty="0">
+                <a:solidFill>
+                  <a:srgbClr val="2E7D46"/>
+                </a:solidFill>
+                <a:latin typeface="Malgun Gothic" pitchFamily="34" charset="0"/>
+                <a:ea typeface="Malgun Gothic" pitchFamily="34" charset="-122"/>
+                <a:cs typeface="Malgun Gothic" pitchFamily="34" charset="-120"/>
+              </a:rPr>
+              <a:t>✓  </a:t>
+            </a:r>
+            <a:pPr indent="0" marL="0">
+              <a:buNone/>
+            </a:pPr>
+            <a:r>
+              <a:rPr lang="en-US" sz="1300" dirty="0">
+                <a:solidFill>
+                  <a:srgbClr val="1F2933"/>
+                </a:solidFill>
+                <a:latin typeface="Malgun Gothic" pitchFamily="34" charset="0"/>
+                <a:ea typeface="Malgun Gothic" pitchFamily="34" charset="-122"/>
+                <a:cs typeface="Malgun Gothic" pitchFamily="34" charset="-120"/>
+              </a:rPr>
+              <a:t>위험 신호는 자동 감지·알림</a:t>
+            </a:r>
+            <a:endParaRPr lang="en-US" sz="1400" dirty="0"/>
+          </a:p>
+        </p:txBody>
+      </p:sp>
+      <p:sp>
+        <p:nvSpPr>
+          <p:cNvPr id="20" name="Shape 18"/>
+          <p:cNvSpPr/>
+          <p:nvPr/>
+        </p:nvSpPr>
+        <p:spPr>
+          <a:xfrm>
+            <a:off x="7744968" y="3822192"/>
+            <a:ext cx="3898087" cy="640080"/>
+          </a:xfrm>
+          <a:prstGeom prst="roundRect">
+            <a:avLst>
+              <a:gd name="adj" fmla="val 12857"/>
             </a:avLst>
           </a:prstGeom>
           <a:solidFill>
@@ -10101,75 +10705,126 @@
       </p:sp>
       <p:sp>
         <p:nvSpPr>
-          <p:cNvPr id="5" name="Shape 3"/>
+          <p:cNvPr id="21" name="Text 19"/>
+          <p:cNvSpPr txBox="1"/>
+          <p:nvPr/>
+        </p:nvSpPr>
+        <p:spPr>
+          <a:xfrm>
+            <a:off x="7927848" y="3822192"/>
+            <a:ext cx="1554480" cy="640080"/>
+          </a:xfrm>
+          <a:prstGeom prst="rect">
+            <a:avLst/>
+          </a:prstGeom>
+          <a:noFill/>
+          <a:ln/>
+        </p:spPr>
+        <p:txBody>
+          <a:bodyPr wrap="square" lIns="0" tIns="0" rIns="0" bIns="0" rtlCol="0" anchor="ctr"/>
+          <a:lstStyle/>
+          <a:p>
+            <a:pPr indent="0" marL="0">
+              <a:buNone/>
+            </a:pPr>
+            <a:r>
+              <a:rPr lang="en-US" sz="2400" b="1" dirty="0">
+                <a:solidFill>
+                  <a:srgbClr val="0F2F6F"/>
+                </a:solidFill>
+                <a:latin typeface="Malgun Gothic" pitchFamily="34" charset="0"/>
+                <a:ea typeface="Malgun Gothic" pitchFamily="34" charset="-122"/>
+                <a:cs typeface="Malgun Gothic" pitchFamily="34" charset="-120"/>
+              </a:rPr>
+              <a:t>92%</a:t>
+            </a:r>
+            <a:endParaRPr lang="en-US" sz="2400" dirty="0"/>
+          </a:p>
+        </p:txBody>
+      </p:sp>
+      <p:sp>
+        <p:nvSpPr>
+          <p:cNvPr id="22" name="Text 20"/>
+          <p:cNvSpPr txBox="1"/>
+          <p:nvPr/>
+        </p:nvSpPr>
+        <p:spPr>
+          <a:xfrm>
+            <a:off x="9482328" y="3822192"/>
+            <a:ext cx="1977847" cy="640080"/>
+          </a:xfrm>
+          <a:prstGeom prst="rect">
+            <a:avLst/>
+          </a:prstGeom>
+          <a:noFill/>
+          <a:ln/>
+        </p:spPr>
+        <p:txBody>
+          <a:bodyPr wrap="square" lIns="0" tIns="0" rIns="0" bIns="0" rtlCol="0" anchor="ctr"/>
+          <a:lstStyle/>
+          <a:p>
+            <a:pPr indent="0" marL="0">
+              <a:buNone/>
+            </a:pPr>
+            <a:r>
+              <a:rPr lang="en-US" sz="1300" b="1" dirty="0">
+                <a:solidFill>
+                  <a:srgbClr val="1F2933"/>
+                </a:solidFill>
+                <a:latin typeface="Malgun Gothic" pitchFamily="34" charset="0"/>
+                <a:ea typeface="Malgun Gothic" pitchFamily="34" charset="-122"/>
+                <a:cs typeface="Malgun Gothic" pitchFamily="34" charset="-120"/>
+              </a:rPr>
+              <a:t>정답률</a:t>
+            </a:r>
+            <a:endParaRPr lang="en-US" sz="1300" dirty="0"/>
+          </a:p>
+        </p:txBody>
+      </p:sp>
+      <p:sp>
+        <p:nvSpPr>
+          <p:cNvPr id="23" name="Shape 21"/>
           <p:cNvSpPr/>
           <p:nvPr/>
         </p:nvSpPr>
         <p:spPr>
           <a:xfrm>
-            <a:off x="822960" y="1810512"/>
-            <a:ext cx="1371600" cy="365760"/>
+            <a:off x="7744968" y="4572000"/>
+            <a:ext cx="3898087" cy="640080"/>
           </a:xfrm>
           <a:prstGeom prst="roundRect">
             <a:avLst>
-              <a:gd name="adj" fmla="val 15000"/>
+              <a:gd name="adj" fmla="val 12857"/>
             </a:avLst>
           </a:prstGeom>
           <a:solidFill>
-            <a:srgbClr val="0F2F6F"/>
+            <a:srgbClr val="F4F7FC"/>
           </a:solidFill>
-          <a:ln/>
-        </p:spPr>
-      </p:sp>
-      <p:sp>
-        <p:nvSpPr>
-          <p:cNvPr id="6" name="Text 4"/>
-          <p:cNvSpPr txBox="1"/>
-          <p:nvPr/>
-        </p:nvSpPr>
-        <p:spPr>
-          <a:xfrm>
-            <a:off x="822960" y="1810512"/>
-            <a:ext cx="1371600" cy="365760"/>
-          </a:xfrm>
-          <a:prstGeom prst="rect">
-            <a:avLst/>
-          </a:prstGeom>
-          <a:noFill/>
-          <a:ln/>
-        </p:spPr>
-        <p:txBody>
-          <a:bodyPr wrap="square" lIns="0" tIns="0" rIns="0" bIns="0" rtlCol="0" anchor="ctr"/>
-          <a:lstStyle/>
-          <a:p>
-            <a:pPr algn="ctr" indent="0" marL="0">
-              <a:buNone/>
-            </a:pPr>
-            <a:r>
-              <a:rPr lang="en-US" sz="1200" b="1" dirty="0">
-                <a:solidFill>
-                  <a:srgbClr val="FFFFFF"/>
-                </a:solidFill>
-                <a:latin typeface="Malgun Gothic" pitchFamily="34" charset="0"/>
-                <a:ea typeface="Malgun Gothic" pitchFamily="34" charset="-122"/>
-                <a:cs typeface="Malgun Gothic" pitchFamily="34" charset="-120"/>
-              </a:rPr>
-              <a:t>데모 A</a:t>
-            </a:r>
-            <a:endParaRPr lang="en-US" sz="1200" dirty="0"/>
-          </a:p>
-        </p:txBody>
-      </p:sp>
-      <p:sp>
-        <p:nvSpPr>
-          <p:cNvPr id="7" name="Text 5"/>
-          <p:cNvSpPr txBox="1"/>
-          <p:nvPr/>
-        </p:nvSpPr>
-        <p:spPr>
-          <a:xfrm>
-            <a:off x="2331720" y="1810512"/>
-            <a:ext cx="3352648" cy="365760"/>
+          <a:ln w="12700">
+            <a:solidFill>
+              <a:srgbClr val="D8E0EC"/>
+            </a:solidFill>
+            <a:prstDash val="solid"/>
+          </a:ln>
+          <a:effectLst>
+            <a:outerShdw sx="100000" sy="100000" kx="0" ky="0" algn="bl" rotWithShape="0" blurRad="76200" dist="25400" dir="5400000">
+              <a:srgbClr val="9AA5B5">
+                <a:alpha val="35000"/>
+              </a:srgbClr>
+            </a:outerShdw>
+          </a:effectLst>
+        </p:spPr>
+      </p:sp>
+      <p:sp>
+        <p:nvSpPr>
+          <p:cNvPr id="24" name="Text 22"/>
+          <p:cNvSpPr txBox="1"/>
+          <p:nvPr/>
+        </p:nvSpPr>
+        <p:spPr>
+          <a:xfrm>
+            <a:off x="7927848" y="4572000"/>
+            <a:ext cx="1554480" cy="640080"/>
           </a:xfrm>
           <a:prstGeom prst="rect">
             <a:avLst/>
@@ -10185,7 +10840,7 @@
               <a:buNone/>
             </a:pPr>
             <a:r>
-              <a:rPr lang="en-US" sz="1600" b="1" dirty="0">
+              <a:rPr lang="en-US" sz="2400" b="1" dirty="0">
                 <a:solidFill>
                   <a:srgbClr val="0F2F6F"/>
                 </a:solidFill>
@@ -10193,42 +10848,38 @@
                 <a:ea typeface="Malgun Gothic" pitchFamily="34" charset="-122"/>
                 <a:cs typeface="Malgun Gothic" pitchFamily="34" charset="-120"/>
               </a:rPr>
-              <a:t>복지 Q&amp;A</a:t>
-            </a:r>
-            <a:endParaRPr lang="en-US" sz="1600" dirty="0"/>
-          </a:p>
-        </p:txBody>
-      </p:sp>
-      <p:sp>
-        <p:nvSpPr>
-          <p:cNvPr id="8" name="Text 6"/>
-          <p:cNvSpPr txBox="1"/>
-          <p:nvPr/>
-        </p:nvSpPr>
-        <p:spPr>
-          <a:xfrm>
-            <a:off x="822960" y="2286000"/>
-            <a:ext cx="4815688" cy="1371600"/>
-          </a:xfrm>
-          <a:prstGeom prst="rect">
-            <a:avLst/>
-          </a:prstGeom>
-          <a:noFill/>
-          <a:ln/>
-        </p:spPr>
-        <p:txBody>
-          <a:bodyPr wrap="square" rtlCol="0" anchor="t"/>
-          <a:lstStyle/>
-          <a:p>
-            <a:pPr marL="342900" indent="-342900">
-              <a:spcAft>
-                <a:spcPts val="600"/>
-              </a:spcAft>
-              <a:buSzPct val="100000"/>
-              <a:buChar char="•"/>
-            </a:pPr>
-            <a:r>
-              <a:rPr lang="en-US" sz="1300" dirty="0">
+              <a:t>100%</a:t>
+            </a:r>
+            <a:endParaRPr lang="en-US" sz="2400" dirty="0"/>
+          </a:p>
+        </p:txBody>
+      </p:sp>
+      <p:sp>
+        <p:nvSpPr>
+          <p:cNvPr id="25" name="Text 23"/>
+          <p:cNvSpPr txBox="1"/>
+          <p:nvPr/>
+        </p:nvSpPr>
+        <p:spPr>
+          <a:xfrm>
+            <a:off x="9482328" y="4572000"/>
+            <a:ext cx="1977847" cy="640080"/>
+          </a:xfrm>
+          <a:prstGeom prst="rect">
+            <a:avLst/>
+          </a:prstGeom>
+          <a:noFill/>
+          <a:ln/>
+        </p:spPr>
+        <p:txBody>
+          <a:bodyPr wrap="square" lIns="0" tIns="0" rIns="0" bIns="0" rtlCol="0" anchor="ctr"/>
+          <a:lstStyle/>
+          <a:p>
+            <a:pPr indent="0" marL="0">
+              <a:buNone/>
+            </a:pPr>
+            <a:r>
+              <a:rPr lang="en-US" sz="1300" b="1" dirty="0">
                 <a:solidFill>
                   <a:srgbClr val="1F2933"/>
                 </a:solidFill>
@@ -10236,68 +10887,26 @@
                 <a:ea typeface="Malgun Gothic" pitchFamily="34" charset="-122"/>
                 <a:cs typeface="Malgun Gothic" pitchFamily="34" charset="-120"/>
               </a:rPr>
-              <a:t>"기초연금은 어떻게 신청하나요?" → 문서 근거 기반 정확 안내</a:t>
+              <a:t>범위 밖 거절</a:t>
             </a:r>
             <a:endParaRPr lang="en-US" sz="1300" dirty="0"/>
           </a:p>
-          <a:p>
-            <a:pPr marL="342900" indent="-342900">
-              <a:spcAft>
-                <a:spcPts val="600"/>
-              </a:spcAft>
-              <a:buSzPct val="100000"/>
-              <a:buChar char="•"/>
-            </a:pPr>
-            <a:r>
-              <a:rPr lang="en-US" sz="1300" dirty="0">
-                <a:solidFill>
-                  <a:srgbClr val="1F2933"/>
-                </a:solidFill>
-                <a:latin typeface="Malgun Gothic" pitchFamily="34" charset="0"/>
-                <a:ea typeface="Malgun Gothic" pitchFamily="34" charset="-122"/>
-                <a:cs typeface="Malgun Gothic" pitchFamily="34" charset="-120"/>
-              </a:rPr>
-              <a:t>범위 밖 질문은 지어내지 않고 안전하게 거절</a:t>
-            </a:r>
-            <a:endParaRPr lang="en-US" sz="1300" dirty="0"/>
-          </a:p>
-          <a:p>
-            <a:pPr marL="342900" indent="-342900">
-              <a:spcAft>
-                <a:spcPts val="600"/>
-              </a:spcAft>
-              <a:buSzPct val="100000"/>
-              <a:buChar char="•"/>
-            </a:pPr>
-            <a:r>
-              <a:rPr lang="en-US" sz="1300" dirty="0">
-                <a:solidFill>
-                  <a:srgbClr val="1F2933"/>
-                </a:solidFill>
-                <a:latin typeface="Malgun Gothic" pitchFamily="34" charset="0"/>
-                <a:ea typeface="Malgun Gothic" pitchFamily="34" charset="-122"/>
-                <a:cs typeface="Malgun Gothic" pitchFamily="34" charset="-120"/>
-              </a:rPr>
-              <a:t>인사·잡담은 따뜻한 대화형 응답</a:t>
-            </a:r>
-            <a:endParaRPr lang="en-US" sz="1300" dirty="0"/>
-          </a:p>
-        </p:txBody>
-      </p:sp>
-      <p:sp>
-        <p:nvSpPr>
-          <p:cNvPr id="9" name="Shape 7"/>
+        </p:txBody>
+      </p:sp>
+      <p:sp>
+        <p:nvSpPr>
+          <p:cNvPr id="26" name="Shape 24"/>
           <p:cNvSpPr/>
           <p:nvPr/>
         </p:nvSpPr>
         <p:spPr>
           <a:xfrm>
-            <a:off x="6278728" y="1600200"/>
-            <a:ext cx="5364328" cy="2148840"/>
+            <a:off x="7744968" y="5321808"/>
+            <a:ext cx="3898087" cy="640080"/>
           </a:xfrm>
           <a:prstGeom prst="roundRect">
             <a:avLst>
-              <a:gd name="adj" fmla="val 3830"/>
+              <a:gd name="adj" fmla="val 12857"/>
             </a:avLst>
           </a:prstGeom>
           <a:solidFill>
@@ -10320,75 +10929,14 @@
       </p:sp>
       <p:sp>
         <p:nvSpPr>
-          <p:cNvPr id="10" name="Shape 8"/>
-          <p:cNvSpPr/>
-          <p:nvPr/>
-        </p:nvSpPr>
-        <p:spPr>
-          <a:xfrm>
-            <a:off x="6553048" y="1810512"/>
-            <a:ext cx="1371600" cy="365760"/>
-          </a:xfrm>
-          <a:prstGeom prst="roundRect">
-            <a:avLst>
-              <a:gd name="adj" fmla="val 15000"/>
-            </a:avLst>
-          </a:prstGeom>
-          <a:solidFill>
-            <a:srgbClr val="E0A83C"/>
-          </a:solidFill>
-          <a:ln/>
-        </p:spPr>
-      </p:sp>
-      <p:sp>
-        <p:nvSpPr>
-          <p:cNvPr id="11" name="Text 9"/>
-          <p:cNvSpPr txBox="1"/>
-          <p:nvPr/>
-        </p:nvSpPr>
-        <p:spPr>
-          <a:xfrm>
-            <a:off x="6553048" y="1810512"/>
-            <a:ext cx="1371600" cy="365760"/>
-          </a:xfrm>
-          <a:prstGeom prst="rect">
-            <a:avLst/>
-          </a:prstGeom>
-          <a:noFill/>
-          <a:ln/>
-        </p:spPr>
-        <p:txBody>
-          <a:bodyPr wrap="square" lIns="0" tIns="0" rIns="0" bIns="0" rtlCol="0" anchor="ctr"/>
-          <a:lstStyle/>
-          <a:p>
-            <a:pPr algn="ctr" indent="0" marL="0">
-              <a:buNone/>
-            </a:pPr>
-            <a:r>
-              <a:rPr lang="en-US" sz="1200" b="1" dirty="0">
-                <a:solidFill>
-                  <a:srgbClr val="FFFFFF"/>
-                </a:solidFill>
-                <a:latin typeface="Malgun Gothic" pitchFamily="34" charset="0"/>
-                <a:ea typeface="Malgun Gothic" pitchFamily="34" charset="-122"/>
-                <a:cs typeface="Malgun Gothic" pitchFamily="34" charset="-120"/>
-              </a:rPr>
-              <a:t>데모 B</a:t>
-            </a:r>
-            <a:endParaRPr lang="en-US" sz="1200" dirty="0"/>
-          </a:p>
-        </p:txBody>
-      </p:sp>
-      <p:sp>
-        <p:nvSpPr>
-          <p:cNvPr id="12" name="Text 10"/>
-          <p:cNvSpPr txBox="1"/>
-          <p:nvPr/>
-        </p:nvSpPr>
-        <p:spPr>
-          <a:xfrm>
-            <a:off x="8061808" y="1810512"/>
-            <a:ext cx="3352648" cy="365760"/>
+          <p:cNvPr id="27" name="Text 25"/>
+          <p:cNvSpPr txBox="1"/>
+          <p:nvPr/>
+        </p:nvSpPr>
+        <p:spPr>
+          <a:xfrm>
+            <a:off x="7927848" y="5321808"/>
+            <a:ext cx="1554480" cy="640080"/>
           </a:xfrm>
           <a:prstGeom prst="rect">
             <a:avLst/>
@@ -10404,7 +10952,7 @@
               <a:buNone/>
             </a:pPr>
             <a:r>
-              <a:rPr lang="en-US" sz="1600" b="1" dirty="0">
+              <a:rPr lang="en-US" sz="2400" b="1" dirty="0">
                 <a:solidFill>
                   <a:srgbClr val="B8862B"/>
                 </a:solidFill>
@@ -10412,42 +10960,38 @@
                 <a:ea typeface="Malgun Gothic" pitchFamily="34" charset="-122"/>
                 <a:cs typeface="Malgun Gothic" pitchFamily="34" charset="-120"/>
               </a:rPr>
-              <a:t>이상신호 감지</a:t>
-            </a:r>
-            <a:endParaRPr lang="en-US" sz="1600" dirty="0"/>
-          </a:p>
-        </p:txBody>
-      </p:sp>
-      <p:sp>
-        <p:nvSpPr>
-          <p:cNvPr id="13" name="Text 11"/>
-          <p:cNvSpPr txBox="1"/>
-          <p:nvPr/>
-        </p:nvSpPr>
-        <p:spPr>
-          <a:xfrm>
-            <a:off x="6553048" y="2286000"/>
-            <a:ext cx="4815688" cy="1371600"/>
-          </a:xfrm>
-          <a:prstGeom prst="rect">
-            <a:avLst/>
-          </a:prstGeom>
-          <a:noFill/>
-          <a:ln/>
-        </p:spPr>
-        <p:txBody>
-          <a:bodyPr wrap="square" rtlCol="0" anchor="t"/>
-          <a:lstStyle/>
-          <a:p>
-            <a:pPr marL="342900" indent="-342900">
-              <a:spcAft>
-                <a:spcPts val="600"/>
-              </a:spcAft>
-              <a:buSzPct val="100000"/>
-              <a:buChar char="•"/>
-            </a:pPr>
-            <a:r>
-              <a:rPr lang="en-US" sz="1300" dirty="0">
+              <a:t>+14%p</a:t>
+            </a:r>
+            <a:endParaRPr lang="en-US" sz="2400" dirty="0"/>
+          </a:p>
+        </p:txBody>
+      </p:sp>
+      <p:sp>
+        <p:nvSpPr>
+          <p:cNvPr id="28" name="Text 26"/>
+          <p:cNvSpPr txBox="1"/>
+          <p:nvPr/>
+        </p:nvSpPr>
+        <p:spPr>
+          <a:xfrm>
+            <a:off x="9482328" y="5321808"/>
+            <a:ext cx="1977847" cy="640080"/>
+          </a:xfrm>
+          <a:prstGeom prst="rect">
+            <a:avLst/>
+          </a:prstGeom>
+          <a:noFill/>
+          <a:ln/>
+        </p:spPr>
+        <p:txBody>
+          <a:bodyPr wrap="square" lIns="0" tIns="0" rIns="0" bIns="0" rtlCol="0" anchor="ctr"/>
+          <a:lstStyle/>
+          <a:p>
+            <a:pPr indent="0" marL="0">
+              <a:buNone/>
+            </a:pPr>
+            <a:r>
+              <a:rPr lang="en-US" sz="1300" b="1" dirty="0">
                 <a:solidFill>
                   <a:srgbClr val="1F2933"/>
                 </a:solidFill>
@@ -10455,504 +10999,9 @@
                 <a:ea typeface="Malgun Gothic" pitchFamily="34" charset="-122"/>
                 <a:cs typeface="Malgun Gothic" pitchFamily="34" charset="-120"/>
               </a:rPr>
-              <a:t>증상 반복 + 부정 감정 대화 감지</a:t>
+              <a:t>재랭킹 효과</a:t>
             </a:r>
             <a:endParaRPr lang="en-US" sz="1300" dirty="0"/>
-          </a:p>
-          <a:p>
-            <a:pPr marL="342900" indent="-342900">
-              <a:spcAft>
-                <a:spcPts val="600"/>
-              </a:spcAft>
-              <a:buSzPct val="100000"/>
-              <a:buChar char="•"/>
-            </a:pPr>
-            <a:r>
-              <a:rPr lang="en-US" sz="1300" dirty="0">
-                <a:solidFill>
-                  <a:srgbClr val="1F2933"/>
-                </a:solidFill>
-                <a:latin typeface="Malgun Gothic" pitchFamily="34" charset="0"/>
-                <a:ea typeface="Malgun Gothic" pitchFamily="34" charset="-122"/>
-                <a:cs typeface="Malgun Gothic" pitchFamily="34" charset="-120"/>
-              </a:rPr>
-              <a:t>위기 키워드 시 즉시 긴급 알림</a:t>
-            </a:r>
-            <a:endParaRPr lang="en-US" sz="1300" dirty="0"/>
-          </a:p>
-          <a:p>
-            <a:pPr marL="342900" indent="-342900">
-              <a:spcAft>
-                <a:spcPts val="600"/>
-              </a:spcAft>
-              <a:buSzPct val="100000"/>
-              <a:buChar char="•"/>
-            </a:pPr>
-            <a:r>
-              <a:rPr lang="en-US" sz="1300" dirty="0">
-                <a:solidFill>
-                  <a:srgbClr val="1F2933"/>
-                </a:solidFill>
-                <a:latin typeface="Malgun Gothic" pitchFamily="34" charset="0"/>
-                <a:ea typeface="Malgun Gothic" pitchFamily="34" charset="-122"/>
-                <a:cs typeface="Malgun Gothic" pitchFamily="34" charset="-120"/>
-              </a:rPr>
-              <a:t>→ 사회복지사 알림 요약 생성</a:t>
-            </a:r>
-            <a:endParaRPr lang="en-US" sz="1300" dirty="0"/>
-          </a:p>
-        </p:txBody>
-      </p:sp>
-      <p:sp>
-        <p:nvSpPr>
-          <p:cNvPr id="14" name="Shape 12"/>
-          <p:cNvSpPr/>
-          <p:nvPr/>
-        </p:nvSpPr>
-        <p:spPr>
-          <a:xfrm>
-            <a:off x="548640" y="3977640"/>
-            <a:ext cx="3454298" cy="1783080"/>
-          </a:xfrm>
-          <a:prstGeom prst="roundRect">
-            <a:avLst>
-              <a:gd name="adj" fmla="val 4615"/>
-            </a:avLst>
-          </a:prstGeom>
-          <a:solidFill>
-            <a:srgbClr val="FFFFFF"/>
-          </a:solidFill>
-          <a:ln w="12700">
-            <a:solidFill>
-              <a:srgbClr val="D8E0EC"/>
-            </a:solidFill>
-            <a:prstDash val="solid"/>
-          </a:ln>
-          <a:effectLst>
-            <a:outerShdw sx="100000" sy="100000" kx="0" ky="0" algn="bl" rotWithShape="0" blurRad="76200" dist="25400" dir="5400000">
-              <a:srgbClr val="9AA5B5">
-                <a:alpha val="35000"/>
-              </a:srgbClr>
-            </a:outerShdw>
-          </a:effectLst>
-        </p:spPr>
-      </p:sp>
-      <p:sp>
-        <p:nvSpPr>
-          <p:cNvPr id="15" name="Text 13"/>
-          <p:cNvSpPr txBox="1"/>
-          <p:nvPr/>
-        </p:nvSpPr>
-        <p:spPr>
-          <a:xfrm>
-            <a:off x="731520" y="4160520"/>
-            <a:ext cx="3088538" cy="731520"/>
-          </a:xfrm>
-          <a:prstGeom prst="rect">
-            <a:avLst/>
-          </a:prstGeom>
-          <a:noFill/>
-          <a:ln/>
-        </p:spPr>
-        <p:txBody>
-          <a:bodyPr wrap="square" lIns="0" tIns="0" rIns="0" bIns="0" rtlCol="0" anchor="ctr"/>
-          <a:lstStyle/>
-          <a:p>
-            <a:pPr indent="0" marL="0">
-              <a:buNone/>
-            </a:pPr>
-            <a:r>
-              <a:rPr lang="en-US" sz="3600" b="1" dirty="0">
-                <a:solidFill>
-                  <a:srgbClr val="0F2F6F"/>
-                </a:solidFill>
-                <a:latin typeface="Malgun Gothic" pitchFamily="34" charset="0"/>
-                <a:ea typeface="Malgun Gothic" pitchFamily="34" charset="-122"/>
-                <a:cs typeface="Malgun Gothic" pitchFamily="34" charset="-120"/>
-              </a:rPr>
-              <a:t>3,455개</a:t>
-            </a:r>
-            <a:endParaRPr lang="en-US" sz="3600" dirty="0"/>
-          </a:p>
-        </p:txBody>
-      </p:sp>
-      <p:sp>
-        <p:nvSpPr>
-          <p:cNvPr id="16" name="Text 14"/>
-          <p:cNvSpPr txBox="1"/>
-          <p:nvPr/>
-        </p:nvSpPr>
-        <p:spPr>
-          <a:xfrm>
-            <a:off x="731520" y="4919472"/>
-            <a:ext cx="3088538" cy="320040"/>
-          </a:xfrm>
-          <a:prstGeom prst="rect">
-            <a:avLst/>
-          </a:prstGeom>
-          <a:noFill/>
-          <a:ln/>
-        </p:spPr>
-        <p:txBody>
-          <a:bodyPr wrap="square" lIns="0" tIns="0" rIns="0" bIns="0" rtlCol="0" anchor="ctr"/>
-          <a:lstStyle/>
-          <a:p>
-            <a:pPr indent="0" marL="0">
-              <a:buNone/>
-            </a:pPr>
-            <a:r>
-              <a:rPr lang="en-US" sz="1400" b="1" dirty="0">
-                <a:solidFill>
-                  <a:srgbClr val="1F2933"/>
-                </a:solidFill>
-                <a:latin typeface="Malgun Gothic" pitchFamily="34" charset="0"/>
-                <a:ea typeface="Malgun Gothic" pitchFamily="34" charset="-122"/>
-                <a:cs typeface="Malgun Gothic" pitchFamily="34" charset="-120"/>
-              </a:rPr>
-              <a:t>색인 청크</a:t>
-            </a:r>
-            <a:endParaRPr lang="en-US" sz="1400" dirty="0"/>
-          </a:p>
-        </p:txBody>
-      </p:sp>
-      <p:sp>
-        <p:nvSpPr>
-          <p:cNvPr id="17" name="Text 15"/>
-          <p:cNvSpPr txBox="1"/>
-          <p:nvPr/>
-        </p:nvSpPr>
-        <p:spPr>
-          <a:xfrm>
-            <a:off x="731520" y="5230368"/>
-            <a:ext cx="3088538" cy="457200"/>
-          </a:xfrm>
-          <a:prstGeom prst="rect">
-            <a:avLst/>
-          </a:prstGeom>
-          <a:noFill/>
-          <a:ln/>
-        </p:spPr>
-        <p:txBody>
-          <a:bodyPr wrap="square" lIns="0" tIns="0" rIns="0" bIns="0" rtlCol="0" anchor="ctr"/>
-          <a:lstStyle/>
-          <a:p>
-            <a:pPr indent="0" marL="0">
-              <a:buNone/>
-            </a:pPr>
-            <a:r>
-              <a:rPr lang="en-US" sz="1100" dirty="0">
-                <a:solidFill>
-                  <a:srgbClr val="5B6673"/>
-                </a:solidFill>
-                <a:latin typeface="Malgun Gothic" pitchFamily="34" charset="0"/>
-                <a:ea typeface="Malgun Gothic" pitchFamily="34" charset="-122"/>
-                <a:cs typeface="Malgun Gothic" pitchFamily="34" charset="-120"/>
-              </a:rPr>
-              <a:t>보건복지부 사업안내 + 대전 공개데이터</a:t>
-            </a:r>
-            <a:endParaRPr lang="en-US" sz="1100" dirty="0"/>
-          </a:p>
-        </p:txBody>
-      </p:sp>
-      <p:sp>
-        <p:nvSpPr>
-          <p:cNvPr id="18" name="Shape 16"/>
-          <p:cNvSpPr/>
-          <p:nvPr/>
-        </p:nvSpPr>
-        <p:spPr>
-          <a:xfrm>
-            <a:off x="4368698" y="3977640"/>
-            <a:ext cx="3454298" cy="1783080"/>
-          </a:xfrm>
-          <a:prstGeom prst="roundRect">
-            <a:avLst>
-              <a:gd name="adj" fmla="val 4615"/>
-            </a:avLst>
-          </a:prstGeom>
-          <a:solidFill>
-            <a:srgbClr val="FFFFFF"/>
-          </a:solidFill>
-          <a:ln w="12700">
-            <a:solidFill>
-              <a:srgbClr val="D8E0EC"/>
-            </a:solidFill>
-            <a:prstDash val="solid"/>
-          </a:ln>
-          <a:effectLst>
-            <a:outerShdw sx="100000" sy="100000" kx="0" ky="0" algn="bl" rotWithShape="0" blurRad="76200" dist="25400" dir="5400000">
-              <a:srgbClr val="9AA5B5">
-                <a:alpha val="35000"/>
-              </a:srgbClr>
-            </a:outerShdw>
-          </a:effectLst>
-        </p:spPr>
-      </p:sp>
-      <p:sp>
-        <p:nvSpPr>
-          <p:cNvPr id="19" name="Text 17"/>
-          <p:cNvSpPr txBox="1"/>
-          <p:nvPr/>
-        </p:nvSpPr>
-        <p:spPr>
-          <a:xfrm>
-            <a:off x="4551578" y="4160520"/>
-            <a:ext cx="3088538" cy="731520"/>
-          </a:xfrm>
-          <a:prstGeom prst="rect">
-            <a:avLst/>
-          </a:prstGeom>
-          <a:noFill/>
-          <a:ln/>
-        </p:spPr>
-        <p:txBody>
-          <a:bodyPr wrap="square" lIns="0" tIns="0" rIns="0" bIns="0" rtlCol="0" anchor="ctr"/>
-          <a:lstStyle/>
-          <a:p>
-            <a:pPr indent="0" marL="0">
-              <a:buNone/>
-            </a:pPr>
-            <a:r>
-              <a:rPr lang="en-US" sz="3600" b="1" dirty="0">
-                <a:solidFill>
-                  <a:srgbClr val="0F2F6F"/>
-                </a:solidFill>
-                <a:latin typeface="Malgun Gothic" pitchFamily="34" charset="0"/>
-                <a:ea typeface="Malgun Gothic" pitchFamily="34" charset="-122"/>
-                <a:cs typeface="Malgun Gothic" pitchFamily="34" charset="-120"/>
-              </a:rPr>
-              <a:t>92%</a:t>
-            </a:r>
-            <a:endParaRPr lang="en-US" sz="3600" dirty="0"/>
-          </a:p>
-        </p:txBody>
-      </p:sp>
-      <p:sp>
-        <p:nvSpPr>
-          <p:cNvPr id="20" name="Text 18"/>
-          <p:cNvSpPr txBox="1"/>
-          <p:nvPr/>
-        </p:nvSpPr>
-        <p:spPr>
-          <a:xfrm>
-            <a:off x="4551578" y="4919472"/>
-            <a:ext cx="3088538" cy="320040"/>
-          </a:xfrm>
-          <a:prstGeom prst="rect">
-            <a:avLst/>
-          </a:prstGeom>
-          <a:noFill/>
-          <a:ln/>
-        </p:spPr>
-        <p:txBody>
-          <a:bodyPr wrap="square" lIns="0" tIns="0" rIns="0" bIns="0" rtlCol="0" anchor="ctr"/>
-          <a:lstStyle/>
-          <a:p>
-            <a:pPr indent="0" marL="0">
-              <a:buNone/>
-            </a:pPr>
-            <a:r>
-              <a:rPr lang="en-US" sz="1400" b="1" dirty="0">
-                <a:solidFill>
-                  <a:srgbClr val="1F2933"/>
-                </a:solidFill>
-                <a:latin typeface="Malgun Gothic" pitchFamily="34" charset="0"/>
-                <a:ea typeface="Malgun Gothic" pitchFamily="34" charset="-122"/>
-                <a:cs typeface="Malgun Gothic" pitchFamily="34" charset="-120"/>
-              </a:rPr>
-              <a:t>200문항 정답률</a:t>
-            </a:r>
-            <a:endParaRPr lang="en-US" sz="1400" dirty="0"/>
-          </a:p>
-        </p:txBody>
-      </p:sp>
-      <p:sp>
-        <p:nvSpPr>
-          <p:cNvPr id="21" name="Text 19"/>
-          <p:cNvSpPr txBox="1"/>
-          <p:nvPr/>
-        </p:nvSpPr>
-        <p:spPr>
-          <a:xfrm>
-            <a:off x="4551578" y="5230368"/>
-            <a:ext cx="3088538" cy="457200"/>
-          </a:xfrm>
-          <a:prstGeom prst="rect">
-            <a:avLst/>
-          </a:prstGeom>
-          <a:noFill/>
-          <a:ln/>
-        </p:spPr>
-        <p:txBody>
-          <a:bodyPr wrap="square" lIns="0" tIns="0" rIns="0" bIns="0" rtlCol="0" anchor="ctr"/>
-          <a:lstStyle/>
-          <a:p>
-            <a:pPr indent="0" marL="0">
-              <a:buNone/>
-            </a:pPr>
-            <a:r>
-              <a:rPr lang="en-US" sz="1100" dirty="0">
-                <a:solidFill>
-                  <a:srgbClr val="5B6673"/>
-                </a:solidFill>
-                <a:latin typeface="Malgun Gothic" pitchFamily="34" charset="0"/>
-                <a:ea typeface="Malgun Gothic" pitchFamily="34" charset="-122"/>
-                <a:cs typeface="Malgun Gothic" pitchFamily="34" charset="-120"/>
-              </a:rPr>
-              <a:t>범위 밖 거절 100% · 사실정확도 98%</a:t>
-            </a:r>
-            <a:endParaRPr lang="en-US" sz="1100" dirty="0"/>
-          </a:p>
-        </p:txBody>
-      </p:sp>
-      <p:sp>
-        <p:nvSpPr>
-          <p:cNvPr id="22" name="Shape 20"/>
-          <p:cNvSpPr/>
-          <p:nvPr/>
-        </p:nvSpPr>
-        <p:spPr>
-          <a:xfrm>
-            <a:off x="8188757" y="3977640"/>
-            <a:ext cx="3454298" cy="1783080"/>
-          </a:xfrm>
-          <a:prstGeom prst="roundRect">
-            <a:avLst>
-              <a:gd name="adj" fmla="val 4615"/>
-            </a:avLst>
-          </a:prstGeom>
-          <a:solidFill>
-            <a:srgbClr val="FFFFFF"/>
-          </a:solidFill>
-          <a:ln w="12700">
-            <a:solidFill>
-              <a:srgbClr val="D8E0EC"/>
-            </a:solidFill>
-            <a:prstDash val="solid"/>
-          </a:ln>
-          <a:effectLst>
-            <a:outerShdw sx="100000" sy="100000" kx="0" ky="0" algn="bl" rotWithShape="0" blurRad="76200" dist="25400" dir="5400000">
-              <a:srgbClr val="9AA5B5">
-                <a:alpha val="35000"/>
-              </a:srgbClr>
-            </a:outerShdw>
-          </a:effectLst>
-        </p:spPr>
-      </p:sp>
-      <p:sp>
-        <p:nvSpPr>
-          <p:cNvPr id="23" name="Text 21"/>
-          <p:cNvSpPr txBox="1"/>
-          <p:nvPr/>
-        </p:nvSpPr>
-        <p:spPr>
-          <a:xfrm>
-            <a:off x="8371637" y="4160520"/>
-            <a:ext cx="3088538" cy="731520"/>
-          </a:xfrm>
-          <a:prstGeom prst="rect">
-            <a:avLst/>
-          </a:prstGeom>
-          <a:noFill/>
-          <a:ln/>
-        </p:spPr>
-        <p:txBody>
-          <a:bodyPr wrap="square" lIns="0" tIns="0" rIns="0" bIns="0" rtlCol="0" anchor="ctr"/>
-          <a:lstStyle/>
-          <a:p>
-            <a:pPr indent="0" marL="0">
-              <a:buNone/>
-            </a:pPr>
-            <a:r>
-              <a:rPr lang="en-US" sz="3600" b="1" dirty="0">
-                <a:solidFill>
-                  <a:srgbClr val="B8862B"/>
-                </a:solidFill>
-                <a:latin typeface="Malgun Gothic" pitchFamily="34" charset="0"/>
-                <a:ea typeface="Malgun Gothic" pitchFamily="34" charset="-122"/>
-                <a:cs typeface="Malgun Gothic" pitchFamily="34" charset="-120"/>
-              </a:rPr>
-              <a:t>+14%p</a:t>
-            </a:r>
-            <a:endParaRPr lang="en-US" sz="3600" dirty="0"/>
-          </a:p>
-        </p:txBody>
-      </p:sp>
-      <p:sp>
-        <p:nvSpPr>
-          <p:cNvPr id="24" name="Text 22"/>
-          <p:cNvSpPr txBox="1"/>
-          <p:nvPr/>
-        </p:nvSpPr>
-        <p:spPr>
-          <a:xfrm>
-            <a:off x="8371637" y="4919472"/>
-            <a:ext cx="3088538" cy="320040"/>
-          </a:xfrm>
-          <a:prstGeom prst="rect">
-            <a:avLst/>
-          </a:prstGeom>
-          <a:noFill/>
-          <a:ln/>
-        </p:spPr>
-        <p:txBody>
-          <a:bodyPr wrap="square" lIns="0" tIns="0" rIns="0" bIns="0" rtlCol="0" anchor="ctr"/>
-          <a:lstStyle/>
-          <a:p>
-            <a:pPr indent="0" marL="0">
-              <a:buNone/>
-            </a:pPr>
-            <a:r>
-              <a:rPr lang="en-US" sz="1400" b="1" dirty="0">
-                <a:solidFill>
-                  <a:srgbClr val="1F2933"/>
-                </a:solidFill>
-                <a:latin typeface="Malgun Gothic" pitchFamily="34" charset="0"/>
-                <a:ea typeface="Malgun Gothic" pitchFamily="34" charset="-122"/>
-                <a:cs typeface="Malgun Gothic" pitchFamily="34" charset="-120"/>
-              </a:rPr>
-              <a:t>재랭킹 효과</a:t>
-            </a:r>
-            <a:endParaRPr lang="en-US" sz="1400" dirty="0"/>
-          </a:p>
-        </p:txBody>
-      </p:sp>
-      <p:sp>
-        <p:nvSpPr>
-          <p:cNvPr id="25" name="Text 23"/>
-          <p:cNvSpPr txBox="1"/>
-          <p:nvPr/>
-        </p:nvSpPr>
-        <p:spPr>
-          <a:xfrm>
-            <a:off x="8371637" y="5230368"/>
-            <a:ext cx="3088538" cy="457200"/>
-          </a:xfrm>
-          <a:prstGeom prst="rect">
-            <a:avLst/>
-          </a:prstGeom>
-          <a:noFill/>
-          <a:ln/>
-        </p:spPr>
-        <p:txBody>
-          <a:bodyPr wrap="square" lIns="0" tIns="0" rIns="0" bIns="0" rtlCol="0" anchor="ctr"/>
-          <a:lstStyle/>
-          <a:p>
-            <a:pPr indent="0" marL="0">
-              <a:buNone/>
-            </a:pPr>
-            <a:r>
-              <a:rPr lang="en-US" sz="1100" dirty="0">
-                <a:solidFill>
-                  <a:srgbClr val="5B6673"/>
-                </a:solidFill>
-                <a:latin typeface="Malgun Gothic" pitchFamily="34" charset="0"/>
-                <a:ea typeface="Malgun Gothic" pitchFamily="34" charset="-122"/>
-                <a:cs typeface="Malgun Gothic" pitchFamily="34" charset="-120"/>
-              </a:rPr>
-              <a:t>잘못된 근거 상위노출 완화</a:t>
-            </a:r>
-            <a:endParaRPr lang="en-US" sz="1100" dirty="0"/>
           </a:p>
         </p:txBody>
       </p:sp>
